--- a/ChemoFilter_COMPLETE_Presentation.pptx
+++ b/ChemoFilter_COMPLETE_Presentation.pptx
@@ -4,6 +4,9 @@
   <p:sldMasterIdLst>
     <p:sldMasterId id="2147483648" r:id="rId1"/>
   </p:sldMasterIdLst>
+  <p:notesMasterIdLst>
+    <p:notesMasterId r:id="rId23"/>
+  </p:notesMasterIdLst>
   <p:sldIdLst>
     <p:sldId id="256" r:id="rId2"/>
     <p:sldId id="257" r:id="rId3"/>
@@ -18,18 +21,15 @@
     <p:sldId id="266" r:id="rId12"/>
     <p:sldId id="267" r:id="rId13"/>
     <p:sldId id="268" r:id="rId14"/>
-    <p:sldId id="269" r:id="rId20"/>
-    <p:sldId id="270" r:id="rId21"/>
-    <p:sldId id="271" r:id="rId22"/>
-    <p:sldId id="272" r:id="rId23"/>
-    <p:sldId id="273" r:id="rId24"/>
-    <p:sldId id="274" r:id="rId25"/>
-    <p:sldId id="275" r:id="rId26"/>
-    <p:sldId id="276" r:id="rId27"/>
+    <p:sldId id="277" r:id="rId15"/>
+    <p:sldId id="270" r:id="rId16"/>
+    <p:sldId id="271" r:id="rId17"/>
+    <p:sldId id="272" r:id="rId18"/>
+    <p:sldId id="273" r:id="rId19"/>
+    <p:sldId id="274" r:id="rId20"/>
+    <p:sldId id="275" r:id="rId21"/>
+    <p:sldId id="276" r:id="rId22"/>
   </p:sldIdLst>
-  <p:notesMasterIdLst>
-    <p:notesMasterId r:id="rId15"/>
-  </p:notesMasterIdLst>
   <p:sldSz cx="12192000" cy="6858000"/>
   <p:notesSz cx="6858000" cy="12192000"/>
   <p:defaultTextStyle>
@@ -124,7 +124,118 @@
       </a:defRPr>
     </a:lvl9pPr>
   </p:defaultTextStyle>
+  <p:extLst>
+    <p:ext uri="{EFAFB233-063F-42B5-8137-9DF3F51BA10A}">
+      <p15:sldGuideLst xmlns:p15="http://schemas.microsoft.com/office/powerpoint/2012/main"/>
+    </p:ext>
+  </p:extLst>
 </p:presentation>
+</file>
+
+<file path=ppt/revisionInfo.xml><?xml version="1.0" encoding="utf-8"?>
+<p1510:revInfo xmlns:a="http://schemas.openxmlformats.org/drawingml/2006/main" xmlns:r="http://schemas.openxmlformats.org/officeDocument/2006/relationships" xmlns:p1510="http://schemas.microsoft.com/office/powerpoint/2015/10/main">
+  <p1510:revLst>
+    <p1510:client id="{A1CAD584-EF42-441A-AE26-0C1CB119A6D8}" v="3" dt="2026-03-25T05:48:44.799"/>
+  </p1510:revLst>
+</p1510:revInfo>
+</file>
+
+<file path=ppt/changesInfos/changesInfo1.xml><?xml version="1.0" encoding="utf-8"?>
+<pc:chgInfo xmlns:a="http://schemas.openxmlformats.org/drawingml/2006/main" xmlns:r="http://schemas.openxmlformats.org/officeDocument/2006/relationships" xmlns:ac="http://schemas.microsoft.com/office/drawing/2013/main/command" xmlns:pc="http://schemas.microsoft.com/office/powerpoint/2013/main/command">
+  <pc:docChgLst>
+    <pc:chgData name="PIYUSH KUMAR" userId="7b1afbd9506350c5" providerId="LiveId" clId="{10E4B6D8-047B-4DB7-AD47-C14C94564A5E}"/>
+    <pc:docChg chg="undo custSel addSld delSld modSld">
+      <pc:chgData name="PIYUSH KUMAR" userId="7b1afbd9506350c5" providerId="LiveId" clId="{10E4B6D8-047B-4DB7-AD47-C14C94564A5E}" dt="2026-03-25T05:50:56.051" v="46" actId="1076"/>
+      <pc:docMkLst>
+        <pc:docMk/>
+      </pc:docMkLst>
+      <pc:sldChg chg="addSp delSp del mod">
+        <pc:chgData name="PIYUSH KUMAR" userId="7b1afbd9506350c5" providerId="LiveId" clId="{10E4B6D8-047B-4DB7-AD47-C14C94564A5E}" dt="2026-03-25T05:47:45.017" v="6" actId="47"/>
+        <pc:sldMkLst>
+          <pc:docMk/>
+          <pc:sldMk cId="0" sldId="269"/>
+        </pc:sldMkLst>
+        <pc:spChg chg="add del">
+          <ac:chgData name="PIYUSH KUMAR" userId="7b1afbd9506350c5" providerId="LiveId" clId="{10E4B6D8-047B-4DB7-AD47-C14C94564A5E}" dt="2026-03-25T05:47:04.848" v="1" actId="22"/>
+          <ac:spMkLst>
+            <pc:docMk/>
+            <pc:sldMk cId="0" sldId="269"/>
+            <ac:spMk id="3" creationId="{B7E6D893-842F-C6B1-6531-182B609DB4EC}"/>
+          </ac:spMkLst>
+        </pc:spChg>
+      </pc:sldChg>
+      <pc:sldChg chg="addSp modSp mod">
+        <pc:chgData name="PIYUSH KUMAR" userId="7b1afbd9506350c5" providerId="LiveId" clId="{10E4B6D8-047B-4DB7-AD47-C14C94564A5E}" dt="2026-03-25T05:48:44.798" v="36"/>
+        <pc:sldMkLst>
+          <pc:docMk/>
+          <pc:sldMk cId="0" sldId="276"/>
+        </pc:sldMkLst>
+        <pc:spChg chg="mod">
+          <ac:chgData name="PIYUSH KUMAR" userId="7b1afbd9506350c5" providerId="LiveId" clId="{10E4B6D8-047B-4DB7-AD47-C14C94564A5E}" dt="2026-03-25T05:48:04.603" v="29" actId="1035"/>
+          <ac:spMkLst>
+            <pc:docMk/>
+            <pc:sldMk cId="0" sldId="276"/>
+            <ac:spMk id="3" creationId="{00000000-0000-0000-0000-000000000000}"/>
+          </ac:spMkLst>
+        </pc:spChg>
+        <pc:spChg chg="add mod">
+          <ac:chgData name="PIYUSH KUMAR" userId="7b1afbd9506350c5" providerId="LiveId" clId="{10E4B6D8-047B-4DB7-AD47-C14C94564A5E}" dt="2026-03-25T05:48:44.798" v="36"/>
+          <ac:spMkLst>
+            <pc:docMk/>
+            <pc:sldMk cId="0" sldId="276"/>
+            <ac:spMk id="4" creationId="{26809711-42DD-A48F-C0DD-2097EDD76EB6}"/>
+          </ac:spMkLst>
+        </pc:spChg>
+      </pc:sldChg>
+      <pc:sldChg chg="addSp modSp new mod">
+        <pc:chgData name="PIYUSH KUMAR" userId="7b1afbd9506350c5" providerId="LiveId" clId="{10E4B6D8-047B-4DB7-AD47-C14C94564A5E}" dt="2026-03-25T05:50:56.051" v="46" actId="1076"/>
+        <pc:sldMkLst>
+          <pc:docMk/>
+          <pc:sldMk cId="242790318" sldId="277"/>
+        </pc:sldMkLst>
+        <pc:picChg chg="add mod">
+          <ac:chgData name="PIYUSH KUMAR" userId="7b1afbd9506350c5" providerId="LiveId" clId="{10E4B6D8-047B-4DB7-AD47-C14C94564A5E}" dt="2026-03-25T05:49:46.316" v="42" actId="1076"/>
+          <ac:picMkLst>
+            <pc:docMk/>
+            <pc:sldMk cId="242790318" sldId="277"/>
+            <ac:picMk id="3" creationId="{8C8C7545-8E3B-AA7D-3CAA-26794BBD248C}"/>
+          </ac:picMkLst>
+        </pc:picChg>
+        <pc:picChg chg="add mod">
+          <ac:chgData name="PIYUSH KUMAR" userId="7b1afbd9506350c5" providerId="LiveId" clId="{10E4B6D8-047B-4DB7-AD47-C14C94564A5E}" dt="2026-03-25T05:50:23.170" v="44" actId="1076"/>
+          <ac:picMkLst>
+            <pc:docMk/>
+            <pc:sldMk cId="242790318" sldId="277"/>
+            <ac:picMk id="5" creationId="{A8A45F74-CD76-4D78-B21E-FA5DD1A5E510}"/>
+          </ac:picMkLst>
+        </pc:picChg>
+        <pc:picChg chg="add mod">
+          <ac:chgData name="PIYUSH KUMAR" userId="7b1afbd9506350c5" providerId="LiveId" clId="{10E4B6D8-047B-4DB7-AD47-C14C94564A5E}" dt="2026-03-25T05:50:56.051" v="46" actId="1076"/>
+          <ac:picMkLst>
+            <pc:docMk/>
+            <pc:sldMk cId="242790318" sldId="277"/>
+            <ac:picMk id="7" creationId="{DF8A0911-1CB6-4ABA-B327-D42E48969D44}"/>
+          </ac:picMkLst>
+        </pc:picChg>
+      </pc:sldChg>
+      <pc:sldChg chg="addSp delSp new del mod">
+        <pc:chgData name="PIYUSH KUMAR" userId="7b1afbd9506350c5" providerId="LiveId" clId="{10E4B6D8-047B-4DB7-AD47-C14C94564A5E}" dt="2026-03-25T05:47:43.767" v="5" actId="47"/>
+        <pc:sldMkLst>
+          <pc:docMk/>
+          <pc:sldMk cId="2855179465" sldId="277"/>
+        </pc:sldMkLst>
+        <pc:spChg chg="add del">
+          <ac:chgData name="PIYUSH KUMAR" userId="7b1afbd9506350c5" providerId="LiveId" clId="{10E4B6D8-047B-4DB7-AD47-C14C94564A5E}" dt="2026-03-25T05:47:34.070" v="4" actId="22"/>
+          <ac:spMkLst>
+            <pc:docMk/>
+            <pc:sldMk cId="2855179465" sldId="277"/>
+            <ac:spMk id="3" creationId="{8D3F0EE8-9A66-54AC-9D21-EC5B808D11DA}"/>
+          </ac:spMkLst>
+        </pc:spChg>
+      </pc:sldChg>
+    </pc:docChg>
+  </pc:docChgLst>
+</pc:chgInfo>
 </file>
 
 <file path=ppt/notesMasters/notesMaster1.xml><?xml version="1.0" encoding="utf-8"?>
@@ -149,234 +260,10 @@
           <a:chExt cx="0" cy="0"/>
         </a:xfrm>
       </p:grpSpPr>
-      <p:sp>
-        <p:nvSpPr>
-          <p:cNvPr id="2" name="Header Placeholder 1"/>
-          <p:cNvSpPr>
-            <a:spLocks noGrp="1"/>
-          </p:cNvSpPr>
-          <p:nvPr>
-            <p:ph type="hdr" sz="quarter"/>
-          </p:nvPr>
-        </p:nvSpPr>
-        <p:spPr>
-          <a:xfrm>
-            <a:off x="0" y="0"/>
-            <a:ext cx="2971800" cy="458788"/>
-          </a:xfrm>
-          <a:prstGeom prst="rect">
-            <a:avLst/>
-          </a:prstGeom>
-        </p:spPr>
-        <p:txBody>
-          <a:bodyPr vert="horz" lIns="91440" tIns="45720" rIns="91440" bIns="45720" rtlCol="0"/>
-          <a:lstStyle>
-            <a:lvl1pPr algn="l">
-              <a:defRPr sz="1200"/>
-            </a:lvl1pPr>
-          </a:lstStyle>
-          <a:p>
-            <a:endParaRPr lang="en-US"/>
-          </a:p>
-        </p:txBody>
-      </p:sp>
-      <p:sp>
-        <p:nvSpPr>
-          <p:cNvPr id="3" name="Date Placeholder 2"/>
-          <p:cNvSpPr>
-            <a:spLocks noGrp="1"/>
-          </p:cNvSpPr>
-          <p:nvPr>
-            <p:ph type="dt" idx="1"/>
-          </p:nvPr>
-        </p:nvSpPr>
-        <p:spPr>
-          <a:xfrm>
-            <a:off x="3884613" y="0"/>
-            <a:ext cx="2971800" cy="458788"/>
-          </a:xfrm>
-          <a:prstGeom prst="rect">
-            <a:avLst/>
-          </a:prstGeom>
-        </p:spPr>
-        <p:txBody>
-          <a:bodyPr vert="horz" lIns="91440" tIns="45720" rIns="91440" bIns="45720" rtlCol="0"/>
-          <a:lstStyle>
-            <a:lvl1pPr algn="r">
-              <a:defRPr sz="1200"/>
-            </a:lvl1pPr>
-          </a:lstStyle>
-          <a:p>
-            <a:fld id="{5282F153-3F37-0F45-9E97-73ACFA13230C}" type="datetimeFigureOut">
-              <a:rPr lang="en-US"/>
-              <a:t>7/23/19</a:t>
-            </a:fld>
-            <a:endParaRPr lang="en-US"/>
-          </a:p>
-        </p:txBody>
-      </p:sp>
-      <p:sp>
-        <p:nvSpPr>
-          <p:cNvPr id="4" name="Slide Image Placeholder 3"/>
-          <p:cNvSpPr>
-            <a:spLocks noGrp="1" noRot="1" noChangeAspect="1"/>
-          </p:cNvSpPr>
-          <p:nvPr>
-            <p:ph type="sldImg" idx="2"/>
-          </p:nvPr>
-        </p:nvSpPr>
-        <p:spPr>
-          <a:xfrm>
-            <a:off x="685800" y="1143000"/>
-            <a:ext cx="5486400" cy="3086100"/>
-          </a:xfrm>
-          <a:prstGeom prst="rect">
-            <a:avLst/>
-          </a:prstGeom>
-          <a:noFill/>
-          <a:ln w="12700">
-            <a:solidFill>
-              <a:prstClr val="black"/>
-            </a:solidFill>
-          </a:ln>
-        </p:spPr>
-        <p:txBody>
-          <a:bodyPr vert="horz" lIns="91440" tIns="45720" rIns="91440" bIns="45720" rtlCol="0" anchor="ctr"/>
-          <a:lstStyle/>
-          <a:p>
-            <a:endParaRPr lang="en-US"/>
-          </a:p>
-        </p:txBody>
-      </p:sp>
-      <p:sp>
-        <p:nvSpPr>
-          <p:cNvPr id="5" name="Notes Placeholder 4"/>
-          <p:cNvSpPr>
-            <a:spLocks noGrp="1"/>
-          </p:cNvSpPr>
-          <p:nvPr>
-            <p:ph type="body" sz="quarter" idx="3"/>
-          </p:nvPr>
-        </p:nvSpPr>
-        <p:spPr>
-          <a:xfrm>
-            <a:off x="685800" y="4400550"/>
-            <a:ext cx="5486400" cy="3600450"/>
-          </a:xfrm>
-          <a:prstGeom prst="rect">
-            <a:avLst/>
-          </a:prstGeom>
-        </p:spPr>
-        <p:txBody>
-          <a:bodyPr vert="horz" lIns="91440" tIns="45720" rIns="91440" bIns="45720" rtlCol="0"/>
-          <a:lstStyle/>
-          <a:p>
-            <a:pPr lvl="0"/>
-            <a:r>
-              <a:rPr lang="en-US"/>
-              <a:t>Click to edit Master text styles</a:t>
-            </a:r>
-          </a:p>
-          <a:p>
-            <a:pPr lvl="1"/>
-            <a:r>
-              <a:rPr lang="en-US"/>
-              <a:t>Second level</a:t>
-            </a:r>
-          </a:p>
-          <a:p>
-            <a:pPr lvl="2"/>
-            <a:r>
-              <a:rPr lang="en-US"/>
-              <a:t>Third level</a:t>
-            </a:r>
-          </a:p>
-          <a:p>
-            <a:pPr lvl="3"/>
-            <a:r>
-              <a:rPr lang="en-US"/>
-              <a:t>Fourth level</a:t>
-            </a:r>
-          </a:p>
-          <a:p>
-            <a:pPr lvl="4"/>
-            <a:r>
-              <a:rPr lang="en-US"/>
-              <a:t>Fifth level</a:t>
-            </a:r>
-          </a:p>
-        </p:txBody>
-      </p:sp>
-      <p:sp>
-        <p:nvSpPr>
-          <p:cNvPr id="6" name="Footer Placeholder 5"/>
-          <p:cNvSpPr>
-            <a:spLocks noGrp="1"/>
-          </p:cNvSpPr>
-          <p:nvPr>
-            <p:ph type="ftr" sz="quarter" idx="4"/>
-          </p:nvPr>
-        </p:nvSpPr>
-        <p:spPr>
-          <a:xfrm>
-            <a:off x="0" y="8685213"/>
-            <a:ext cx="2971800" cy="458787"/>
-          </a:xfrm>
-          <a:prstGeom prst="rect">
-            <a:avLst/>
-          </a:prstGeom>
-        </p:spPr>
-        <p:txBody>
-          <a:bodyPr vert="horz" lIns="91440" tIns="45720" rIns="91440" bIns="45720" rtlCol="0" anchor="b"/>
-          <a:lstStyle>
-            <a:lvl1pPr algn="l">
-              <a:defRPr sz="1200"/>
-            </a:lvl1pPr>
-          </a:lstStyle>
-          <a:p>
-            <a:endParaRPr lang="en-US"/>
-          </a:p>
-        </p:txBody>
-      </p:sp>
-      <p:sp>
-        <p:nvSpPr>
-          <p:cNvPr id="7" name="Slide Number Placeholder 6"/>
-          <p:cNvSpPr>
-            <a:spLocks noGrp="1"/>
-          </p:cNvSpPr>
-          <p:nvPr>
-            <p:ph type="sldNum" sz="quarter" idx="5"/>
-          </p:nvPr>
-        </p:nvSpPr>
-        <p:spPr>
-          <a:xfrm>
-            <a:off x="3884613" y="8685213"/>
-            <a:ext cx="2971800" cy="458787"/>
-          </a:xfrm>
-          <a:prstGeom prst="rect">
-            <a:avLst/>
-          </a:prstGeom>
-        </p:spPr>
-        <p:txBody>
-          <a:bodyPr vert="horz" lIns="91440" tIns="45720" rIns="91440" bIns="45720" rtlCol="0" anchor="b"/>
-          <a:lstStyle>
-            <a:lvl1pPr algn="r">
-              <a:defRPr sz="1200"/>
-            </a:lvl1pPr>
-          </a:lstStyle>
-          <a:p>
-            <a:fld id="{CE5E9CC1-C706-0F49-92D6-E571CC5EEA8F}" type="slidenum">
-              <a:rPr lang="en-US"/>
-              <a:t>‹#›</a:t>
-            </a:fld>
-            <a:endParaRPr lang="en-US"/>
-          </a:p>
-        </p:txBody>
-      </p:sp>
     </p:spTree>
     <p:extLst>
       <p:ext uri="{BB962C8B-B14F-4D97-AF65-F5344CB8AC3E}">
-        <p14:creationId xmlns:p14="http://schemas.microsoft.com/office/powerpoint/2010/main" val="1024086991"/>
+        <p14:creationId xmlns:p14="http://schemas.microsoft.com/office/powerpoint/2010/main" val="2038791796"/>
       </p:ext>
     </p:extLst>
   </p:cSld>
@@ -520,10 +407,6 @@
           <a:bodyPr/>
           <a:lstStyle/>
           <a:p>
-            <a:r>
-              <a:rPr lang="en-US" dirty="0"/>
-              <a:t/>
-            </a:r>
             <a:endParaRPr lang="en-US" dirty="0"/>
           </a:p>
         </p:txBody>
@@ -608,10 +491,6 @@
           <a:bodyPr/>
           <a:lstStyle/>
           <a:p>
-            <a:r>
-              <a:rPr lang="en-US" dirty="0"/>
-              <a:t/>
-            </a:r>
             <a:endParaRPr lang="en-US" dirty="0"/>
           </a:p>
         </p:txBody>
@@ -696,10 +575,6 @@
           <a:bodyPr/>
           <a:lstStyle/>
           <a:p>
-            <a:r>
-              <a:rPr lang="en-US" dirty="0"/>
-              <a:t/>
-            </a:r>
             <a:endParaRPr lang="en-US" dirty="0"/>
           </a:p>
         </p:txBody>
@@ -784,10 +659,6 @@
           <a:bodyPr/>
           <a:lstStyle/>
           <a:p>
-            <a:r>
-              <a:rPr lang="en-US" dirty="0"/>
-              <a:t/>
-            </a:r>
             <a:endParaRPr lang="en-US" dirty="0"/>
           </a:p>
         </p:txBody>
@@ -872,10 +743,6 @@
           <a:bodyPr/>
           <a:lstStyle/>
           <a:p>
-            <a:r>
-              <a:rPr lang="en-US" dirty="0"/>
-              <a:t/>
-            </a:r>
             <a:endParaRPr lang="en-US" dirty="0"/>
           </a:p>
         </p:txBody>
@@ -960,10 +827,6 @@
           <a:bodyPr/>
           <a:lstStyle/>
           <a:p>
-            <a:r>
-              <a:rPr lang="en-US" dirty="0"/>
-              <a:t/>
-            </a:r>
             <a:endParaRPr lang="en-US" dirty="0"/>
           </a:p>
         </p:txBody>
@@ -1048,10 +911,6 @@
           <a:bodyPr/>
           <a:lstStyle/>
           <a:p>
-            <a:r>
-              <a:rPr lang="en-US" dirty="0"/>
-              <a:t/>
-            </a:r>
             <a:endParaRPr lang="en-US" dirty="0"/>
           </a:p>
         </p:txBody>
@@ -1136,10 +995,6 @@
           <a:bodyPr/>
           <a:lstStyle/>
           <a:p>
-            <a:r>
-              <a:rPr lang="en-US" dirty="0"/>
-              <a:t/>
-            </a:r>
             <a:endParaRPr lang="en-US" dirty="0"/>
           </a:p>
         </p:txBody>
@@ -1224,10 +1079,6 @@
           <a:bodyPr/>
           <a:lstStyle/>
           <a:p>
-            <a:r>
-              <a:rPr lang="en-US" dirty="0"/>
-              <a:t/>
-            </a:r>
             <a:endParaRPr lang="en-US" dirty="0"/>
           </a:p>
         </p:txBody>
@@ -1312,10 +1163,6 @@
           <a:bodyPr/>
           <a:lstStyle/>
           <a:p>
-            <a:r>
-              <a:rPr lang="en-US" dirty="0"/>
-              <a:t/>
-            </a:r>
             <a:endParaRPr lang="en-US" dirty="0"/>
           </a:p>
         </p:txBody>
@@ -1400,10 +1247,6 @@
           <a:bodyPr/>
           <a:lstStyle/>
           <a:p>
-            <a:r>
-              <a:rPr lang="en-US" dirty="0"/>
-              <a:t/>
-            </a:r>
             <a:endParaRPr lang="en-US" dirty="0"/>
           </a:p>
         </p:txBody>
@@ -1488,10 +1331,6 @@
           <a:bodyPr/>
           <a:lstStyle/>
           <a:p>
-            <a:r>
-              <a:rPr lang="en-US" dirty="0"/>
-              <a:t/>
-            </a:r>
             <a:endParaRPr lang="en-US" dirty="0"/>
           </a:p>
         </p:txBody>
@@ -1576,10 +1415,6 @@
           <a:bodyPr/>
           <a:lstStyle/>
           <a:p>
-            <a:r>
-              <a:rPr lang="en-US" dirty="0"/>
-              <a:t/>
-            </a:r>
             <a:endParaRPr lang="en-US" dirty="0"/>
           </a:p>
         </p:txBody>
@@ -1653,6 +1488,11 @@
 <file path=ppt/slideMasters/slideMaster1.xml><?xml version="1.0" encoding="utf-8"?>
 <p:sldMaster xmlns:a="http://schemas.openxmlformats.org/drawingml/2006/main" xmlns:r="http://schemas.openxmlformats.org/officeDocument/2006/relationships" xmlns:p="http://schemas.openxmlformats.org/presentationml/2006/main">
   <p:cSld>
+    <p:bg>
+      <p:bgRef idx="1001">
+        <a:schemeClr val="bg1"/>
+      </p:bgRef>
+    </p:bg>
     <p:spTree>
       <p:nvGrpSpPr>
         <p:cNvPr id="1" name=""/>
@@ -1935,6 +1775,7 @@
         <a:solidFill>
           <a:srgbClr val="000408"/>
         </a:solidFill>
+        <a:effectLst/>
       </p:bgPr>
     </p:bg>
     <p:spTree>
@@ -3205,7 +3046,7 @@
           <a:bodyPr wrap="square" lIns="0" tIns="0" rIns="0" bIns="0" rtlCol="0" anchor="ctr"/>
           <a:lstStyle/>
           <a:p>
-            <a:pPr algn="ctr" indent="0" marL="0">
+            <a:pPr marL="0" indent="0" algn="ctr">
               <a:buNone/>
             </a:pPr>
             <a:r>
@@ -3273,11 +3114,11 @@
           <a:bodyPr wrap="square" lIns="0" tIns="0" rIns="0" bIns="0" rtlCol="0" anchor="ctr"/>
           <a:lstStyle/>
           <a:p>
-            <a:pPr algn="ctr" indent="0" marL="0">
-              <a:buNone/>
-            </a:pPr>
-            <a:r>
-              <a:rPr lang="en-US" sz="650" b="1" spc="150" kern="0" dirty="0">
+            <a:pPr marL="0" indent="0" algn="ctr">
+              <a:buNone/>
+            </a:pPr>
+            <a:r>
+              <a:rPr lang="en-US" sz="650" b="1" kern="0" spc="150" dirty="0">
                 <a:solidFill>
                   <a:srgbClr val="00D2BE"/>
                 </a:solidFill>
@@ -3339,11 +3180,11 @@
           <a:bodyPr wrap="square" lIns="0" tIns="0" rIns="0" bIns="0" rtlCol="0" anchor="ctr"/>
           <a:lstStyle/>
           <a:p>
-            <a:pPr algn="ctr" indent="0" marL="0">
-              <a:buNone/>
-            </a:pPr>
-            <a:r>
-              <a:rPr lang="en-US" sz="650" b="1" spc="150" kern="0" dirty="0">
+            <a:pPr marL="0" indent="0" algn="ctr">
+              <a:buNone/>
+            </a:pPr>
+            <a:r>
+              <a:rPr lang="en-US" sz="650" b="1" kern="0" spc="150" dirty="0">
                 <a:solidFill>
                   <a:srgbClr val="F0A020"/>
                 </a:solidFill>
@@ -3405,11 +3246,11 @@
           <a:bodyPr wrap="square" lIns="0" tIns="0" rIns="0" bIns="0" rtlCol="0" anchor="ctr"/>
           <a:lstStyle/>
           <a:p>
-            <a:pPr algn="ctr" indent="0" marL="0">
-              <a:buNone/>
-            </a:pPr>
-            <a:r>
-              <a:rPr lang="en-US" sz="650" b="1" spc="150" kern="0" dirty="0">
+            <a:pPr marL="0" indent="0" algn="ctr">
+              <a:buNone/>
+            </a:pPr>
+            <a:r>
+              <a:rPr lang="en-US" sz="650" b="1" kern="0" spc="150" dirty="0">
                 <a:solidFill>
                   <a:srgbClr val="9B6FF0"/>
                 </a:solidFill>
@@ -3440,7 +3281,7 @@
           <a:noFill/>
           <a:ln/>
           <a:effectLst>
-            <a:outerShdw sx="100000" sy="100000" kx="0" ky="0" algn="bl" rotWithShape="0" blurRad="127000" dist="38100" dir="8100000">
+            <a:outerShdw blurRad="127000" dist="38100" dir="8100000" algn="bl" rotWithShape="0">
               <a:srgbClr val="000000">
                 <a:alpha val="50000"/>
               </a:srgbClr>
@@ -3451,7 +3292,7 @@
           <a:bodyPr wrap="square" lIns="0" tIns="0" rIns="0" bIns="0" rtlCol="0" anchor="ctr"/>
           <a:lstStyle/>
           <a:p>
-            <a:pPr algn="l" indent="0" marL="0">
+            <a:pPr marL="0" indent="0" algn="l">
               <a:buNone/>
             </a:pPr>
             <a:r>
@@ -3486,7 +3327,7 @@
           <a:noFill/>
           <a:ln/>
           <a:effectLst>
-            <a:outerShdw sx="100000" sy="100000" kx="0" ky="0" algn="bl" rotWithShape="0" blurRad="317500" dist="50800" dir="8100000">
+            <a:outerShdw blurRad="317500" dist="50800" dir="8100000" algn="bl" rotWithShape="0">
               <a:srgbClr val="00D2BE">
                 <a:alpha val="40000"/>
               </a:srgbClr>
@@ -3497,7 +3338,7 @@
           <a:bodyPr wrap="square" lIns="0" tIns="0" rIns="0" bIns="0" rtlCol="0" anchor="ctr"/>
           <a:lstStyle/>
           <a:p>
-            <a:pPr algn="l" indent="0" marL="0">
+            <a:pPr marL="0" indent="0" algn="l">
               <a:buNone/>
             </a:pPr>
             <a:r>
@@ -3536,11 +3377,11 @@
           <a:bodyPr wrap="square" lIns="0" tIns="0" rIns="0" bIns="0" rtlCol="0" anchor="ctr"/>
           <a:lstStyle/>
           <a:p>
-            <a:pPr algn="l" indent="0" marL="0">
-              <a:buNone/>
-            </a:pPr>
-            <a:r>
-              <a:rPr lang="en-US" sz="1200" spc="300" kern="0" dirty="0">
+            <a:pPr marL="0" indent="0" algn="l">
+              <a:buNone/>
+            </a:pPr>
+            <a:r>
+              <a:rPr lang="en-US" sz="1200" kern="0" spc="300" dirty="0">
                 <a:solidFill>
                   <a:srgbClr val="8ABEB8"/>
                 </a:solidFill>
@@ -3575,7 +3416,7 @@
           <a:bodyPr wrap="square" lIns="0" tIns="0" rIns="0" bIns="0" rtlCol="0" anchor="t"/>
           <a:lstStyle/>
           <a:p>
-            <a:pPr algn="l" indent="0" marL="0">
+            <a:pPr marL="0" indent="0" algn="l">
               <a:lnSpc>
                 <a:spcPct val="150000"/>
               </a:lnSpc>
@@ -3595,7 +3436,7 @@
             <a:endParaRPr lang="en-US" sz="1200" dirty="0"/>
           </a:p>
           <a:p>
-            <a:pPr algn="l" indent="0" marL="0">
+            <a:pPr marL="0" indent="0" algn="l">
               <a:lnSpc>
                 <a:spcPct val="150000"/>
               </a:lnSpc>
@@ -3669,7 +3510,7 @@
             <a:prstDash val="solid"/>
           </a:ln>
           <a:effectLst>
-            <a:outerShdw sx="100000" sy="100000" kx="0" ky="0" algn="bl" rotWithShape="0" blurRad="254000" dist="76200" dir="8100000">
+            <a:outerShdw blurRad="254000" dist="76200" dir="8100000" algn="bl" rotWithShape="0">
               <a:srgbClr val="000000">
                 <a:alpha val="80000"/>
               </a:srgbClr>
@@ -3748,7 +3589,7 @@
           <a:noFill/>
           <a:ln/>
           <a:effectLst>
-            <a:outerShdw sx="100000" sy="100000" kx="0" ky="0" algn="bl" rotWithShape="0" blurRad="317500" dist="50800" dir="8100000">
+            <a:outerShdw blurRad="317500" dist="50800" dir="8100000" algn="bl" rotWithShape="0">
               <a:srgbClr val="00D2BE">
                 <a:alpha val="40000"/>
               </a:srgbClr>
@@ -3759,7 +3600,7 @@
           <a:bodyPr wrap="square" lIns="0" tIns="0" rIns="0" bIns="0" rtlCol="0" anchor="ctr"/>
           <a:lstStyle/>
           <a:p>
-            <a:pPr algn="ctr" indent="0" marL="0">
+            <a:pPr marL="0" indent="0" algn="ctr">
               <a:buNone/>
             </a:pPr>
             <a:r>
@@ -3823,11 +3664,11 @@
           <a:bodyPr wrap="square" lIns="0" tIns="0" rIns="0" bIns="0" rtlCol="0" anchor="ctr"/>
           <a:lstStyle/>
           <a:p>
-            <a:pPr algn="ctr" indent="0" marL="0">
-              <a:buNone/>
-            </a:pPr>
-            <a:r>
-              <a:rPr lang="en-US" sz="750" spc="180" kern="0" dirty="0">
+            <a:pPr marL="0" indent="0" algn="ctr">
+              <a:buNone/>
+            </a:pPr>
+            <a:r>
+              <a:rPr lang="en-US" sz="750" kern="0" spc="180" dirty="0">
                 <a:solidFill>
                   <a:srgbClr val="2A5050"/>
                 </a:solidFill>
@@ -3894,7 +3735,7 @@
             <a:prstDash val="solid"/>
           </a:ln>
           <a:effectLst>
-            <a:outerShdw sx="100000" sy="100000" kx="0" ky="0" algn="bl" rotWithShape="0" blurRad="254000" dist="76200" dir="8100000">
+            <a:outerShdw blurRad="254000" dist="76200" dir="8100000" algn="bl" rotWithShape="0">
               <a:srgbClr val="000000">
                 <a:alpha val="80000"/>
               </a:srgbClr>
@@ -3973,7 +3814,7 @@
           <a:noFill/>
           <a:ln/>
           <a:effectLst>
-            <a:outerShdw sx="100000" sy="100000" kx="0" ky="0" algn="bl" rotWithShape="0" blurRad="317500" dist="50800" dir="8100000">
+            <a:outerShdw blurRad="317500" dist="50800" dir="8100000" algn="bl" rotWithShape="0">
               <a:srgbClr val="F0A020">
                 <a:alpha val="40000"/>
               </a:srgbClr>
@@ -3984,7 +3825,7 @@
           <a:bodyPr wrap="square" lIns="0" tIns="0" rIns="0" bIns="0" rtlCol="0" anchor="ctr"/>
           <a:lstStyle/>
           <a:p>
-            <a:pPr algn="ctr" indent="0" marL="0">
+            <a:pPr marL="0" indent="0" algn="ctr">
               <a:buNone/>
             </a:pPr>
             <a:r>
@@ -4048,11 +3889,11 @@
           <a:bodyPr wrap="square" lIns="0" tIns="0" rIns="0" bIns="0" rtlCol="0" anchor="ctr"/>
           <a:lstStyle/>
           <a:p>
-            <a:pPr algn="ctr" indent="0" marL="0">
-              <a:buNone/>
-            </a:pPr>
-            <a:r>
-              <a:rPr lang="en-US" sz="750" spc="180" kern="0" dirty="0">
+            <a:pPr marL="0" indent="0" algn="ctr">
+              <a:buNone/>
+            </a:pPr>
+            <a:r>
+              <a:rPr lang="en-US" sz="750" kern="0" spc="180" dirty="0">
                 <a:solidFill>
                   <a:srgbClr val="2A5050"/>
                 </a:solidFill>
@@ -4119,7 +3960,7 @@
             <a:prstDash val="solid"/>
           </a:ln>
           <a:effectLst>
-            <a:outerShdw sx="100000" sy="100000" kx="0" ky="0" algn="bl" rotWithShape="0" blurRad="254000" dist="76200" dir="8100000">
+            <a:outerShdw blurRad="254000" dist="76200" dir="8100000" algn="bl" rotWithShape="0">
               <a:srgbClr val="000000">
                 <a:alpha val="80000"/>
               </a:srgbClr>
@@ -4198,7 +4039,7 @@
           <a:noFill/>
           <a:ln/>
           <a:effectLst>
-            <a:outerShdw sx="100000" sy="100000" kx="0" ky="0" algn="bl" rotWithShape="0" blurRad="317500" dist="50800" dir="8100000">
+            <a:outerShdw blurRad="317500" dist="50800" dir="8100000" algn="bl" rotWithShape="0">
               <a:srgbClr val="22D88A">
                 <a:alpha val="40000"/>
               </a:srgbClr>
@@ -4209,7 +4050,7 @@
           <a:bodyPr wrap="square" lIns="0" tIns="0" rIns="0" bIns="0" rtlCol="0" anchor="ctr"/>
           <a:lstStyle/>
           <a:p>
-            <a:pPr algn="ctr" indent="0" marL="0">
+            <a:pPr marL="0" indent="0" algn="ctr">
               <a:buNone/>
             </a:pPr>
             <a:r>
@@ -4273,11 +4114,11 @@
           <a:bodyPr wrap="square" lIns="0" tIns="0" rIns="0" bIns="0" rtlCol="0" anchor="ctr"/>
           <a:lstStyle/>
           <a:p>
-            <a:pPr algn="ctr" indent="0" marL="0">
-              <a:buNone/>
-            </a:pPr>
-            <a:r>
-              <a:rPr lang="en-US" sz="750" spc="180" kern="0" dirty="0">
+            <a:pPr marL="0" indent="0" algn="ctr">
+              <a:buNone/>
+            </a:pPr>
+            <a:r>
+              <a:rPr lang="en-US" sz="750" kern="0" spc="180" dirty="0">
                 <a:solidFill>
                   <a:srgbClr val="2A5050"/>
                 </a:solidFill>
@@ -4344,7 +4185,7 @@
             <a:prstDash val="solid"/>
           </a:ln>
           <a:effectLst>
-            <a:outerShdw sx="100000" sy="100000" kx="0" ky="0" algn="bl" rotWithShape="0" blurRad="254000" dist="76200" dir="8100000">
+            <a:outerShdw blurRad="254000" dist="76200" dir="8100000" algn="bl" rotWithShape="0">
               <a:srgbClr val="000000">
                 <a:alpha val="80000"/>
               </a:srgbClr>
@@ -4423,7 +4264,7 @@
           <a:noFill/>
           <a:ln/>
           <a:effectLst>
-            <a:outerShdw sx="100000" sy="100000" kx="0" ky="0" algn="bl" rotWithShape="0" blurRad="317500" dist="50800" dir="8100000">
+            <a:outerShdw blurRad="317500" dist="50800" dir="8100000" algn="bl" rotWithShape="0">
               <a:srgbClr val="9B6FF0">
                 <a:alpha val="40000"/>
               </a:srgbClr>
@@ -4434,7 +4275,7 @@
           <a:bodyPr wrap="square" lIns="0" tIns="0" rIns="0" bIns="0" rtlCol="0" anchor="ctr"/>
           <a:lstStyle/>
           <a:p>
-            <a:pPr algn="ctr" indent="0" marL="0">
+            <a:pPr marL="0" indent="0" algn="ctr">
               <a:buNone/>
             </a:pPr>
             <a:r>
@@ -4498,11 +4339,11 @@
           <a:bodyPr wrap="square" lIns="0" tIns="0" rIns="0" bIns="0" rtlCol="0" anchor="ctr"/>
           <a:lstStyle/>
           <a:p>
-            <a:pPr algn="ctr" indent="0" marL="0">
-              <a:buNone/>
-            </a:pPr>
-            <a:r>
-              <a:rPr lang="en-US" sz="750" spc="180" kern="0" dirty="0">
+            <a:pPr marL="0" indent="0" algn="ctr">
+              <a:buNone/>
+            </a:pPr>
+            <a:r>
+              <a:rPr lang="en-US" sz="750" kern="0" spc="180" dirty="0">
                 <a:solidFill>
                   <a:srgbClr val="2A5050"/>
                 </a:solidFill>
@@ -4587,11 +4428,11 @@
           <a:bodyPr wrap="square" lIns="0" tIns="0" rIns="0" bIns="0" rtlCol="0" anchor="ctr"/>
           <a:lstStyle/>
           <a:p>
-            <a:pPr algn="ctr" indent="0" marL="0">
-              <a:buNone/>
-            </a:pPr>
-            <a:r>
-              <a:rPr lang="en-US" sz="750" spc="100" kern="0" dirty="0">
+            <a:pPr marL="0" indent="0" algn="ctr">
+              <a:buNone/>
+            </a:pPr>
+            <a:r>
+              <a:rPr lang="en-US" sz="750" kern="0" spc="100" dirty="0">
                 <a:solidFill>
                   <a:srgbClr val="2A5050"/>
                 </a:solidFill>
@@ -4621,6 +4462,7 @@
         <a:solidFill>
           <a:srgbClr val="030B16"/>
         </a:solidFill>
+        <a:effectLst/>
       </p:bgPr>
     </p:bg>
     <p:spTree>
@@ -4753,9 +4595,7 @@
             <a:ext cx="594360" cy="594360"/>
           </a:xfrm>
           <a:prstGeom prst="rect">
-            <a:avLst>
-              <a:gd name="adj" fmla="val 12308"/>
-            </a:avLst>
+            <a:avLst/>
           </a:prstGeom>
           <a:solidFill>
             <a:srgbClr val="22D88A">
@@ -4769,7 +4609,7 @@
             <a:prstDash val="solid"/>
           </a:ln>
           <a:effectLst>
-            <a:outerShdw sx="100000" sy="100000" kx="0" ky="0" algn="bl" rotWithShape="0" blurRad="317500" dist="50800" dir="8100000">
+            <a:outerShdw blurRad="317500" dist="50800" dir="8100000" algn="bl" rotWithShape="0">
               <a:srgbClr val="22D88A">
                 <a:alpha val="40000"/>
               </a:srgbClr>
@@ -4798,7 +4638,7 @@
           <a:bodyPr wrap="square" lIns="0" tIns="0" rIns="0" bIns="0" rtlCol="0" anchor="ctr"/>
           <a:lstStyle/>
           <a:p>
-            <a:pPr algn="ctr" indent="0" marL="0">
+            <a:pPr marL="0" indent="0" algn="ctr">
               <a:buNone/>
             </a:pPr>
             <a:r>
@@ -4830,7 +4670,7 @@
           <a:noFill/>
           <a:ln/>
           <a:effectLst>
-            <a:outerShdw sx="100000" sy="100000" kx="0" ky="0" algn="bl" rotWithShape="0" blurRad="127000" dist="38100" dir="8100000">
+            <a:outerShdw blurRad="127000" dist="38100" dir="8100000" algn="bl" rotWithShape="0">
               <a:srgbClr val="000000">
                 <a:alpha val="50000"/>
               </a:srgbClr>
@@ -4841,7 +4681,7 @@
           <a:bodyPr wrap="square" lIns="0" tIns="0" rIns="0" bIns="0" rtlCol="0" anchor="ctr"/>
           <a:lstStyle/>
           <a:p>
-            <a:pPr indent="0" marL="0">
+            <a:pPr marL="0" indent="0">
               <a:buNone/>
             </a:pPr>
             <a:r>
@@ -4907,11 +4747,11 @@
           <a:bodyPr wrap="square" lIns="0" tIns="0" rIns="0" bIns="0" rtlCol="0" anchor="ctr"/>
           <a:lstStyle/>
           <a:p>
-            <a:pPr algn="ctr" indent="0" marL="0">
-              <a:buNone/>
-            </a:pPr>
-            <a:r>
-              <a:rPr lang="en-US" sz="700" b="1" spc="150" kern="0" dirty="0">
+            <a:pPr marL="0" indent="0" algn="ctr">
+              <a:buNone/>
+            </a:pPr>
+            <a:r>
+              <a:rPr lang="en-US" sz="700" b="1" kern="0" spc="150" dirty="0">
                 <a:solidFill>
                   <a:srgbClr val="22D88A"/>
                 </a:solidFill>
@@ -4978,7 +4818,7 @@
             <a:prstDash val="solid"/>
           </a:ln>
           <a:effectLst>
-            <a:outerShdw sx="100000" sy="100000" kx="0" ky="0" algn="bl" rotWithShape="0" blurRad="254000" dist="76200" dir="8100000">
+            <a:outerShdw blurRad="254000" dist="76200" dir="8100000" algn="bl" rotWithShape="0">
               <a:srgbClr val="000000">
                 <a:alpha val="80000"/>
               </a:srgbClr>
@@ -5084,7 +4924,7 @@
           <a:noFill/>
           <a:ln/>
           <a:effectLst>
-            <a:outerShdw sx="100000" sy="100000" kx="0" ky="0" algn="bl" rotWithShape="0" blurRad="317500" dist="50800" dir="8100000">
+            <a:outerShdw blurRad="317500" dist="50800" dir="8100000" algn="bl" rotWithShape="0">
               <a:srgbClr val="00D2BE">
                 <a:alpha val="40000"/>
               </a:srgbClr>
@@ -5095,7 +4935,7 @@
           <a:bodyPr wrap="square" lIns="0" tIns="0" rIns="0" bIns="0" rtlCol="0" anchor="ctr"/>
           <a:lstStyle/>
           <a:p>
-            <a:pPr indent="0" marL="0">
+            <a:pPr marL="0" indent="0">
               <a:buNone/>
             </a:pPr>
             <a:r>
@@ -5134,7 +4974,7 @@
           <a:bodyPr wrap="square" lIns="0" tIns="0" rIns="0" bIns="0" rtlCol="0" anchor="ctr"/>
           <a:lstStyle/>
           <a:p>
-            <a:pPr indent="0" marL="0">
+            <a:pPr marL="0" indent="0">
               <a:buNone/>
             </a:pPr>
             <a:r>
@@ -5173,7 +5013,7 @@
           <a:bodyPr wrap="square" lIns="0" tIns="0" rIns="0" bIns="0" rtlCol="0" anchor="t"/>
           <a:lstStyle/>
           <a:p>
-            <a:pPr indent="0" marL="0">
+            <a:pPr marL="0" indent="0">
               <a:lnSpc>
                 <a:spcPct val="130000"/>
               </a:lnSpc>
@@ -5240,7 +5080,7 @@
           <a:bodyPr wrap="square" lIns="0" tIns="0" rIns="0" bIns="0" rtlCol="0" anchor="ctr"/>
           <a:lstStyle/>
           <a:p>
-            <a:pPr indent="0" marL="0">
+            <a:pPr marL="0" indent="0">
               <a:buNone/>
             </a:pPr>
             <a:r>
@@ -5279,7 +5119,7 @@
           <a:bodyPr wrap="square" lIns="0" tIns="0" rIns="0" bIns="0" rtlCol="0" anchor="t"/>
           <a:lstStyle/>
           <a:p>
-            <a:pPr indent="0" marL="0">
+            <a:pPr marL="0" indent="0">
               <a:lnSpc>
                 <a:spcPct val="130000"/>
               </a:lnSpc>
@@ -5346,7 +5186,7 @@
           <a:bodyPr wrap="square" lIns="0" tIns="0" rIns="0" bIns="0" rtlCol="0" anchor="ctr"/>
           <a:lstStyle/>
           <a:p>
-            <a:pPr indent="0" marL="0">
+            <a:pPr marL="0" indent="0">
               <a:buNone/>
             </a:pPr>
             <a:r>
@@ -5385,7 +5225,7 @@
           <a:bodyPr wrap="square" lIns="0" tIns="0" rIns="0" bIns="0" rtlCol="0" anchor="t"/>
           <a:lstStyle/>
           <a:p>
-            <a:pPr indent="0" marL="0">
+            <a:pPr marL="0" indent="0">
               <a:lnSpc>
                 <a:spcPct val="130000"/>
               </a:lnSpc>
@@ -5452,7 +5292,7 @@
           <a:bodyPr wrap="square" lIns="0" tIns="0" rIns="0" bIns="0" rtlCol="0" anchor="ctr"/>
           <a:lstStyle/>
           <a:p>
-            <a:pPr indent="0" marL="0">
+            <a:pPr marL="0" indent="0">
               <a:buNone/>
             </a:pPr>
             <a:r>
@@ -5491,7 +5331,7 @@
           <a:bodyPr wrap="square" lIns="0" tIns="0" rIns="0" bIns="0" rtlCol="0" anchor="t"/>
           <a:lstStyle/>
           <a:p>
-            <a:pPr indent="0" marL="0">
+            <a:pPr marL="0" indent="0">
               <a:lnSpc>
                 <a:spcPct val="130000"/>
               </a:lnSpc>
@@ -5565,7 +5405,7 @@
             <a:prstDash val="solid"/>
           </a:ln>
           <a:effectLst>
-            <a:outerShdw sx="100000" sy="100000" kx="0" ky="0" algn="bl" rotWithShape="0" blurRad="254000" dist="76200" dir="8100000">
+            <a:outerShdw blurRad="254000" dist="76200" dir="8100000" algn="bl" rotWithShape="0">
               <a:srgbClr val="000000">
                 <a:alpha val="80000"/>
               </a:srgbClr>
@@ -5671,7 +5511,7 @@
           <a:noFill/>
           <a:ln/>
           <a:effectLst>
-            <a:outerShdw sx="100000" sy="100000" kx="0" ky="0" algn="bl" rotWithShape="0" blurRad="317500" dist="50800" dir="8100000">
+            <a:outerShdw blurRad="317500" dist="50800" dir="8100000" algn="bl" rotWithShape="0">
               <a:srgbClr val="22D88A">
                 <a:alpha val="40000"/>
               </a:srgbClr>
@@ -5682,7 +5522,7 @@
           <a:bodyPr wrap="square" lIns="0" tIns="0" rIns="0" bIns="0" rtlCol="0" anchor="ctr"/>
           <a:lstStyle/>
           <a:p>
-            <a:pPr indent="0" marL="0">
+            <a:pPr marL="0" indent="0">
               <a:buNone/>
             </a:pPr>
             <a:r>
@@ -5721,7 +5561,7 @@
           <a:bodyPr wrap="square" lIns="0" tIns="0" rIns="0" bIns="0" rtlCol="0" anchor="ctr"/>
           <a:lstStyle/>
           <a:p>
-            <a:pPr indent="0" marL="0">
+            <a:pPr marL="0" indent="0">
               <a:buNone/>
             </a:pPr>
             <a:r>
@@ -5760,7 +5600,7 @@
           <a:bodyPr wrap="square" lIns="0" tIns="0" rIns="0" bIns="0" rtlCol="0" anchor="t"/>
           <a:lstStyle/>
           <a:p>
-            <a:pPr indent="0" marL="0">
+            <a:pPr marL="0" indent="0">
               <a:lnSpc>
                 <a:spcPct val="130000"/>
               </a:lnSpc>
@@ -5827,7 +5667,7 @@
           <a:bodyPr wrap="square" lIns="0" tIns="0" rIns="0" bIns="0" rtlCol="0" anchor="ctr"/>
           <a:lstStyle/>
           <a:p>
-            <a:pPr indent="0" marL="0">
+            <a:pPr marL="0" indent="0">
               <a:buNone/>
             </a:pPr>
             <a:r>
@@ -5866,7 +5706,7 @@
           <a:bodyPr wrap="square" lIns="0" tIns="0" rIns="0" bIns="0" rtlCol="0" anchor="t"/>
           <a:lstStyle/>
           <a:p>
-            <a:pPr indent="0" marL="0">
+            <a:pPr marL="0" indent="0">
               <a:lnSpc>
                 <a:spcPct val="130000"/>
               </a:lnSpc>
@@ -5933,7 +5773,7 @@
           <a:bodyPr wrap="square" lIns="0" tIns="0" rIns="0" bIns="0" rtlCol="0" anchor="ctr"/>
           <a:lstStyle/>
           <a:p>
-            <a:pPr indent="0" marL="0">
+            <a:pPr marL="0" indent="0">
               <a:buNone/>
             </a:pPr>
             <a:r>
@@ -5972,7 +5812,7 @@
           <a:bodyPr wrap="square" lIns="0" tIns="0" rIns="0" bIns="0" rtlCol="0" anchor="t"/>
           <a:lstStyle/>
           <a:p>
-            <a:pPr indent="0" marL="0">
+            <a:pPr marL="0" indent="0">
               <a:lnSpc>
                 <a:spcPct val="130000"/>
               </a:lnSpc>
@@ -6039,7 +5879,7 @@
           <a:bodyPr wrap="square" lIns="0" tIns="0" rIns="0" bIns="0" rtlCol="0" anchor="ctr"/>
           <a:lstStyle/>
           <a:p>
-            <a:pPr indent="0" marL="0">
+            <a:pPr marL="0" indent="0">
               <a:buNone/>
             </a:pPr>
             <a:r>
@@ -6078,7 +5918,7 @@
           <a:bodyPr wrap="square" lIns="0" tIns="0" rIns="0" bIns="0" rtlCol="0" anchor="t"/>
           <a:lstStyle/>
           <a:p>
-            <a:pPr indent="0" marL="0">
+            <a:pPr marL="0" indent="0">
               <a:lnSpc>
                 <a:spcPct val="130000"/>
               </a:lnSpc>
@@ -6152,7 +5992,7 @@
             <a:prstDash val="solid"/>
           </a:ln>
           <a:effectLst>
-            <a:outerShdw sx="100000" sy="100000" kx="0" ky="0" algn="bl" rotWithShape="0" blurRad="254000" dist="76200" dir="8100000">
+            <a:outerShdw blurRad="254000" dist="76200" dir="8100000" algn="bl" rotWithShape="0">
               <a:srgbClr val="000000">
                 <a:alpha val="80000"/>
               </a:srgbClr>
@@ -6258,7 +6098,7 @@
           <a:noFill/>
           <a:ln/>
           <a:effectLst>
-            <a:outerShdw sx="100000" sy="100000" kx="0" ky="0" algn="bl" rotWithShape="0" blurRad="317500" dist="50800" dir="8100000">
+            <a:outerShdw blurRad="317500" dist="50800" dir="8100000" algn="bl" rotWithShape="0">
               <a:srgbClr val="F0A020">
                 <a:alpha val="40000"/>
               </a:srgbClr>
@@ -6269,7 +6109,7 @@
           <a:bodyPr wrap="square" lIns="0" tIns="0" rIns="0" bIns="0" rtlCol="0" anchor="ctr"/>
           <a:lstStyle/>
           <a:p>
-            <a:pPr indent="0" marL="0">
+            <a:pPr marL="0" indent="0">
               <a:buNone/>
             </a:pPr>
             <a:r>
@@ -6308,7 +6148,7 @@
           <a:bodyPr wrap="square" lIns="0" tIns="0" rIns="0" bIns="0" rtlCol="0" anchor="ctr"/>
           <a:lstStyle/>
           <a:p>
-            <a:pPr indent="0" marL="0">
+            <a:pPr marL="0" indent="0">
               <a:buNone/>
             </a:pPr>
             <a:r>
@@ -6347,7 +6187,7 @@
           <a:bodyPr wrap="square" lIns="0" tIns="0" rIns="0" bIns="0" rtlCol="0" anchor="t"/>
           <a:lstStyle/>
           <a:p>
-            <a:pPr indent="0" marL="0">
+            <a:pPr marL="0" indent="0">
               <a:lnSpc>
                 <a:spcPct val="130000"/>
               </a:lnSpc>
@@ -6414,7 +6254,7 @@
           <a:bodyPr wrap="square" lIns="0" tIns="0" rIns="0" bIns="0" rtlCol="0" anchor="ctr"/>
           <a:lstStyle/>
           <a:p>
-            <a:pPr indent="0" marL="0">
+            <a:pPr marL="0" indent="0">
               <a:buNone/>
             </a:pPr>
             <a:r>
@@ -6453,7 +6293,7 @@
           <a:bodyPr wrap="square" lIns="0" tIns="0" rIns="0" bIns="0" rtlCol="0" anchor="t"/>
           <a:lstStyle/>
           <a:p>
-            <a:pPr indent="0" marL="0">
+            <a:pPr marL="0" indent="0">
               <a:lnSpc>
                 <a:spcPct val="130000"/>
               </a:lnSpc>
@@ -6520,7 +6360,7 @@
           <a:bodyPr wrap="square" lIns="0" tIns="0" rIns="0" bIns="0" rtlCol="0" anchor="ctr"/>
           <a:lstStyle/>
           <a:p>
-            <a:pPr indent="0" marL="0">
+            <a:pPr marL="0" indent="0">
               <a:buNone/>
             </a:pPr>
             <a:r>
@@ -6559,7 +6399,7 @@
           <a:bodyPr wrap="square" lIns="0" tIns="0" rIns="0" bIns="0" rtlCol="0" anchor="t"/>
           <a:lstStyle/>
           <a:p>
-            <a:pPr indent="0" marL="0">
+            <a:pPr marL="0" indent="0">
               <a:lnSpc>
                 <a:spcPct val="130000"/>
               </a:lnSpc>
@@ -6626,7 +6466,7 @@
           <a:bodyPr wrap="square" lIns="0" tIns="0" rIns="0" bIns="0" rtlCol="0" anchor="ctr"/>
           <a:lstStyle/>
           <a:p>
-            <a:pPr indent="0" marL="0">
+            <a:pPr marL="0" indent="0">
               <a:buNone/>
             </a:pPr>
             <a:r>
@@ -6665,7 +6505,7 @@
           <a:bodyPr wrap="square" lIns="0" tIns="0" rIns="0" bIns="0" rtlCol="0" anchor="t"/>
           <a:lstStyle/>
           <a:p>
-            <a:pPr indent="0" marL="0">
+            <a:pPr marL="0" indent="0">
               <a:lnSpc>
                 <a:spcPct val="130000"/>
               </a:lnSpc>
@@ -6739,7 +6579,7 @@
             <a:prstDash val="solid"/>
           </a:ln>
           <a:effectLst>
-            <a:outerShdw sx="100000" sy="100000" kx="0" ky="0" algn="bl" rotWithShape="0" blurRad="254000" dist="76200" dir="8100000">
+            <a:outerShdw blurRad="254000" dist="76200" dir="8100000" algn="bl" rotWithShape="0">
               <a:srgbClr val="000000">
                 <a:alpha val="80000"/>
               </a:srgbClr>
@@ -6845,7 +6685,7 @@
           <a:noFill/>
           <a:ln/>
           <a:effectLst>
-            <a:outerShdw sx="100000" sy="100000" kx="0" ky="0" algn="bl" rotWithShape="0" blurRad="317500" dist="50800" dir="8100000">
+            <a:outerShdw blurRad="317500" dist="50800" dir="8100000" algn="bl" rotWithShape="0">
               <a:srgbClr val="9B6FF0">
                 <a:alpha val="40000"/>
               </a:srgbClr>
@@ -6856,7 +6696,7 @@
           <a:bodyPr wrap="square" lIns="0" tIns="0" rIns="0" bIns="0" rtlCol="0" anchor="ctr"/>
           <a:lstStyle/>
           <a:p>
-            <a:pPr indent="0" marL="0">
+            <a:pPr marL="0" indent="0">
               <a:buNone/>
             </a:pPr>
             <a:r>
@@ -6895,7 +6735,7 @@
           <a:bodyPr wrap="square" lIns="0" tIns="0" rIns="0" bIns="0" rtlCol="0" anchor="ctr"/>
           <a:lstStyle/>
           <a:p>
-            <a:pPr indent="0" marL="0">
+            <a:pPr marL="0" indent="0">
               <a:buNone/>
             </a:pPr>
             <a:r>
@@ -6934,7 +6774,7 @@
           <a:bodyPr wrap="square" lIns="0" tIns="0" rIns="0" bIns="0" rtlCol="0" anchor="t"/>
           <a:lstStyle/>
           <a:p>
-            <a:pPr indent="0" marL="0">
+            <a:pPr marL="0" indent="0">
               <a:lnSpc>
                 <a:spcPct val="130000"/>
               </a:lnSpc>
@@ -7001,7 +6841,7 @@
           <a:bodyPr wrap="square" lIns="0" tIns="0" rIns="0" bIns="0" rtlCol="0" anchor="ctr"/>
           <a:lstStyle/>
           <a:p>
-            <a:pPr indent="0" marL="0">
+            <a:pPr marL="0" indent="0">
               <a:buNone/>
             </a:pPr>
             <a:r>
@@ -7040,7 +6880,7 @@
           <a:bodyPr wrap="square" lIns="0" tIns="0" rIns="0" bIns="0" rtlCol="0" anchor="t"/>
           <a:lstStyle/>
           <a:p>
-            <a:pPr indent="0" marL="0">
+            <a:pPr marL="0" indent="0">
               <a:lnSpc>
                 <a:spcPct val="130000"/>
               </a:lnSpc>
@@ -7107,7 +6947,7 @@
           <a:bodyPr wrap="square" lIns="0" tIns="0" rIns="0" bIns="0" rtlCol="0" anchor="ctr"/>
           <a:lstStyle/>
           <a:p>
-            <a:pPr indent="0" marL="0">
+            <a:pPr marL="0" indent="0">
               <a:buNone/>
             </a:pPr>
             <a:r>
@@ -7146,7 +6986,7 @@
           <a:bodyPr wrap="square" lIns="0" tIns="0" rIns="0" bIns="0" rtlCol="0" anchor="t"/>
           <a:lstStyle/>
           <a:p>
-            <a:pPr indent="0" marL="0">
+            <a:pPr marL="0" indent="0">
               <a:lnSpc>
                 <a:spcPct val="130000"/>
               </a:lnSpc>
@@ -7213,7 +7053,7 @@
           <a:bodyPr wrap="square" lIns="0" tIns="0" rIns="0" bIns="0" rtlCol="0" anchor="ctr"/>
           <a:lstStyle/>
           <a:p>
-            <a:pPr indent="0" marL="0">
+            <a:pPr marL="0" indent="0">
               <a:buNone/>
             </a:pPr>
             <a:r>
@@ -7252,7 +7092,7 @@
           <a:bodyPr wrap="square" lIns="0" tIns="0" rIns="0" bIns="0" rtlCol="0" anchor="t"/>
           <a:lstStyle/>
           <a:p>
-            <a:pPr indent="0" marL="0">
+            <a:pPr marL="0" indent="0">
               <a:lnSpc>
                 <a:spcPct val="130000"/>
               </a:lnSpc>
@@ -7326,7 +7166,7 @@
             <a:prstDash val="solid"/>
           </a:ln>
           <a:effectLst>
-            <a:outerShdw sx="100000" sy="100000" kx="0" ky="0" algn="bl" rotWithShape="0" blurRad="254000" dist="76200" dir="8100000">
+            <a:outerShdw blurRad="254000" dist="76200" dir="8100000" algn="bl" rotWithShape="0">
               <a:srgbClr val="000000">
                 <a:alpha val="80000"/>
               </a:srgbClr>
@@ -7432,7 +7272,7 @@
           <a:noFill/>
           <a:ln/>
           <a:effectLst>
-            <a:outerShdw sx="100000" sy="100000" kx="0" ky="0" algn="bl" rotWithShape="0" blurRad="317500" dist="50800" dir="8100000">
+            <a:outerShdw blurRad="317500" dist="50800" dir="8100000" algn="bl" rotWithShape="0">
               <a:srgbClr val="9B6FF0">
                 <a:alpha val="40000"/>
               </a:srgbClr>
@@ -7443,7 +7283,7 @@
           <a:bodyPr wrap="square" lIns="0" tIns="0" rIns="0" bIns="0" rtlCol="0" anchor="ctr"/>
           <a:lstStyle/>
           <a:p>
-            <a:pPr indent="0" marL="0">
+            <a:pPr marL="0" indent="0">
               <a:buNone/>
             </a:pPr>
             <a:r>
@@ -7507,7 +7347,7 @@
           <a:bodyPr wrap="square" lIns="0" tIns="0" rIns="0" bIns="0" rtlCol="0" anchor="ctr"/>
           <a:lstStyle/>
           <a:p>
-            <a:pPr indent="0" marL="0">
+            <a:pPr marL="0" indent="0">
               <a:buNone/>
             </a:pPr>
             <a:r>
@@ -7546,7 +7386,7 @@
           <a:bodyPr wrap="square" lIns="0" tIns="0" rIns="0" bIns="0" rtlCol="0" anchor="t"/>
           <a:lstStyle/>
           <a:p>
-            <a:pPr indent="0" marL="0">
+            <a:pPr marL="0" indent="0">
               <a:lnSpc>
                 <a:spcPct val="125000"/>
               </a:lnSpc>
@@ -7613,7 +7453,7 @@
           <a:bodyPr wrap="square" lIns="0" tIns="0" rIns="0" bIns="0" rtlCol="0" anchor="ctr"/>
           <a:lstStyle/>
           <a:p>
-            <a:pPr indent="0" marL="0">
+            <a:pPr marL="0" indent="0">
               <a:buNone/>
             </a:pPr>
             <a:r>
@@ -7652,7 +7492,7 @@
           <a:bodyPr wrap="square" lIns="0" tIns="0" rIns="0" bIns="0" rtlCol="0" anchor="t"/>
           <a:lstStyle/>
           <a:p>
-            <a:pPr indent="0" marL="0">
+            <a:pPr marL="0" indent="0">
               <a:lnSpc>
                 <a:spcPct val="125000"/>
               </a:lnSpc>
@@ -7719,7 +7559,7 @@
           <a:bodyPr wrap="square" lIns="0" tIns="0" rIns="0" bIns="0" rtlCol="0" anchor="ctr"/>
           <a:lstStyle/>
           <a:p>
-            <a:pPr indent="0" marL="0">
+            <a:pPr marL="0" indent="0">
               <a:buNone/>
             </a:pPr>
             <a:r>
@@ -7758,7 +7598,7 @@
           <a:bodyPr wrap="square" lIns="0" tIns="0" rIns="0" bIns="0" rtlCol="0" anchor="t"/>
           <a:lstStyle/>
           <a:p>
-            <a:pPr indent="0" marL="0">
+            <a:pPr marL="0" indent="0">
               <a:lnSpc>
                 <a:spcPct val="125000"/>
               </a:lnSpc>
@@ -7825,7 +7665,7 @@
           <a:bodyPr wrap="square" lIns="0" tIns="0" rIns="0" bIns="0" rtlCol="0" anchor="ctr"/>
           <a:lstStyle/>
           <a:p>
-            <a:pPr indent="0" marL="0">
+            <a:pPr marL="0" indent="0">
               <a:buNone/>
             </a:pPr>
             <a:r>
@@ -7864,7 +7704,7 @@
           <a:bodyPr wrap="square" lIns="0" tIns="0" rIns="0" bIns="0" rtlCol="0" anchor="t"/>
           <a:lstStyle/>
           <a:p>
-            <a:pPr indent="0" marL="0">
+            <a:pPr marL="0" indent="0">
               <a:lnSpc>
                 <a:spcPct val="125000"/>
               </a:lnSpc>
@@ -7931,7 +7771,7 @@
           <a:bodyPr wrap="square" lIns="0" tIns="0" rIns="0" bIns="0" rtlCol="0" anchor="ctr"/>
           <a:lstStyle/>
           <a:p>
-            <a:pPr indent="0" marL="0">
+            <a:pPr marL="0" indent="0">
               <a:buNone/>
             </a:pPr>
             <a:r>
@@ -7970,7 +7810,7 @@
           <a:bodyPr wrap="square" lIns="0" tIns="0" rIns="0" bIns="0" rtlCol="0" anchor="t"/>
           <a:lstStyle/>
           <a:p>
-            <a:pPr indent="0" marL="0">
+            <a:pPr marL="0" indent="0">
               <a:lnSpc>
                 <a:spcPct val="125000"/>
               </a:lnSpc>
@@ -8037,7 +7877,7 @@
           <a:bodyPr wrap="square" lIns="0" tIns="0" rIns="0" bIns="0" rtlCol="0" anchor="ctr"/>
           <a:lstStyle/>
           <a:p>
-            <a:pPr indent="0" marL="0">
+            <a:pPr marL="0" indent="0">
               <a:buNone/>
             </a:pPr>
             <a:r>
@@ -8076,7 +7916,7 @@
           <a:bodyPr wrap="square" lIns="0" tIns="0" rIns="0" bIns="0" rtlCol="0" anchor="t"/>
           <a:lstStyle/>
           <a:p>
-            <a:pPr indent="0" marL="0">
+            <a:pPr marL="0" indent="0">
               <a:lnSpc>
                 <a:spcPct val="125000"/>
               </a:lnSpc>
@@ -8150,7 +7990,7 @@
             <a:prstDash val="solid"/>
           </a:ln>
           <a:effectLst>
-            <a:outerShdw sx="100000" sy="100000" kx="0" ky="0" algn="bl" rotWithShape="0" blurRad="254000" dist="76200" dir="8100000">
+            <a:outerShdw blurRad="254000" dist="76200" dir="8100000" algn="bl" rotWithShape="0">
               <a:srgbClr val="000000">
                 <a:alpha val="80000"/>
               </a:srgbClr>
@@ -8229,7 +8069,7 @@
           <a:noFill/>
           <a:ln/>
           <a:effectLst>
-            <a:outerShdw sx="100000" sy="100000" kx="0" ky="0" algn="bl" rotWithShape="0" blurRad="317500" dist="50800" dir="8100000">
+            <a:outerShdw blurRad="317500" dist="50800" dir="8100000" algn="bl" rotWithShape="0">
               <a:srgbClr val="00D2BE">
                 <a:alpha val="40000"/>
               </a:srgbClr>
@@ -8240,7 +8080,7 @@
           <a:bodyPr wrap="square" lIns="0" tIns="0" rIns="0" bIns="0" rtlCol="0" anchor="ctr"/>
           <a:lstStyle/>
           <a:p>
-            <a:pPr algn="ctr" indent="0" marL="0">
+            <a:pPr marL="0" indent="0" algn="ctr">
               <a:buNone/>
             </a:pPr>
             <a:r>
@@ -8279,11 +8119,11 @@
           <a:bodyPr wrap="square" lIns="0" tIns="0" rIns="0" bIns="0" rtlCol="0" anchor="ctr"/>
           <a:lstStyle/>
           <a:p>
-            <a:pPr indent="0" marL="0">
-              <a:buNone/>
-            </a:pPr>
-            <a:r>
-              <a:rPr lang="en-US" sz="750" spc="100" kern="0" dirty="0">
+            <a:pPr marL="0" indent="0">
+              <a:buNone/>
+            </a:pPr>
+            <a:r>
+              <a:rPr lang="en-US" sz="750" kern="0" spc="100" dirty="0">
                 <a:solidFill>
                   <a:srgbClr val="2A5050"/>
                 </a:solidFill>
@@ -8350,7 +8190,7 @@
             <a:prstDash val="solid"/>
           </a:ln>
           <a:effectLst>
-            <a:outerShdw sx="100000" sy="100000" kx="0" ky="0" algn="bl" rotWithShape="0" blurRad="254000" dist="76200" dir="8100000">
+            <a:outerShdw blurRad="254000" dist="76200" dir="8100000" algn="bl" rotWithShape="0">
               <a:srgbClr val="000000">
                 <a:alpha val="80000"/>
               </a:srgbClr>
@@ -8429,7 +8269,7 @@
           <a:noFill/>
           <a:ln/>
           <a:effectLst>
-            <a:outerShdw sx="100000" sy="100000" kx="0" ky="0" algn="bl" rotWithShape="0" blurRad="317500" dist="50800" dir="8100000">
+            <a:outerShdw blurRad="317500" dist="50800" dir="8100000" algn="bl" rotWithShape="0">
               <a:srgbClr val="F0A020">
                 <a:alpha val="40000"/>
               </a:srgbClr>
@@ -8440,7 +8280,7 @@
           <a:bodyPr wrap="square" lIns="0" tIns="0" rIns="0" bIns="0" rtlCol="0" anchor="ctr"/>
           <a:lstStyle/>
           <a:p>
-            <a:pPr algn="ctr" indent="0" marL="0">
+            <a:pPr marL="0" indent="0" algn="ctr">
               <a:buNone/>
             </a:pPr>
             <a:r>
@@ -8479,11 +8319,11 @@
           <a:bodyPr wrap="square" lIns="0" tIns="0" rIns="0" bIns="0" rtlCol="0" anchor="ctr"/>
           <a:lstStyle/>
           <a:p>
-            <a:pPr indent="0" marL="0">
-              <a:buNone/>
-            </a:pPr>
-            <a:r>
-              <a:rPr lang="en-US" sz="750" spc="100" kern="0" dirty="0">
+            <a:pPr marL="0" indent="0">
+              <a:buNone/>
+            </a:pPr>
+            <a:r>
+              <a:rPr lang="en-US" sz="750" kern="0" spc="100" dirty="0">
                 <a:solidFill>
                   <a:srgbClr val="2A5050"/>
                 </a:solidFill>
@@ -8550,7 +8390,7 @@
             <a:prstDash val="solid"/>
           </a:ln>
           <a:effectLst>
-            <a:outerShdw sx="100000" sy="100000" kx="0" ky="0" algn="bl" rotWithShape="0" blurRad="254000" dist="76200" dir="8100000">
+            <a:outerShdw blurRad="254000" dist="76200" dir="8100000" algn="bl" rotWithShape="0">
               <a:srgbClr val="000000">
                 <a:alpha val="80000"/>
               </a:srgbClr>
@@ -8629,7 +8469,7 @@
           <a:noFill/>
           <a:ln/>
           <a:effectLst>
-            <a:outerShdw sx="100000" sy="100000" kx="0" ky="0" algn="bl" rotWithShape="0" blurRad="317500" dist="50800" dir="8100000">
+            <a:outerShdw blurRad="317500" dist="50800" dir="8100000" algn="bl" rotWithShape="0">
               <a:srgbClr val="22D88A">
                 <a:alpha val="40000"/>
               </a:srgbClr>
@@ -8640,7 +8480,7 @@
           <a:bodyPr wrap="square" lIns="0" tIns="0" rIns="0" bIns="0" rtlCol="0" anchor="ctr"/>
           <a:lstStyle/>
           <a:p>
-            <a:pPr algn="ctr" indent="0" marL="0">
+            <a:pPr marL="0" indent="0" algn="ctr">
               <a:buNone/>
             </a:pPr>
             <a:r>
@@ -8679,11 +8519,11 @@
           <a:bodyPr wrap="square" lIns="0" tIns="0" rIns="0" bIns="0" rtlCol="0" anchor="ctr"/>
           <a:lstStyle/>
           <a:p>
-            <a:pPr indent="0" marL="0">
-              <a:buNone/>
-            </a:pPr>
-            <a:r>
-              <a:rPr lang="en-US" sz="750" spc="100" kern="0" dirty="0">
+            <a:pPr marL="0" indent="0">
+              <a:buNone/>
+            </a:pPr>
+            <a:r>
+              <a:rPr lang="en-US" sz="750" kern="0" spc="100" dirty="0">
                 <a:solidFill>
                   <a:srgbClr val="2A5050"/>
                 </a:solidFill>
@@ -8750,7 +8590,7 @@
             <a:prstDash val="solid"/>
           </a:ln>
           <a:effectLst>
-            <a:outerShdw sx="100000" sy="100000" kx="0" ky="0" algn="bl" rotWithShape="0" blurRad="254000" dist="76200" dir="8100000">
+            <a:outerShdw blurRad="254000" dist="76200" dir="8100000" algn="bl" rotWithShape="0">
               <a:srgbClr val="000000">
                 <a:alpha val="80000"/>
               </a:srgbClr>
@@ -8829,7 +8669,7 @@
           <a:noFill/>
           <a:ln/>
           <a:effectLst>
-            <a:outerShdw sx="100000" sy="100000" kx="0" ky="0" algn="bl" rotWithShape="0" blurRad="317500" dist="50800" dir="8100000">
+            <a:outerShdw blurRad="317500" dist="50800" dir="8100000" algn="bl" rotWithShape="0">
               <a:srgbClr val="9B6FF0">
                 <a:alpha val="40000"/>
               </a:srgbClr>
@@ -8840,7 +8680,7 @@
           <a:bodyPr wrap="square" lIns="0" tIns="0" rIns="0" bIns="0" rtlCol="0" anchor="ctr"/>
           <a:lstStyle/>
           <a:p>
-            <a:pPr algn="ctr" indent="0" marL="0">
+            <a:pPr marL="0" indent="0" algn="ctr">
               <a:buNone/>
             </a:pPr>
             <a:r>
@@ -8879,11 +8719,11 @@
           <a:bodyPr wrap="square" lIns="0" tIns="0" rIns="0" bIns="0" rtlCol="0" anchor="ctr"/>
           <a:lstStyle/>
           <a:p>
-            <a:pPr indent="0" marL="0">
-              <a:buNone/>
-            </a:pPr>
-            <a:r>
-              <a:rPr lang="en-US" sz="750" spc="100" kern="0" dirty="0">
+            <a:pPr marL="0" indent="0">
+              <a:buNone/>
+            </a:pPr>
+            <a:r>
+              <a:rPr lang="en-US" sz="750" kern="0" spc="100" dirty="0">
                 <a:solidFill>
                   <a:srgbClr val="2A5050"/>
                 </a:solidFill>
@@ -8950,7 +8790,7 @@
             <a:prstDash val="solid"/>
           </a:ln>
           <a:effectLst>
-            <a:outerShdw sx="100000" sy="100000" kx="0" ky="0" algn="bl" rotWithShape="0" blurRad="254000" dist="76200" dir="8100000">
+            <a:outerShdw blurRad="254000" dist="76200" dir="8100000" algn="bl" rotWithShape="0">
               <a:srgbClr val="000000">
                 <a:alpha val="80000"/>
               </a:srgbClr>
@@ -9029,7 +8869,7 @@
           <a:noFill/>
           <a:ln/>
           <a:effectLst>
-            <a:outerShdw sx="100000" sy="100000" kx="0" ky="0" algn="bl" rotWithShape="0" blurRad="317500" dist="50800" dir="8100000">
+            <a:outerShdw blurRad="317500" dist="50800" dir="8100000" algn="bl" rotWithShape="0">
               <a:srgbClr val="38C8FF">
                 <a:alpha val="40000"/>
               </a:srgbClr>
@@ -9040,7 +8880,7 @@
           <a:bodyPr wrap="square" lIns="0" tIns="0" rIns="0" bIns="0" rtlCol="0" anchor="ctr"/>
           <a:lstStyle/>
           <a:p>
-            <a:pPr algn="ctr" indent="0" marL="0">
+            <a:pPr marL="0" indent="0" algn="ctr">
               <a:buNone/>
             </a:pPr>
             <a:r>
@@ -9079,11 +8919,11 @@
           <a:bodyPr wrap="square" lIns="0" tIns="0" rIns="0" bIns="0" rtlCol="0" anchor="ctr"/>
           <a:lstStyle/>
           <a:p>
-            <a:pPr indent="0" marL="0">
-              <a:buNone/>
-            </a:pPr>
-            <a:r>
-              <a:rPr lang="en-US" sz="750" spc="100" kern="0" dirty="0">
+            <a:pPr marL="0" indent="0">
+              <a:buNone/>
+            </a:pPr>
+            <a:r>
+              <a:rPr lang="en-US" sz="750" kern="0" spc="100" dirty="0">
                 <a:solidFill>
                   <a:srgbClr val="2A5050"/>
                 </a:solidFill>
@@ -9150,7 +8990,7 @@
             <a:prstDash val="solid"/>
           </a:ln>
           <a:effectLst>
-            <a:outerShdw sx="100000" sy="100000" kx="0" ky="0" algn="bl" rotWithShape="0" blurRad="254000" dist="76200" dir="8100000">
+            <a:outerShdw blurRad="254000" dist="76200" dir="8100000" algn="bl" rotWithShape="0">
               <a:srgbClr val="000000">
                 <a:alpha val="80000"/>
               </a:srgbClr>
@@ -9229,7 +9069,7 @@
           <a:noFill/>
           <a:ln/>
           <a:effectLst>
-            <a:outerShdw sx="100000" sy="100000" kx="0" ky="0" algn="bl" rotWithShape="0" blurRad="317500" dist="50800" dir="8100000">
+            <a:outerShdw blurRad="317500" dist="50800" dir="8100000" algn="bl" rotWithShape="0">
               <a:srgbClr val="FF4D8F">
                 <a:alpha val="40000"/>
               </a:srgbClr>
@@ -9240,7 +9080,7 @@
           <a:bodyPr wrap="square" lIns="0" tIns="0" rIns="0" bIns="0" rtlCol="0" anchor="ctr"/>
           <a:lstStyle/>
           <a:p>
-            <a:pPr algn="ctr" indent="0" marL="0">
+            <a:pPr marL="0" indent="0" algn="ctr">
               <a:buNone/>
             </a:pPr>
             <a:r>
@@ -9279,11 +9119,11 @@
           <a:bodyPr wrap="square" lIns="0" tIns="0" rIns="0" bIns="0" rtlCol="0" anchor="ctr"/>
           <a:lstStyle/>
           <a:p>
-            <a:pPr indent="0" marL="0">
-              <a:buNone/>
-            </a:pPr>
-            <a:r>
-              <a:rPr lang="en-US" sz="750" spc="100" kern="0" dirty="0">
+            <a:pPr marL="0" indent="0">
+              <a:buNone/>
+            </a:pPr>
+            <a:r>
+              <a:rPr lang="en-US" sz="750" kern="0" spc="100" dirty="0">
                 <a:solidFill>
                   <a:srgbClr val="2A5050"/>
                 </a:solidFill>
@@ -9313,6 +9153,7 @@
         <a:solidFill>
           <a:srgbClr val="030B16"/>
         </a:solidFill>
+        <a:effectLst/>
       </p:bgPr>
     </p:bg>
     <p:spTree>
@@ -9445,9 +9286,7 @@
             <a:ext cx="594360" cy="594360"/>
           </a:xfrm>
           <a:prstGeom prst="rect">
-            <a:avLst>
-              <a:gd name="adj" fmla="val 12308"/>
-            </a:avLst>
+            <a:avLst/>
           </a:prstGeom>
           <a:solidFill>
             <a:srgbClr val="00D2BE">
@@ -9461,7 +9300,7 @@
             <a:prstDash val="solid"/>
           </a:ln>
           <a:effectLst>
-            <a:outerShdw sx="100000" sy="100000" kx="0" ky="0" algn="bl" rotWithShape="0" blurRad="317500" dist="50800" dir="8100000">
+            <a:outerShdw blurRad="317500" dist="50800" dir="8100000" algn="bl" rotWithShape="0">
               <a:srgbClr val="00D2BE">
                 <a:alpha val="40000"/>
               </a:srgbClr>
@@ -9490,7 +9329,7 @@
           <a:bodyPr wrap="square" lIns="0" tIns="0" rIns="0" bIns="0" rtlCol="0" anchor="ctr"/>
           <a:lstStyle/>
           <a:p>
-            <a:pPr algn="ctr" indent="0" marL="0">
+            <a:pPr marL="0" indent="0" algn="ctr">
               <a:buNone/>
             </a:pPr>
             <a:r>
@@ -9522,7 +9361,7 @@
           <a:noFill/>
           <a:ln/>
           <a:effectLst>
-            <a:outerShdw sx="100000" sy="100000" kx="0" ky="0" algn="bl" rotWithShape="0" blurRad="127000" dist="38100" dir="8100000">
+            <a:outerShdw blurRad="127000" dist="38100" dir="8100000" algn="bl" rotWithShape="0">
               <a:srgbClr val="000000">
                 <a:alpha val="50000"/>
               </a:srgbClr>
@@ -9533,7 +9372,7 @@
           <a:bodyPr wrap="square" lIns="0" tIns="0" rIns="0" bIns="0" rtlCol="0" anchor="ctr"/>
           <a:lstStyle/>
           <a:p>
-            <a:pPr indent="0" marL="0">
+            <a:pPr marL="0" indent="0">
               <a:buNone/>
             </a:pPr>
             <a:r>
@@ -9599,11 +9438,11 @@
           <a:bodyPr wrap="square" lIns="0" tIns="0" rIns="0" bIns="0" rtlCol="0" anchor="ctr"/>
           <a:lstStyle/>
           <a:p>
-            <a:pPr algn="ctr" indent="0" marL="0">
-              <a:buNone/>
-            </a:pPr>
-            <a:r>
-              <a:rPr lang="en-US" sz="700" b="1" spc="150" kern="0" dirty="0">
+            <a:pPr marL="0" indent="0" algn="ctr">
+              <a:buNone/>
+            </a:pPr>
+            <a:r>
+              <a:rPr lang="en-US" sz="700" b="1" kern="0" spc="150" dirty="0">
                 <a:solidFill>
                   <a:srgbClr val="00D2BE"/>
                 </a:solidFill>
@@ -9670,7 +9509,7 @@
             <a:prstDash val="solid"/>
           </a:ln>
           <a:effectLst>
-            <a:outerShdw sx="100000" sy="100000" kx="0" ky="0" algn="bl" rotWithShape="0" blurRad="254000" dist="76200" dir="8100000">
+            <a:outerShdw blurRad="254000" dist="76200" dir="8100000" algn="bl" rotWithShape="0">
               <a:srgbClr val="000000">
                 <a:alpha val="80000"/>
               </a:srgbClr>
@@ -9753,11 +9592,11 @@
           <a:bodyPr wrap="square" lIns="0" tIns="0" rIns="0" bIns="0" rtlCol="0" anchor="ctr"/>
           <a:lstStyle/>
           <a:p>
-            <a:pPr indent="0" marL="0">
-              <a:buNone/>
-            </a:pPr>
-            <a:r>
-              <a:rPr lang="en-US" sz="700" b="1" spc="300" kern="0" dirty="0">
+            <a:pPr marL="0" indent="0">
+              <a:buNone/>
+            </a:pPr>
+            <a:r>
+              <a:rPr lang="en-US" sz="700" b="1" kern="0" spc="300" dirty="0">
                 <a:solidFill>
                   <a:srgbClr val="00D2BE"/>
                 </a:solidFill>
@@ -9817,7 +9656,7 @@
           <a:bodyPr wrap="square" lIns="0" tIns="0" rIns="0" bIns="0" rtlCol="0" anchor="ctr"/>
           <a:lstStyle/>
           <a:p>
-            <a:pPr indent="0" marL="0">
+            <a:pPr marL="0" indent="0">
               <a:buNone/>
             </a:pPr>
             <a:r>
@@ -9856,7 +9695,7 @@
           <a:bodyPr wrap="square" lIns="0" tIns="0" rIns="0" bIns="0" rtlCol="0" anchor="ctr"/>
           <a:lstStyle/>
           <a:p>
-            <a:pPr indent="0" marL="0">
+            <a:pPr marL="0" indent="0">
               <a:buNone/>
             </a:pPr>
             <a:r>
@@ -9895,7 +9734,7 @@
           <a:bodyPr wrap="square" lIns="0" tIns="0" rIns="0" bIns="0" rtlCol="0" anchor="ctr"/>
           <a:lstStyle/>
           <a:p>
-            <a:pPr indent="0" marL="0">
+            <a:pPr marL="0" indent="0">
               <a:buNone/>
             </a:pPr>
             <a:r>
@@ -9934,7 +9773,7 @@
           <a:bodyPr wrap="square" lIns="0" tIns="0" rIns="0" bIns="0" rtlCol="0" anchor="ctr"/>
           <a:lstStyle/>
           <a:p>
-            <a:pPr indent="0" marL="0">
+            <a:pPr marL="0" indent="0">
               <a:buNone/>
             </a:pPr>
             <a:r>
@@ -9973,7 +9812,7 @@
           <a:bodyPr wrap="square" lIns="0" tIns="0" rIns="0" bIns="0" rtlCol="0" anchor="ctr"/>
           <a:lstStyle/>
           <a:p>
-            <a:pPr indent="0" marL="0">
+            <a:pPr marL="0" indent="0">
               <a:buNone/>
             </a:pPr>
             <a:r>
@@ -10012,7 +9851,7 @@
           <a:bodyPr wrap="square" lIns="0" tIns="0" rIns="0" bIns="0" rtlCol="0" anchor="ctr"/>
           <a:lstStyle/>
           <a:p>
-            <a:pPr indent="0" marL="0">
+            <a:pPr marL="0" indent="0">
               <a:buNone/>
             </a:pPr>
             <a:r>
@@ -10051,7 +9890,7 @@
           <a:bodyPr wrap="square" lIns="0" tIns="0" rIns="0" bIns="0" rtlCol="0" anchor="ctr"/>
           <a:lstStyle/>
           <a:p>
-            <a:pPr indent="0" marL="0">
+            <a:pPr marL="0" indent="0">
               <a:buNone/>
             </a:pPr>
             <a:r>
@@ -10090,7 +9929,7 @@
           <a:bodyPr wrap="square" lIns="0" tIns="0" rIns="0" bIns="0" rtlCol="0" anchor="ctr"/>
           <a:lstStyle/>
           <a:p>
-            <a:pPr indent="0" marL="0">
+            <a:pPr marL="0" indent="0">
               <a:buNone/>
             </a:pPr>
             <a:r>
@@ -10129,7 +9968,7 @@
           <a:bodyPr wrap="square" lIns="0" tIns="0" rIns="0" bIns="0" rtlCol="0" anchor="ctr"/>
           <a:lstStyle/>
           <a:p>
-            <a:pPr indent="0" marL="0">
+            <a:pPr marL="0" indent="0">
               <a:buNone/>
             </a:pPr>
             <a:r>
@@ -10168,7 +10007,7 @@
           <a:bodyPr wrap="square" lIns="0" tIns="0" rIns="0" bIns="0" rtlCol="0" anchor="ctr"/>
           <a:lstStyle/>
           <a:p>
-            <a:pPr indent="0" marL="0">
+            <a:pPr marL="0" indent="0">
               <a:buNone/>
             </a:pPr>
             <a:r>
@@ -10207,7 +10046,7 @@
           <a:bodyPr wrap="square" lIns="0" tIns="0" rIns="0" bIns="0" rtlCol="0" anchor="ctr"/>
           <a:lstStyle/>
           <a:p>
-            <a:pPr indent="0" marL="0">
+            <a:pPr marL="0" indent="0">
               <a:buNone/>
             </a:pPr>
             <a:r>
@@ -10246,7 +10085,7 @@
           <a:bodyPr wrap="square" lIns="0" tIns="0" rIns="0" bIns="0" rtlCol="0" anchor="ctr"/>
           <a:lstStyle/>
           <a:p>
-            <a:pPr indent="0" marL="0">
+            <a:pPr marL="0" indent="0">
               <a:buNone/>
             </a:pPr>
             <a:r>
@@ -10285,7 +10124,7 @@
           <a:bodyPr wrap="square" lIns="0" tIns="0" rIns="0" bIns="0" rtlCol="0" anchor="ctr"/>
           <a:lstStyle/>
           <a:p>
-            <a:pPr indent="0" marL="0">
+            <a:pPr marL="0" indent="0">
               <a:buNone/>
             </a:pPr>
             <a:r>
@@ -10324,7 +10163,7 @@
           <a:bodyPr wrap="square" lIns="0" tIns="0" rIns="0" bIns="0" rtlCol="0" anchor="ctr"/>
           <a:lstStyle/>
           <a:p>
-            <a:pPr indent="0" marL="0">
+            <a:pPr marL="0" indent="0">
               <a:buNone/>
             </a:pPr>
             <a:r>
@@ -10363,7 +10202,7 @@
           <a:bodyPr wrap="square" lIns="0" tIns="0" rIns="0" bIns="0" rtlCol="0" anchor="ctr"/>
           <a:lstStyle/>
           <a:p>
-            <a:pPr indent="0" marL="0">
+            <a:pPr marL="0" indent="0">
               <a:buNone/>
             </a:pPr>
             <a:r>
@@ -10402,7 +10241,7 @@
           <a:bodyPr wrap="square" lIns="0" tIns="0" rIns="0" bIns="0" rtlCol="0" anchor="ctr"/>
           <a:lstStyle/>
           <a:p>
-            <a:pPr indent="0" marL="0">
+            <a:pPr marL="0" indent="0">
               <a:buNone/>
             </a:pPr>
             <a:r>
@@ -10441,7 +10280,7 @@
           <a:bodyPr wrap="square" lIns="0" tIns="0" rIns="0" bIns="0" rtlCol="0" anchor="ctr"/>
           <a:lstStyle/>
           <a:p>
-            <a:pPr indent="0" marL="0">
+            <a:pPr marL="0" indent="0">
               <a:buNone/>
             </a:pPr>
             <a:r>
@@ -10480,7 +10319,7 @@
           <a:bodyPr wrap="square" lIns="0" tIns="0" rIns="0" bIns="0" rtlCol="0" anchor="ctr"/>
           <a:lstStyle/>
           <a:p>
-            <a:pPr indent="0" marL="0">
+            <a:pPr marL="0" indent="0">
               <a:buNone/>
             </a:pPr>
             <a:r>
@@ -10519,7 +10358,7 @@
           <a:bodyPr wrap="square" lIns="0" tIns="0" rIns="0" bIns="0" rtlCol="0" anchor="ctr"/>
           <a:lstStyle/>
           <a:p>
-            <a:pPr indent="0" marL="0">
+            <a:pPr marL="0" indent="0">
               <a:buNone/>
             </a:pPr>
             <a:r>
@@ -10558,7 +10397,7 @@
           <a:bodyPr wrap="square" lIns="0" tIns="0" rIns="0" bIns="0" rtlCol="0" anchor="ctr"/>
           <a:lstStyle/>
           <a:p>
-            <a:pPr indent="0" marL="0">
+            <a:pPr marL="0" indent="0">
               <a:buNone/>
             </a:pPr>
             <a:r>
@@ -10597,7 +10436,7 @@
           <a:bodyPr wrap="square" lIns="0" tIns="0" rIns="0" bIns="0" rtlCol="0" anchor="ctr"/>
           <a:lstStyle/>
           <a:p>
-            <a:pPr indent="0" marL="0">
+            <a:pPr marL="0" indent="0">
               <a:buNone/>
             </a:pPr>
             <a:r>
@@ -10636,7 +10475,7 @@
           <a:bodyPr wrap="square" lIns="0" tIns="0" rIns="0" bIns="0" rtlCol="0" anchor="ctr"/>
           <a:lstStyle/>
           <a:p>
-            <a:pPr indent="0" marL="0">
+            <a:pPr marL="0" indent="0">
               <a:buNone/>
             </a:pPr>
             <a:r>
@@ -10675,7 +10514,7 @@
           <a:bodyPr wrap="square" lIns="0" tIns="0" rIns="0" bIns="0" rtlCol="0" anchor="ctr"/>
           <a:lstStyle/>
           <a:p>
-            <a:pPr indent="0" marL="0">
+            <a:pPr marL="0" indent="0">
               <a:buNone/>
             </a:pPr>
             <a:r>
@@ -10714,7 +10553,7 @@
           <a:bodyPr wrap="square" lIns="0" tIns="0" rIns="0" bIns="0" rtlCol="0" anchor="ctr"/>
           <a:lstStyle/>
           <a:p>
-            <a:pPr indent="0" marL="0">
+            <a:pPr marL="0" indent="0">
               <a:buNone/>
             </a:pPr>
             <a:r>
@@ -10753,7 +10592,7 @@
           <a:bodyPr wrap="square" lIns="0" tIns="0" rIns="0" bIns="0" rtlCol="0" anchor="ctr"/>
           <a:lstStyle/>
           <a:p>
-            <a:pPr indent="0" marL="0">
+            <a:pPr marL="0" indent="0">
               <a:buNone/>
             </a:pPr>
             <a:r>
@@ -10792,7 +10631,7 @@
           <a:bodyPr wrap="square" lIns="0" tIns="0" rIns="0" bIns="0" rtlCol="0" anchor="ctr"/>
           <a:lstStyle/>
           <a:p>
-            <a:pPr indent="0" marL="0">
+            <a:pPr marL="0" indent="0">
               <a:buNone/>
             </a:pPr>
             <a:r>
@@ -10831,7 +10670,7 @@
           <a:bodyPr wrap="square" lIns="0" tIns="0" rIns="0" bIns="0" rtlCol="0" anchor="ctr"/>
           <a:lstStyle/>
           <a:p>
-            <a:pPr indent="0" marL="0">
+            <a:pPr marL="0" indent="0">
               <a:buNone/>
             </a:pPr>
             <a:r>
@@ -10870,7 +10709,7 @@
           <a:bodyPr wrap="square" lIns="0" tIns="0" rIns="0" bIns="0" rtlCol="0" anchor="ctr"/>
           <a:lstStyle/>
           <a:p>
-            <a:pPr indent="0" marL="0">
+            <a:pPr marL="0" indent="0">
               <a:buNone/>
             </a:pPr>
             <a:r>
@@ -10909,7 +10748,7 @@
           <a:bodyPr wrap="square" lIns="0" tIns="0" rIns="0" bIns="0" rtlCol="0" anchor="ctr"/>
           <a:lstStyle/>
           <a:p>
-            <a:pPr indent="0" marL="0">
+            <a:pPr marL="0" indent="0">
               <a:buNone/>
             </a:pPr>
             <a:r>
@@ -10948,7 +10787,7 @@
           <a:bodyPr wrap="square" lIns="0" tIns="0" rIns="0" bIns="0" rtlCol="0" anchor="ctr"/>
           <a:lstStyle/>
           <a:p>
-            <a:pPr indent="0" marL="0">
+            <a:pPr marL="0" indent="0">
               <a:buNone/>
             </a:pPr>
             <a:r>
@@ -10987,7 +10826,7 @@
           <a:bodyPr wrap="square" lIns="0" tIns="0" rIns="0" bIns="0" rtlCol="0" anchor="ctr"/>
           <a:lstStyle/>
           <a:p>
-            <a:pPr indent="0" marL="0">
+            <a:pPr marL="0" indent="0">
               <a:buNone/>
             </a:pPr>
             <a:r>
@@ -11058,7 +10897,7 @@
             <a:prstDash val="solid"/>
           </a:ln>
           <a:effectLst>
-            <a:outerShdw sx="100000" sy="100000" kx="0" ky="0" algn="bl" rotWithShape="0" blurRad="254000" dist="76200" dir="8100000">
+            <a:outerShdw blurRad="254000" dist="76200" dir="8100000" algn="bl" rotWithShape="0">
               <a:srgbClr val="000000">
                 <a:alpha val="80000"/>
               </a:srgbClr>
@@ -11166,7 +11005,7 @@
           <a:bodyPr wrap="square" lIns="0" tIns="0" rIns="0" bIns="0" rtlCol="0" anchor="ctr"/>
           <a:lstStyle/>
           <a:p>
-            <a:pPr algn="ctr" indent="0" marL="0">
+            <a:pPr marL="0" indent="0" algn="ctr">
               <a:buNone/>
             </a:pPr>
             <a:r>
@@ -11203,7 +11042,7 @@
           <a:noFill/>
           <a:ln/>
           <a:effectLst>
-            <a:outerShdw sx="100000" sy="100000" kx="0" ky="0" algn="bl" rotWithShape="0" blurRad="317500" dist="50800" dir="8100000">
+            <a:outerShdw blurRad="317500" dist="50800" dir="8100000" algn="bl" rotWithShape="0">
               <a:srgbClr val="00D2BE">
                 <a:alpha val="40000"/>
               </a:srgbClr>
@@ -11214,7 +11053,7 @@
           <a:bodyPr wrap="square" lIns="0" tIns="0" rIns="0" bIns="0" rtlCol="0" anchor="ctr"/>
           <a:lstStyle/>
           <a:p>
-            <a:pPr indent="0" marL="0">
+            <a:pPr marL="0" indent="0">
               <a:buNone/>
             </a:pPr>
             <a:r>
@@ -11253,7 +11092,7 @@
           <a:bodyPr wrap="square" lIns="0" tIns="0" rIns="0" bIns="0" rtlCol="0" anchor="t"/>
           <a:lstStyle/>
           <a:p>
-            <a:pPr indent="0" marL="0">
+            <a:pPr marL="0" indent="0">
               <a:buNone/>
             </a:pPr>
             <a:r>
@@ -11324,7 +11163,7 @@
             <a:prstDash val="solid"/>
           </a:ln>
           <a:effectLst>
-            <a:outerShdw sx="100000" sy="100000" kx="0" ky="0" algn="bl" rotWithShape="0" blurRad="254000" dist="76200" dir="8100000">
+            <a:outerShdw blurRad="254000" dist="76200" dir="8100000" algn="bl" rotWithShape="0">
               <a:srgbClr val="000000">
                 <a:alpha val="80000"/>
               </a:srgbClr>
@@ -11432,7 +11271,7 @@
           <a:bodyPr wrap="square" lIns="0" tIns="0" rIns="0" bIns="0" rtlCol="0" anchor="ctr"/>
           <a:lstStyle/>
           <a:p>
-            <a:pPr algn="ctr" indent="0" marL="0">
+            <a:pPr marL="0" indent="0" algn="ctr">
               <a:buNone/>
             </a:pPr>
             <a:r>
@@ -11469,7 +11308,7 @@
           <a:noFill/>
           <a:ln/>
           <a:effectLst>
-            <a:outerShdw sx="100000" sy="100000" kx="0" ky="0" algn="bl" rotWithShape="0" blurRad="317500" dist="50800" dir="8100000">
+            <a:outerShdw blurRad="317500" dist="50800" dir="8100000" algn="bl" rotWithShape="0">
               <a:srgbClr val="F0A020">
                 <a:alpha val="40000"/>
               </a:srgbClr>
@@ -11480,7 +11319,7 @@
           <a:bodyPr wrap="square" lIns="0" tIns="0" rIns="0" bIns="0" rtlCol="0" anchor="ctr"/>
           <a:lstStyle/>
           <a:p>
-            <a:pPr indent="0" marL="0">
+            <a:pPr marL="0" indent="0">
               <a:buNone/>
             </a:pPr>
             <a:r>
@@ -11519,7 +11358,7 @@
           <a:bodyPr wrap="square" lIns="0" tIns="0" rIns="0" bIns="0" rtlCol="0" anchor="t"/>
           <a:lstStyle/>
           <a:p>
-            <a:pPr indent="0" marL="0">
+            <a:pPr marL="0" indent="0">
               <a:buNone/>
             </a:pPr>
             <a:r>
@@ -11590,7 +11429,7 @@
             <a:prstDash val="solid"/>
           </a:ln>
           <a:effectLst>
-            <a:outerShdw sx="100000" sy="100000" kx="0" ky="0" algn="bl" rotWithShape="0" blurRad="254000" dist="76200" dir="8100000">
+            <a:outerShdw blurRad="254000" dist="76200" dir="8100000" algn="bl" rotWithShape="0">
               <a:srgbClr val="000000">
                 <a:alpha val="80000"/>
               </a:srgbClr>
@@ -11698,7 +11537,7 @@
           <a:bodyPr wrap="square" lIns="0" tIns="0" rIns="0" bIns="0" rtlCol="0" anchor="ctr"/>
           <a:lstStyle/>
           <a:p>
-            <a:pPr algn="ctr" indent="0" marL="0">
+            <a:pPr marL="0" indent="0" algn="ctr">
               <a:buNone/>
             </a:pPr>
             <a:r>
@@ -11735,7 +11574,7 @@
           <a:noFill/>
           <a:ln/>
           <a:effectLst>
-            <a:outerShdw sx="100000" sy="100000" kx="0" ky="0" algn="bl" rotWithShape="0" blurRad="317500" dist="50800" dir="8100000">
+            <a:outerShdw blurRad="317500" dist="50800" dir="8100000" algn="bl" rotWithShape="0">
               <a:srgbClr val="22D88A">
                 <a:alpha val="40000"/>
               </a:srgbClr>
@@ -11746,7 +11585,7 @@
           <a:bodyPr wrap="square" lIns="0" tIns="0" rIns="0" bIns="0" rtlCol="0" anchor="ctr"/>
           <a:lstStyle/>
           <a:p>
-            <a:pPr indent="0" marL="0">
+            <a:pPr marL="0" indent="0">
               <a:buNone/>
             </a:pPr>
             <a:r>
@@ -11785,7 +11624,7 @@
           <a:bodyPr wrap="square" lIns="0" tIns="0" rIns="0" bIns="0" rtlCol="0" anchor="t"/>
           <a:lstStyle/>
           <a:p>
-            <a:pPr indent="0" marL="0">
+            <a:pPr marL="0" indent="0">
               <a:buNone/>
             </a:pPr>
             <a:r>
@@ -11856,7 +11695,7 @@
             <a:prstDash val="solid"/>
           </a:ln>
           <a:effectLst>
-            <a:outerShdw sx="100000" sy="100000" kx="0" ky="0" algn="bl" rotWithShape="0" blurRad="254000" dist="76200" dir="8100000">
+            <a:outerShdw blurRad="254000" dist="76200" dir="8100000" algn="bl" rotWithShape="0">
               <a:srgbClr val="000000">
                 <a:alpha val="80000"/>
               </a:srgbClr>
@@ -11964,7 +11803,7 @@
           <a:bodyPr wrap="square" lIns="0" tIns="0" rIns="0" bIns="0" rtlCol="0" anchor="ctr"/>
           <a:lstStyle/>
           <a:p>
-            <a:pPr algn="ctr" indent="0" marL="0">
+            <a:pPr marL="0" indent="0" algn="ctr">
               <a:buNone/>
             </a:pPr>
             <a:r>
@@ -12001,7 +11840,7 @@
           <a:noFill/>
           <a:ln/>
           <a:effectLst>
-            <a:outerShdw sx="100000" sy="100000" kx="0" ky="0" algn="bl" rotWithShape="0" blurRad="317500" dist="50800" dir="8100000">
+            <a:outerShdw blurRad="317500" dist="50800" dir="8100000" algn="bl" rotWithShape="0">
               <a:srgbClr val="9B6FF0">
                 <a:alpha val="40000"/>
               </a:srgbClr>
@@ -12012,7 +11851,7 @@
           <a:bodyPr wrap="square" lIns="0" tIns="0" rIns="0" bIns="0" rtlCol="0" anchor="ctr"/>
           <a:lstStyle/>
           <a:p>
-            <a:pPr indent="0" marL="0">
+            <a:pPr marL="0" indent="0">
               <a:buNone/>
             </a:pPr>
             <a:r>
@@ -12051,7 +11890,7 @@
           <a:bodyPr wrap="square" lIns="0" tIns="0" rIns="0" bIns="0" rtlCol="0" anchor="t"/>
           <a:lstStyle/>
           <a:p>
-            <a:pPr indent="0" marL="0">
+            <a:pPr marL="0" indent="0">
               <a:buNone/>
             </a:pPr>
             <a:r>
@@ -12122,7 +11961,7 @@
             <a:prstDash val="solid"/>
           </a:ln>
           <a:effectLst>
-            <a:outerShdw sx="100000" sy="100000" kx="0" ky="0" algn="bl" rotWithShape="0" blurRad="254000" dist="76200" dir="8100000">
+            <a:outerShdw blurRad="254000" dist="76200" dir="8100000" algn="bl" rotWithShape="0">
               <a:srgbClr val="000000">
                 <a:alpha val="80000"/>
               </a:srgbClr>
@@ -12230,7 +12069,7 @@
           <a:bodyPr wrap="square" lIns="0" tIns="0" rIns="0" bIns="0" rtlCol="0" anchor="ctr"/>
           <a:lstStyle/>
           <a:p>
-            <a:pPr algn="ctr" indent="0" marL="0">
+            <a:pPr marL="0" indent="0" algn="ctr">
               <a:buNone/>
             </a:pPr>
             <a:r>
@@ -12267,7 +12106,7 @@
           <a:noFill/>
           <a:ln/>
           <a:effectLst>
-            <a:outerShdw sx="100000" sy="100000" kx="0" ky="0" algn="bl" rotWithShape="0" blurRad="317500" dist="50800" dir="8100000">
+            <a:outerShdw blurRad="317500" dist="50800" dir="8100000" algn="bl" rotWithShape="0">
               <a:srgbClr val="38C8FF">
                 <a:alpha val="40000"/>
               </a:srgbClr>
@@ -12278,7 +12117,7 @@
           <a:bodyPr wrap="square" lIns="0" tIns="0" rIns="0" bIns="0" rtlCol="0" anchor="ctr"/>
           <a:lstStyle/>
           <a:p>
-            <a:pPr indent="0" marL="0">
+            <a:pPr marL="0" indent="0">
               <a:buNone/>
             </a:pPr>
             <a:r>
@@ -12317,7 +12156,7 @@
           <a:bodyPr wrap="square" lIns="0" tIns="0" rIns="0" bIns="0" rtlCol="0" anchor="t"/>
           <a:lstStyle/>
           <a:p>
-            <a:pPr indent="0" marL="0">
+            <a:pPr marL="0" indent="0">
               <a:buNone/>
             </a:pPr>
             <a:r>
@@ -12388,7 +12227,7 @@
             <a:prstDash val="solid"/>
           </a:ln>
           <a:effectLst>
-            <a:outerShdw sx="100000" sy="100000" kx="0" ky="0" algn="bl" rotWithShape="0" blurRad="254000" dist="76200" dir="8100000">
+            <a:outerShdw blurRad="254000" dist="76200" dir="8100000" algn="bl" rotWithShape="0">
               <a:srgbClr val="000000">
                 <a:alpha val="80000"/>
               </a:srgbClr>
@@ -12496,7 +12335,7 @@
           <a:bodyPr wrap="square" lIns="0" tIns="0" rIns="0" bIns="0" rtlCol="0" anchor="ctr"/>
           <a:lstStyle/>
           <a:p>
-            <a:pPr algn="ctr" indent="0" marL="0">
+            <a:pPr marL="0" indent="0" algn="ctr">
               <a:buNone/>
             </a:pPr>
             <a:r>
@@ -12533,7 +12372,7 @@
           <a:noFill/>
           <a:ln/>
           <a:effectLst>
-            <a:outerShdw sx="100000" sy="100000" kx="0" ky="0" algn="bl" rotWithShape="0" blurRad="317500" dist="50800" dir="8100000">
+            <a:outerShdw blurRad="317500" dist="50800" dir="8100000" algn="bl" rotWithShape="0">
               <a:srgbClr val="00D2BE">
                 <a:alpha val="40000"/>
               </a:srgbClr>
@@ -12544,7 +12383,7 @@
           <a:bodyPr wrap="square" lIns="0" tIns="0" rIns="0" bIns="0" rtlCol="0" anchor="ctr"/>
           <a:lstStyle/>
           <a:p>
-            <a:pPr indent="0" marL="0">
+            <a:pPr marL="0" indent="0">
               <a:buNone/>
             </a:pPr>
             <a:r>
@@ -12583,7 +12422,7 @@
           <a:bodyPr wrap="square" lIns="0" tIns="0" rIns="0" bIns="0" rtlCol="0" anchor="t"/>
           <a:lstStyle/>
           <a:p>
-            <a:pPr indent="0" marL="0">
+            <a:pPr marL="0" indent="0">
               <a:buNone/>
             </a:pPr>
             <a:r>
@@ -12654,7 +12493,7 @@
             <a:prstDash val="solid"/>
           </a:ln>
           <a:effectLst>
-            <a:outerShdw sx="100000" sy="100000" kx="0" ky="0" algn="bl" rotWithShape="0" blurRad="254000" dist="76200" dir="8100000">
+            <a:outerShdw blurRad="254000" dist="76200" dir="8100000" algn="bl" rotWithShape="0">
               <a:srgbClr val="000000">
                 <a:alpha val="80000"/>
               </a:srgbClr>
@@ -12762,7 +12601,7 @@
           <a:bodyPr wrap="square" lIns="0" tIns="0" rIns="0" bIns="0" rtlCol="0" anchor="ctr"/>
           <a:lstStyle/>
           <a:p>
-            <a:pPr algn="ctr" indent="0" marL="0">
+            <a:pPr marL="0" indent="0" algn="ctr">
               <a:buNone/>
             </a:pPr>
             <a:r>
@@ -12799,7 +12638,7 @@
           <a:noFill/>
           <a:ln/>
           <a:effectLst>
-            <a:outerShdw sx="100000" sy="100000" kx="0" ky="0" algn="bl" rotWithShape="0" blurRad="317500" dist="50800" dir="8100000">
+            <a:outerShdw blurRad="317500" dist="50800" dir="8100000" algn="bl" rotWithShape="0">
               <a:srgbClr val="F0A020">
                 <a:alpha val="40000"/>
               </a:srgbClr>
@@ -12810,7 +12649,7 @@
           <a:bodyPr wrap="square" lIns="0" tIns="0" rIns="0" bIns="0" rtlCol="0" anchor="ctr"/>
           <a:lstStyle/>
           <a:p>
-            <a:pPr indent="0" marL="0">
+            <a:pPr marL="0" indent="0">
               <a:buNone/>
             </a:pPr>
             <a:r>
@@ -12849,7 +12688,7 @@
           <a:bodyPr wrap="square" lIns="0" tIns="0" rIns="0" bIns="0" rtlCol="0" anchor="t"/>
           <a:lstStyle/>
           <a:p>
-            <a:pPr indent="0" marL="0">
+            <a:pPr marL="0" indent="0">
               <a:buNone/>
             </a:pPr>
             <a:r>
@@ -12920,7 +12759,7 @@
             <a:prstDash val="solid"/>
           </a:ln>
           <a:effectLst>
-            <a:outerShdw sx="100000" sy="100000" kx="0" ky="0" algn="bl" rotWithShape="0" blurRad="254000" dist="76200" dir="8100000">
+            <a:outerShdw blurRad="254000" dist="76200" dir="8100000" algn="bl" rotWithShape="0">
               <a:srgbClr val="000000">
                 <a:alpha val="80000"/>
               </a:srgbClr>
@@ -13028,7 +12867,7 @@
           <a:bodyPr wrap="square" lIns="0" tIns="0" rIns="0" bIns="0" rtlCol="0" anchor="ctr"/>
           <a:lstStyle/>
           <a:p>
-            <a:pPr algn="ctr" indent="0" marL="0">
+            <a:pPr marL="0" indent="0" algn="ctr">
               <a:buNone/>
             </a:pPr>
             <a:r>
@@ -13065,7 +12904,7 @@
           <a:noFill/>
           <a:ln/>
           <a:effectLst>
-            <a:outerShdw sx="100000" sy="100000" kx="0" ky="0" algn="bl" rotWithShape="0" blurRad="317500" dist="50800" dir="8100000">
+            <a:outerShdw blurRad="317500" dist="50800" dir="8100000" algn="bl" rotWithShape="0">
               <a:srgbClr val="22D88A">
                 <a:alpha val="40000"/>
               </a:srgbClr>
@@ -13076,7 +12915,7 @@
           <a:bodyPr wrap="square" lIns="0" tIns="0" rIns="0" bIns="0" rtlCol="0" anchor="ctr"/>
           <a:lstStyle/>
           <a:p>
-            <a:pPr indent="0" marL="0">
+            <a:pPr marL="0" indent="0">
               <a:buNone/>
             </a:pPr>
             <a:r>
@@ -13115,7 +12954,7 @@
           <a:bodyPr wrap="square" lIns="0" tIns="0" rIns="0" bIns="0" rtlCol="0" anchor="t"/>
           <a:lstStyle/>
           <a:p>
-            <a:pPr indent="0" marL="0">
+            <a:pPr marL="0" indent="0">
               <a:buNone/>
             </a:pPr>
             <a:r>
@@ -13149,6 +12988,7 @@
         <a:solidFill>
           <a:srgbClr val="030B16"/>
         </a:solidFill>
+        <a:effectLst/>
       </p:bgPr>
     </p:bg>
     <p:spTree>
@@ -13281,9 +13121,7 @@
             <a:ext cx="594360" cy="594360"/>
           </a:xfrm>
           <a:prstGeom prst="rect">
-            <a:avLst>
-              <a:gd name="adj" fmla="val 12308"/>
-            </a:avLst>
+            <a:avLst/>
           </a:prstGeom>
           <a:solidFill>
             <a:srgbClr val="F0A020">
@@ -13297,7 +13135,7 @@
             <a:prstDash val="solid"/>
           </a:ln>
           <a:effectLst>
-            <a:outerShdw sx="100000" sy="100000" kx="0" ky="0" algn="bl" rotWithShape="0" blurRad="317500" dist="50800" dir="8100000">
+            <a:outerShdw blurRad="317500" dist="50800" dir="8100000" algn="bl" rotWithShape="0">
               <a:srgbClr val="F0A020">
                 <a:alpha val="40000"/>
               </a:srgbClr>
@@ -13326,7 +13164,7 @@
           <a:bodyPr wrap="square" lIns="0" tIns="0" rIns="0" bIns="0" rtlCol="0" anchor="ctr"/>
           <a:lstStyle/>
           <a:p>
-            <a:pPr algn="ctr" indent="0" marL="0">
+            <a:pPr marL="0" indent="0" algn="ctr">
               <a:buNone/>
             </a:pPr>
             <a:r>
@@ -13358,7 +13196,7 @@
           <a:noFill/>
           <a:ln/>
           <a:effectLst>
-            <a:outerShdw sx="100000" sy="100000" kx="0" ky="0" algn="bl" rotWithShape="0" blurRad="127000" dist="38100" dir="8100000">
+            <a:outerShdw blurRad="127000" dist="38100" dir="8100000" algn="bl" rotWithShape="0">
               <a:srgbClr val="000000">
                 <a:alpha val="50000"/>
               </a:srgbClr>
@@ -13369,7 +13207,7 @@
           <a:bodyPr wrap="square" lIns="0" tIns="0" rIns="0" bIns="0" rtlCol="0" anchor="ctr"/>
           <a:lstStyle/>
           <a:p>
-            <a:pPr indent="0" marL="0">
+            <a:pPr marL="0" indent="0">
               <a:buNone/>
             </a:pPr>
             <a:r>
@@ -13435,11 +13273,11 @@
           <a:bodyPr wrap="square" lIns="0" tIns="0" rIns="0" bIns="0" rtlCol="0" anchor="ctr"/>
           <a:lstStyle/>
           <a:p>
-            <a:pPr algn="ctr" indent="0" marL="0">
-              <a:buNone/>
-            </a:pPr>
-            <a:r>
-              <a:rPr lang="en-US" sz="700" b="1" spc="150" kern="0" dirty="0">
+            <a:pPr marL="0" indent="0" algn="ctr">
+              <a:buNone/>
+            </a:pPr>
+            <a:r>
+              <a:rPr lang="en-US" sz="700" b="1" kern="0" spc="150" dirty="0">
                 <a:solidFill>
                   <a:srgbClr val="F0A020"/>
                 </a:solidFill>
@@ -13506,7 +13344,7 @@
             <a:prstDash val="solid"/>
           </a:ln>
           <a:effectLst>
-            <a:outerShdw sx="100000" sy="100000" kx="0" ky="0" algn="bl" rotWithShape="0" blurRad="254000" dist="76200" dir="8100000">
+            <a:outerShdw blurRad="254000" dist="76200" dir="8100000" algn="bl" rotWithShape="0">
               <a:srgbClr val="000000">
                 <a:alpha val="80000"/>
               </a:srgbClr>
@@ -13612,7 +13450,7 @@
           <a:noFill/>
           <a:ln/>
           <a:effectLst>
-            <a:outerShdw sx="100000" sy="100000" kx="0" ky="0" algn="bl" rotWithShape="0" blurRad="317500" dist="50800" dir="8100000">
+            <a:outerShdw blurRad="317500" dist="50800" dir="8100000" algn="bl" rotWithShape="0">
               <a:srgbClr val="22D88A">
                 <a:alpha val="40000"/>
               </a:srgbClr>
@@ -13623,7 +13461,7 @@
           <a:bodyPr wrap="square" lIns="0" tIns="0" rIns="0" bIns="0" rtlCol="0" anchor="ctr"/>
           <a:lstStyle/>
           <a:p>
-            <a:pPr indent="0" marL="0">
+            <a:pPr marL="0" indent="0">
               <a:buNone/>
             </a:pPr>
             <a:r>
@@ -13662,7 +13500,7 @@
           <a:bodyPr wrap="square" lIns="0" tIns="0" rIns="0" bIns="0" rtlCol="0" anchor="ctr"/>
           <a:lstStyle/>
           <a:p>
-            <a:pPr indent="0" marL="0">
+            <a:pPr marL="0" indent="0">
               <a:buNone/>
             </a:pPr>
             <a:r>
@@ -13701,7 +13539,7 @@
           <a:bodyPr wrap="square" lIns="0" tIns="0" rIns="0" bIns="0" rtlCol="0" anchor="t"/>
           <a:lstStyle/>
           <a:p>
-            <a:pPr indent="0" marL="0">
+            <a:pPr marL="0" indent="0">
               <a:lnSpc>
                 <a:spcPct val="125000"/>
               </a:lnSpc>
@@ -13743,7 +13581,7 @@
           <a:bodyPr wrap="square" lIns="0" tIns="0" rIns="0" bIns="0" rtlCol="0" anchor="ctr"/>
           <a:lstStyle/>
           <a:p>
-            <a:pPr indent="0" marL="0">
+            <a:pPr marL="0" indent="0">
               <a:buNone/>
             </a:pPr>
             <a:r>
@@ -13782,7 +13620,7 @@
           <a:bodyPr wrap="square" lIns="0" tIns="0" rIns="0" bIns="0" rtlCol="0" anchor="t"/>
           <a:lstStyle/>
           <a:p>
-            <a:pPr indent="0" marL="0">
+            <a:pPr marL="0" indent="0">
               <a:lnSpc>
                 <a:spcPct val="125000"/>
               </a:lnSpc>
@@ -13824,7 +13662,7 @@
           <a:bodyPr wrap="square" lIns="0" tIns="0" rIns="0" bIns="0" rtlCol="0" anchor="ctr"/>
           <a:lstStyle/>
           <a:p>
-            <a:pPr indent="0" marL="0">
+            <a:pPr marL="0" indent="0">
               <a:buNone/>
             </a:pPr>
             <a:r>
@@ -13863,7 +13701,7 @@
           <a:bodyPr wrap="square" lIns="0" tIns="0" rIns="0" bIns="0" rtlCol="0" anchor="t"/>
           <a:lstStyle/>
           <a:p>
-            <a:pPr indent="0" marL="0">
+            <a:pPr marL="0" indent="0">
               <a:lnSpc>
                 <a:spcPct val="125000"/>
               </a:lnSpc>
@@ -13905,7 +13743,7 @@
           <a:bodyPr wrap="square" lIns="0" tIns="0" rIns="0" bIns="0" rtlCol="0" anchor="ctr"/>
           <a:lstStyle/>
           <a:p>
-            <a:pPr indent="0" marL="0">
+            <a:pPr marL="0" indent="0">
               <a:buNone/>
             </a:pPr>
             <a:r>
@@ -13944,7 +13782,7 @@
           <a:bodyPr wrap="square" lIns="0" tIns="0" rIns="0" bIns="0" rtlCol="0" anchor="t"/>
           <a:lstStyle/>
           <a:p>
-            <a:pPr indent="0" marL="0">
+            <a:pPr marL="0" indent="0">
               <a:lnSpc>
                 <a:spcPct val="125000"/>
               </a:lnSpc>
@@ -13986,7 +13824,7 @@
           <a:bodyPr wrap="square" lIns="0" tIns="0" rIns="0" bIns="0" rtlCol="0" anchor="ctr"/>
           <a:lstStyle/>
           <a:p>
-            <a:pPr indent="0" marL="0">
+            <a:pPr marL="0" indent="0">
               <a:buNone/>
             </a:pPr>
             <a:r>
@@ -14025,7 +13863,7 @@
           <a:bodyPr wrap="square" lIns="0" tIns="0" rIns="0" bIns="0" rtlCol="0" anchor="t"/>
           <a:lstStyle/>
           <a:p>
-            <a:pPr indent="0" marL="0">
+            <a:pPr marL="0" indent="0">
               <a:lnSpc>
                 <a:spcPct val="125000"/>
               </a:lnSpc>
@@ -14067,7 +13905,7 @@
           <a:bodyPr wrap="square" lIns="0" tIns="0" rIns="0" bIns="0" rtlCol="0" anchor="ctr"/>
           <a:lstStyle/>
           <a:p>
-            <a:pPr indent="0" marL="0">
+            <a:pPr marL="0" indent="0">
               <a:buNone/>
             </a:pPr>
             <a:r>
@@ -14106,7 +13944,7 @@
           <a:bodyPr wrap="square" lIns="0" tIns="0" rIns="0" bIns="0" rtlCol="0" anchor="t"/>
           <a:lstStyle/>
           <a:p>
-            <a:pPr indent="0" marL="0">
+            <a:pPr marL="0" indent="0">
               <a:lnSpc>
                 <a:spcPct val="125000"/>
               </a:lnSpc>
@@ -14180,7 +14018,7 @@
             <a:prstDash val="solid"/>
           </a:ln>
           <a:effectLst>
-            <a:outerShdw sx="100000" sy="100000" kx="0" ky="0" algn="bl" rotWithShape="0" blurRad="254000" dist="76200" dir="8100000">
+            <a:outerShdw blurRad="254000" dist="76200" dir="8100000" algn="bl" rotWithShape="0">
               <a:srgbClr val="000000">
                 <a:alpha val="80000"/>
               </a:srgbClr>
@@ -14286,7 +14124,7 @@
           <a:noFill/>
           <a:ln/>
           <a:effectLst>
-            <a:outerShdw sx="100000" sy="100000" kx="0" ky="0" algn="bl" rotWithShape="0" blurRad="317500" dist="50800" dir="8100000">
+            <a:outerShdw blurRad="317500" dist="50800" dir="8100000" algn="bl" rotWithShape="0">
               <a:srgbClr val="00D2BE">
                 <a:alpha val="40000"/>
               </a:srgbClr>
@@ -14297,7 +14135,7 @@
           <a:bodyPr wrap="square" lIns="0" tIns="0" rIns="0" bIns="0" rtlCol="0" anchor="ctr"/>
           <a:lstStyle/>
           <a:p>
-            <a:pPr indent="0" marL="0">
+            <a:pPr marL="0" indent="0">
               <a:buNone/>
             </a:pPr>
             <a:r>
@@ -14363,7 +14201,7 @@
           <a:bodyPr wrap="square" lIns="0" tIns="0" rIns="0" bIns="0" rtlCol="0" anchor="ctr"/>
           <a:lstStyle/>
           <a:p>
-            <a:pPr algn="ctr" indent="0" marL="0">
+            <a:pPr marL="0" indent="0" algn="ctr">
               <a:buNone/>
             </a:pPr>
             <a:r>
@@ -14402,7 +14240,7 @@
           <a:bodyPr wrap="square" lIns="0" tIns="0" rIns="0" bIns="0" rtlCol="0" anchor="ctr"/>
           <a:lstStyle/>
           <a:p>
-            <a:pPr indent="0" marL="0">
+            <a:pPr marL="0" indent="0">
               <a:buNone/>
             </a:pPr>
             <a:r>
@@ -14468,7 +14306,7 @@
           <a:bodyPr wrap="square" lIns="0" tIns="0" rIns="0" bIns="0" rtlCol="0" anchor="ctr"/>
           <a:lstStyle/>
           <a:p>
-            <a:pPr algn="ctr" indent="0" marL="0">
+            <a:pPr marL="0" indent="0" algn="ctr">
               <a:buNone/>
             </a:pPr>
             <a:r>
@@ -14507,7 +14345,7 @@
           <a:bodyPr wrap="square" lIns="0" tIns="0" rIns="0" bIns="0" rtlCol="0" anchor="ctr"/>
           <a:lstStyle/>
           <a:p>
-            <a:pPr indent="0" marL="0">
+            <a:pPr marL="0" indent="0">
               <a:buNone/>
             </a:pPr>
             <a:r>
@@ -14573,7 +14411,7 @@
           <a:bodyPr wrap="square" lIns="0" tIns="0" rIns="0" bIns="0" rtlCol="0" anchor="ctr"/>
           <a:lstStyle/>
           <a:p>
-            <a:pPr algn="ctr" indent="0" marL="0">
+            <a:pPr marL="0" indent="0" algn="ctr">
               <a:buNone/>
             </a:pPr>
             <a:r>
@@ -14612,7 +14450,7 @@
           <a:bodyPr wrap="square" lIns="0" tIns="0" rIns="0" bIns="0" rtlCol="0" anchor="ctr"/>
           <a:lstStyle/>
           <a:p>
-            <a:pPr indent="0" marL="0">
+            <a:pPr marL="0" indent="0">
               <a:buNone/>
             </a:pPr>
             <a:r>
@@ -14678,7 +14516,7 @@
           <a:bodyPr wrap="square" lIns="0" tIns="0" rIns="0" bIns="0" rtlCol="0" anchor="ctr"/>
           <a:lstStyle/>
           <a:p>
-            <a:pPr algn="ctr" indent="0" marL="0">
+            <a:pPr marL="0" indent="0" algn="ctr">
               <a:buNone/>
             </a:pPr>
             <a:r>
@@ -14717,7 +14555,7 @@
           <a:bodyPr wrap="square" lIns="0" tIns="0" rIns="0" bIns="0" rtlCol="0" anchor="ctr"/>
           <a:lstStyle/>
           <a:p>
-            <a:pPr indent="0" marL="0">
+            <a:pPr marL="0" indent="0">
               <a:buNone/>
             </a:pPr>
             <a:r>
@@ -14788,7 +14626,7 @@
             <a:prstDash val="solid"/>
           </a:ln>
           <a:effectLst>
-            <a:outerShdw sx="100000" sy="100000" kx="0" ky="0" algn="bl" rotWithShape="0" blurRad="254000" dist="76200" dir="8100000">
+            <a:outerShdw blurRad="254000" dist="76200" dir="8100000" algn="bl" rotWithShape="0">
               <a:srgbClr val="000000">
                 <a:alpha val="80000"/>
               </a:srgbClr>
@@ -14894,7 +14732,7 @@
           <a:noFill/>
           <a:ln/>
           <a:effectLst>
-            <a:outerShdw sx="100000" sy="100000" kx="0" ky="0" algn="bl" rotWithShape="0" blurRad="317500" dist="50800" dir="8100000">
+            <a:outerShdw blurRad="317500" dist="50800" dir="8100000" algn="bl" rotWithShape="0">
               <a:srgbClr val="9B6FF0">
                 <a:alpha val="40000"/>
               </a:srgbClr>
@@ -14905,7 +14743,7 @@
           <a:bodyPr wrap="square" lIns="0" tIns="0" rIns="0" bIns="0" rtlCol="0" anchor="ctr"/>
           <a:lstStyle/>
           <a:p>
-            <a:pPr indent="0" marL="0">
+            <a:pPr marL="0" indent="0">
               <a:buNone/>
             </a:pPr>
             <a:r>
@@ -14944,7 +14782,7 @@
           <a:bodyPr wrap="square" lIns="0" tIns="0" rIns="0" bIns="0" rtlCol="0" anchor="ctr"/>
           <a:lstStyle/>
           <a:p>
-            <a:pPr indent="0" marL="0">
+            <a:pPr marL="0" indent="0">
               <a:buNone/>
             </a:pPr>
             <a:r>
@@ -14983,7 +14821,7 @@
           <a:bodyPr wrap="square" lIns="0" tIns="0" rIns="0" bIns="0" rtlCol="0" anchor="ctr"/>
           <a:lstStyle/>
           <a:p>
-            <a:pPr indent="0" marL="0">
+            <a:pPr marL="0" indent="0">
               <a:buNone/>
             </a:pPr>
             <a:r>
@@ -15022,7 +14860,7 @@
           <a:bodyPr wrap="square" lIns="0" tIns="0" rIns="0" bIns="0" rtlCol="0" anchor="ctr"/>
           <a:lstStyle/>
           <a:p>
-            <a:pPr indent="0" marL="0">
+            <a:pPr marL="0" indent="0">
               <a:buNone/>
             </a:pPr>
             <a:r>
@@ -15061,7 +14899,7 @@
           <a:bodyPr wrap="square" lIns="0" tIns="0" rIns="0" bIns="0" rtlCol="0" anchor="ctr"/>
           <a:lstStyle/>
           <a:p>
-            <a:pPr indent="0" marL="0">
+            <a:pPr marL="0" indent="0">
               <a:buNone/>
             </a:pPr>
             <a:r>
@@ -15100,7 +14938,7 @@
           <a:bodyPr wrap="square" lIns="0" tIns="0" rIns="0" bIns="0" rtlCol="0" anchor="ctr"/>
           <a:lstStyle/>
           <a:p>
-            <a:pPr indent="0" marL="0">
+            <a:pPr marL="0" indent="0">
               <a:buNone/>
             </a:pPr>
             <a:r>
@@ -15139,7 +14977,7 @@
           <a:bodyPr wrap="square" lIns="0" tIns="0" rIns="0" bIns="0" rtlCol="0" anchor="ctr"/>
           <a:lstStyle/>
           <a:p>
-            <a:pPr indent="0" marL="0">
+            <a:pPr marL="0" indent="0">
               <a:buNone/>
             </a:pPr>
             <a:r>
@@ -15178,7 +15016,7 @@
           <a:bodyPr wrap="square" lIns="0" tIns="0" rIns="0" bIns="0" rtlCol="0" anchor="ctr"/>
           <a:lstStyle/>
           <a:p>
-            <a:pPr indent="0" marL="0">
+            <a:pPr marL="0" indent="0">
               <a:buNone/>
             </a:pPr>
             <a:r>
@@ -15217,7 +15055,7 @@
           <a:bodyPr wrap="square" lIns="0" tIns="0" rIns="0" bIns="0" rtlCol="0" anchor="ctr"/>
           <a:lstStyle/>
           <a:p>
-            <a:pPr indent="0" marL="0">
+            <a:pPr marL="0" indent="0">
               <a:buNone/>
             </a:pPr>
             <a:r>
@@ -15256,7 +15094,7 @@
           <a:bodyPr wrap="square" lIns="0" tIns="0" rIns="0" bIns="0" rtlCol="0" anchor="ctr"/>
           <a:lstStyle/>
           <a:p>
-            <a:pPr indent="0" marL="0">
+            <a:pPr marL="0" indent="0">
               <a:buNone/>
             </a:pPr>
             <a:r>
@@ -15295,7 +15133,7 @@
           <a:bodyPr wrap="square" lIns="0" tIns="0" rIns="0" bIns="0" rtlCol="0" anchor="ctr"/>
           <a:lstStyle/>
           <a:p>
-            <a:pPr indent="0" marL="0">
+            <a:pPr marL="0" indent="0">
               <a:buNone/>
             </a:pPr>
             <a:r>
@@ -15334,7 +15172,7 @@
           <a:bodyPr wrap="square" lIns="0" tIns="0" rIns="0" bIns="0" rtlCol="0" anchor="ctr"/>
           <a:lstStyle/>
           <a:p>
-            <a:pPr indent="0" marL="0">
+            <a:pPr marL="0" indent="0">
               <a:buNone/>
             </a:pPr>
             <a:r>
@@ -15373,7 +15211,7 @@
           <a:bodyPr wrap="square" lIns="0" tIns="0" rIns="0" bIns="0" rtlCol="0" anchor="ctr"/>
           <a:lstStyle/>
           <a:p>
-            <a:pPr indent="0" marL="0">
+            <a:pPr marL="0" indent="0">
               <a:buNone/>
             </a:pPr>
             <a:r>
@@ -15412,7 +15250,7 @@
           <a:bodyPr wrap="square" lIns="0" tIns="0" rIns="0" bIns="0" rtlCol="0" anchor="ctr"/>
           <a:lstStyle/>
           <a:p>
-            <a:pPr indent="0" marL="0">
+            <a:pPr marL="0" indent="0">
               <a:buNone/>
             </a:pPr>
             <a:r>
@@ -15451,7 +15289,7 @@
           <a:bodyPr wrap="square" lIns="0" tIns="0" rIns="0" bIns="0" rtlCol="0" anchor="ctr"/>
           <a:lstStyle/>
           <a:p>
-            <a:pPr indent="0" marL="0">
+            <a:pPr marL="0" indent="0">
               <a:buNone/>
             </a:pPr>
             <a:r>
@@ -15490,7 +15328,7 @@
           <a:bodyPr wrap="square" lIns="0" tIns="0" rIns="0" bIns="0" rtlCol="0" anchor="ctr"/>
           <a:lstStyle/>
           <a:p>
-            <a:pPr indent="0" marL="0">
+            <a:pPr marL="0" indent="0">
               <a:buNone/>
             </a:pPr>
             <a:r>
@@ -15529,7 +15367,7 @@
           <a:bodyPr wrap="square" lIns="0" tIns="0" rIns="0" bIns="0" rtlCol="0" anchor="ctr"/>
           <a:lstStyle/>
           <a:p>
-            <a:pPr indent="0" marL="0">
+            <a:pPr marL="0" indent="0">
               <a:buNone/>
             </a:pPr>
             <a:r>
@@ -15568,7 +15406,7 @@
           <a:bodyPr wrap="square" lIns="0" tIns="0" rIns="0" bIns="0" rtlCol="0" anchor="ctr"/>
           <a:lstStyle/>
           <a:p>
-            <a:pPr indent="0" marL="0">
+            <a:pPr marL="0" indent="0">
               <a:buNone/>
             </a:pPr>
             <a:r>
@@ -15607,7 +15445,7 @@
           <a:bodyPr wrap="square" lIns="0" tIns="0" rIns="0" bIns="0" rtlCol="0" anchor="ctr"/>
           <a:lstStyle/>
           <a:p>
-            <a:pPr indent="0" marL="0">
+            <a:pPr marL="0" indent="0">
               <a:buNone/>
             </a:pPr>
             <a:r>
@@ -15646,7 +15484,7 @@
           <a:bodyPr wrap="square" lIns="0" tIns="0" rIns="0" bIns="0" rtlCol="0" anchor="ctr"/>
           <a:lstStyle/>
           <a:p>
-            <a:pPr indent="0" marL="0">
+            <a:pPr marL="0" indent="0">
               <a:buNone/>
             </a:pPr>
             <a:r>
@@ -15685,7 +15523,7 @@
           <a:bodyPr wrap="square" lIns="0" tIns="0" rIns="0" bIns="0" rtlCol="0" anchor="ctr"/>
           <a:lstStyle/>
           <a:p>
-            <a:pPr indent="0" marL="0">
+            <a:pPr marL="0" indent="0">
               <a:buNone/>
             </a:pPr>
             <a:r>
@@ -15719,6 +15557,7 @@
         <a:solidFill>
           <a:srgbClr val="000408"/>
         </a:solidFill>
+        <a:effectLst/>
       </p:bgPr>
     </p:bg>
     <p:spTree>
@@ -17014,7 +16853,7 @@
           <a:bodyPr wrap="square" lIns="0" tIns="0" rIns="0" bIns="0" rtlCol="0" anchor="ctr"/>
           <a:lstStyle/>
           <a:p>
-            <a:pPr algn="ctr" indent="0" marL="0">
+            <a:pPr marL="0" indent="0" algn="ctr">
               <a:buNone/>
             </a:pPr>
             <a:r>
@@ -17060,7 +16899,7 @@
             <a:prstDash val="solid"/>
           </a:ln>
           <a:effectLst>
-            <a:outerShdw sx="100000" sy="100000" kx="0" ky="0" algn="bl" rotWithShape="0" blurRad="317500" dist="50800" dir="8100000">
+            <a:outerShdw blurRad="317500" dist="50800" dir="8100000" algn="bl" rotWithShape="0">
               <a:srgbClr val="00D2BE">
                 <a:alpha val="40000"/>
               </a:srgbClr>
@@ -17085,7 +16924,7 @@
           <a:noFill/>
           <a:ln/>
           <a:effectLst>
-            <a:outerShdw sx="100000" sy="100000" kx="0" ky="0" algn="bl" rotWithShape="0" blurRad="317500" dist="50800" dir="8100000">
+            <a:outerShdw blurRad="317500" dist="50800" dir="8100000" algn="bl" rotWithShape="0">
               <a:srgbClr val="00D2BE">
                 <a:alpha val="40000"/>
               </a:srgbClr>
@@ -17096,7 +16935,7 @@
           <a:bodyPr wrap="square" lIns="0" tIns="0" rIns="0" bIns="0" rtlCol="0" anchor="ctr"/>
           <a:lstStyle/>
           <a:p>
-            <a:pPr algn="ctr" indent="0" marL="0">
+            <a:pPr marL="0" indent="0" algn="ctr">
               <a:buNone/>
             </a:pPr>
             <a:r>
@@ -17128,7 +16967,7 @@
           <a:noFill/>
           <a:ln/>
           <a:effectLst>
-            <a:outerShdw sx="100000" sy="100000" kx="0" ky="0" algn="bl" rotWithShape="0" blurRad="127000" dist="38100" dir="8100000">
+            <a:outerShdw blurRad="127000" dist="38100" dir="8100000" algn="bl" rotWithShape="0">
               <a:srgbClr val="000000">
                 <a:alpha val="50000"/>
               </a:srgbClr>
@@ -17139,7 +16978,7 @@
           <a:bodyPr wrap="square" lIns="0" tIns="0" rIns="0" bIns="0" rtlCol="0" anchor="ctr"/>
           <a:lstStyle/>
           <a:p>
-            <a:pPr algn="ctr" indent="0" marL="0">
+            <a:pPr marL="0" indent="0" algn="ctr">
               <a:buNone/>
             </a:pPr>
             <a:r>
@@ -17226,7 +17065,7 @@
           <a:noFill/>
           <a:ln/>
           <a:effectLst>
-            <a:outerShdw sx="100000" sy="100000" kx="0" ky="0" algn="bl" rotWithShape="0" blurRad="317500" dist="50800" dir="8100000">
+            <a:outerShdw blurRad="317500" dist="50800" dir="8100000" algn="bl" rotWithShape="0">
               <a:srgbClr val="00D2BE">
                 <a:alpha val="40000"/>
               </a:srgbClr>
@@ -17237,11 +17076,11 @@
           <a:bodyPr wrap="square" lIns="0" tIns="0" rIns="0" bIns="0" rtlCol="0" anchor="ctr"/>
           <a:lstStyle/>
           <a:p>
-            <a:pPr algn="ctr" indent="0" marL="0">
-              <a:buNone/>
-            </a:pPr>
-            <a:r>
-              <a:rPr lang="en-US" sz="1300" spc="300" kern="0" dirty="0">
+            <a:pPr marL="0" indent="0" algn="ctr">
+              <a:buNone/>
+            </a:pPr>
+            <a:r>
+              <a:rPr lang="en-US" sz="1300" kern="0" spc="300" dirty="0">
                 <a:solidFill>
                   <a:srgbClr val="00D2BE"/>
                 </a:solidFill>
@@ -17276,7 +17115,7 @@
           <a:bodyPr wrap="square" lIns="0" tIns="0" rIns="0" bIns="0" rtlCol="0" anchor="ctr"/>
           <a:lstStyle/>
           <a:p>
-            <a:pPr algn="ctr" indent="0" marL="0">
+            <a:pPr marL="0" indent="0" algn="ctr">
               <a:buNone/>
             </a:pPr>
             <a:r>
@@ -17347,7 +17186,7 @@
             <a:prstDash val="solid"/>
           </a:ln>
           <a:effectLst>
-            <a:outerShdw sx="100000" sy="100000" kx="0" ky="0" algn="bl" rotWithShape="0" blurRad="254000" dist="76200" dir="8100000">
+            <a:outerShdw blurRad="254000" dist="76200" dir="8100000" algn="bl" rotWithShape="0">
               <a:srgbClr val="000000">
                 <a:alpha val="80000"/>
               </a:srgbClr>
@@ -17426,7 +17265,7 @@
           <a:noFill/>
           <a:ln/>
           <a:effectLst>
-            <a:outerShdw sx="100000" sy="100000" kx="0" ky="0" algn="bl" rotWithShape="0" blurRad="317500" dist="50800" dir="8100000">
+            <a:outerShdw blurRad="317500" dist="50800" dir="8100000" algn="bl" rotWithShape="0">
               <a:srgbClr val="00D2BE">
                 <a:alpha val="40000"/>
               </a:srgbClr>
@@ -17437,7 +17276,7 @@
           <a:bodyPr wrap="square" lIns="0" tIns="0" rIns="0" bIns="0" rtlCol="0" anchor="ctr"/>
           <a:lstStyle/>
           <a:p>
-            <a:pPr algn="ctr" indent="0" marL="0">
+            <a:pPr marL="0" indent="0" algn="ctr">
               <a:buNone/>
             </a:pPr>
             <a:r>
@@ -17476,11 +17315,11 @@
           <a:bodyPr wrap="square" lIns="0" tIns="0" rIns="0" bIns="0" rtlCol="0" anchor="ctr"/>
           <a:lstStyle/>
           <a:p>
-            <a:pPr algn="ctr" indent="0" marL="0">
-              <a:buNone/>
-            </a:pPr>
-            <a:r>
-              <a:rPr lang="en-US" sz="650" spc="120" kern="0" dirty="0">
+            <a:pPr marL="0" indent="0" algn="ctr">
+              <a:buNone/>
+            </a:pPr>
+            <a:r>
+              <a:rPr lang="en-US" sz="650" kern="0" spc="120" dirty="0">
                 <a:solidFill>
                   <a:srgbClr val="2A5050"/>
                 </a:solidFill>
@@ -17547,7 +17386,7 @@
             <a:prstDash val="solid"/>
           </a:ln>
           <a:effectLst>
-            <a:outerShdw sx="100000" sy="100000" kx="0" ky="0" algn="bl" rotWithShape="0" blurRad="254000" dist="76200" dir="8100000">
+            <a:outerShdw blurRad="254000" dist="76200" dir="8100000" algn="bl" rotWithShape="0">
               <a:srgbClr val="000000">
                 <a:alpha val="80000"/>
               </a:srgbClr>
@@ -17626,7 +17465,7 @@
           <a:noFill/>
           <a:ln/>
           <a:effectLst>
-            <a:outerShdw sx="100000" sy="100000" kx="0" ky="0" algn="bl" rotWithShape="0" blurRad="317500" dist="50800" dir="8100000">
+            <a:outerShdw blurRad="317500" dist="50800" dir="8100000" algn="bl" rotWithShape="0">
               <a:srgbClr val="F0A020">
                 <a:alpha val="40000"/>
               </a:srgbClr>
@@ -17637,7 +17476,7 @@
           <a:bodyPr wrap="square" lIns="0" tIns="0" rIns="0" bIns="0" rtlCol="0" anchor="ctr"/>
           <a:lstStyle/>
           <a:p>
-            <a:pPr algn="ctr" indent="0" marL="0">
+            <a:pPr marL="0" indent="0" algn="ctr">
               <a:buNone/>
             </a:pPr>
             <a:r>
@@ -17676,11 +17515,11 @@
           <a:bodyPr wrap="square" lIns="0" tIns="0" rIns="0" bIns="0" rtlCol="0" anchor="ctr"/>
           <a:lstStyle/>
           <a:p>
-            <a:pPr algn="ctr" indent="0" marL="0">
-              <a:buNone/>
-            </a:pPr>
-            <a:r>
-              <a:rPr lang="en-US" sz="650" spc="120" kern="0" dirty="0">
+            <a:pPr marL="0" indent="0" algn="ctr">
+              <a:buNone/>
+            </a:pPr>
+            <a:r>
+              <a:rPr lang="en-US" sz="650" kern="0" spc="120" dirty="0">
                 <a:solidFill>
                   <a:srgbClr val="2A5050"/>
                 </a:solidFill>
@@ -17747,7 +17586,7 @@
             <a:prstDash val="solid"/>
           </a:ln>
           <a:effectLst>
-            <a:outerShdw sx="100000" sy="100000" kx="0" ky="0" algn="bl" rotWithShape="0" blurRad="254000" dist="76200" dir="8100000">
+            <a:outerShdw blurRad="254000" dist="76200" dir="8100000" algn="bl" rotWithShape="0">
               <a:srgbClr val="000000">
                 <a:alpha val="80000"/>
               </a:srgbClr>
@@ -17826,7 +17665,7 @@
           <a:noFill/>
           <a:ln/>
           <a:effectLst>
-            <a:outerShdw sx="100000" sy="100000" kx="0" ky="0" algn="bl" rotWithShape="0" blurRad="317500" dist="50800" dir="8100000">
+            <a:outerShdw blurRad="317500" dist="50800" dir="8100000" algn="bl" rotWithShape="0">
               <a:srgbClr val="22D88A">
                 <a:alpha val="40000"/>
               </a:srgbClr>
@@ -17837,7 +17676,7 @@
           <a:bodyPr wrap="square" lIns="0" tIns="0" rIns="0" bIns="0" rtlCol="0" anchor="ctr"/>
           <a:lstStyle/>
           <a:p>
-            <a:pPr algn="ctr" indent="0" marL="0">
+            <a:pPr marL="0" indent="0" algn="ctr">
               <a:buNone/>
             </a:pPr>
             <a:r>
@@ -17876,11 +17715,11 @@
           <a:bodyPr wrap="square" lIns="0" tIns="0" rIns="0" bIns="0" rtlCol="0" anchor="ctr"/>
           <a:lstStyle/>
           <a:p>
-            <a:pPr algn="ctr" indent="0" marL="0">
-              <a:buNone/>
-            </a:pPr>
-            <a:r>
-              <a:rPr lang="en-US" sz="650" spc="120" kern="0" dirty="0">
+            <a:pPr marL="0" indent="0" algn="ctr">
+              <a:buNone/>
+            </a:pPr>
+            <a:r>
+              <a:rPr lang="en-US" sz="650" kern="0" spc="120" dirty="0">
                 <a:solidFill>
                   <a:srgbClr val="2A5050"/>
                 </a:solidFill>
@@ -17947,7 +17786,7 @@
             <a:prstDash val="solid"/>
           </a:ln>
           <a:effectLst>
-            <a:outerShdw sx="100000" sy="100000" kx="0" ky="0" algn="bl" rotWithShape="0" blurRad="254000" dist="76200" dir="8100000">
+            <a:outerShdw blurRad="254000" dist="76200" dir="8100000" algn="bl" rotWithShape="0">
               <a:srgbClr val="000000">
                 <a:alpha val="80000"/>
               </a:srgbClr>
@@ -18026,7 +17865,7 @@
           <a:noFill/>
           <a:ln/>
           <a:effectLst>
-            <a:outerShdw sx="100000" sy="100000" kx="0" ky="0" algn="bl" rotWithShape="0" blurRad="317500" dist="50800" dir="8100000">
+            <a:outerShdw blurRad="317500" dist="50800" dir="8100000" algn="bl" rotWithShape="0">
               <a:srgbClr val="9B6FF0">
                 <a:alpha val="40000"/>
               </a:srgbClr>
@@ -18037,7 +17876,7 @@
           <a:bodyPr wrap="square" lIns="0" tIns="0" rIns="0" bIns="0" rtlCol="0" anchor="ctr"/>
           <a:lstStyle/>
           <a:p>
-            <a:pPr algn="ctr" indent="0" marL="0">
+            <a:pPr marL="0" indent="0" algn="ctr">
               <a:buNone/>
             </a:pPr>
             <a:r>
@@ -18076,11 +17915,11 @@
           <a:bodyPr wrap="square" lIns="0" tIns="0" rIns="0" bIns="0" rtlCol="0" anchor="ctr"/>
           <a:lstStyle/>
           <a:p>
-            <a:pPr algn="ctr" indent="0" marL="0">
-              <a:buNone/>
-            </a:pPr>
-            <a:r>
-              <a:rPr lang="en-US" sz="650" spc="120" kern="0" dirty="0">
+            <a:pPr marL="0" indent="0" algn="ctr">
+              <a:buNone/>
+            </a:pPr>
+            <a:r>
+              <a:rPr lang="en-US" sz="650" kern="0" spc="120" dirty="0">
                 <a:solidFill>
                   <a:srgbClr val="2A5050"/>
                 </a:solidFill>
@@ -18147,7 +17986,7 @@
             <a:prstDash val="solid"/>
           </a:ln>
           <a:effectLst>
-            <a:outerShdw sx="100000" sy="100000" kx="0" ky="0" algn="bl" rotWithShape="0" blurRad="254000" dist="76200" dir="8100000">
+            <a:outerShdw blurRad="254000" dist="76200" dir="8100000" algn="bl" rotWithShape="0">
               <a:srgbClr val="000000">
                 <a:alpha val="80000"/>
               </a:srgbClr>
@@ -18226,7 +18065,7 @@
           <a:noFill/>
           <a:ln/>
           <a:effectLst>
-            <a:outerShdw sx="100000" sy="100000" kx="0" ky="0" algn="bl" rotWithShape="0" blurRad="317500" dist="50800" dir="8100000">
+            <a:outerShdw blurRad="317500" dist="50800" dir="8100000" algn="bl" rotWithShape="0">
               <a:srgbClr val="38C8FF">
                 <a:alpha val="40000"/>
               </a:srgbClr>
@@ -18237,7 +18076,7 @@
           <a:bodyPr wrap="square" lIns="0" tIns="0" rIns="0" bIns="0" rtlCol="0" anchor="ctr"/>
           <a:lstStyle/>
           <a:p>
-            <a:pPr algn="ctr" indent="0" marL="0">
+            <a:pPr marL="0" indent="0" algn="ctr">
               <a:buNone/>
             </a:pPr>
             <a:r>
@@ -18276,11 +18115,11 @@
           <a:bodyPr wrap="square" lIns="0" tIns="0" rIns="0" bIns="0" rtlCol="0" anchor="ctr"/>
           <a:lstStyle/>
           <a:p>
-            <a:pPr algn="ctr" indent="0" marL="0">
-              <a:buNone/>
-            </a:pPr>
-            <a:r>
-              <a:rPr lang="en-US" sz="650" spc="120" kern="0" dirty="0">
+            <a:pPr marL="0" indent="0" algn="ctr">
+              <a:buNone/>
+            </a:pPr>
+            <a:r>
+              <a:rPr lang="en-US" sz="650" kern="0" spc="120" dirty="0">
                 <a:solidFill>
                   <a:srgbClr val="2A5050"/>
                 </a:solidFill>
@@ -18347,7 +18186,7 @@
             <a:prstDash val="solid"/>
           </a:ln>
           <a:effectLst>
-            <a:outerShdw sx="100000" sy="100000" kx="0" ky="0" algn="bl" rotWithShape="0" blurRad="254000" dist="76200" dir="8100000">
+            <a:outerShdw blurRad="254000" dist="76200" dir="8100000" algn="bl" rotWithShape="0">
               <a:srgbClr val="000000">
                 <a:alpha val="80000"/>
               </a:srgbClr>
@@ -18426,7 +18265,7 @@
           <a:noFill/>
           <a:ln/>
           <a:effectLst>
-            <a:outerShdw sx="100000" sy="100000" kx="0" ky="0" algn="bl" rotWithShape="0" blurRad="317500" dist="50800" dir="8100000">
+            <a:outerShdw blurRad="317500" dist="50800" dir="8100000" algn="bl" rotWithShape="0">
               <a:srgbClr val="FF4D8F">
                 <a:alpha val="40000"/>
               </a:srgbClr>
@@ -18437,7 +18276,7 @@
           <a:bodyPr wrap="square" lIns="0" tIns="0" rIns="0" bIns="0" rtlCol="0" anchor="ctr"/>
           <a:lstStyle/>
           <a:p>
-            <a:pPr algn="ctr" indent="0" marL="0">
+            <a:pPr marL="0" indent="0" algn="ctr">
               <a:buNone/>
             </a:pPr>
             <a:r>
@@ -18476,11 +18315,11 @@
           <a:bodyPr wrap="square" lIns="0" tIns="0" rIns="0" bIns="0" rtlCol="0" anchor="ctr"/>
           <a:lstStyle/>
           <a:p>
-            <a:pPr algn="ctr" indent="0" marL="0">
-              <a:buNone/>
-            </a:pPr>
-            <a:r>
-              <a:rPr lang="en-US" sz="650" spc="120" kern="0" dirty="0">
+            <a:pPr marL="0" indent="0" algn="ctr">
+              <a:buNone/>
+            </a:pPr>
+            <a:r>
+              <a:rPr lang="en-US" sz="650" kern="0" spc="120" dirty="0">
                 <a:solidFill>
                   <a:srgbClr val="2A5050"/>
                 </a:solidFill>
@@ -18547,7 +18386,7 @@
             <a:prstDash val="solid"/>
           </a:ln>
           <a:effectLst>
-            <a:outerShdw sx="100000" sy="100000" kx="0" ky="0" algn="bl" rotWithShape="0" blurRad="254000" dist="76200" dir="8100000">
+            <a:outerShdw blurRad="254000" dist="76200" dir="8100000" algn="bl" rotWithShape="0">
               <a:srgbClr val="000000">
                 <a:alpha val="80000"/>
               </a:srgbClr>
@@ -18626,7 +18465,7 @@
           <a:noFill/>
           <a:ln/>
           <a:effectLst>
-            <a:outerShdw sx="100000" sy="100000" kx="0" ky="0" algn="bl" rotWithShape="0" blurRad="317500" dist="50800" dir="8100000">
+            <a:outerShdw blurRad="317500" dist="50800" dir="8100000" algn="bl" rotWithShape="0">
               <a:srgbClr val="00F5E0">
                 <a:alpha val="40000"/>
               </a:srgbClr>
@@ -18637,7 +18476,7 @@
           <a:bodyPr wrap="square" lIns="0" tIns="0" rIns="0" bIns="0" rtlCol="0" anchor="ctr"/>
           <a:lstStyle/>
           <a:p>
-            <a:pPr algn="ctr" indent="0" marL="0">
+            <a:pPr marL="0" indent="0" algn="ctr">
               <a:buNone/>
             </a:pPr>
             <a:r>
@@ -18676,11 +18515,11 @@
           <a:bodyPr wrap="square" lIns="0" tIns="0" rIns="0" bIns="0" rtlCol="0" anchor="ctr"/>
           <a:lstStyle/>
           <a:p>
-            <a:pPr algn="ctr" indent="0" marL="0">
-              <a:buNone/>
-            </a:pPr>
-            <a:r>
-              <a:rPr lang="en-US" sz="650" spc="120" kern="0" dirty="0">
+            <a:pPr marL="0" indent="0" algn="ctr">
+              <a:buNone/>
+            </a:pPr>
+            <a:r>
+              <a:rPr lang="en-US" sz="650" kern="0" spc="120" dirty="0">
                 <a:solidFill>
                   <a:srgbClr val="2A5050"/>
                 </a:solidFill>
@@ -18715,11 +18554,11 @@
           <a:bodyPr wrap="square" lIns="0" tIns="0" rIns="0" bIns="0" rtlCol="0" anchor="ctr"/>
           <a:lstStyle/>
           <a:p>
-            <a:pPr algn="ctr" indent="0" marL="0">
-              <a:buNone/>
-            </a:pPr>
-            <a:r>
-              <a:rPr lang="en-US" sz="900" spc="200" kern="0" dirty="0">
+            <a:pPr marL="0" indent="0" algn="ctr">
+              <a:buNone/>
+            </a:pPr>
+            <a:r>
+              <a:rPr lang="en-US" sz="900" kern="0" spc="200" dirty="0">
                 <a:solidFill>
                   <a:srgbClr val="2A5050"/>
                 </a:solidFill>
@@ -18804,11 +18643,11 @@
           <a:bodyPr wrap="square" lIns="0" tIns="0" rIns="0" bIns="0" rtlCol="0" anchor="ctr"/>
           <a:lstStyle/>
           <a:p>
-            <a:pPr algn="ctr" indent="0" marL="0">
-              <a:buNone/>
-            </a:pPr>
-            <a:r>
-              <a:rPr lang="en-US" sz="700" spc="150" kern="0" dirty="0">
+            <a:pPr marL="0" indent="0" algn="ctr">
+              <a:buNone/>
+            </a:pPr>
+            <a:r>
+              <a:rPr lang="en-US" sz="700" kern="0" spc="150" dirty="0">
                 <a:solidFill>
                   <a:srgbClr val="2A5050"/>
                 </a:solidFill>
@@ -18831,7 +18670,127 @@
 </file>
 
 <file path=ppt/slides/slide14.xml><?xml version="1.0" encoding="utf-8"?>
-<p:sld xmlns:a="http://schemas.openxmlformats.org/drawingml/2006/main" xmlns:p="http://schemas.openxmlformats.org/presentationml/2006/main" xmlns:r="http://schemas.openxmlformats.org/officeDocument/2006/relationships">
+<p:sld xmlns:a="http://schemas.openxmlformats.org/drawingml/2006/main" xmlns:r="http://schemas.openxmlformats.org/officeDocument/2006/relationships" xmlns:p="http://schemas.openxmlformats.org/presentationml/2006/main">
+  <p:cSld>
+    <p:spTree>
+      <p:nvGrpSpPr>
+        <p:cNvPr id="1" name=""/>
+        <p:cNvGrpSpPr/>
+        <p:nvPr/>
+      </p:nvGrpSpPr>
+      <p:grpSpPr>
+        <a:xfrm>
+          <a:off x="0" y="0"/>
+          <a:ext cx="0" cy="0"/>
+          <a:chOff x="0" y="0"/>
+          <a:chExt cx="0" cy="0"/>
+        </a:xfrm>
+      </p:grpSpPr>
+      <p:pic>
+        <p:nvPicPr>
+          <p:cNvPr id="3" name="Picture 2">
+            <a:extLst>
+              <a:ext uri="{FF2B5EF4-FFF2-40B4-BE49-F238E27FC236}">
+                <a16:creationId xmlns:a16="http://schemas.microsoft.com/office/drawing/2014/main" id="{8C8C7545-8E3B-AA7D-3CAA-26794BBD248C}"/>
+              </a:ext>
+            </a:extLst>
+          </p:cNvPr>
+          <p:cNvPicPr>
+            <a:picLocks noChangeAspect="1"/>
+          </p:cNvPicPr>
+          <p:nvPr/>
+        </p:nvPicPr>
+        <p:blipFill>
+          <a:blip r:embed="rId2"/>
+          <a:stretch>
+            <a:fillRect/>
+          </a:stretch>
+        </p:blipFill>
+        <p:spPr>
+          <a:xfrm>
+            <a:off x="0" y="0"/>
+            <a:ext cx="5917720" cy="6858000"/>
+          </a:xfrm>
+          <a:prstGeom prst="rect">
+            <a:avLst/>
+          </a:prstGeom>
+        </p:spPr>
+      </p:pic>
+      <p:pic>
+        <p:nvPicPr>
+          <p:cNvPr id="5" name="Picture 4">
+            <a:extLst>
+              <a:ext uri="{FF2B5EF4-FFF2-40B4-BE49-F238E27FC236}">
+                <a16:creationId xmlns:a16="http://schemas.microsoft.com/office/drawing/2014/main" id="{A8A45F74-CD76-4D78-B21E-FA5DD1A5E510}"/>
+              </a:ext>
+            </a:extLst>
+          </p:cNvPr>
+          <p:cNvPicPr>
+            <a:picLocks noChangeAspect="1"/>
+          </p:cNvPicPr>
+          <p:nvPr/>
+        </p:nvPicPr>
+        <p:blipFill>
+          <a:blip r:embed="rId3"/>
+          <a:stretch>
+            <a:fillRect/>
+          </a:stretch>
+        </p:blipFill>
+        <p:spPr>
+          <a:xfrm>
+            <a:off x="5917720" y="0"/>
+            <a:ext cx="3344383" cy="6858000"/>
+          </a:xfrm>
+          <a:prstGeom prst="rect">
+            <a:avLst/>
+          </a:prstGeom>
+        </p:spPr>
+      </p:pic>
+      <p:pic>
+        <p:nvPicPr>
+          <p:cNvPr id="7" name="Picture 6">
+            <a:extLst>
+              <a:ext uri="{FF2B5EF4-FFF2-40B4-BE49-F238E27FC236}">
+                <a16:creationId xmlns:a16="http://schemas.microsoft.com/office/drawing/2014/main" id="{DF8A0911-1CB6-4ABA-B327-D42E48969D44}"/>
+              </a:ext>
+            </a:extLst>
+          </p:cNvPr>
+          <p:cNvPicPr>
+            <a:picLocks noChangeAspect="1"/>
+          </p:cNvPicPr>
+          <p:nvPr/>
+        </p:nvPicPr>
+        <p:blipFill>
+          <a:blip r:embed="rId4"/>
+          <a:stretch>
+            <a:fillRect/>
+          </a:stretch>
+        </p:blipFill>
+        <p:spPr>
+          <a:xfrm>
+            <a:off x="9210259" y="0"/>
+            <a:ext cx="2981741" cy="1552792"/>
+          </a:xfrm>
+          <a:prstGeom prst="rect">
+            <a:avLst/>
+          </a:prstGeom>
+        </p:spPr>
+      </p:pic>
+    </p:spTree>
+    <p:extLst>
+      <p:ext uri="{BB962C8B-B14F-4D97-AF65-F5344CB8AC3E}">
+        <p14:creationId xmlns:p14="http://schemas.microsoft.com/office/powerpoint/2010/main" val="242790318"/>
+      </p:ext>
+    </p:extLst>
+  </p:cSld>
+  <p:clrMapOvr>
+    <a:masterClrMapping/>
+  </p:clrMapOvr>
+</p:sld>
+</file>
+
+<file path=ppt/slides/slide15.xml><?xml version="1.0" encoding="utf-8"?>
+<p:sld xmlns:a="http://schemas.openxmlformats.org/drawingml/2006/main" xmlns:r="http://schemas.openxmlformats.org/officeDocument/2006/relationships" xmlns:p="http://schemas.openxmlformats.org/presentationml/2006/main">
   <p:cSld>
     <p:bg>
       <p:bgPr>
@@ -18847,7 +18806,120 @@
         <p:cNvGrpSpPr/>
         <p:nvPr/>
       </p:nvGrpSpPr>
-      <p:grpSpPr/>
+      <p:grpSpPr>
+        <a:xfrm>
+          <a:off x="0" y="0"/>
+          <a:ext cx="0" cy="0"/>
+          <a:chOff x="0" y="0"/>
+          <a:chExt cx="0" cy="0"/>
+        </a:xfrm>
+      </p:grpSpPr>
+      <p:sp>
+        <p:nvSpPr>
+          <p:cNvPr id="2" name="TextBox 1"/>
+          <p:cNvSpPr txBox="1"/>
+          <p:nvPr/>
+        </p:nvSpPr>
+        <p:spPr>
+          <a:xfrm>
+            <a:off x="457200" y="457200"/>
+            <a:ext cx="10972800" cy="914400"/>
+          </a:xfrm>
+          <a:prstGeom prst="rect">
+            <a:avLst/>
+          </a:prstGeom>
+          <a:noFill/>
+        </p:spPr>
+        <p:txBody>
+          <a:bodyPr wrap="none">
+            <a:spAutoFit/>
+          </a:bodyPr>
+          <a:lstStyle/>
+          <a:p>
+            <a:pPr>
+              <a:defRPr sz="3600" b="1">
+                <a:solidFill>
+                  <a:srgbClr val="D4AF37"/>
+                </a:solidFill>
+              </a:defRPr>
+            </a:pPr>
+            <a:r>
+              <a:t>ChemoFilter Platform Overview</a:t>
+            </a:r>
+          </a:p>
+        </p:txBody>
+      </p:sp>
+      <p:sp>
+        <p:nvSpPr>
+          <p:cNvPr id="3" name="TextBox 2"/>
+          <p:cNvSpPr txBox="1"/>
+          <p:nvPr/>
+        </p:nvSpPr>
+        <p:spPr>
+          <a:xfrm>
+            <a:off x="457200" y="1645920"/>
+            <a:ext cx="10972800" cy="4572000"/>
+          </a:xfrm>
+          <a:prstGeom prst="rect">
+            <a:avLst/>
+          </a:prstGeom>
+          <a:noFill/>
+        </p:spPr>
+        <p:txBody>
+          <a:bodyPr wrap="square">
+            <a:spAutoFit/>
+          </a:bodyPr>
+          <a:lstStyle/>
+          <a:p>
+            <a:pPr>
+              <a:defRPr sz="2000">
+                <a:solidFill>
+                  <a:srgbClr val="FFFFFF"/>
+                </a:solidFill>
+              </a:defRPr>
+            </a:pPr>
+            <a:r>
+              <a:t>An AI-powered, multi-tab computational chemistry web application built perfectly on Streamlit and RDKit.</a:t>
+            </a:r>
+          </a:p>
+          <a:p>
+            <a:pPr>
+              <a:defRPr sz="2000">
+                <a:solidFill>
+                  <a:srgbClr val="FFFFFF"/>
+                </a:solidFill>
+              </a:defRPr>
+            </a:pPr>
+            <a:r>
+              <a:t>Instantly analyzes molecular representations (SMILES) to predict drug-likeness, safety, and synthetic accessibility.</a:t>
+            </a:r>
+          </a:p>
+          <a:p>
+            <a:pPr>
+              <a:defRPr sz="2000">
+                <a:solidFill>
+                  <a:srgbClr val="FFFFFF"/>
+                </a:solidFill>
+              </a:defRPr>
+            </a:pPr>
+            <a:r>
+              <a:t>Architecture: Operates entirely locally with robust Python backends, avoiding cloud exposure of proprietary IP.</a:t>
+            </a:r>
+          </a:p>
+          <a:p>
+            <a:pPr>
+              <a:defRPr sz="2000">
+                <a:solidFill>
+                  <a:srgbClr val="FFFFFF"/>
+                </a:solidFill>
+              </a:defRPr>
+            </a:pPr>
+            <a:r>
+              <a:t>Scalability: Equipped with Mega-Iterative 'Zenith' and 'Celestial' evaluation engines checking up to 50+ physiochemical parameters in milliseconds.</a:t>
+            </a:r>
+          </a:p>
+        </p:txBody>
+      </p:sp>
     </p:spTree>
   </p:cSld>
   <p:clrMapOvr>
@@ -18856,8 +18928,8 @@
 </p:sld>
 </file>
 
-<file path=ppt/slides/slide15.xml><?xml version="1.0" encoding="utf-8"?>
-<p:sld xmlns:a="http://schemas.openxmlformats.org/drawingml/2006/main" xmlns:p="http://schemas.openxmlformats.org/presentationml/2006/main" xmlns:r="http://schemas.openxmlformats.org/officeDocument/2006/relationships">
+<file path=ppt/slides/slide16.xml><?xml version="1.0" encoding="utf-8"?>
+<p:sld xmlns:a="http://schemas.openxmlformats.org/drawingml/2006/main" xmlns:r="http://schemas.openxmlformats.org/officeDocument/2006/relationships" xmlns:p="http://schemas.openxmlformats.org/presentationml/2006/main">
   <p:cSld>
     <p:bg>
       <p:bgPr>
@@ -18873,7 +18945,14 @@
         <p:cNvGrpSpPr/>
         <p:nvPr/>
       </p:nvGrpSpPr>
-      <p:grpSpPr/>
+      <p:grpSpPr>
+        <a:xfrm>
+          <a:off x="0" y="0"/>
+          <a:ext cx="0" cy="0"/>
+          <a:chOff x="0" y="0"/>
+          <a:chExt cx="0" cy="0"/>
+        </a:xfrm>
+      </p:grpSpPr>
       <p:sp>
         <p:nvSpPr>
           <p:cNvPr id="2" name="TextBox 1"/>
@@ -18904,7 +18983,7 @@
               </a:defRPr>
             </a:pPr>
             <a:r>
-              <a:t>ChemoFilter Platform Overview</a:t>
+              <a:t>Pillar 1: Deep ADMET &amp; Physicochemical Analysis</a:t>
             </a:r>
           </a:p>
         </p:txBody>
@@ -18939,7 +19018,7 @@
               </a:defRPr>
             </a:pPr>
             <a:r>
-              <a:t>An AI-powered, multi-tab computational chemistry web application built perfectly on Streamlit and RDKit.</a:t>
+              <a:t>Lipinski's Rule of 5 Validation (MW, LogP, HBD, HBA) for oral bioavailability.</a:t>
             </a:r>
           </a:p>
           <a:p>
@@ -18951,7 +19030,7 @@
               </a:defRPr>
             </a:pPr>
             <a:r>
-              <a:t>Instantly analyzes molecular representations (SMILES) to predict drug-likeness, safety, and synthetic accessibility.</a:t>
+              <a:t>Advanced topological scoring: QED (Quantitative Estimate of Drug-likeness), TPSA, and Fsp3 orbital hybridization.</a:t>
             </a:r>
           </a:p>
           <a:p>
@@ -18963,7 +19042,7 @@
               </a:defRPr>
             </a:pPr>
             <a:r>
-              <a:t>Architecture: Operates entirely locally with robust Python backends, avoiding cloud exposure of proprietary IP.</a:t>
+              <a:t>3D Conformational Stress calculations via the MMFF force field.</a:t>
             </a:r>
           </a:p>
           <a:p>
@@ -18975,7 +19054,7 @@
               </a:defRPr>
             </a:pPr>
             <a:r>
-              <a:t>Scalability: Equipped with Mega-Iterative 'Zenith' and 'Celestial' evaluation engines checking up to 50+ physiochemical parameters in milliseconds.</a:t>
+              <a:t>Automated Toxicity Alerts: Checks structures against SMARTS libraries for PAINS (Pan Assay Interference Compounds), Brenk alerts, Ames mutagenicity, and hERG inhibition.</a:t>
             </a:r>
           </a:p>
         </p:txBody>
@@ -18988,8 +19067,8 @@
 </p:sld>
 </file>
 
-<file path=ppt/slides/slide16.xml><?xml version="1.0" encoding="utf-8"?>
-<p:sld xmlns:a="http://schemas.openxmlformats.org/drawingml/2006/main" xmlns:p="http://schemas.openxmlformats.org/presentationml/2006/main" xmlns:r="http://schemas.openxmlformats.org/officeDocument/2006/relationships">
+<file path=ppt/slides/slide17.xml><?xml version="1.0" encoding="utf-8"?>
+<p:sld xmlns:a="http://schemas.openxmlformats.org/drawingml/2006/main" xmlns:r="http://schemas.openxmlformats.org/officeDocument/2006/relationships" xmlns:p="http://schemas.openxmlformats.org/presentationml/2006/main">
   <p:cSld>
     <p:bg>
       <p:bgPr>
@@ -19005,7 +19084,14 @@
         <p:cNvGrpSpPr/>
         <p:nvPr/>
       </p:nvGrpSpPr>
-      <p:grpSpPr/>
+      <p:grpSpPr>
+        <a:xfrm>
+          <a:off x="0" y="0"/>
+          <a:ext cx="0" cy="0"/>
+          <a:chOff x="0" y="0"/>
+          <a:chExt cx="0" cy="0"/>
+        </a:xfrm>
+      </p:grpSpPr>
       <p:sp>
         <p:nvSpPr>
           <p:cNvPr id="2" name="TextBox 1"/>
@@ -19036,7 +19122,7 @@
               </a:defRPr>
             </a:pPr>
             <a:r>
-              <a:t>Pillar 1: Deep ADMET &amp; Physicochemical Analysis</a:t>
+              <a:t>Pillar 2: Data Visualization &amp; AI Explanations</a:t>
             </a:r>
           </a:p>
         </p:txBody>
@@ -19071,7 +19157,7 @@
               </a:defRPr>
             </a:pPr>
             <a:r>
-              <a:t>Lipinski's Rule of 5 Validation (MW, LogP, HBD, HBA) for oral bioavailability.</a:t>
+              <a:t>Rich 2D &amp; 3D Visuals: Interactive 3D molecular conformity viewers, Plotly radar charts, and scaffold clustering graphs.</a:t>
             </a:r>
           </a:p>
           <a:p>
@@ -19083,7 +19169,7 @@
               </a:defRPr>
             </a:pPr>
             <a:r>
-              <a:t>Advanced topological scoring: QED (Quantitative Estimate of Drug-likeness), TPSA, and Fsp3 orbital hybridization.</a:t>
+              <a:t>LLM Integration: Anthropic Claude integration acts as a virtual medicinal chemist.</a:t>
             </a:r>
           </a:p>
           <a:p>
@@ -19095,7 +19181,7 @@
               </a:defRPr>
             </a:pPr>
             <a:r>
-              <a:t>3D Conformational Stress calculations via the MMFF force field.</a:t>
+              <a:t>Generates analog suggestions, identifies synthetic vulnerabilities, and predicts biological mechanisms instantly from the evaluated metrics.</a:t>
             </a:r>
           </a:p>
           <a:p>
@@ -19107,7 +19193,7 @@
               </a:defRPr>
             </a:pPr>
             <a:r>
-              <a:t>Automated Toxicity Alerts: Checks structures against SMARTS libraries for PAINS (Pan Assay Interference Compounds), Brenk alerts, Ames mutagenicity, and hERG inhibition.</a:t>
+              <a:t>Side-by-side Gold Standard tracking allows direct comparison against market reference compounds like Olanzapine.</a:t>
             </a:r>
           </a:p>
         </p:txBody>
@@ -19120,8 +19206,8 @@
 </p:sld>
 </file>
 
-<file path=ppt/slides/slide17.xml><?xml version="1.0" encoding="utf-8"?>
-<p:sld xmlns:a="http://schemas.openxmlformats.org/drawingml/2006/main" xmlns:p="http://schemas.openxmlformats.org/presentationml/2006/main" xmlns:r="http://schemas.openxmlformats.org/officeDocument/2006/relationships">
+<file path=ppt/slides/slide18.xml><?xml version="1.0" encoding="utf-8"?>
+<p:sld xmlns:a="http://schemas.openxmlformats.org/drawingml/2006/main" xmlns:r="http://schemas.openxmlformats.org/officeDocument/2006/relationships" xmlns:p="http://schemas.openxmlformats.org/presentationml/2006/main">
   <p:cSld>
     <p:bg>
       <p:bgPr>
@@ -19137,7 +19223,14 @@
         <p:cNvGrpSpPr/>
         <p:nvPr/>
       </p:nvGrpSpPr>
-      <p:grpSpPr/>
+      <p:grpSpPr>
+        <a:xfrm>
+          <a:off x="0" y="0"/>
+          <a:ext cx="0" cy="0"/>
+          <a:chOff x="0" y="0"/>
+          <a:chExt cx="0" cy="0"/>
+        </a:xfrm>
+      </p:grpSpPr>
       <p:sp>
         <p:nvSpPr>
           <p:cNvPr id="2" name="TextBox 1"/>
@@ -19168,7 +19261,7 @@
               </a:defRPr>
             </a:pPr>
             <a:r>
-              <a:t>Pillar 2: Data Visualization &amp; AI Explanations</a:t>
+              <a:t>ChemoScore: The Ultimate Prioritization Metric</a:t>
             </a:r>
           </a:p>
         </p:txBody>
@@ -19203,7 +19296,7 @@
               </a:defRPr>
             </a:pPr>
             <a:r>
-              <a:t>Rich 2D &amp; 3D Visuals: Interactive 3D molecular conformity viewers, Plotly radar charts, and scaffold clustering graphs.</a:t>
+              <a:t>Weighted Evaluation: Calculates an overall 'ChemoScore' and Grade (A, B, C, F) for any input.</a:t>
             </a:r>
           </a:p>
           <a:p>
@@ -19215,7 +19308,7 @@
               </a:defRPr>
             </a:pPr>
             <a:r>
-              <a:t>LLM Integration: Anthropic Claude integration acts as a virtual medicinal chemist.</a:t>
+              <a:t>Adjustable Sliders: Lead reviewers can dynamically distribute weight among Structure, PhysChem, Safety, and Synthesis modules.</a:t>
             </a:r>
           </a:p>
           <a:p>
@@ -19227,7 +19320,7 @@
               </a:defRPr>
             </a:pPr>
             <a:r>
-              <a:t>Generates analog suggestions, identifies synthetic vulnerabilities, and predicts biological mechanisms instantly from the evaluated metrics.</a:t>
+              <a:t>Ensures researchers aren't just optimizing for binding affinity, but prioritizing molecules that can actually survive the human liver and bloodstream.</a:t>
             </a:r>
           </a:p>
           <a:p>
@@ -19239,7 +19332,7 @@
               </a:defRPr>
             </a:pPr>
             <a:r>
-              <a:t>Side-by-side Gold Standard tracking allows direct comparison against market reference compounds like Olanzapine.</a:t>
+              <a:t>Actionable outputs: Allows instant sorting of thousands of hits down to the Top 5 most viable structures.</a:t>
             </a:r>
           </a:p>
         </p:txBody>
@@ -19252,8 +19345,8 @@
 </p:sld>
 </file>
 
-<file path=ppt/slides/slide18.xml><?xml version="1.0" encoding="utf-8"?>
-<p:sld xmlns:a="http://schemas.openxmlformats.org/drawingml/2006/main" xmlns:p="http://schemas.openxmlformats.org/presentationml/2006/main" xmlns:r="http://schemas.openxmlformats.org/officeDocument/2006/relationships">
+<file path=ppt/slides/slide19.xml><?xml version="1.0" encoding="utf-8"?>
+<p:sld xmlns:a="http://schemas.openxmlformats.org/drawingml/2006/main" xmlns:r="http://schemas.openxmlformats.org/officeDocument/2006/relationships" xmlns:p="http://schemas.openxmlformats.org/presentationml/2006/main">
   <p:cSld>
     <p:bg>
       <p:bgPr>
@@ -19269,139 +19362,14 @@
         <p:cNvGrpSpPr/>
         <p:nvPr/>
       </p:nvGrpSpPr>
-      <p:grpSpPr/>
-      <p:sp>
-        <p:nvSpPr>
-          <p:cNvPr id="2" name="TextBox 1"/>
-          <p:cNvSpPr txBox="1"/>
-          <p:nvPr/>
-        </p:nvSpPr>
-        <p:spPr>
-          <a:xfrm>
-            <a:off x="457200" y="457200"/>
-            <a:ext cx="10972800" cy="914400"/>
-          </a:xfrm>
-          <a:prstGeom prst="rect">
-            <a:avLst/>
-          </a:prstGeom>
-          <a:noFill/>
-        </p:spPr>
-        <p:txBody>
-          <a:bodyPr wrap="none">
-            <a:spAutoFit/>
-          </a:bodyPr>
-          <a:lstStyle/>
-          <a:p>
-            <a:pPr>
-              <a:defRPr sz="3600" b="1">
-                <a:solidFill>
-                  <a:srgbClr val="D4AF37"/>
-                </a:solidFill>
-              </a:defRPr>
-            </a:pPr>
-            <a:r>
-              <a:t>ChemoScore: The Ultimate Prioritization Metric</a:t>
-            </a:r>
-          </a:p>
-        </p:txBody>
-      </p:sp>
-      <p:sp>
-        <p:nvSpPr>
-          <p:cNvPr id="3" name="TextBox 2"/>
-          <p:cNvSpPr txBox="1"/>
-          <p:nvPr/>
-        </p:nvSpPr>
-        <p:spPr>
-          <a:xfrm>
-            <a:off x="457200" y="1645920"/>
-            <a:ext cx="10972800" cy="4572000"/>
-          </a:xfrm>
-          <a:prstGeom prst="rect">
-            <a:avLst/>
-          </a:prstGeom>
-          <a:noFill/>
-        </p:spPr>
-        <p:txBody>
-          <a:bodyPr wrap="square">
-            <a:spAutoFit/>
-          </a:bodyPr>
-          <a:lstStyle/>
-          <a:p>
-            <a:pPr>
-              <a:defRPr sz="2000">
-                <a:solidFill>
-                  <a:srgbClr val="FFFFFF"/>
-                </a:solidFill>
-              </a:defRPr>
-            </a:pPr>
-            <a:r>
-              <a:t>Weighted Evaluation: Calculates an overall 'ChemoScore' and Grade (A, B, C, F) for any input.</a:t>
-            </a:r>
-          </a:p>
-          <a:p>
-            <a:pPr>
-              <a:defRPr sz="2000">
-                <a:solidFill>
-                  <a:srgbClr val="FFFFFF"/>
-                </a:solidFill>
-              </a:defRPr>
-            </a:pPr>
-            <a:r>
-              <a:t>Adjustable Sliders: Lead reviewers can dynamically distribute weight among Structure, PhysChem, Safety, and Synthesis modules.</a:t>
-            </a:r>
-          </a:p>
-          <a:p>
-            <a:pPr>
-              <a:defRPr sz="2000">
-                <a:solidFill>
-                  <a:srgbClr val="FFFFFF"/>
-                </a:solidFill>
-              </a:defRPr>
-            </a:pPr>
-            <a:r>
-              <a:t>Ensures researchers aren't just optimizing for binding affinity, but prioritizing molecules that can actually survive the human liver and bloodstream.</a:t>
-            </a:r>
-          </a:p>
-          <a:p>
-            <a:pPr>
-              <a:defRPr sz="2000">
-                <a:solidFill>
-                  <a:srgbClr val="FFFFFF"/>
-                </a:solidFill>
-              </a:defRPr>
-            </a:pPr>
-            <a:r>
-              <a:t>Actionable outputs: Allows instant sorting of thousands of hits down to the Top 5 most viable structures.</a:t>
-            </a:r>
-          </a:p>
-        </p:txBody>
-      </p:sp>
-    </p:spTree>
-  </p:cSld>
-  <p:clrMapOvr>
-    <a:masterClrMapping/>
-  </p:clrMapOvr>
-</p:sld>
-</file>
-
-<file path=ppt/slides/slide19.xml><?xml version="1.0" encoding="utf-8"?>
-<p:sld xmlns:a="http://schemas.openxmlformats.org/drawingml/2006/main" xmlns:p="http://schemas.openxmlformats.org/presentationml/2006/main" xmlns:r="http://schemas.openxmlformats.org/officeDocument/2006/relationships">
-  <p:cSld>
-    <p:bg>
-      <p:bgPr>
-        <a:solidFill>
-          <a:srgbClr val="0D1525"/>
-        </a:solidFill>
-        <a:effectLst/>
-      </p:bgPr>
-    </p:bg>
-    <p:spTree>
-      <p:nvGrpSpPr>
-        <p:cNvPr id="1" name=""/>
-        <p:cNvGrpSpPr/>
-        <p:nvPr/>
-      </p:nvGrpSpPr>
-      <p:grpSpPr/>
+      <p:grpSpPr>
+        <a:xfrm>
+          <a:off x="0" y="0"/>
+          <a:ext cx="0" cy="0"/>
+          <a:chOff x="0" y="0"/>
+          <a:chExt cx="0" cy="0"/>
+        </a:xfrm>
+      </p:grpSpPr>
       <p:sp>
         <p:nvSpPr>
           <p:cNvPr id="2" name="TextBox 1"/>
@@ -19524,6 +19492,7 @@
         <a:solidFill>
           <a:srgbClr val="030B16"/>
         </a:solidFill>
+        <a:effectLst/>
       </p:bgPr>
     </p:bg>
     <p:spTree>
@@ -19656,9 +19625,7 @@
             <a:ext cx="594360" cy="594360"/>
           </a:xfrm>
           <a:prstGeom prst="rect">
-            <a:avLst>
-              <a:gd name="adj" fmla="val 12308"/>
-            </a:avLst>
+            <a:avLst/>
           </a:prstGeom>
           <a:solidFill>
             <a:srgbClr val="00D2BE">
@@ -19672,7 +19639,7 @@
             <a:prstDash val="solid"/>
           </a:ln>
           <a:effectLst>
-            <a:outerShdw sx="100000" sy="100000" kx="0" ky="0" algn="bl" rotWithShape="0" blurRad="317500" dist="50800" dir="8100000">
+            <a:outerShdw blurRad="317500" dist="50800" dir="8100000" algn="bl" rotWithShape="0">
               <a:srgbClr val="00D2BE">
                 <a:alpha val="40000"/>
               </a:srgbClr>
@@ -19701,7 +19668,7 @@
           <a:bodyPr wrap="square" lIns="0" tIns="0" rIns="0" bIns="0" rtlCol="0" anchor="ctr"/>
           <a:lstStyle/>
           <a:p>
-            <a:pPr algn="ctr" indent="0" marL="0">
+            <a:pPr marL="0" indent="0" algn="ctr">
               <a:buNone/>
             </a:pPr>
             <a:r>
@@ -19733,7 +19700,7 @@
           <a:noFill/>
           <a:ln/>
           <a:effectLst>
-            <a:outerShdw sx="100000" sy="100000" kx="0" ky="0" algn="bl" rotWithShape="0" blurRad="127000" dist="38100" dir="8100000">
+            <a:outerShdw blurRad="127000" dist="38100" dir="8100000" algn="bl" rotWithShape="0">
               <a:srgbClr val="000000">
                 <a:alpha val="50000"/>
               </a:srgbClr>
@@ -19744,7 +19711,7 @@
           <a:bodyPr wrap="square" lIns="0" tIns="0" rIns="0" bIns="0" rtlCol="0" anchor="ctr"/>
           <a:lstStyle/>
           <a:p>
-            <a:pPr indent="0" marL="0">
+            <a:pPr marL="0" indent="0">
               <a:buNone/>
             </a:pPr>
             <a:r>
@@ -19810,11 +19777,11 @@
           <a:bodyPr wrap="square" lIns="0" tIns="0" rIns="0" bIns="0" rtlCol="0" anchor="ctr"/>
           <a:lstStyle/>
           <a:p>
-            <a:pPr algn="ctr" indent="0" marL="0">
-              <a:buNone/>
-            </a:pPr>
-            <a:r>
-              <a:rPr lang="en-US" sz="700" b="1" spc="150" kern="0" dirty="0">
+            <a:pPr marL="0" indent="0" algn="ctr">
+              <a:buNone/>
+            </a:pPr>
+            <a:r>
+              <a:rPr lang="en-US" sz="700" b="1" kern="0" spc="150" dirty="0">
                 <a:solidFill>
                   <a:srgbClr val="00D2BE"/>
                 </a:solidFill>
@@ -19881,7 +19848,7 @@
             <a:prstDash val="solid"/>
           </a:ln>
           <a:effectLst>
-            <a:outerShdw sx="100000" sy="100000" kx="0" ky="0" algn="bl" rotWithShape="0" blurRad="254000" dist="76200" dir="8100000">
+            <a:outerShdw blurRad="254000" dist="76200" dir="8100000" algn="bl" rotWithShape="0">
               <a:srgbClr val="000000">
                 <a:alpha val="80000"/>
               </a:srgbClr>
@@ -19964,11 +19931,11 @@
           <a:bodyPr wrap="square" lIns="0" tIns="0" rIns="0" bIns="0" rtlCol="0" anchor="ctr"/>
           <a:lstStyle/>
           <a:p>
-            <a:pPr indent="0" marL="0">
-              <a:buNone/>
-            </a:pPr>
-            <a:r>
-              <a:rPr lang="en-US" sz="700" b="1" spc="300" kern="0" dirty="0">
+            <a:pPr marL="0" indent="0">
+              <a:buNone/>
+            </a:pPr>
+            <a:r>
+              <a:rPr lang="en-US" sz="700" b="1" kern="0" spc="300" dirty="0">
                 <a:solidFill>
                   <a:srgbClr val="00D2BE"/>
                 </a:solidFill>
@@ -20055,7 +20022,7 @@
           <a:bodyPr wrap="square" lIns="0" tIns="0" rIns="0" bIns="0" rtlCol="0" anchor="ctr"/>
           <a:lstStyle/>
           <a:p>
-            <a:pPr algn="ctr" indent="0" marL="0">
+            <a:pPr marL="0" indent="0" algn="ctr">
               <a:buNone/>
             </a:pPr>
             <a:r>
@@ -20094,7 +20061,7 @@
           <a:bodyPr wrap="square" lIns="0" tIns="0" rIns="0" bIns="0" rtlCol="0" anchor="t"/>
           <a:lstStyle/>
           <a:p>
-            <a:pPr indent="0" marL="0">
+            <a:pPr marL="0" indent="0">
               <a:lnSpc>
                 <a:spcPct val="150000"/>
               </a:lnSpc>
@@ -20163,7 +20130,7 @@
           <a:bodyPr wrap="square" lIns="0" tIns="0" rIns="0" bIns="0" rtlCol="0" anchor="ctr"/>
           <a:lstStyle/>
           <a:p>
-            <a:pPr algn="ctr" indent="0" marL="0">
+            <a:pPr marL="0" indent="0" algn="ctr">
               <a:buNone/>
             </a:pPr>
             <a:r>
@@ -20202,7 +20169,7 @@
           <a:bodyPr wrap="square" lIns="0" tIns="0" rIns="0" bIns="0" rtlCol="0" anchor="t"/>
           <a:lstStyle/>
           <a:p>
-            <a:pPr indent="0" marL="0">
+            <a:pPr marL="0" indent="0">
               <a:lnSpc>
                 <a:spcPct val="150000"/>
               </a:lnSpc>
@@ -20271,7 +20238,7 @@
           <a:bodyPr wrap="square" lIns="0" tIns="0" rIns="0" bIns="0" rtlCol="0" anchor="ctr"/>
           <a:lstStyle/>
           <a:p>
-            <a:pPr algn="ctr" indent="0" marL="0">
+            <a:pPr marL="0" indent="0" algn="ctr">
               <a:buNone/>
             </a:pPr>
             <a:r>
@@ -20310,7 +20277,7 @@
           <a:bodyPr wrap="square" lIns="0" tIns="0" rIns="0" bIns="0" rtlCol="0" anchor="t"/>
           <a:lstStyle/>
           <a:p>
-            <a:pPr indent="0" marL="0">
+            <a:pPr marL="0" indent="0">
               <a:lnSpc>
                 <a:spcPct val="150000"/>
               </a:lnSpc>
@@ -20379,7 +20346,7 @@
           <a:bodyPr wrap="square" lIns="0" tIns="0" rIns="0" bIns="0" rtlCol="0" anchor="ctr"/>
           <a:lstStyle/>
           <a:p>
-            <a:pPr algn="ctr" indent="0" marL="0">
+            <a:pPr marL="0" indent="0" algn="ctr">
               <a:buNone/>
             </a:pPr>
             <a:r>
@@ -20418,7 +20385,7 @@
           <a:bodyPr wrap="square" lIns="0" tIns="0" rIns="0" bIns="0" rtlCol="0" anchor="t"/>
           <a:lstStyle/>
           <a:p>
-            <a:pPr indent="0" marL="0">
+            <a:pPr marL="0" indent="0">
               <a:lnSpc>
                 <a:spcPct val="150000"/>
               </a:lnSpc>
@@ -20492,7 +20459,7 @@
             <a:prstDash val="solid"/>
           </a:ln>
           <a:effectLst>
-            <a:outerShdw sx="100000" sy="100000" kx="0" ky="0" algn="bl" rotWithShape="0" blurRad="254000" dist="76200" dir="8100000">
+            <a:outerShdw blurRad="254000" dist="76200" dir="8100000" algn="bl" rotWithShape="0">
               <a:srgbClr val="000000">
                 <a:alpha val="80000"/>
               </a:srgbClr>
@@ -20580,7 +20547,7 @@
             <a:prstDash val="solid"/>
           </a:ln>
           <a:effectLst>
-            <a:outerShdw sx="100000" sy="100000" kx="0" ky="0" algn="bl" rotWithShape="0" blurRad="317500" dist="50800" dir="8100000">
+            <a:outerShdw blurRad="317500" dist="50800" dir="8100000" algn="bl" rotWithShape="0">
               <a:srgbClr val="00D2BE">
                 <a:alpha val="40000"/>
               </a:srgbClr>
@@ -20609,7 +20576,7 @@
           <a:bodyPr wrap="square" lIns="0" tIns="0" rIns="0" bIns="0" rtlCol="0" anchor="ctr"/>
           <a:lstStyle/>
           <a:p>
-            <a:pPr algn="ctr" indent="0" marL="0">
+            <a:pPr marL="0" indent="0" algn="ctr">
               <a:buNone/>
             </a:pPr>
             <a:r>
@@ -20641,7 +20608,7 @@
           <a:noFill/>
           <a:ln/>
           <a:effectLst>
-            <a:outerShdw sx="100000" sy="100000" kx="0" ky="0" algn="bl" rotWithShape="0" blurRad="317500" dist="50800" dir="8100000">
+            <a:outerShdw blurRad="317500" dist="50800" dir="8100000" algn="bl" rotWithShape="0">
               <a:srgbClr val="00D2BE">
                 <a:alpha val="40000"/>
               </a:srgbClr>
@@ -20652,7 +20619,7 @@
           <a:bodyPr wrap="square" lIns="0" tIns="0" rIns="0" bIns="0" rtlCol="0" anchor="ctr"/>
           <a:lstStyle/>
           <a:p>
-            <a:pPr indent="0" marL="0">
+            <a:pPr marL="0" indent="0">
               <a:buNone/>
             </a:pPr>
             <a:r>
@@ -20716,7 +20683,7 @@
           <a:bodyPr wrap="square" lIns="0" tIns="0" rIns="0" bIns="0" rtlCol="0" anchor="t"/>
           <a:lstStyle/>
           <a:p>
-            <a:pPr indent="0" marL="0">
+            <a:pPr marL="0" indent="0">
               <a:lnSpc>
                 <a:spcPct val="140000"/>
               </a:lnSpc>
@@ -20790,7 +20757,7 @@
             <a:prstDash val="solid"/>
           </a:ln>
           <a:effectLst>
-            <a:outerShdw sx="100000" sy="100000" kx="0" ky="0" algn="bl" rotWithShape="0" blurRad="254000" dist="76200" dir="8100000">
+            <a:outerShdw blurRad="254000" dist="76200" dir="8100000" algn="bl" rotWithShape="0">
               <a:srgbClr val="000000">
                 <a:alpha val="80000"/>
               </a:srgbClr>
@@ -20878,7 +20845,7 @@
             <a:prstDash val="solid"/>
           </a:ln>
           <a:effectLst>
-            <a:outerShdw sx="100000" sy="100000" kx="0" ky="0" algn="bl" rotWithShape="0" blurRad="317500" dist="50800" dir="8100000">
+            <a:outerShdw blurRad="317500" dist="50800" dir="8100000" algn="bl" rotWithShape="0">
               <a:srgbClr val="F0A020">
                 <a:alpha val="40000"/>
               </a:srgbClr>
@@ -20907,7 +20874,7 @@
           <a:bodyPr wrap="square" lIns="0" tIns="0" rIns="0" bIns="0" rtlCol="0" anchor="ctr"/>
           <a:lstStyle/>
           <a:p>
-            <a:pPr algn="ctr" indent="0" marL="0">
+            <a:pPr marL="0" indent="0" algn="ctr">
               <a:buNone/>
             </a:pPr>
             <a:r>
@@ -20939,7 +20906,7 @@
           <a:noFill/>
           <a:ln/>
           <a:effectLst>
-            <a:outerShdw sx="100000" sy="100000" kx="0" ky="0" algn="bl" rotWithShape="0" blurRad="317500" dist="50800" dir="8100000">
+            <a:outerShdw blurRad="317500" dist="50800" dir="8100000" algn="bl" rotWithShape="0">
               <a:srgbClr val="F0A020">
                 <a:alpha val="40000"/>
               </a:srgbClr>
@@ -20950,7 +20917,7 @@
           <a:bodyPr wrap="square" lIns="0" tIns="0" rIns="0" bIns="0" rtlCol="0" anchor="ctr"/>
           <a:lstStyle/>
           <a:p>
-            <a:pPr indent="0" marL="0">
+            <a:pPr marL="0" indent="0">
               <a:buNone/>
             </a:pPr>
             <a:r>
@@ -21014,7 +20981,7 @@
           <a:bodyPr wrap="square" lIns="0" tIns="0" rIns="0" bIns="0" rtlCol="0" anchor="t"/>
           <a:lstStyle/>
           <a:p>
-            <a:pPr indent="0" marL="0">
+            <a:pPr marL="0" indent="0">
               <a:lnSpc>
                 <a:spcPct val="140000"/>
               </a:lnSpc>
@@ -21088,7 +21055,7 @@
             <a:prstDash val="solid"/>
           </a:ln>
           <a:effectLst>
-            <a:outerShdw sx="100000" sy="100000" kx="0" ky="0" algn="bl" rotWithShape="0" blurRad="254000" dist="76200" dir="8100000">
+            <a:outerShdw blurRad="254000" dist="76200" dir="8100000" algn="bl" rotWithShape="0">
               <a:srgbClr val="000000">
                 <a:alpha val="80000"/>
               </a:srgbClr>
@@ -21176,7 +21143,7 @@
             <a:prstDash val="solid"/>
           </a:ln>
           <a:effectLst>
-            <a:outerShdw sx="100000" sy="100000" kx="0" ky="0" algn="bl" rotWithShape="0" blurRad="317500" dist="50800" dir="8100000">
+            <a:outerShdw blurRad="317500" dist="50800" dir="8100000" algn="bl" rotWithShape="0">
               <a:srgbClr val="22D88A">
                 <a:alpha val="40000"/>
               </a:srgbClr>
@@ -21205,7 +21172,7 @@
           <a:bodyPr wrap="square" lIns="0" tIns="0" rIns="0" bIns="0" rtlCol="0" anchor="ctr"/>
           <a:lstStyle/>
           <a:p>
-            <a:pPr algn="ctr" indent="0" marL="0">
+            <a:pPr marL="0" indent="0" algn="ctr">
               <a:buNone/>
             </a:pPr>
             <a:r>
@@ -21237,7 +21204,7 @@
           <a:noFill/>
           <a:ln/>
           <a:effectLst>
-            <a:outerShdw sx="100000" sy="100000" kx="0" ky="0" algn="bl" rotWithShape="0" blurRad="317500" dist="50800" dir="8100000">
+            <a:outerShdw blurRad="317500" dist="50800" dir="8100000" algn="bl" rotWithShape="0">
               <a:srgbClr val="22D88A">
                 <a:alpha val="40000"/>
               </a:srgbClr>
@@ -21248,7 +21215,7 @@
           <a:bodyPr wrap="square" lIns="0" tIns="0" rIns="0" bIns="0" rtlCol="0" anchor="ctr"/>
           <a:lstStyle/>
           <a:p>
-            <a:pPr indent="0" marL="0">
+            <a:pPr marL="0" indent="0">
               <a:buNone/>
             </a:pPr>
             <a:r>
@@ -21312,7 +21279,7 @@
           <a:bodyPr wrap="square" lIns="0" tIns="0" rIns="0" bIns="0" rtlCol="0" anchor="t"/>
           <a:lstStyle/>
           <a:p>
-            <a:pPr indent="0" marL="0">
+            <a:pPr marL="0" indent="0">
               <a:lnSpc>
                 <a:spcPct val="140000"/>
               </a:lnSpc>
@@ -21386,7 +21353,7 @@
             <a:prstDash val="solid"/>
           </a:ln>
           <a:effectLst>
-            <a:outerShdw sx="100000" sy="100000" kx="0" ky="0" algn="bl" rotWithShape="0" blurRad="254000" dist="76200" dir="8100000">
+            <a:outerShdw blurRad="254000" dist="76200" dir="8100000" algn="bl" rotWithShape="0">
               <a:srgbClr val="000000">
                 <a:alpha val="80000"/>
               </a:srgbClr>
@@ -21474,7 +21441,7 @@
             <a:prstDash val="solid"/>
           </a:ln>
           <a:effectLst>
-            <a:outerShdw sx="100000" sy="100000" kx="0" ky="0" algn="bl" rotWithShape="0" blurRad="317500" dist="50800" dir="8100000">
+            <a:outerShdw blurRad="317500" dist="50800" dir="8100000" algn="bl" rotWithShape="0">
               <a:srgbClr val="9B6FF0">
                 <a:alpha val="40000"/>
               </a:srgbClr>
@@ -21503,7 +21470,7 @@
           <a:bodyPr wrap="square" lIns="0" tIns="0" rIns="0" bIns="0" rtlCol="0" anchor="ctr"/>
           <a:lstStyle/>
           <a:p>
-            <a:pPr algn="ctr" indent="0" marL="0">
+            <a:pPr marL="0" indent="0" algn="ctr">
               <a:buNone/>
             </a:pPr>
             <a:r>
@@ -21535,7 +21502,7 @@
           <a:noFill/>
           <a:ln/>
           <a:effectLst>
-            <a:outerShdw sx="100000" sy="100000" kx="0" ky="0" algn="bl" rotWithShape="0" blurRad="317500" dist="50800" dir="8100000">
+            <a:outerShdw blurRad="317500" dist="50800" dir="8100000" algn="bl" rotWithShape="0">
               <a:srgbClr val="9B6FF0">
                 <a:alpha val="40000"/>
               </a:srgbClr>
@@ -21546,7 +21513,7 @@
           <a:bodyPr wrap="square" lIns="0" tIns="0" rIns="0" bIns="0" rtlCol="0" anchor="ctr"/>
           <a:lstStyle/>
           <a:p>
-            <a:pPr indent="0" marL="0">
+            <a:pPr marL="0" indent="0">
               <a:buNone/>
             </a:pPr>
             <a:r>
@@ -21610,7 +21577,7 @@
           <a:bodyPr wrap="square" lIns="0" tIns="0" rIns="0" bIns="0" rtlCol="0" anchor="t"/>
           <a:lstStyle/>
           <a:p>
-            <a:pPr indent="0" marL="0">
+            <a:pPr marL="0" indent="0">
               <a:lnSpc>
                 <a:spcPct val="140000"/>
               </a:lnSpc>
@@ -21640,7 +21607,7 @@
 </file>
 
 <file path=ppt/slides/slide20.xml><?xml version="1.0" encoding="utf-8"?>
-<p:sld xmlns:a="http://schemas.openxmlformats.org/drawingml/2006/main" xmlns:p="http://schemas.openxmlformats.org/presentationml/2006/main" xmlns:r="http://schemas.openxmlformats.org/officeDocument/2006/relationships">
+<p:sld xmlns:a="http://schemas.openxmlformats.org/drawingml/2006/main" xmlns:r="http://schemas.openxmlformats.org/officeDocument/2006/relationships" xmlns:p="http://schemas.openxmlformats.org/presentationml/2006/main">
   <p:cSld>
     <p:bg>
       <p:bgPr>
@@ -21656,7 +21623,14 @@
         <p:cNvGrpSpPr/>
         <p:nvPr/>
       </p:nvGrpSpPr>
-      <p:grpSpPr/>
+      <p:grpSpPr>
+        <a:xfrm>
+          <a:off x="0" y="0"/>
+          <a:ext cx="0" cy="0"/>
+          <a:chOff x="0" y="0"/>
+          <a:chExt cx="0" cy="0"/>
+        </a:xfrm>
+      </p:grpSpPr>
       <p:sp>
         <p:nvSpPr>
           <p:cNvPr id="2" name="TextBox 1"/>
@@ -21772,7 +21746,7 @@
 </file>
 
 <file path=ppt/slides/slide21.xml><?xml version="1.0" encoding="utf-8"?>
-<p:sld xmlns:a="http://schemas.openxmlformats.org/drawingml/2006/main" xmlns:p="http://schemas.openxmlformats.org/presentationml/2006/main" xmlns:r="http://schemas.openxmlformats.org/officeDocument/2006/relationships">
+<p:sld xmlns:a="http://schemas.openxmlformats.org/drawingml/2006/main" xmlns:r="http://schemas.openxmlformats.org/officeDocument/2006/relationships" xmlns:p="http://schemas.openxmlformats.org/presentationml/2006/main">
   <p:cSld>
     <p:bg>
       <p:bgPr>
@@ -21788,7 +21762,14 @@
         <p:cNvGrpSpPr/>
         <p:nvPr/>
       </p:nvGrpSpPr>
-      <p:grpSpPr/>
+      <p:grpSpPr>
+        <a:xfrm>
+          <a:off x="0" y="0"/>
+          <a:ext cx="0" cy="0"/>
+          <a:chOff x="0" y="0"/>
+          <a:chExt cx="0" cy="0"/>
+        </a:xfrm>
+      </p:grpSpPr>
       <p:sp>
         <p:nvSpPr>
           <p:cNvPr id="2" name="TextBox 1"/>
@@ -21832,8 +21813,8 @@
         </p:nvSpPr>
         <p:spPr>
           <a:xfrm>
-            <a:off x="457200" y="1645920"/>
-            <a:ext cx="10972800" cy="4572000"/>
+            <a:off x="457200" y="1050699"/>
+            <a:ext cx="4632385" cy="400110"/>
           </a:xfrm>
           <a:prstGeom prst="rect">
             <a:avLst/>
@@ -21856,6 +21837,38 @@
             <a:r>
               <a:t>Ready for Live Demonstration &amp; Questions</a:t>
             </a:r>
+          </a:p>
+        </p:txBody>
+      </p:sp>
+      <p:sp>
+        <p:nvSpPr>
+          <p:cNvPr id="4" name="TextBox 3">
+            <a:extLst>
+              <a:ext uri="{FF2B5EF4-FFF2-40B4-BE49-F238E27FC236}">
+                <a16:creationId xmlns:a16="http://schemas.microsoft.com/office/drawing/2014/main" id="{26809711-42DD-A48F-C0DD-2097EDD76EB6}"/>
+              </a:ext>
+            </a:extLst>
+          </p:cNvPr>
+          <p:cNvSpPr txBox="1"/>
+          <p:nvPr/>
+        </p:nvSpPr>
+        <p:spPr>
+          <a:xfrm>
+            <a:off x="5637362" y="2971800"/>
+            <a:ext cx="914400" cy="914400"/>
+          </a:xfrm>
+          <a:prstGeom prst="rect">
+            <a:avLst/>
+          </a:prstGeom>
+          <a:noFill/>
+        </p:spPr>
+        <p:txBody>
+          <a:bodyPr wrap="square" rtlCol="0">
+            <a:spAutoFit/>
+          </a:bodyPr>
+          <a:lstStyle/>
+          <a:p>
+            <a:endParaRPr lang="en-IN" dirty="0"/>
           </a:p>
         </p:txBody>
       </p:sp>
@@ -21875,6 +21888,7 @@
         <a:solidFill>
           <a:srgbClr val="030B16"/>
         </a:solidFill>
+        <a:effectLst/>
       </p:bgPr>
     </p:bg>
     <p:spTree>
@@ -22007,9 +22021,7 @@
             <a:ext cx="594360" cy="594360"/>
           </a:xfrm>
           <a:prstGeom prst="rect">
-            <a:avLst>
-              <a:gd name="adj" fmla="val 12308"/>
-            </a:avLst>
+            <a:avLst/>
           </a:prstGeom>
           <a:solidFill>
             <a:srgbClr val="F0A020">
@@ -22023,7 +22035,7 @@
             <a:prstDash val="solid"/>
           </a:ln>
           <a:effectLst>
-            <a:outerShdw sx="100000" sy="100000" kx="0" ky="0" algn="bl" rotWithShape="0" blurRad="317500" dist="50800" dir="8100000">
+            <a:outerShdw blurRad="317500" dist="50800" dir="8100000" algn="bl" rotWithShape="0">
               <a:srgbClr val="F0A020">
                 <a:alpha val="40000"/>
               </a:srgbClr>
@@ -22052,7 +22064,7 @@
           <a:bodyPr wrap="square" lIns="0" tIns="0" rIns="0" bIns="0" rtlCol="0" anchor="ctr"/>
           <a:lstStyle/>
           <a:p>
-            <a:pPr algn="ctr" indent="0" marL="0">
+            <a:pPr marL="0" indent="0" algn="ctr">
               <a:buNone/>
             </a:pPr>
             <a:r>
@@ -22084,7 +22096,7 @@
           <a:noFill/>
           <a:ln/>
           <a:effectLst>
-            <a:outerShdw sx="100000" sy="100000" kx="0" ky="0" algn="bl" rotWithShape="0" blurRad="127000" dist="38100" dir="8100000">
+            <a:outerShdw blurRad="127000" dist="38100" dir="8100000" algn="bl" rotWithShape="0">
               <a:srgbClr val="000000">
                 <a:alpha val="50000"/>
               </a:srgbClr>
@@ -22095,7 +22107,7 @@
           <a:bodyPr wrap="square" lIns="0" tIns="0" rIns="0" bIns="0" rtlCol="0" anchor="ctr"/>
           <a:lstStyle/>
           <a:p>
-            <a:pPr indent="0" marL="0">
+            <a:pPr marL="0" indent="0">
               <a:buNone/>
             </a:pPr>
             <a:r>
@@ -22161,11 +22173,11 @@
           <a:bodyPr wrap="square" lIns="0" tIns="0" rIns="0" bIns="0" rtlCol="0" anchor="ctr"/>
           <a:lstStyle/>
           <a:p>
-            <a:pPr algn="ctr" indent="0" marL="0">
-              <a:buNone/>
-            </a:pPr>
-            <a:r>
-              <a:rPr lang="en-US" sz="700" b="1" spc="150" kern="0" dirty="0">
+            <a:pPr marL="0" indent="0" algn="ctr">
+              <a:buNone/>
+            </a:pPr>
+            <a:r>
+              <a:rPr lang="en-US" sz="700" b="1" kern="0" spc="150" dirty="0">
                 <a:solidFill>
                   <a:srgbClr val="F0A020"/>
                 </a:solidFill>
@@ -22232,7 +22244,7 @@
             <a:prstDash val="solid"/>
           </a:ln>
           <a:effectLst>
-            <a:outerShdw sx="100000" sy="100000" kx="0" ky="0" algn="bl" rotWithShape="0" blurRad="254000" dist="76200" dir="8100000">
+            <a:outerShdw blurRad="254000" dist="76200" dir="8100000" algn="bl" rotWithShape="0">
               <a:srgbClr val="000000">
                 <a:alpha val="80000"/>
               </a:srgbClr>
@@ -22417,7 +22429,7 @@
           <a:bodyPr wrap="square" lIns="0" tIns="0" rIns="0" bIns="0" rtlCol="0" anchor="ctr"/>
           <a:lstStyle/>
           <a:p>
-            <a:pPr algn="ctr" indent="0" marL="0">
+            <a:pPr marL="0" indent="0" algn="ctr">
               <a:buNone/>
             </a:pPr>
             <a:r>
@@ -22456,7 +22468,7 @@
           <a:bodyPr wrap="square" lIns="0" tIns="0" rIns="0" bIns="0" rtlCol="0" anchor="ctr"/>
           <a:lstStyle/>
           <a:p>
-            <a:pPr indent="0" marL="0">
+            <a:pPr marL="0" indent="0">
               <a:buNone/>
             </a:pPr>
             <a:r>
@@ -22495,7 +22507,7 @@
           <a:bodyPr wrap="square" lIns="0" tIns="0" rIns="0" bIns="0" rtlCol="0" anchor="ctr"/>
           <a:lstStyle/>
           <a:p>
-            <a:pPr indent="0" marL="0">
+            <a:pPr marL="0" indent="0">
               <a:buNone/>
             </a:pPr>
             <a:r>
@@ -22534,7 +22546,7 @@
           <a:bodyPr wrap="square" lIns="0" tIns="0" rIns="0" bIns="0" rtlCol="0" anchor="ctr"/>
           <a:lstStyle/>
           <a:p>
-            <a:pPr algn="r" indent="0" marL="0">
+            <a:pPr marL="0" indent="0" algn="r">
               <a:buNone/>
             </a:pPr>
             <a:r>
@@ -22575,7 +22587,7 @@
           <a:bodyPr wrap="square" lIns="0" tIns="0" rIns="0" bIns="0" rtlCol="0" anchor="ctr"/>
           <a:lstStyle/>
           <a:p>
-            <a:pPr indent="0" marL="0">
+            <a:pPr marL="0" indent="0">
               <a:buNone/>
             </a:pPr>
             <a:r>
@@ -22614,7 +22626,7 @@
           <a:bodyPr wrap="square" lIns="0" tIns="0" rIns="0" bIns="0" rtlCol="0" anchor="ctr"/>
           <a:lstStyle/>
           <a:p>
-            <a:pPr algn="r" indent="0" marL="0">
+            <a:pPr marL="0" indent="0" algn="r">
               <a:buNone/>
             </a:pPr>
             <a:r>
@@ -22655,7 +22667,7 @@
           <a:bodyPr wrap="square" lIns="0" tIns="0" rIns="0" bIns="0" rtlCol="0" anchor="ctr"/>
           <a:lstStyle/>
           <a:p>
-            <a:pPr indent="0" marL="0">
+            <a:pPr marL="0" indent="0">
               <a:buNone/>
             </a:pPr>
             <a:r>
@@ -22694,7 +22706,7 @@
           <a:bodyPr wrap="square" lIns="0" tIns="0" rIns="0" bIns="0" rtlCol="0" anchor="ctr"/>
           <a:lstStyle/>
           <a:p>
-            <a:pPr algn="r" indent="0" marL="0">
+            <a:pPr marL="0" indent="0" algn="r">
               <a:buNone/>
             </a:pPr>
             <a:r>
@@ -22735,7 +22747,7 @@
           <a:bodyPr wrap="square" lIns="0" tIns="0" rIns="0" bIns="0" rtlCol="0" anchor="ctr"/>
           <a:lstStyle/>
           <a:p>
-            <a:pPr indent="0" marL="0">
+            <a:pPr marL="0" indent="0">
               <a:buNone/>
             </a:pPr>
             <a:r>
@@ -22774,7 +22786,7 @@
           <a:bodyPr wrap="square" lIns="0" tIns="0" rIns="0" bIns="0" rtlCol="0" anchor="ctr"/>
           <a:lstStyle/>
           <a:p>
-            <a:pPr algn="r" indent="0" marL="0">
+            <a:pPr marL="0" indent="0" algn="r">
               <a:buNone/>
             </a:pPr>
             <a:r>
@@ -22815,7 +22827,7 @@
           <a:bodyPr wrap="square" lIns="0" tIns="0" rIns="0" bIns="0" rtlCol="0" anchor="ctr"/>
           <a:lstStyle/>
           <a:p>
-            <a:pPr indent="0" marL="0">
+            <a:pPr marL="0" indent="0">
               <a:buNone/>
             </a:pPr>
             <a:r>
@@ -22854,7 +22866,7 @@
           <a:bodyPr wrap="square" lIns="0" tIns="0" rIns="0" bIns="0" rtlCol="0" anchor="ctr"/>
           <a:lstStyle/>
           <a:p>
-            <a:pPr algn="r" indent="0" marL="0">
+            <a:pPr marL="0" indent="0" algn="r">
               <a:buNone/>
             </a:pPr>
             <a:r>
@@ -22895,7 +22907,7 @@
           <a:bodyPr wrap="square" lIns="0" tIns="0" rIns="0" bIns="0" rtlCol="0" anchor="ctr"/>
           <a:lstStyle/>
           <a:p>
-            <a:pPr indent="0" marL="0">
+            <a:pPr marL="0" indent="0">
               <a:buNone/>
             </a:pPr>
             <a:r>
@@ -22934,7 +22946,7 @@
           <a:bodyPr wrap="square" lIns="0" tIns="0" rIns="0" bIns="0" rtlCol="0" anchor="ctr"/>
           <a:lstStyle/>
           <a:p>
-            <a:pPr algn="r" indent="0" marL="0">
+            <a:pPr marL="0" indent="0" algn="r">
               <a:buNone/>
             </a:pPr>
             <a:r>
@@ -22975,7 +22987,7 @@
           <a:bodyPr wrap="square" lIns="0" tIns="0" rIns="0" bIns="0" rtlCol="0" anchor="ctr"/>
           <a:lstStyle/>
           <a:p>
-            <a:pPr indent="0" marL="0">
+            <a:pPr marL="0" indent="0">
               <a:buNone/>
             </a:pPr>
             <a:r>
@@ -23014,7 +23026,7 @@
           <a:bodyPr wrap="square" lIns="0" tIns="0" rIns="0" bIns="0" rtlCol="0" anchor="ctr"/>
           <a:lstStyle/>
           <a:p>
-            <a:pPr algn="r" indent="0" marL="0">
+            <a:pPr marL="0" indent="0" algn="r">
               <a:buNone/>
             </a:pPr>
             <a:r>
@@ -23055,7 +23067,7 @@
           <a:bodyPr wrap="square" lIns="0" tIns="0" rIns="0" bIns="0" rtlCol="0" anchor="ctr"/>
           <a:lstStyle/>
           <a:p>
-            <a:pPr indent="0" marL="0">
+            <a:pPr marL="0" indent="0">
               <a:buNone/>
             </a:pPr>
             <a:r>
@@ -23094,7 +23106,7 @@
           <a:bodyPr wrap="square" lIns="0" tIns="0" rIns="0" bIns="0" rtlCol="0" anchor="ctr"/>
           <a:lstStyle/>
           <a:p>
-            <a:pPr algn="r" indent="0" marL="0">
+            <a:pPr marL="0" indent="0" algn="r">
               <a:buNone/>
             </a:pPr>
             <a:r>
@@ -23135,7 +23147,7 @@
           <a:bodyPr wrap="square" lIns="0" tIns="0" rIns="0" bIns="0" rtlCol="0" anchor="ctr"/>
           <a:lstStyle/>
           <a:p>
-            <a:pPr indent="0" marL="0">
+            <a:pPr marL="0" indent="0">
               <a:buNone/>
             </a:pPr>
             <a:r>
@@ -23174,7 +23186,7 @@
           <a:bodyPr wrap="square" lIns="0" tIns="0" rIns="0" bIns="0" rtlCol="0" anchor="ctr"/>
           <a:lstStyle/>
           <a:p>
-            <a:pPr algn="r" indent="0" marL="0">
+            <a:pPr marL="0" indent="0" algn="r">
               <a:buNone/>
             </a:pPr>
             <a:r>
@@ -23215,7 +23227,7 @@
           <a:bodyPr wrap="square" lIns="0" tIns="0" rIns="0" bIns="0" rtlCol="0" anchor="ctr"/>
           <a:lstStyle/>
           <a:p>
-            <a:pPr indent="0" marL="0">
+            <a:pPr marL="0" indent="0">
               <a:buNone/>
             </a:pPr>
             <a:r>
@@ -23254,7 +23266,7 @@
           <a:bodyPr wrap="square" lIns="0" tIns="0" rIns="0" bIns="0" rtlCol="0" anchor="ctr"/>
           <a:lstStyle/>
           <a:p>
-            <a:pPr algn="r" indent="0" marL="0">
+            <a:pPr marL="0" indent="0" algn="r">
               <a:buNone/>
             </a:pPr>
             <a:r>
@@ -23295,7 +23307,7 @@
           <a:bodyPr wrap="square" lIns="0" tIns="0" rIns="0" bIns="0" rtlCol="0" anchor="ctr"/>
           <a:lstStyle/>
           <a:p>
-            <a:pPr indent="0" marL="0">
+            <a:pPr marL="0" indent="0">
               <a:buNone/>
             </a:pPr>
             <a:r>
@@ -23334,7 +23346,7 @@
           <a:bodyPr wrap="square" lIns="0" tIns="0" rIns="0" bIns="0" rtlCol="0" anchor="ctr"/>
           <a:lstStyle/>
           <a:p>
-            <a:pPr algn="r" indent="0" marL="0">
+            <a:pPr marL="0" indent="0" algn="r">
               <a:buNone/>
             </a:pPr>
             <a:r>
@@ -23375,7 +23387,7 @@
           <a:bodyPr wrap="square" lIns="0" tIns="0" rIns="0" bIns="0" rtlCol="0" anchor="ctr"/>
           <a:lstStyle/>
           <a:p>
-            <a:pPr indent="0" marL="0">
+            <a:pPr marL="0" indent="0">
               <a:buNone/>
             </a:pPr>
             <a:r>
@@ -23414,7 +23426,7 @@
           <a:bodyPr wrap="square" lIns="0" tIns="0" rIns="0" bIns="0" rtlCol="0" anchor="ctr"/>
           <a:lstStyle/>
           <a:p>
-            <a:pPr algn="r" indent="0" marL="0">
+            <a:pPr marL="0" indent="0" algn="r">
               <a:buNone/>
             </a:pPr>
             <a:r>
@@ -23455,7 +23467,7 @@
           <a:bodyPr wrap="square" lIns="0" tIns="0" rIns="0" bIns="0" rtlCol="0" anchor="ctr"/>
           <a:lstStyle/>
           <a:p>
-            <a:pPr indent="0" marL="0">
+            <a:pPr marL="0" indent="0">
               <a:buNone/>
             </a:pPr>
             <a:r>
@@ -23494,7 +23506,7 @@
           <a:bodyPr wrap="square" lIns="0" tIns="0" rIns="0" bIns="0" rtlCol="0" anchor="ctr"/>
           <a:lstStyle/>
           <a:p>
-            <a:pPr algn="r" indent="0" marL="0">
+            <a:pPr marL="0" indent="0" algn="r">
               <a:buNone/>
             </a:pPr>
             <a:r>
@@ -23535,7 +23547,7 @@
           <a:bodyPr wrap="square" lIns="0" tIns="0" rIns="0" bIns="0" rtlCol="0" anchor="ctr"/>
           <a:lstStyle/>
           <a:p>
-            <a:pPr indent="0" marL="0">
+            <a:pPr marL="0" indent="0">
               <a:buNone/>
             </a:pPr>
             <a:r>
@@ -23574,7 +23586,7 @@
           <a:bodyPr wrap="square" lIns="0" tIns="0" rIns="0" bIns="0" rtlCol="0" anchor="ctr"/>
           <a:lstStyle/>
           <a:p>
-            <a:pPr algn="r" indent="0" marL="0">
+            <a:pPr marL="0" indent="0" algn="r">
               <a:buNone/>
             </a:pPr>
             <a:r>
@@ -23615,7 +23627,7 @@
           <a:bodyPr wrap="square" lIns="0" tIns="0" rIns="0" bIns="0" rtlCol="0" anchor="ctr"/>
           <a:lstStyle/>
           <a:p>
-            <a:pPr indent="0" marL="0">
+            <a:pPr marL="0" indent="0">
               <a:buNone/>
             </a:pPr>
             <a:r>
@@ -23654,7 +23666,7 @@
           <a:bodyPr wrap="square" lIns="0" tIns="0" rIns="0" bIns="0" rtlCol="0" anchor="ctr"/>
           <a:lstStyle/>
           <a:p>
-            <a:pPr algn="r" indent="0" marL="0">
+            <a:pPr marL="0" indent="0" algn="r">
               <a:buNone/>
             </a:pPr>
             <a:r>
@@ -23695,7 +23707,7 @@
           <a:bodyPr wrap="square" lIns="0" tIns="0" rIns="0" bIns="0" rtlCol="0" anchor="ctr"/>
           <a:lstStyle/>
           <a:p>
-            <a:pPr indent="0" marL="0">
+            <a:pPr marL="0" indent="0">
               <a:buNone/>
             </a:pPr>
             <a:r>
@@ -23734,7 +23746,7 @@
           <a:bodyPr wrap="square" lIns="0" tIns="0" rIns="0" bIns="0" rtlCol="0" anchor="ctr"/>
           <a:lstStyle/>
           <a:p>
-            <a:pPr algn="r" indent="0" marL="0">
+            <a:pPr marL="0" indent="0" algn="r">
               <a:buNone/>
             </a:pPr>
             <a:r>
@@ -23775,7 +23787,7 @@
           <a:bodyPr wrap="square" lIns="0" tIns="0" rIns="0" bIns="0" rtlCol="0" anchor="ctr"/>
           <a:lstStyle/>
           <a:p>
-            <a:pPr indent="0" marL="0">
+            <a:pPr marL="0" indent="0">
               <a:buNone/>
             </a:pPr>
             <a:r>
@@ -23814,7 +23826,7 @@
           <a:bodyPr wrap="square" lIns="0" tIns="0" rIns="0" bIns="0" rtlCol="0" anchor="ctr"/>
           <a:lstStyle/>
           <a:p>
-            <a:pPr algn="r" indent="0" marL="0">
+            <a:pPr marL="0" indent="0" algn="r">
               <a:buNone/>
             </a:pPr>
             <a:r>
@@ -23887,7 +23899,7 @@
             <a:prstDash val="solid"/>
           </a:ln>
           <a:effectLst>
-            <a:outerShdw sx="100000" sy="100000" kx="0" ky="0" algn="bl" rotWithShape="0" blurRad="254000" dist="76200" dir="8100000">
+            <a:outerShdw blurRad="254000" dist="76200" dir="8100000" algn="bl" rotWithShape="0">
               <a:srgbClr val="000000">
                 <a:alpha val="80000"/>
               </a:srgbClr>
@@ -23970,11 +23982,11 @@
           <a:bodyPr wrap="square" lIns="0" tIns="0" rIns="0" bIns="0" rtlCol="0" anchor="ctr"/>
           <a:lstStyle/>
           <a:p>
-            <a:pPr indent="0" marL="0">
-              <a:buNone/>
-            </a:pPr>
-            <a:r>
-              <a:rPr lang="en-US" sz="700" b="1" spc="300" kern="0" dirty="0">
+            <a:pPr marL="0" indent="0">
+              <a:buNone/>
+            </a:pPr>
+            <a:r>
+              <a:rPr lang="en-US" sz="700" b="1" kern="0" spc="300" dirty="0">
                 <a:solidFill>
                   <a:srgbClr val="00D2BE"/>
                 </a:solidFill>
@@ -24034,7 +24046,7 @@
           <a:bodyPr wrap="square" lIns="0" tIns="0" rIns="0" bIns="0" rtlCol="0" anchor="ctr"/>
           <a:lstStyle/>
           <a:p>
-            <a:pPr indent="0" marL="0">
+            <a:pPr marL="0" indent="0">
               <a:buNone/>
             </a:pPr>
             <a:r>
@@ -24073,7 +24085,7 @@
           <a:bodyPr wrap="square" lIns="0" tIns="0" rIns="0" bIns="0" rtlCol="0" anchor="ctr"/>
           <a:lstStyle/>
           <a:p>
-            <a:pPr indent="0" marL="0">
+            <a:pPr marL="0" indent="0">
               <a:buNone/>
             </a:pPr>
             <a:r>
@@ -24112,7 +24124,7 @@
           <a:bodyPr wrap="square" lIns="0" tIns="0" rIns="0" bIns="0" rtlCol="0" anchor="ctr"/>
           <a:lstStyle/>
           <a:p>
-            <a:pPr indent="0" marL="0">
+            <a:pPr marL="0" indent="0">
               <a:buNone/>
             </a:pPr>
             <a:r>
@@ -24151,7 +24163,7 @@
           <a:bodyPr wrap="square" lIns="0" tIns="0" rIns="0" bIns="0" rtlCol="0" anchor="ctr"/>
           <a:lstStyle/>
           <a:p>
-            <a:pPr indent="0" marL="0">
+            <a:pPr marL="0" indent="0">
               <a:buNone/>
             </a:pPr>
             <a:r>
@@ -24190,7 +24202,7 @@
           <a:bodyPr wrap="square" lIns="0" tIns="0" rIns="0" bIns="0" rtlCol="0" anchor="ctr"/>
           <a:lstStyle/>
           <a:p>
-            <a:pPr indent="0" marL="0">
+            <a:pPr marL="0" indent="0">
               <a:buNone/>
             </a:pPr>
             <a:r>
@@ -24229,7 +24241,7 @@
           <a:bodyPr wrap="square" lIns="0" tIns="0" rIns="0" bIns="0" rtlCol="0" anchor="ctr"/>
           <a:lstStyle/>
           <a:p>
-            <a:pPr indent="0" marL="0">
+            <a:pPr marL="0" indent="0">
               <a:buNone/>
             </a:pPr>
             <a:r>
@@ -24300,7 +24312,7 @@
             <a:prstDash val="solid"/>
           </a:ln>
           <a:effectLst>
-            <a:outerShdw sx="100000" sy="100000" kx="0" ky="0" algn="bl" rotWithShape="0" blurRad="254000" dist="76200" dir="8100000">
+            <a:outerShdw blurRad="254000" dist="76200" dir="8100000" algn="bl" rotWithShape="0">
               <a:srgbClr val="000000">
                 <a:alpha val="80000"/>
               </a:srgbClr>
@@ -24383,11 +24395,11 @@
           <a:bodyPr wrap="square" lIns="0" tIns="0" rIns="0" bIns="0" rtlCol="0" anchor="ctr"/>
           <a:lstStyle/>
           <a:p>
-            <a:pPr indent="0" marL="0">
-              <a:buNone/>
-            </a:pPr>
-            <a:r>
-              <a:rPr lang="en-US" sz="700" b="1" spc="300" kern="0" dirty="0">
+            <a:pPr marL="0" indent="0">
+              <a:buNone/>
+            </a:pPr>
+            <a:r>
+              <a:rPr lang="en-US" sz="700" b="1" kern="0" spc="300" dirty="0">
                 <a:solidFill>
                   <a:srgbClr val="22D88A"/>
                 </a:solidFill>
@@ -24447,7 +24459,7 @@
           <a:bodyPr wrap="square" lIns="0" tIns="0" rIns="0" bIns="0" rtlCol="0" anchor="ctr"/>
           <a:lstStyle/>
           <a:p>
-            <a:pPr indent="0" marL="0">
+            <a:pPr marL="0" indent="0">
               <a:buNone/>
             </a:pPr>
             <a:r>
@@ -24486,7 +24498,7 @@
           <a:bodyPr wrap="square" lIns="0" tIns="0" rIns="0" bIns="0" rtlCol="0" anchor="ctr"/>
           <a:lstStyle/>
           <a:p>
-            <a:pPr indent="0" marL="0">
+            <a:pPr marL="0" indent="0">
               <a:buNone/>
             </a:pPr>
             <a:r>
@@ -24525,7 +24537,7 @@
           <a:bodyPr wrap="square" lIns="0" tIns="0" rIns="0" bIns="0" rtlCol="0" anchor="ctr"/>
           <a:lstStyle/>
           <a:p>
-            <a:pPr indent="0" marL="0">
+            <a:pPr marL="0" indent="0">
               <a:buNone/>
             </a:pPr>
             <a:r>
@@ -24564,7 +24576,7 @@
           <a:bodyPr wrap="square" lIns="0" tIns="0" rIns="0" bIns="0" rtlCol="0" anchor="ctr"/>
           <a:lstStyle/>
           <a:p>
-            <a:pPr indent="0" marL="0">
+            <a:pPr marL="0" indent="0">
               <a:buNone/>
             </a:pPr>
             <a:r>
@@ -24603,7 +24615,7 @@
           <a:bodyPr wrap="square" lIns="0" tIns="0" rIns="0" bIns="0" rtlCol="0" anchor="ctr"/>
           <a:lstStyle/>
           <a:p>
-            <a:pPr indent="0" marL="0">
+            <a:pPr marL="0" indent="0">
               <a:buNone/>
             </a:pPr>
             <a:r>
@@ -24642,7 +24654,7 @@
           <a:bodyPr wrap="square" lIns="0" tIns="0" rIns="0" bIns="0" rtlCol="0" anchor="ctr"/>
           <a:lstStyle/>
           <a:p>
-            <a:pPr indent="0" marL="0">
+            <a:pPr marL="0" indent="0">
               <a:buNone/>
             </a:pPr>
             <a:r>
@@ -24713,7 +24725,7 @@
             <a:prstDash val="solid"/>
           </a:ln>
           <a:effectLst>
-            <a:outerShdw sx="100000" sy="100000" kx="0" ky="0" algn="bl" rotWithShape="0" blurRad="254000" dist="76200" dir="8100000">
+            <a:outerShdw blurRad="254000" dist="76200" dir="8100000" algn="bl" rotWithShape="0">
               <a:srgbClr val="000000">
                 <a:alpha val="80000"/>
               </a:srgbClr>
@@ -24796,11 +24808,11 @@
           <a:bodyPr wrap="square" lIns="0" tIns="0" rIns="0" bIns="0" rtlCol="0" anchor="ctr"/>
           <a:lstStyle/>
           <a:p>
-            <a:pPr indent="0" marL="0">
-              <a:buNone/>
-            </a:pPr>
-            <a:r>
-              <a:rPr lang="en-US" sz="700" b="1" spc="300" kern="0" dirty="0">
+            <a:pPr marL="0" indent="0">
+              <a:buNone/>
+            </a:pPr>
+            <a:r>
+              <a:rPr lang="en-US" sz="700" b="1" kern="0" spc="300" dirty="0">
                 <a:solidFill>
                   <a:srgbClr val="F0A020"/>
                 </a:solidFill>
@@ -24860,7 +24872,7 @@
           <a:bodyPr wrap="square" lIns="0" tIns="0" rIns="0" bIns="0" rtlCol="0" anchor="ctr"/>
           <a:lstStyle/>
           <a:p>
-            <a:pPr indent="0" marL="0">
+            <a:pPr marL="0" indent="0">
               <a:buNone/>
             </a:pPr>
             <a:r>
@@ -24899,7 +24911,7 @@
           <a:bodyPr wrap="square" lIns="0" tIns="0" rIns="0" bIns="0" rtlCol="0" anchor="ctr"/>
           <a:lstStyle/>
           <a:p>
-            <a:pPr indent="0" marL="0">
+            <a:pPr marL="0" indent="0">
               <a:buNone/>
             </a:pPr>
             <a:r>
@@ -24938,7 +24950,7 @@
           <a:bodyPr wrap="square" lIns="0" tIns="0" rIns="0" bIns="0" rtlCol="0" anchor="ctr"/>
           <a:lstStyle/>
           <a:p>
-            <a:pPr indent="0" marL="0">
+            <a:pPr marL="0" indent="0">
               <a:buNone/>
             </a:pPr>
             <a:r>
@@ -24977,7 +24989,7 @@
           <a:bodyPr wrap="square" lIns="0" tIns="0" rIns="0" bIns="0" rtlCol="0" anchor="ctr"/>
           <a:lstStyle/>
           <a:p>
-            <a:pPr indent="0" marL="0">
+            <a:pPr marL="0" indent="0">
               <a:buNone/>
             </a:pPr>
             <a:r>
@@ -25016,7 +25028,7 @@
           <a:bodyPr wrap="square" lIns="0" tIns="0" rIns="0" bIns="0" rtlCol="0" anchor="ctr"/>
           <a:lstStyle/>
           <a:p>
-            <a:pPr indent="0" marL="0">
+            <a:pPr marL="0" indent="0">
               <a:buNone/>
             </a:pPr>
             <a:r>
@@ -25055,7 +25067,7 @@
           <a:bodyPr wrap="square" lIns="0" tIns="0" rIns="0" bIns="0" rtlCol="0" anchor="ctr"/>
           <a:lstStyle/>
           <a:p>
-            <a:pPr indent="0" marL="0">
+            <a:pPr marL="0" indent="0">
               <a:buNone/>
             </a:pPr>
             <a:r>
@@ -25126,7 +25138,7 @@
             <a:prstDash val="solid"/>
           </a:ln>
           <a:effectLst>
-            <a:outerShdw sx="100000" sy="100000" kx="0" ky="0" algn="bl" rotWithShape="0" blurRad="254000" dist="76200" dir="8100000">
+            <a:outerShdw blurRad="254000" dist="76200" dir="8100000" algn="bl" rotWithShape="0">
               <a:srgbClr val="000000">
                 <a:alpha val="80000"/>
               </a:srgbClr>
@@ -25209,11 +25221,11 @@
           <a:bodyPr wrap="square" lIns="0" tIns="0" rIns="0" bIns="0" rtlCol="0" anchor="ctr"/>
           <a:lstStyle/>
           <a:p>
-            <a:pPr indent="0" marL="0">
-              <a:buNone/>
-            </a:pPr>
-            <a:r>
-              <a:rPr lang="en-US" sz="700" b="1" spc="300" kern="0" dirty="0">
+            <a:pPr marL="0" indent="0">
+              <a:buNone/>
+            </a:pPr>
+            <a:r>
+              <a:rPr lang="en-US" sz="700" b="1" kern="0" spc="300" dirty="0">
                 <a:solidFill>
                   <a:srgbClr val="9B6FF0"/>
                 </a:solidFill>
@@ -25273,7 +25285,7 @@
           <a:bodyPr wrap="square" lIns="0" tIns="0" rIns="0" bIns="0" rtlCol="0" anchor="ctr"/>
           <a:lstStyle/>
           <a:p>
-            <a:pPr indent="0" marL="0">
+            <a:pPr marL="0" indent="0">
               <a:buNone/>
             </a:pPr>
             <a:r>
@@ -25312,7 +25324,7 @@
           <a:bodyPr wrap="square" lIns="0" tIns="0" rIns="0" bIns="0" rtlCol="0" anchor="ctr"/>
           <a:lstStyle/>
           <a:p>
-            <a:pPr indent="0" marL="0">
+            <a:pPr marL="0" indent="0">
               <a:buNone/>
             </a:pPr>
             <a:r>
@@ -25351,7 +25363,7 @@
           <a:bodyPr wrap="square" lIns="0" tIns="0" rIns="0" bIns="0" rtlCol="0" anchor="ctr"/>
           <a:lstStyle/>
           <a:p>
-            <a:pPr indent="0" marL="0">
+            <a:pPr marL="0" indent="0">
               <a:buNone/>
             </a:pPr>
             <a:r>
@@ -25390,7 +25402,7 @@
           <a:bodyPr wrap="square" lIns="0" tIns="0" rIns="0" bIns="0" rtlCol="0" anchor="ctr"/>
           <a:lstStyle/>
           <a:p>
-            <a:pPr indent="0" marL="0">
+            <a:pPr marL="0" indent="0">
               <a:buNone/>
             </a:pPr>
             <a:r>
@@ -25429,7 +25441,7 @@
           <a:bodyPr wrap="square" lIns="0" tIns="0" rIns="0" bIns="0" rtlCol="0" anchor="ctr"/>
           <a:lstStyle/>
           <a:p>
-            <a:pPr indent="0" marL="0">
+            <a:pPr marL="0" indent="0">
               <a:buNone/>
             </a:pPr>
             <a:r>
@@ -25468,7 +25480,7 @@
           <a:bodyPr wrap="square" lIns="0" tIns="0" rIns="0" bIns="0" rtlCol="0" anchor="ctr"/>
           <a:lstStyle/>
           <a:p>
-            <a:pPr indent="0" marL="0">
+            <a:pPr marL="0" indent="0">
               <a:buNone/>
             </a:pPr>
             <a:r>
@@ -25502,6 +25514,7 @@
         <a:solidFill>
           <a:srgbClr val="030B16"/>
         </a:solidFill>
+        <a:effectLst/>
       </p:bgPr>
     </p:bg>
     <p:spTree>
@@ -25634,9 +25647,7 @@
             <a:ext cx="594360" cy="594360"/>
           </a:xfrm>
           <a:prstGeom prst="rect">
-            <a:avLst>
-              <a:gd name="adj" fmla="val 12308"/>
-            </a:avLst>
+            <a:avLst/>
           </a:prstGeom>
           <a:solidFill>
             <a:srgbClr val="22D88A">
@@ -25650,7 +25661,7 @@
             <a:prstDash val="solid"/>
           </a:ln>
           <a:effectLst>
-            <a:outerShdw sx="100000" sy="100000" kx="0" ky="0" algn="bl" rotWithShape="0" blurRad="317500" dist="50800" dir="8100000">
+            <a:outerShdw blurRad="317500" dist="50800" dir="8100000" algn="bl" rotWithShape="0">
               <a:srgbClr val="22D88A">
                 <a:alpha val="40000"/>
               </a:srgbClr>
@@ -25679,7 +25690,7 @@
           <a:bodyPr wrap="square" lIns="0" tIns="0" rIns="0" bIns="0" rtlCol="0" anchor="ctr"/>
           <a:lstStyle/>
           <a:p>
-            <a:pPr algn="ctr" indent="0" marL="0">
+            <a:pPr marL="0" indent="0" algn="ctr">
               <a:buNone/>
             </a:pPr>
             <a:r>
@@ -25711,7 +25722,7 @@
           <a:noFill/>
           <a:ln/>
           <a:effectLst>
-            <a:outerShdw sx="100000" sy="100000" kx="0" ky="0" algn="bl" rotWithShape="0" blurRad="127000" dist="38100" dir="8100000">
+            <a:outerShdw blurRad="127000" dist="38100" dir="8100000" algn="bl" rotWithShape="0">
               <a:srgbClr val="000000">
                 <a:alpha val="50000"/>
               </a:srgbClr>
@@ -25722,7 +25733,7 @@
           <a:bodyPr wrap="square" lIns="0" tIns="0" rIns="0" bIns="0" rtlCol="0" anchor="ctr"/>
           <a:lstStyle/>
           <a:p>
-            <a:pPr indent="0" marL="0">
+            <a:pPr marL="0" indent="0">
               <a:buNone/>
             </a:pPr>
             <a:r>
@@ -25788,11 +25799,11 @@
           <a:bodyPr wrap="square" lIns="0" tIns="0" rIns="0" bIns="0" rtlCol="0" anchor="ctr"/>
           <a:lstStyle/>
           <a:p>
-            <a:pPr algn="ctr" indent="0" marL="0">
-              <a:buNone/>
-            </a:pPr>
-            <a:r>
-              <a:rPr lang="en-US" sz="700" b="1" spc="150" kern="0" dirty="0">
+            <a:pPr marL="0" indent="0" algn="ctr">
+              <a:buNone/>
+            </a:pPr>
+            <a:r>
+              <a:rPr lang="en-US" sz="700" b="1" kern="0" spc="150" dirty="0">
                 <a:solidFill>
                   <a:srgbClr val="22D88A"/>
                 </a:solidFill>
@@ -25859,7 +25870,7 @@
             <a:prstDash val="solid"/>
           </a:ln>
           <a:effectLst>
-            <a:outerShdw sx="100000" sy="100000" kx="0" ky="0" algn="bl" rotWithShape="0" blurRad="254000" dist="76200" dir="8100000">
+            <a:outerShdw blurRad="254000" dist="76200" dir="8100000" algn="bl" rotWithShape="0">
               <a:srgbClr val="000000">
                 <a:alpha val="80000"/>
               </a:srgbClr>
@@ -25965,7 +25976,7 @@
           <a:noFill/>
           <a:ln/>
           <a:effectLst>
-            <a:outerShdw sx="100000" sy="100000" kx="0" ky="0" algn="bl" rotWithShape="0" blurRad="317500" dist="50800" dir="8100000">
+            <a:outerShdw blurRad="317500" dist="50800" dir="8100000" algn="bl" rotWithShape="0">
               <a:srgbClr val="00D2BE">
                 <a:alpha val="40000"/>
               </a:srgbClr>
@@ -25976,7 +25987,7 @@
           <a:bodyPr wrap="square" lIns="0" tIns="0" rIns="0" bIns="0" rtlCol="0" anchor="ctr"/>
           <a:lstStyle/>
           <a:p>
-            <a:pPr indent="0" marL="0">
+            <a:pPr marL="0" indent="0">
               <a:buNone/>
             </a:pPr>
             <a:r>
@@ -26042,7 +26053,7 @@
           <a:bodyPr wrap="square" lIns="0" tIns="0" rIns="0" bIns="0" rtlCol="0" anchor="ctr"/>
           <a:lstStyle/>
           <a:p>
-            <a:pPr indent="0" marL="0">
+            <a:pPr marL="0" indent="0">
               <a:buNone/>
             </a:pPr>
             <a:r>
@@ -26081,7 +26092,7 @@
           <a:bodyPr wrap="square" lIns="0" tIns="0" rIns="0" bIns="0" rtlCol="0" anchor="ctr"/>
           <a:lstStyle/>
           <a:p>
-            <a:pPr indent="0" marL="0">
+            <a:pPr marL="0" indent="0">
               <a:buNone/>
             </a:pPr>
             <a:r>
@@ -26120,7 +26131,7 @@
           <a:bodyPr wrap="square" lIns="0" tIns="0" rIns="0" bIns="0" rtlCol="0" anchor="ctr"/>
           <a:lstStyle/>
           <a:p>
-            <a:pPr indent="0" marL="0">
+            <a:pPr marL="0" indent="0">
               <a:buNone/>
             </a:pPr>
             <a:r>
@@ -26159,7 +26170,7 @@
           <a:bodyPr wrap="square" lIns="0" tIns="0" rIns="0" bIns="0" rtlCol="0" anchor="ctr"/>
           <a:lstStyle/>
           <a:p>
-            <a:pPr indent="0" marL="0">
+            <a:pPr marL="0" indent="0">
               <a:buNone/>
             </a:pPr>
             <a:r>
@@ -26225,7 +26236,7 @@
           <a:bodyPr wrap="square" lIns="0" tIns="0" rIns="0" bIns="0" rtlCol="0" anchor="ctr"/>
           <a:lstStyle/>
           <a:p>
-            <a:pPr indent="0" marL="0">
+            <a:pPr marL="0" indent="0">
               <a:buNone/>
             </a:pPr>
             <a:r>
@@ -26264,7 +26275,7 @@
           <a:bodyPr wrap="square" lIns="0" tIns="0" rIns="0" bIns="0" rtlCol="0" anchor="ctr"/>
           <a:lstStyle/>
           <a:p>
-            <a:pPr indent="0" marL="0">
+            <a:pPr marL="0" indent="0">
               <a:buNone/>
             </a:pPr>
             <a:r>
@@ -26303,7 +26314,7 @@
           <a:bodyPr wrap="square" lIns="0" tIns="0" rIns="0" bIns="0" rtlCol="0" anchor="ctr"/>
           <a:lstStyle/>
           <a:p>
-            <a:pPr indent="0" marL="0">
+            <a:pPr marL="0" indent="0">
               <a:buNone/>
             </a:pPr>
             <a:r>
@@ -26342,7 +26353,7 @@
           <a:bodyPr wrap="square" lIns="0" tIns="0" rIns="0" bIns="0" rtlCol="0" anchor="ctr"/>
           <a:lstStyle/>
           <a:p>
-            <a:pPr indent="0" marL="0">
+            <a:pPr marL="0" indent="0">
               <a:buNone/>
             </a:pPr>
             <a:r>
@@ -26408,7 +26419,7 @@
           <a:bodyPr wrap="square" lIns="0" tIns="0" rIns="0" bIns="0" rtlCol="0" anchor="ctr"/>
           <a:lstStyle/>
           <a:p>
-            <a:pPr indent="0" marL="0">
+            <a:pPr marL="0" indent="0">
               <a:buNone/>
             </a:pPr>
             <a:r>
@@ -26447,7 +26458,7 @@
           <a:bodyPr wrap="square" lIns="0" tIns="0" rIns="0" bIns="0" rtlCol="0" anchor="ctr"/>
           <a:lstStyle/>
           <a:p>
-            <a:pPr indent="0" marL="0">
+            <a:pPr marL="0" indent="0">
               <a:buNone/>
             </a:pPr>
             <a:r>
@@ -26486,7 +26497,7 @@
           <a:bodyPr wrap="square" lIns="0" tIns="0" rIns="0" bIns="0" rtlCol="0" anchor="ctr"/>
           <a:lstStyle/>
           <a:p>
-            <a:pPr indent="0" marL="0">
+            <a:pPr marL="0" indent="0">
               <a:buNone/>
             </a:pPr>
             <a:r>
@@ -26525,7 +26536,7 @@
           <a:bodyPr wrap="square" lIns="0" tIns="0" rIns="0" bIns="0" rtlCol="0" anchor="ctr"/>
           <a:lstStyle/>
           <a:p>
-            <a:pPr indent="0" marL="0">
+            <a:pPr marL="0" indent="0">
               <a:buNone/>
             </a:pPr>
             <a:r>
@@ -26591,7 +26602,7 @@
           <a:bodyPr wrap="square" lIns="0" tIns="0" rIns="0" bIns="0" rtlCol="0" anchor="ctr"/>
           <a:lstStyle/>
           <a:p>
-            <a:pPr indent="0" marL="0">
+            <a:pPr marL="0" indent="0">
               <a:buNone/>
             </a:pPr>
             <a:r>
@@ -26630,7 +26641,7 @@
           <a:bodyPr wrap="square" lIns="0" tIns="0" rIns="0" bIns="0" rtlCol="0" anchor="ctr"/>
           <a:lstStyle/>
           <a:p>
-            <a:pPr indent="0" marL="0">
+            <a:pPr marL="0" indent="0">
               <a:buNone/>
             </a:pPr>
             <a:r>
@@ -26669,7 +26680,7 @@
           <a:bodyPr wrap="square" lIns="0" tIns="0" rIns="0" bIns="0" rtlCol="0" anchor="ctr"/>
           <a:lstStyle/>
           <a:p>
-            <a:pPr indent="0" marL="0">
+            <a:pPr marL="0" indent="0">
               <a:buNone/>
             </a:pPr>
             <a:r>
@@ -26708,7 +26719,7 @@
           <a:bodyPr wrap="square" lIns="0" tIns="0" rIns="0" bIns="0" rtlCol="0" anchor="ctr"/>
           <a:lstStyle/>
           <a:p>
-            <a:pPr indent="0" marL="0">
+            <a:pPr marL="0" indent="0">
               <a:buNone/>
             </a:pPr>
             <a:r>
@@ -26774,7 +26785,7 @@
           <a:bodyPr wrap="square" lIns="0" tIns="0" rIns="0" bIns="0" rtlCol="0" anchor="ctr"/>
           <a:lstStyle/>
           <a:p>
-            <a:pPr indent="0" marL="0">
+            <a:pPr marL="0" indent="0">
               <a:buNone/>
             </a:pPr>
             <a:r>
@@ -26813,7 +26824,7 @@
           <a:bodyPr wrap="square" lIns="0" tIns="0" rIns="0" bIns="0" rtlCol="0" anchor="ctr"/>
           <a:lstStyle/>
           <a:p>
-            <a:pPr indent="0" marL="0">
+            <a:pPr marL="0" indent="0">
               <a:buNone/>
             </a:pPr>
             <a:r>
@@ -26884,7 +26895,7 @@
             <a:prstDash val="solid"/>
           </a:ln>
           <a:effectLst>
-            <a:outerShdw sx="100000" sy="100000" kx="0" ky="0" algn="bl" rotWithShape="0" blurRad="254000" dist="76200" dir="8100000">
+            <a:outerShdw blurRad="254000" dist="76200" dir="8100000" algn="bl" rotWithShape="0">
               <a:srgbClr val="000000">
                 <a:alpha val="80000"/>
               </a:srgbClr>
@@ -26990,7 +27001,7 @@
           <a:noFill/>
           <a:ln/>
           <a:effectLst>
-            <a:outerShdw sx="100000" sy="100000" kx="0" ky="0" algn="bl" rotWithShape="0" blurRad="317500" dist="50800" dir="8100000">
+            <a:outerShdw blurRad="317500" dist="50800" dir="8100000" algn="bl" rotWithShape="0">
               <a:srgbClr val="F0A020">
                 <a:alpha val="40000"/>
               </a:srgbClr>
@@ -27001,7 +27012,7 @@
           <a:bodyPr wrap="square" lIns="0" tIns="0" rIns="0" bIns="0" rtlCol="0" anchor="ctr"/>
           <a:lstStyle/>
           <a:p>
-            <a:pPr indent="0" marL="0">
+            <a:pPr marL="0" indent="0">
               <a:buNone/>
             </a:pPr>
             <a:r>
@@ -27067,7 +27078,7 @@
           <a:bodyPr wrap="square" lIns="0" tIns="0" rIns="0" bIns="0" rtlCol="0" anchor="ctr"/>
           <a:lstStyle/>
           <a:p>
-            <a:pPr indent="0" marL="0">
+            <a:pPr marL="0" indent="0">
               <a:buNone/>
             </a:pPr>
             <a:r>
@@ -27106,7 +27117,7 @@
           <a:bodyPr wrap="square" lIns="0" tIns="0" rIns="0" bIns="0" rtlCol="0" anchor="ctr"/>
           <a:lstStyle/>
           <a:p>
-            <a:pPr indent="0" marL="0">
+            <a:pPr marL="0" indent="0">
               <a:buNone/>
             </a:pPr>
             <a:r>
@@ -27145,7 +27156,7 @@
           <a:bodyPr wrap="square" lIns="0" tIns="0" rIns="0" bIns="0" rtlCol="0" anchor="ctr"/>
           <a:lstStyle/>
           <a:p>
-            <a:pPr indent="0" marL="0">
+            <a:pPr marL="0" indent="0">
               <a:buNone/>
             </a:pPr>
             <a:r>
@@ -27184,7 +27195,7 @@
           <a:bodyPr wrap="square" lIns="0" tIns="0" rIns="0" bIns="0" rtlCol="0" anchor="ctr"/>
           <a:lstStyle/>
           <a:p>
-            <a:pPr indent="0" marL="0">
+            <a:pPr marL="0" indent="0">
               <a:buNone/>
             </a:pPr>
             <a:r>
@@ -27250,7 +27261,7 @@
           <a:bodyPr wrap="square" lIns="0" tIns="0" rIns="0" bIns="0" rtlCol="0" anchor="ctr"/>
           <a:lstStyle/>
           <a:p>
-            <a:pPr indent="0" marL="0">
+            <a:pPr marL="0" indent="0">
               <a:buNone/>
             </a:pPr>
             <a:r>
@@ -27289,7 +27300,7 @@
           <a:bodyPr wrap="square" lIns="0" tIns="0" rIns="0" bIns="0" rtlCol="0" anchor="ctr"/>
           <a:lstStyle/>
           <a:p>
-            <a:pPr indent="0" marL="0">
+            <a:pPr marL="0" indent="0">
               <a:buNone/>
             </a:pPr>
             <a:r>
@@ -27328,7 +27339,7 @@
           <a:bodyPr wrap="square" lIns="0" tIns="0" rIns="0" bIns="0" rtlCol="0" anchor="ctr"/>
           <a:lstStyle/>
           <a:p>
-            <a:pPr indent="0" marL="0">
+            <a:pPr marL="0" indent="0">
               <a:buNone/>
             </a:pPr>
             <a:r>
@@ -27367,7 +27378,7 @@
           <a:bodyPr wrap="square" lIns="0" tIns="0" rIns="0" bIns="0" rtlCol="0" anchor="ctr"/>
           <a:lstStyle/>
           <a:p>
-            <a:pPr indent="0" marL="0">
+            <a:pPr marL="0" indent="0">
               <a:buNone/>
             </a:pPr>
             <a:r>
@@ -27433,7 +27444,7 @@
           <a:bodyPr wrap="square" lIns="0" tIns="0" rIns="0" bIns="0" rtlCol="0" anchor="ctr"/>
           <a:lstStyle/>
           <a:p>
-            <a:pPr indent="0" marL="0">
+            <a:pPr marL="0" indent="0">
               <a:buNone/>
             </a:pPr>
             <a:r>
@@ -27472,7 +27483,7 @@
           <a:bodyPr wrap="square" lIns="0" tIns="0" rIns="0" bIns="0" rtlCol="0" anchor="ctr"/>
           <a:lstStyle/>
           <a:p>
-            <a:pPr indent="0" marL="0">
+            <a:pPr marL="0" indent="0">
               <a:buNone/>
             </a:pPr>
             <a:r>
@@ -27511,7 +27522,7 @@
           <a:bodyPr wrap="square" lIns="0" tIns="0" rIns="0" bIns="0" rtlCol="0" anchor="ctr"/>
           <a:lstStyle/>
           <a:p>
-            <a:pPr indent="0" marL="0">
+            <a:pPr marL="0" indent="0">
               <a:buNone/>
             </a:pPr>
             <a:r>
@@ -27550,7 +27561,7 @@
           <a:bodyPr wrap="square" lIns="0" tIns="0" rIns="0" bIns="0" rtlCol="0" anchor="ctr"/>
           <a:lstStyle/>
           <a:p>
-            <a:pPr indent="0" marL="0">
+            <a:pPr marL="0" indent="0">
               <a:buNone/>
             </a:pPr>
             <a:r>
@@ -27616,7 +27627,7 @@
           <a:bodyPr wrap="square" lIns="0" tIns="0" rIns="0" bIns="0" rtlCol="0" anchor="ctr"/>
           <a:lstStyle/>
           <a:p>
-            <a:pPr indent="0" marL="0">
+            <a:pPr marL="0" indent="0">
               <a:buNone/>
             </a:pPr>
             <a:r>
@@ -27655,7 +27666,7 @@
           <a:bodyPr wrap="square" lIns="0" tIns="0" rIns="0" bIns="0" rtlCol="0" anchor="ctr"/>
           <a:lstStyle/>
           <a:p>
-            <a:pPr indent="0" marL="0">
+            <a:pPr marL="0" indent="0">
               <a:buNone/>
             </a:pPr>
             <a:r>
@@ -27694,7 +27705,7 @@
           <a:bodyPr wrap="square" lIns="0" tIns="0" rIns="0" bIns="0" rtlCol="0" anchor="ctr"/>
           <a:lstStyle/>
           <a:p>
-            <a:pPr indent="0" marL="0">
+            <a:pPr marL="0" indent="0">
               <a:buNone/>
             </a:pPr>
             <a:r>
@@ -27733,7 +27744,7 @@
           <a:bodyPr wrap="square" lIns="0" tIns="0" rIns="0" bIns="0" rtlCol="0" anchor="ctr"/>
           <a:lstStyle/>
           <a:p>
-            <a:pPr indent="0" marL="0">
+            <a:pPr marL="0" indent="0">
               <a:buNone/>
             </a:pPr>
             <a:r>
@@ -27799,7 +27810,7 @@
           <a:bodyPr wrap="square" lIns="0" tIns="0" rIns="0" bIns="0" rtlCol="0" anchor="ctr"/>
           <a:lstStyle/>
           <a:p>
-            <a:pPr indent="0" marL="0">
+            <a:pPr marL="0" indent="0">
               <a:buNone/>
             </a:pPr>
             <a:r>
@@ -27838,7 +27849,7 @@
           <a:bodyPr wrap="square" lIns="0" tIns="0" rIns="0" bIns="0" rtlCol="0" anchor="ctr"/>
           <a:lstStyle/>
           <a:p>
-            <a:pPr indent="0" marL="0">
+            <a:pPr marL="0" indent="0">
               <a:buNone/>
             </a:pPr>
             <a:r>
@@ -27909,7 +27920,7 @@
             <a:prstDash val="solid"/>
           </a:ln>
           <a:effectLst>
-            <a:outerShdw sx="100000" sy="100000" kx="0" ky="0" algn="bl" rotWithShape="0" blurRad="254000" dist="76200" dir="8100000">
+            <a:outerShdw blurRad="254000" dist="76200" dir="8100000" algn="bl" rotWithShape="0">
               <a:srgbClr val="000000">
                 <a:alpha val="80000"/>
               </a:srgbClr>
@@ -28015,7 +28026,7 @@
           <a:noFill/>
           <a:ln/>
           <a:effectLst>
-            <a:outerShdw sx="100000" sy="100000" kx="0" ky="0" algn="bl" rotWithShape="0" blurRad="317500" dist="50800" dir="8100000">
+            <a:outerShdw blurRad="317500" dist="50800" dir="8100000" algn="bl" rotWithShape="0">
               <a:srgbClr val="FF4060">
                 <a:alpha val="40000"/>
               </a:srgbClr>
@@ -28026,7 +28037,7 @@
           <a:bodyPr wrap="square" lIns="0" tIns="0" rIns="0" bIns="0" rtlCol="0" anchor="ctr"/>
           <a:lstStyle/>
           <a:p>
-            <a:pPr indent="0" marL="0">
+            <a:pPr marL="0" indent="0">
               <a:buNone/>
             </a:pPr>
             <a:r>
@@ -28092,7 +28103,7 @@
           <a:bodyPr wrap="square" lIns="0" tIns="0" rIns="0" bIns="0" rtlCol="0" anchor="ctr"/>
           <a:lstStyle/>
           <a:p>
-            <a:pPr indent="0" marL="0">
+            <a:pPr marL="0" indent="0">
               <a:buNone/>
             </a:pPr>
             <a:r>
@@ -28131,7 +28142,7 @@
           <a:bodyPr wrap="square" lIns="0" tIns="0" rIns="0" bIns="0" rtlCol="0" anchor="ctr"/>
           <a:lstStyle/>
           <a:p>
-            <a:pPr indent="0" marL="0">
+            <a:pPr marL="0" indent="0">
               <a:buNone/>
             </a:pPr>
             <a:r>
@@ -28170,7 +28181,7 @@
           <a:bodyPr wrap="square" lIns="0" tIns="0" rIns="0" bIns="0" rtlCol="0" anchor="ctr"/>
           <a:lstStyle/>
           <a:p>
-            <a:pPr indent="0" marL="0">
+            <a:pPr marL="0" indent="0">
               <a:buNone/>
             </a:pPr>
             <a:r>
@@ -28209,7 +28220,7 @@
           <a:bodyPr wrap="square" lIns="0" tIns="0" rIns="0" bIns="0" rtlCol="0" anchor="ctr"/>
           <a:lstStyle/>
           <a:p>
-            <a:pPr indent="0" marL="0">
+            <a:pPr marL="0" indent="0">
               <a:buNone/>
             </a:pPr>
             <a:r>
@@ -28275,7 +28286,7 @@
           <a:bodyPr wrap="square" lIns="0" tIns="0" rIns="0" bIns="0" rtlCol="0" anchor="ctr"/>
           <a:lstStyle/>
           <a:p>
-            <a:pPr indent="0" marL="0">
+            <a:pPr marL="0" indent="0">
               <a:buNone/>
             </a:pPr>
             <a:r>
@@ -28314,7 +28325,7 @@
           <a:bodyPr wrap="square" lIns="0" tIns="0" rIns="0" bIns="0" rtlCol="0" anchor="ctr"/>
           <a:lstStyle/>
           <a:p>
-            <a:pPr indent="0" marL="0">
+            <a:pPr marL="0" indent="0">
               <a:buNone/>
             </a:pPr>
             <a:r>
@@ -28353,7 +28364,7 @@
           <a:bodyPr wrap="square" lIns="0" tIns="0" rIns="0" bIns="0" rtlCol="0" anchor="ctr"/>
           <a:lstStyle/>
           <a:p>
-            <a:pPr indent="0" marL="0">
+            <a:pPr marL="0" indent="0">
               <a:buNone/>
             </a:pPr>
             <a:r>
@@ -28392,7 +28403,7 @@
           <a:bodyPr wrap="square" lIns="0" tIns="0" rIns="0" bIns="0" rtlCol="0" anchor="ctr"/>
           <a:lstStyle/>
           <a:p>
-            <a:pPr indent="0" marL="0">
+            <a:pPr marL="0" indent="0">
               <a:buNone/>
             </a:pPr>
             <a:r>
@@ -28458,7 +28469,7 @@
           <a:bodyPr wrap="square" lIns="0" tIns="0" rIns="0" bIns="0" rtlCol="0" anchor="ctr"/>
           <a:lstStyle/>
           <a:p>
-            <a:pPr indent="0" marL="0">
+            <a:pPr marL="0" indent="0">
               <a:buNone/>
             </a:pPr>
             <a:r>
@@ -28497,7 +28508,7 @@
           <a:bodyPr wrap="square" lIns="0" tIns="0" rIns="0" bIns="0" rtlCol="0" anchor="ctr"/>
           <a:lstStyle/>
           <a:p>
-            <a:pPr indent="0" marL="0">
+            <a:pPr marL="0" indent="0">
               <a:buNone/>
             </a:pPr>
             <a:r>
@@ -28536,7 +28547,7 @@
           <a:bodyPr wrap="square" lIns="0" tIns="0" rIns="0" bIns="0" rtlCol="0" anchor="ctr"/>
           <a:lstStyle/>
           <a:p>
-            <a:pPr indent="0" marL="0">
+            <a:pPr marL="0" indent="0">
               <a:buNone/>
             </a:pPr>
             <a:r>
@@ -28575,7 +28586,7 @@
           <a:bodyPr wrap="square" lIns="0" tIns="0" rIns="0" bIns="0" rtlCol="0" anchor="ctr"/>
           <a:lstStyle/>
           <a:p>
-            <a:pPr indent="0" marL="0">
+            <a:pPr marL="0" indent="0">
               <a:buNone/>
             </a:pPr>
             <a:r>
@@ -28641,7 +28652,7 @@
           <a:bodyPr wrap="square" lIns="0" tIns="0" rIns="0" bIns="0" rtlCol="0" anchor="ctr"/>
           <a:lstStyle/>
           <a:p>
-            <a:pPr indent="0" marL="0">
+            <a:pPr marL="0" indent="0">
               <a:buNone/>
             </a:pPr>
             <a:r>
@@ -28680,7 +28691,7 @@
           <a:bodyPr wrap="square" lIns="0" tIns="0" rIns="0" bIns="0" rtlCol="0" anchor="ctr"/>
           <a:lstStyle/>
           <a:p>
-            <a:pPr indent="0" marL="0">
+            <a:pPr marL="0" indent="0">
               <a:buNone/>
             </a:pPr>
             <a:r>
@@ -28719,7 +28730,7 @@
           <a:bodyPr wrap="square" lIns="0" tIns="0" rIns="0" bIns="0" rtlCol="0" anchor="ctr"/>
           <a:lstStyle/>
           <a:p>
-            <a:pPr indent="0" marL="0">
+            <a:pPr marL="0" indent="0">
               <a:buNone/>
             </a:pPr>
             <a:r>
@@ -28758,7 +28769,7 @@
           <a:bodyPr wrap="square" lIns="0" tIns="0" rIns="0" bIns="0" rtlCol="0" anchor="ctr"/>
           <a:lstStyle/>
           <a:p>
-            <a:pPr indent="0" marL="0">
+            <a:pPr marL="0" indent="0">
               <a:buNone/>
             </a:pPr>
             <a:r>
@@ -28824,7 +28835,7 @@
           <a:bodyPr wrap="square" lIns="0" tIns="0" rIns="0" bIns="0" rtlCol="0" anchor="ctr"/>
           <a:lstStyle/>
           <a:p>
-            <a:pPr indent="0" marL="0">
+            <a:pPr marL="0" indent="0">
               <a:buNone/>
             </a:pPr>
             <a:r>
@@ -28863,7 +28874,7 @@
           <a:bodyPr wrap="square" lIns="0" tIns="0" rIns="0" bIns="0" rtlCol="0" anchor="ctr"/>
           <a:lstStyle/>
           <a:p>
-            <a:pPr indent="0" marL="0">
+            <a:pPr marL="0" indent="0">
               <a:buNone/>
             </a:pPr>
             <a:r>
@@ -28934,7 +28945,7 @@
             <a:prstDash val="solid"/>
           </a:ln>
           <a:effectLst>
-            <a:outerShdw sx="100000" sy="100000" kx="0" ky="0" algn="bl" rotWithShape="0" blurRad="254000" dist="76200" dir="8100000">
+            <a:outerShdw blurRad="254000" dist="76200" dir="8100000" algn="bl" rotWithShape="0">
               <a:srgbClr val="000000">
                 <a:alpha val="80000"/>
               </a:srgbClr>
@@ -29040,7 +29051,7 @@
           <a:noFill/>
           <a:ln/>
           <a:effectLst>
-            <a:outerShdw sx="100000" sy="100000" kx="0" ky="0" algn="bl" rotWithShape="0" blurRad="317500" dist="50800" dir="8100000">
+            <a:outerShdw blurRad="317500" dist="50800" dir="8100000" algn="bl" rotWithShape="0">
               <a:srgbClr val="9B6FF0">
                 <a:alpha val="40000"/>
               </a:srgbClr>
@@ -29051,7 +29062,7 @@
           <a:bodyPr wrap="square" lIns="0" tIns="0" rIns="0" bIns="0" rtlCol="0" anchor="ctr"/>
           <a:lstStyle/>
           <a:p>
-            <a:pPr indent="0" marL="0">
+            <a:pPr marL="0" indent="0">
               <a:buNone/>
             </a:pPr>
             <a:r>
@@ -29117,7 +29128,7 @@
           <a:bodyPr wrap="square" lIns="0" tIns="0" rIns="0" bIns="0" rtlCol="0" anchor="ctr"/>
           <a:lstStyle/>
           <a:p>
-            <a:pPr indent="0" marL="0">
+            <a:pPr marL="0" indent="0">
               <a:buNone/>
             </a:pPr>
             <a:r>
@@ -29156,7 +29167,7 @@
           <a:bodyPr wrap="square" lIns="0" tIns="0" rIns="0" bIns="0" rtlCol="0" anchor="ctr"/>
           <a:lstStyle/>
           <a:p>
-            <a:pPr indent="0" marL="0">
+            <a:pPr marL="0" indent="0">
               <a:buNone/>
             </a:pPr>
             <a:r>
@@ -29195,7 +29206,7 @@
           <a:bodyPr wrap="square" lIns="0" tIns="0" rIns="0" bIns="0" rtlCol="0" anchor="ctr"/>
           <a:lstStyle/>
           <a:p>
-            <a:pPr indent="0" marL="0">
+            <a:pPr marL="0" indent="0">
               <a:buNone/>
             </a:pPr>
             <a:r>
@@ -29234,7 +29245,7 @@
           <a:bodyPr wrap="square" lIns="0" tIns="0" rIns="0" bIns="0" rtlCol="0" anchor="ctr"/>
           <a:lstStyle/>
           <a:p>
-            <a:pPr indent="0" marL="0">
+            <a:pPr marL="0" indent="0">
               <a:buNone/>
             </a:pPr>
             <a:r>
@@ -29300,7 +29311,7 @@
           <a:bodyPr wrap="square" lIns="0" tIns="0" rIns="0" bIns="0" rtlCol="0" anchor="ctr"/>
           <a:lstStyle/>
           <a:p>
-            <a:pPr indent="0" marL="0">
+            <a:pPr marL="0" indent="0">
               <a:buNone/>
             </a:pPr>
             <a:r>
@@ -29339,7 +29350,7 @@
           <a:bodyPr wrap="square" lIns="0" tIns="0" rIns="0" bIns="0" rtlCol="0" anchor="ctr"/>
           <a:lstStyle/>
           <a:p>
-            <a:pPr indent="0" marL="0">
+            <a:pPr marL="0" indent="0">
               <a:buNone/>
             </a:pPr>
             <a:r>
@@ -29378,7 +29389,7 @@
           <a:bodyPr wrap="square" lIns="0" tIns="0" rIns="0" bIns="0" rtlCol="0" anchor="ctr"/>
           <a:lstStyle/>
           <a:p>
-            <a:pPr indent="0" marL="0">
+            <a:pPr marL="0" indent="0">
               <a:buNone/>
             </a:pPr>
             <a:r>
@@ -29417,7 +29428,7 @@
           <a:bodyPr wrap="square" lIns="0" tIns="0" rIns="0" bIns="0" rtlCol="0" anchor="ctr"/>
           <a:lstStyle/>
           <a:p>
-            <a:pPr indent="0" marL="0">
+            <a:pPr marL="0" indent="0">
               <a:buNone/>
             </a:pPr>
             <a:r>
@@ -29483,7 +29494,7 @@
           <a:bodyPr wrap="square" lIns="0" tIns="0" rIns="0" bIns="0" rtlCol="0" anchor="ctr"/>
           <a:lstStyle/>
           <a:p>
-            <a:pPr indent="0" marL="0">
+            <a:pPr marL="0" indent="0">
               <a:buNone/>
             </a:pPr>
             <a:r>
@@ -29522,7 +29533,7 @@
           <a:bodyPr wrap="square" lIns="0" tIns="0" rIns="0" bIns="0" rtlCol="0" anchor="ctr"/>
           <a:lstStyle/>
           <a:p>
-            <a:pPr indent="0" marL="0">
+            <a:pPr marL="0" indent="0">
               <a:buNone/>
             </a:pPr>
             <a:r>
@@ -29561,7 +29572,7 @@
           <a:bodyPr wrap="square" lIns="0" tIns="0" rIns="0" bIns="0" rtlCol="0" anchor="ctr"/>
           <a:lstStyle/>
           <a:p>
-            <a:pPr indent="0" marL="0">
+            <a:pPr marL="0" indent="0">
               <a:buNone/>
             </a:pPr>
             <a:r>
@@ -29600,7 +29611,7 @@
           <a:bodyPr wrap="square" lIns="0" tIns="0" rIns="0" bIns="0" rtlCol="0" anchor="ctr"/>
           <a:lstStyle/>
           <a:p>
-            <a:pPr indent="0" marL="0">
+            <a:pPr marL="0" indent="0">
               <a:buNone/>
             </a:pPr>
             <a:r>
@@ -29666,7 +29677,7 @@
           <a:bodyPr wrap="square" lIns="0" tIns="0" rIns="0" bIns="0" rtlCol="0" anchor="ctr"/>
           <a:lstStyle/>
           <a:p>
-            <a:pPr indent="0" marL="0">
+            <a:pPr marL="0" indent="0">
               <a:buNone/>
             </a:pPr>
             <a:r>
@@ -29705,7 +29716,7 @@
           <a:bodyPr wrap="square" lIns="0" tIns="0" rIns="0" bIns="0" rtlCol="0" anchor="ctr"/>
           <a:lstStyle/>
           <a:p>
-            <a:pPr indent="0" marL="0">
+            <a:pPr marL="0" indent="0">
               <a:buNone/>
             </a:pPr>
             <a:r>
@@ -29744,7 +29755,7 @@
           <a:bodyPr wrap="square" lIns="0" tIns="0" rIns="0" bIns="0" rtlCol="0" anchor="ctr"/>
           <a:lstStyle/>
           <a:p>
-            <a:pPr indent="0" marL="0">
+            <a:pPr marL="0" indent="0">
               <a:buNone/>
             </a:pPr>
             <a:r>
@@ -29783,7 +29794,7 @@
           <a:bodyPr wrap="square" lIns="0" tIns="0" rIns="0" bIns="0" rtlCol="0" anchor="ctr"/>
           <a:lstStyle/>
           <a:p>
-            <a:pPr indent="0" marL="0">
+            <a:pPr marL="0" indent="0">
               <a:buNone/>
             </a:pPr>
             <a:r>
@@ -29849,7 +29860,7 @@
           <a:bodyPr wrap="square" lIns="0" tIns="0" rIns="0" bIns="0" rtlCol="0" anchor="ctr"/>
           <a:lstStyle/>
           <a:p>
-            <a:pPr indent="0" marL="0">
+            <a:pPr marL="0" indent="0">
               <a:buNone/>
             </a:pPr>
             <a:r>
@@ -29888,7 +29899,7 @@
           <a:bodyPr wrap="square" lIns="0" tIns="0" rIns="0" bIns="0" rtlCol="0" anchor="ctr"/>
           <a:lstStyle/>
           <a:p>
-            <a:pPr indent="0" marL="0">
+            <a:pPr marL="0" indent="0">
               <a:buNone/>
             </a:pPr>
             <a:r>
@@ -29922,6 +29933,7 @@
         <a:solidFill>
           <a:srgbClr val="030B16"/>
         </a:solidFill>
+        <a:effectLst/>
       </p:bgPr>
     </p:bg>
     <p:spTree>
@@ -30054,9 +30066,7 @@
             <a:ext cx="594360" cy="594360"/>
           </a:xfrm>
           <a:prstGeom prst="rect">
-            <a:avLst>
-              <a:gd name="adj" fmla="val 12308"/>
-            </a:avLst>
+            <a:avLst/>
           </a:prstGeom>
           <a:solidFill>
             <a:srgbClr val="9B6FF0">
@@ -30070,7 +30080,7 @@
             <a:prstDash val="solid"/>
           </a:ln>
           <a:effectLst>
-            <a:outerShdw sx="100000" sy="100000" kx="0" ky="0" algn="bl" rotWithShape="0" blurRad="317500" dist="50800" dir="8100000">
+            <a:outerShdw blurRad="317500" dist="50800" dir="8100000" algn="bl" rotWithShape="0">
               <a:srgbClr val="9B6FF0">
                 <a:alpha val="40000"/>
               </a:srgbClr>
@@ -30099,7 +30109,7 @@
           <a:bodyPr wrap="square" lIns="0" tIns="0" rIns="0" bIns="0" rtlCol="0" anchor="ctr"/>
           <a:lstStyle/>
           <a:p>
-            <a:pPr algn="ctr" indent="0" marL="0">
+            <a:pPr marL="0" indent="0" algn="ctr">
               <a:buNone/>
             </a:pPr>
             <a:r>
@@ -30131,7 +30141,7 @@
           <a:noFill/>
           <a:ln/>
           <a:effectLst>
-            <a:outerShdw sx="100000" sy="100000" kx="0" ky="0" algn="bl" rotWithShape="0" blurRad="127000" dist="38100" dir="8100000">
+            <a:outerShdw blurRad="127000" dist="38100" dir="8100000" algn="bl" rotWithShape="0">
               <a:srgbClr val="000000">
                 <a:alpha val="50000"/>
               </a:srgbClr>
@@ -30142,7 +30152,7 @@
           <a:bodyPr wrap="square" lIns="0" tIns="0" rIns="0" bIns="0" rtlCol="0" anchor="ctr"/>
           <a:lstStyle/>
           <a:p>
-            <a:pPr indent="0" marL="0">
+            <a:pPr marL="0" indent="0">
               <a:buNone/>
             </a:pPr>
             <a:r>
@@ -30208,11 +30218,11 @@
           <a:bodyPr wrap="square" lIns="0" tIns="0" rIns="0" bIns="0" rtlCol="0" anchor="ctr"/>
           <a:lstStyle/>
           <a:p>
-            <a:pPr algn="ctr" indent="0" marL="0">
-              <a:buNone/>
-            </a:pPr>
-            <a:r>
-              <a:rPr lang="en-US" sz="700" b="1" spc="150" kern="0" dirty="0">
+            <a:pPr marL="0" indent="0" algn="ctr">
+              <a:buNone/>
+            </a:pPr>
+            <a:r>
+              <a:rPr lang="en-US" sz="700" b="1" kern="0" spc="150" dirty="0">
                 <a:solidFill>
                   <a:srgbClr val="9B6FF0"/>
                 </a:solidFill>
@@ -30279,7 +30289,7 @@
             <a:prstDash val="solid"/>
           </a:ln>
           <a:effectLst>
-            <a:outerShdw sx="100000" sy="100000" kx="0" ky="0" algn="bl" rotWithShape="0" blurRad="254000" dist="76200" dir="8100000">
+            <a:outerShdw blurRad="254000" dist="76200" dir="8100000" algn="bl" rotWithShape="0">
               <a:srgbClr val="000000">
                 <a:alpha val="80000"/>
               </a:srgbClr>
@@ -30362,11 +30372,11 @@
           <a:bodyPr wrap="square" lIns="0" tIns="0" rIns="0" bIns="0" rtlCol="0" anchor="ctr"/>
           <a:lstStyle/>
           <a:p>
-            <a:pPr indent="0" marL="0">
-              <a:buNone/>
-            </a:pPr>
-            <a:r>
-              <a:rPr lang="en-US" sz="700" b="1" spc="300" kern="0" dirty="0">
+            <a:pPr marL="0" indent="0">
+              <a:buNone/>
+            </a:pPr>
+            <a:r>
+              <a:rPr lang="en-US" sz="700" b="1" kern="0" spc="300" dirty="0">
                 <a:solidFill>
                   <a:srgbClr val="9B6FF0"/>
                 </a:solidFill>
@@ -30503,7 +30513,7 @@
           <a:noFill/>
           <a:ln/>
           <a:effectLst>
-            <a:outerShdw sx="100000" sy="100000" kx="0" ky="0" algn="bl" rotWithShape="0" blurRad="317500" dist="50800" dir="8100000">
+            <a:outerShdw blurRad="317500" dist="50800" dir="8100000" algn="bl" rotWithShape="0">
               <a:srgbClr val="00FFEE">
                 <a:alpha val="40000"/>
               </a:srgbClr>
@@ -30514,7 +30524,7 @@
           <a:bodyPr wrap="square" lIns="0" tIns="0" rIns="0" bIns="0" rtlCol="0" anchor="ctr"/>
           <a:lstStyle/>
           <a:p>
-            <a:pPr algn="ctr" indent="0" marL="0">
+            <a:pPr marL="0" indent="0" algn="ctr">
               <a:buNone/>
             </a:pPr>
             <a:r>
@@ -30553,7 +30563,7 @@
           <a:bodyPr wrap="square" lIns="0" tIns="0" rIns="0" bIns="0" rtlCol="0" anchor="ctr"/>
           <a:lstStyle/>
           <a:p>
-            <a:pPr indent="0" marL="0">
+            <a:pPr marL="0" indent="0">
               <a:buNone/>
             </a:pPr>
             <a:r>
@@ -30592,7 +30602,7 @@
           <a:bodyPr wrap="square" lIns="0" tIns="0" rIns="0" bIns="0" rtlCol="0" anchor="ctr"/>
           <a:lstStyle/>
           <a:p>
-            <a:pPr indent="0" marL="0">
+            <a:pPr marL="0" indent="0">
               <a:buNone/>
             </a:pPr>
             <a:r>
@@ -30708,7 +30718,7 @@
           <a:noFill/>
           <a:ln/>
           <a:effectLst>
-            <a:outerShdw sx="100000" sy="100000" kx="0" ky="0" algn="bl" rotWithShape="0" blurRad="317500" dist="50800" dir="8100000">
+            <a:outerShdw blurRad="317500" dist="50800" dir="8100000" algn="bl" rotWithShape="0">
               <a:srgbClr val="00D2BE">
                 <a:alpha val="40000"/>
               </a:srgbClr>
@@ -30719,7 +30729,7 @@
           <a:bodyPr wrap="square" lIns="0" tIns="0" rIns="0" bIns="0" rtlCol="0" anchor="ctr"/>
           <a:lstStyle/>
           <a:p>
-            <a:pPr algn="ctr" indent="0" marL="0">
+            <a:pPr marL="0" indent="0" algn="ctr">
               <a:buNone/>
             </a:pPr>
             <a:r>
@@ -30758,7 +30768,7 @@
           <a:bodyPr wrap="square" lIns="0" tIns="0" rIns="0" bIns="0" rtlCol="0" anchor="ctr"/>
           <a:lstStyle/>
           <a:p>
-            <a:pPr indent="0" marL="0">
+            <a:pPr marL="0" indent="0">
               <a:buNone/>
             </a:pPr>
             <a:r>
@@ -30797,7 +30807,7 @@
           <a:bodyPr wrap="square" lIns="0" tIns="0" rIns="0" bIns="0" rtlCol="0" anchor="ctr"/>
           <a:lstStyle/>
           <a:p>
-            <a:pPr indent="0" marL="0">
+            <a:pPr marL="0" indent="0">
               <a:buNone/>
             </a:pPr>
             <a:r>
@@ -30913,7 +30923,7 @@
           <a:noFill/>
           <a:ln/>
           <a:effectLst>
-            <a:outerShdw sx="100000" sy="100000" kx="0" ky="0" algn="bl" rotWithShape="0" blurRad="317500" dist="50800" dir="8100000">
+            <a:outerShdw blurRad="317500" dist="50800" dir="8100000" algn="bl" rotWithShape="0">
               <a:srgbClr val="22D88A">
                 <a:alpha val="40000"/>
               </a:srgbClr>
@@ -30924,7 +30934,7 @@
           <a:bodyPr wrap="square" lIns="0" tIns="0" rIns="0" bIns="0" rtlCol="0" anchor="ctr"/>
           <a:lstStyle/>
           <a:p>
-            <a:pPr algn="ctr" indent="0" marL="0">
+            <a:pPr marL="0" indent="0" algn="ctr">
               <a:buNone/>
             </a:pPr>
             <a:r>
@@ -30963,7 +30973,7 @@
           <a:bodyPr wrap="square" lIns="0" tIns="0" rIns="0" bIns="0" rtlCol="0" anchor="ctr"/>
           <a:lstStyle/>
           <a:p>
-            <a:pPr indent="0" marL="0">
+            <a:pPr marL="0" indent="0">
               <a:buNone/>
             </a:pPr>
             <a:r>
@@ -31002,7 +31012,7 @@
           <a:bodyPr wrap="square" lIns="0" tIns="0" rIns="0" bIns="0" rtlCol="0" anchor="ctr"/>
           <a:lstStyle/>
           <a:p>
-            <a:pPr indent="0" marL="0">
+            <a:pPr marL="0" indent="0">
               <a:buNone/>
             </a:pPr>
             <a:r>
@@ -31118,7 +31128,7 @@
           <a:noFill/>
           <a:ln/>
           <a:effectLst>
-            <a:outerShdw sx="100000" sy="100000" kx="0" ky="0" algn="bl" rotWithShape="0" blurRad="317500" dist="50800" dir="8100000">
+            <a:outerShdw blurRad="317500" dist="50800" dir="8100000" algn="bl" rotWithShape="0">
               <a:srgbClr val="90D8A8">
                 <a:alpha val="40000"/>
               </a:srgbClr>
@@ -31129,7 +31139,7 @@
           <a:bodyPr wrap="square" lIns="0" tIns="0" rIns="0" bIns="0" rtlCol="0" anchor="ctr"/>
           <a:lstStyle/>
           <a:p>
-            <a:pPr algn="ctr" indent="0" marL="0">
+            <a:pPr marL="0" indent="0" algn="ctr">
               <a:buNone/>
             </a:pPr>
             <a:r>
@@ -31168,7 +31178,7 @@
           <a:bodyPr wrap="square" lIns="0" tIns="0" rIns="0" bIns="0" rtlCol="0" anchor="ctr"/>
           <a:lstStyle/>
           <a:p>
-            <a:pPr indent="0" marL="0">
+            <a:pPr marL="0" indent="0">
               <a:buNone/>
             </a:pPr>
             <a:r>
@@ -31207,7 +31217,7 @@
           <a:bodyPr wrap="square" lIns="0" tIns="0" rIns="0" bIns="0" rtlCol="0" anchor="ctr"/>
           <a:lstStyle/>
           <a:p>
-            <a:pPr indent="0" marL="0">
+            <a:pPr marL="0" indent="0">
               <a:buNone/>
             </a:pPr>
             <a:r>
@@ -31323,7 +31333,7 @@
           <a:noFill/>
           <a:ln/>
           <a:effectLst>
-            <a:outerShdw sx="100000" sy="100000" kx="0" ky="0" algn="bl" rotWithShape="0" blurRad="317500" dist="50800" dir="8100000">
+            <a:outerShdw blurRad="317500" dist="50800" dir="8100000" algn="bl" rotWithShape="0">
               <a:srgbClr val="F0A020">
                 <a:alpha val="40000"/>
               </a:srgbClr>
@@ -31334,7 +31344,7 @@
           <a:bodyPr wrap="square" lIns="0" tIns="0" rIns="0" bIns="0" rtlCol="0" anchor="ctr"/>
           <a:lstStyle/>
           <a:p>
-            <a:pPr algn="ctr" indent="0" marL="0">
+            <a:pPr marL="0" indent="0" algn="ctr">
               <a:buNone/>
             </a:pPr>
             <a:r>
@@ -31373,7 +31383,7 @@
           <a:bodyPr wrap="square" lIns="0" tIns="0" rIns="0" bIns="0" rtlCol="0" anchor="ctr"/>
           <a:lstStyle/>
           <a:p>
-            <a:pPr indent="0" marL="0">
+            <a:pPr marL="0" indent="0">
               <a:buNone/>
             </a:pPr>
             <a:r>
@@ -31412,7 +31422,7 @@
           <a:bodyPr wrap="square" lIns="0" tIns="0" rIns="0" bIns="0" rtlCol="0" anchor="ctr"/>
           <a:lstStyle/>
           <a:p>
-            <a:pPr indent="0" marL="0">
+            <a:pPr marL="0" indent="0">
               <a:buNone/>
             </a:pPr>
             <a:r>
@@ -31528,7 +31538,7 @@
           <a:noFill/>
           <a:ln/>
           <a:effectLst>
-            <a:outerShdw sx="100000" sy="100000" kx="0" ky="0" algn="bl" rotWithShape="0" blurRad="317500" dist="50800" dir="8100000">
+            <a:outerShdw blurRad="317500" dist="50800" dir="8100000" algn="bl" rotWithShape="0">
               <a:srgbClr val="E08040">
                 <a:alpha val="40000"/>
               </a:srgbClr>
@@ -31539,7 +31549,7 @@
           <a:bodyPr wrap="square" lIns="0" tIns="0" rIns="0" bIns="0" rtlCol="0" anchor="ctr"/>
           <a:lstStyle/>
           <a:p>
-            <a:pPr algn="ctr" indent="0" marL="0">
+            <a:pPr marL="0" indent="0" algn="ctr">
               <a:buNone/>
             </a:pPr>
             <a:r>
@@ -31578,7 +31588,7 @@
           <a:bodyPr wrap="square" lIns="0" tIns="0" rIns="0" bIns="0" rtlCol="0" anchor="ctr"/>
           <a:lstStyle/>
           <a:p>
-            <a:pPr indent="0" marL="0">
+            <a:pPr marL="0" indent="0">
               <a:buNone/>
             </a:pPr>
             <a:r>
@@ -31617,7 +31627,7 @@
           <a:bodyPr wrap="square" lIns="0" tIns="0" rIns="0" bIns="0" rtlCol="0" anchor="ctr"/>
           <a:lstStyle/>
           <a:p>
-            <a:pPr indent="0" marL="0">
+            <a:pPr marL="0" indent="0">
               <a:buNone/>
             </a:pPr>
             <a:r>
@@ -31733,7 +31743,7 @@
           <a:noFill/>
           <a:ln/>
           <a:effectLst>
-            <a:outerShdw sx="100000" sy="100000" kx="0" ky="0" algn="bl" rotWithShape="0" blurRad="317500" dist="50800" dir="8100000">
+            <a:outerShdw blurRad="317500" dist="50800" dir="8100000" algn="bl" rotWithShape="0">
               <a:srgbClr val="FF4060">
                 <a:alpha val="40000"/>
               </a:srgbClr>
@@ -31744,7 +31754,7 @@
           <a:bodyPr wrap="square" lIns="0" tIns="0" rIns="0" bIns="0" rtlCol="0" anchor="ctr"/>
           <a:lstStyle/>
           <a:p>
-            <a:pPr algn="ctr" indent="0" marL="0">
+            <a:pPr marL="0" indent="0" algn="ctr">
               <a:buNone/>
             </a:pPr>
             <a:r>
@@ -31783,7 +31793,7 @@
           <a:bodyPr wrap="square" lIns="0" tIns="0" rIns="0" bIns="0" rtlCol="0" anchor="ctr"/>
           <a:lstStyle/>
           <a:p>
-            <a:pPr indent="0" marL="0">
+            <a:pPr marL="0" indent="0">
               <a:buNone/>
             </a:pPr>
             <a:r>
@@ -31822,7 +31832,7 @@
           <a:bodyPr wrap="square" lIns="0" tIns="0" rIns="0" bIns="0" rtlCol="0" anchor="ctr"/>
           <a:lstStyle/>
           <a:p>
-            <a:pPr indent="0" marL="0">
+            <a:pPr marL="0" indent="0">
               <a:buNone/>
             </a:pPr>
             <a:r>
@@ -31893,7 +31903,7 @@
             <a:prstDash val="solid"/>
           </a:ln>
           <a:effectLst>
-            <a:outerShdw sx="100000" sy="100000" kx="0" ky="0" algn="bl" rotWithShape="0" blurRad="254000" dist="76200" dir="8100000">
+            <a:outerShdw blurRad="254000" dist="76200" dir="8100000" algn="bl" rotWithShape="0">
               <a:srgbClr val="000000">
                 <a:alpha val="80000"/>
               </a:srgbClr>
@@ -31976,11 +31986,11 @@
           <a:bodyPr wrap="square" lIns="0" tIns="0" rIns="0" bIns="0" rtlCol="0" anchor="ctr"/>
           <a:lstStyle/>
           <a:p>
-            <a:pPr indent="0" marL="0">
-              <a:buNone/>
-            </a:pPr>
-            <a:r>
-              <a:rPr lang="en-US" sz="700" b="1" spc="300" kern="0" dirty="0">
+            <a:pPr marL="0" indent="0">
+              <a:buNone/>
+            </a:pPr>
+            <a:r>
+              <a:rPr lang="en-US" sz="700" b="1" kern="0" spc="300" dirty="0">
                 <a:solidFill>
                   <a:srgbClr val="F0A020"/>
                 </a:solidFill>
@@ -32121,7 +32131,7 @@
           <a:bodyPr wrap="square" lIns="0" tIns="0" rIns="0" bIns="0" rtlCol="0" anchor="ctr"/>
           <a:lstStyle/>
           <a:p>
-            <a:pPr algn="ctr" indent="0" marL="0">
+            <a:pPr marL="0" indent="0" algn="ctr">
               <a:buNone/>
             </a:pPr>
             <a:r>
@@ -32160,7 +32170,7 @@
           <a:bodyPr wrap="square" lIns="0" tIns="0" rIns="0" bIns="0" rtlCol="0" anchor="ctr"/>
           <a:lstStyle/>
           <a:p>
-            <a:pPr indent="0" marL="0">
+            <a:pPr marL="0" indent="0">
               <a:buNone/>
             </a:pPr>
             <a:r>
@@ -32199,7 +32209,7 @@
           <a:bodyPr wrap="square" lIns="0" tIns="0" rIns="0" bIns="0" rtlCol="0" anchor="ctr"/>
           <a:lstStyle/>
           <a:p>
-            <a:pPr indent="0" marL="0">
+            <a:pPr marL="0" indent="0">
               <a:buNone/>
             </a:pPr>
             <a:r>
@@ -32319,7 +32329,7 @@
           <a:bodyPr wrap="square" lIns="0" tIns="0" rIns="0" bIns="0" rtlCol="0" anchor="ctr"/>
           <a:lstStyle/>
           <a:p>
-            <a:pPr algn="ctr" indent="0" marL="0">
+            <a:pPr marL="0" indent="0" algn="ctr">
               <a:buNone/>
             </a:pPr>
             <a:r>
@@ -32358,7 +32368,7 @@
           <a:bodyPr wrap="square" lIns="0" tIns="0" rIns="0" bIns="0" rtlCol="0" anchor="ctr"/>
           <a:lstStyle/>
           <a:p>
-            <a:pPr indent="0" marL="0">
+            <a:pPr marL="0" indent="0">
               <a:buNone/>
             </a:pPr>
             <a:r>
@@ -32397,7 +32407,7 @@
           <a:bodyPr wrap="square" lIns="0" tIns="0" rIns="0" bIns="0" rtlCol="0" anchor="ctr"/>
           <a:lstStyle/>
           <a:p>
-            <a:pPr indent="0" marL="0">
+            <a:pPr marL="0" indent="0">
               <a:buNone/>
             </a:pPr>
             <a:r>
@@ -32517,7 +32527,7 @@
           <a:bodyPr wrap="square" lIns="0" tIns="0" rIns="0" bIns="0" rtlCol="0" anchor="ctr"/>
           <a:lstStyle/>
           <a:p>
-            <a:pPr algn="ctr" indent="0" marL="0">
+            <a:pPr marL="0" indent="0" algn="ctr">
               <a:buNone/>
             </a:pPr>
             <a:r>
@@ -32556,7 +32566,7 @@
           <a:bodyPr wrap="square" lIns="0" tIns="0" rIns="0" bIns="0" rtlCol="0" anchor="ctr"/>
           <a:lstStyle/>
           <a:p>
-            <a:pPr indent="0" marL="0">
+            <a:pPr marL="0" indent="0">
               <a:buNone/>
             </a:pPr>
             <a:r>
@@ -32595,7 +32605,7 @@
           <a:bodyPr wrap="square" lIns="0" tIns="0" rIns="0" bIns="0" rtlCol="0" anchor="ctr"/>
           <a:lstStyle/>
           <a:p>
-            <a:pPr indent="0" marL="0">
+            <a:pPr marL="0" indent="0">
               <a:buNone/>
             </a:pPr>
             <a:r>
@@ -32715,7 +32725,7 @@
           <a:bodyPr wrap="square" lIns="0" tIns="0" rIns="0" bIns="0" rtlCol="0" anchor="ctr"/>
           <a:lstStyle/>
           <a:p>
-            <a:pPr algn="ctr" indent="0" marL="0">
+            <a:pPr marL="0" indent="0" algn="ctr">
               <a:buNone/>
             </a:pPr>
             <a:r>
@@ -32754,7 +32764,7 @@
           <a:bodyPr wrap="square" lIns="0" tIns="0" rIns="0" bIns="0" rtlCol="0" anchor="ctr"/>
           <a:lstStyle/>
           <a:p>
-            <a:pPr indent="0" marL="0">
+            <a:pPr marL="0" indent="0">
               <a:buNone/>
             </a:pPr>
             <a:r>
@@ -32793,7 +32803,7 @@
           <a:bodyPr wrap="square" lIns="0" tIns="0" rIns="0" bIns="0" rtlCol="0" anchor="ctr"/>
           <a:lstStyle/>
           <a:p>
-            <a:pPr indent="0" marL="0">
+            <a:pPr marL="0" indent="0">
               <a:buNone/>
             </a:pPr>
             <a:r>
@@ -32913,7 +32923,7 @@
           <a:bodyPr wrap="square" lIns="0" tIns="0" rIns="0" bIns="0" rtlCol="0" anchor="ctr"/>
           <a:lstStyle/>
           <a:p>
-            <a:pPr algn="ctr" indent="0" marL="0">
+            <a:pPr marL="0" indent="0" algn="ctr">
               <a:buNone/>
             </a:pPr>
             <a:r>
@@ -32952,7 +32962,7 @@
           <a:bodyPr wrap="square" lIns="0" tIns="0" rIns="0" bIns="0" rtlCol="0" anchor="ctr"/>
           <a:lstStyle/>
           <a:p>
-            <a:pPr indent="0" marL="0">
+            <a:pPr marL="0" indent="0">
               <a:buNone/>
             </a:pPr>
             <a:r>
@@ -32991,7 +33001,7 @@
           <a:bodyPr wrap="square" lIns="0" tIns="0" rIns="0" bIns="0" rtlCol="0" anchor="ctr"/>
           <a:lstStyle/>
           <a:p>
-            <a:pPr indent="0" marL="0">
+            <a:pPr marL="0" indent="0">
               <a:buNone/>
             </a:pPr>
             <a:r>
@@ -33111,7 +33121,7 @@
           <a:bodyPr wrap="square" lIns="0" tIns="0" rIns="0" bIns="0" rtlCol="0" anchor="ctr"/>
           <a:lstStyle/>
           <a:p>
-            <a:pPr algn="ctr" indent="0" marL="0">
+            <a:pPr marL="0" indent="0" algn="ctr">
               <a:buNone/>
             </a:pPr>
             <a:r>
@@ -33150,7 +33160,7 @@
           <a:bodyPr wrap="square" lIns="0" tIns="0" rIns="0" bIns="0" rtlCol="0" anchor="ctr"/>
           <a:lstStyle/>
           <a:p>
-            <a:pPr indent="0" marL="0">
+            <a:pPr marL="0" indent="0">
               <a:buNone/>
             </a:pPr>
             <a:r>
@@ -33189,7 +33199,7 @@
           <a:bodyPr wrap="square" lIns="0" tIns="0" rIns="0" bIns="0" rtlCol="0" anchor="ctr"/>
           <a:lstStyle/>
           <a:p>
-            <a:pPr indent="0" marL="0">
+            <a:pPr marL="0" indent="0">
               <a:buNone/>
             </a:pPr>
             <a:r>
@@ -33309,7 +33319,7 @@
           <a:bodyPr wrap="square" lIns="0" tIns="0" rIns="0" bIns="0" rtlCol="0" anchor="ctr"/>
           <a:lstStyle/>
           <a:p>
-            <a:pPr algn="ctr" indent="0" marL="0">
+            <a:pPr marL="0" indent="0" algn="ctr">
               <a:buNone/>
             </a:pPr>
             <a:r>
@@ -33348,7 +33358,7 @@
           <a:bodyPr wrap="square" lIns="0" tIns="0" rIns="0" bIns="0" rtlCol="0" anchor="ctr"/>
           <a:lstStyle/>
           <a:p>
-            <a:pPr indent="0" marL="0">
+            <a:pPr marL="0" indent="0">
               <a:buNone/>
             </a:pPr>
             <a:r>
@@ -33387,7 +33397,7 @@
           <a:bodyPr wrap="square" lIns="0" tIns="0" rIns="0" bIns="0" rtlCol="0" anchor="ctr"/>
           <a:lstStyle/>
           <a:p>
-            <a:pPr indent="0" marL="0">
+            <a:pPr marL="0" indent="0">
               <a:buNone/>
             </a:pPr>
             <a:r>
@@ -33458,7 +33468,7 @@
             <a:prstDash val="solid"/>
           </a:ln>
           <a:effectLst>
-            <a:outerShdw sx="100000" sy="100000" kx="0" ky="0" algn="bl" rotWithShape="0" blurRad="254000" dist="76200" dir="8100000">
+            <a:outerShdw blurRad="254000" dist="76200" dir="8100000" algn="bl" rotWithShape="0">
               <a:srgbClr val="000000">
                 <a:alpha val="80000"/>
               </a:srgbClr>
@@ -33541,11 +33551,11 @@
           <a:bodyPr wrap="square" lIns="0" tIns="0" rIns="0" bIns="0" rtlCol="0" anchor="ctr"/>
           <a:lstStyle/>
           <a:p>
-            <a:pPr indent="0" marL="0">
-              <a:buNone/>
-            </a:pPr>
-            <a:r>
-              <a:rPr lang="en-US" sz="700" b="1" spc="300" kern="0" dirty="0">
+            <a:pPr marL="0" indent="0">
+              <a:buNone/>
+            </a:pPr>
+            <a:r>
+              <a:rPr lang="en-US" sz="700" b="1" kern="0" spc="300" dirty="0">
                 <a:solidFill>
                   <a:srgbClr val="00D2BE"/>
                 </a:solidFill>
@@ -33657,7 +33667,7 @@
           <a:bodyPr wrap="square" lIns="0" tIns="0" rIns="0" bIns="0" rtlCol="0" anchor="ctr"/>
           <a:lstStyle/>
           <a:p>
-            <a:pPr indent="0" marL="0">
+            <a:pPr marL="0" indent="0">
               <a:buNone/>
             </a:pPr>
             <a:r>
@@ -33723,7 +33733,7 @@
           <a:bodyPr wrap="square" lIns="0" tIns="0" rIns="0" bIns="0" rtlCol="0" anchor="ctr"/>
           <a:lstStyle/>
           <a:p>
-            <a:pPr algn="ctr" indent="0" marL="0">
+            <a:pPr marL="0" indent="0" algn="ctr">
               <a:buNone/>
             </a:pPr>
             <a:r>
@@ -33762,7 +33772,7 @@
           <a:bodyPr wrap="square" lIns="0" tIns="0" rIns="0" bIns="0" rtlCol="0" anchor="t"/>
           <a:lstStyle/>
           <a:p>
-            <a:pPr indent="0" marL="0">
+            <a:pPr marL="0" indent="0">
               <a:buNone/>
             </a:pPr>
             <a:r>
@@ -33853,7 +33863,7 @@
           <a:bodyPr wrap="square" lIns="0" tIns="0" rIns="0" bIns="0" rtlCol="0" anchor="ctr"/>
           <a:lstStyle/>
           <a:p>
-            <a:pPr indent="0" marL="0">
+            <a:pPr marL="0" indent="0">
               <a:buNone/>
             </a:pPr>
             <a:r>
@@ -33919,7 +33929,7 @@
           <a:bodyPr wrap="square" lIns="0" tIns="0" rIns="0" bIns="0" rtlCol="0" anchor="ctr"/>
           <a:lstStyle/>
           <a:p>
-            <a:pPr algn="ctr" indent="0" marL="0">
+            <a:pPr marL="0" indent="0" algn="ctr">
               <a:buNone/>
             </a:pPr>
             <a:r>
@@ -33958,7 +33968,7 @@
           <a:bodyPr wrap="square" lIns="0" tIns="0" rIns="0" bIns="0" rtlCol="0" anchor="t"/>
           <a:lstStyle/>
           <a:p>
-            <a:pPr indent="0" marL="0">
+            <a:pPr marL="0" indent="0">
               <a:buNone/>
             </a:pPr>
             <a:r>
@@ -34049,7 +34059,7 @@
           <a:bodyPr wrap="square" lIns="0" tIns="0" rIns="0" bIns="0" rtlCol="0" anchor="ctr"/>
           <a:lstStyle/>
           <a:p>
-            <a:pPr indent="0" marL="0">
+            <a:pPr marL="0" indent="0">
               <a:buNone/>
             </a:pPr>
             <a:r>
@@ -34115,7 +34125,7 @@
           <a:bodyPr wrap="square" lIns="0" tIns="0" rIns="0" bIns="0" rtlCol="0" anchor="ctr"/>
           <a:lstStyle/>
           <a:p>
-            <a:pPr algn="ctr" indent="0" marL="0">
+            <a:pPr marL="0" indent="0" algn="ctr">
               <a:buNone/>
             </a:pPr>
             <a:r>
@@ -34154,7 +34164,7 @@
           <a:bodyPr wrap="square" lIns="0" tIns="0" rIns="0" bIns="0" rtlCol="0" anchor="t"/>
           <a:lstStyle/>
           <a:p>
-            <a:pPr indent="0" marL="0">
+            <a:pPr marL="0" indent="0">
               <a:buNone/>
             </a:pPr>
             <a:r>
@@ -34245,7 +34255,7 @@
           <a:bodyPr wrap="square" lIns="0" tIns="0" rIns="0" bIns="0" rtlCol="0" anchor="ctr"/>
           <a:lstStyle/>
           <a:p>
-            <a:pPr indent="0" marL="0">
+            <a:pPr marL="0" indent="0">
               <a:buNone/>
             </a:pPr>
             <a:r>
@@ -34311,7 +34321,7 @@
           <a:bodyPr wrap="square" lIns="0" tIns="0" rIns="0" bIns="0" rtlCol="0" anchor="ctr"/>
           <a:lstStyle/>
           <a:p>
-            <a:pPr algn="ctr" indent="0" marL="0">
+            <a:pPr marL="0" indent="0" algn="ctr">
               <a:buNone/>
             </a:pPr>
             <a:r>
@@ -34350,7 +34360,7 @@
           <a:bodyPr wrap="square" lIns="0" tIns="0" rIns="0" bIns="0" rtlCol="0" anchor="t"/>
           <a:lstStyle/>
           <a:p>
-            <a:pPr indent="0" marL="0">
+            <a:pPr marL="0" indent="0">
               <a:buNone/>
             </a:pPr>
             <a:r>
@@ -34441,7 +34451,7 @@
           <a:bodyPr wrap="square" lIns="0" tIns="0" rIns="0" bIns="0" rtlCol="0" anchor="ctr"/>
           <a:lstStyle/>
           <a:p>
-            <a:pPr indent="0" marL="0">
+            <a:pPr marL="0" indent="0">
               <a:buNone/>
             </a:pPr>
             <a:r>
@@ -34507,7 +34517,7 @@
           <a:bodyPr wrap="square" lIns="0" tIns="0" rIns="0" bIns="0" rtlCol="0" anchor="ctr"/>
           <a:lstStyle/>
           <a:p>
-            <a:pPr algn="ctr" indent="0" marL="0">
+            <a:pPr marL="0" indent="0" algn="ctr">
               <a:buNone/>
             </a:pPr>
             <a:r>
@@ -34546,7 +34556,7 @@
           <a:bodyPr wrap="square" lIns="0" tIns="0" rIns="0" bIns="0" rtlCol="0" anchor="t"/>
           <a:lstStyle/>
           <a:p>
-            <a:pPr indent="0" marL="0">
+            <a:pPr marL="0" indent="0">
               <a:buNone/>
             </a:pPr>
             <a:r>
@@ -34637,7 +34647,7 @@
           <a:bodyPr wrap="square" lIns="0" tIns="0" rIns="0" bIns="0" rtlCol="0" anchor="ctr"/>
           <a:lstStyle/>
           <a:p>
-            <a:pPr indent="0" marL="0">
+            <a:pPr marL="0" indent="0">
               <a:buNone/>
             </a:pPr>
             <a:r>
@@ -34703,7 +34713,7 @@
           <a:bodyPr wrap="square" lIns="0" tIns="0" rIns="0" bIns="0" rtlCol="0" anchor="ctr"/>
           <a:lstStyle/>
           <a:p>
-            <a:pPr algn="ctr" indent="0" marL="0">
+            <a:pPr marL="0" indent="0" algn="ctr">
               <a:buNone/>
             </a:pPr>
             <a:r>
@@ -34742,7 +34752,7 @@
           <a:bodyPr wrap="square" lIns="0" tIns="0" rIns="0" bIns="0" rtlCol="0" anchor="t"/>
           <a:lstStyle/>
           <a:p>
-            <a:pPr indent="0" marL="0">
+            <a:pPr marL="0" indent="0">
               <a:buNone/>
             </a:pPr>
             <a:r>
@@ -34833,7 +34843,7 @@
           <a:bodyPr wrap="square" lIns="0" tIns="0" rIns="0" bIns="0" rtlCol="0" anchor="ctr"/>
           <a:lstStyle/>
           <a:p>
-            <a:pPr indent="0" marL="0">
+            <a:pPr marL="0" indent="0">
               <a:buNone/>
             </a:pPr>
             <a:r>
@@ -34899,7 +34909,7 @@
           <a:bodyPr wrap="square" lIns="0" tIns="0" rIns="0" bIns="0" rtlCol="0" anchor="ctr"/>
           <a:lstStyle/>
           <a:p>
-            <a:pPr algn="ctr" indent="0" marL="0">
+            <a:pPr marL="0" indent="0" algn="ctr">
               <a:buNone/>
             </a:pPr>
             <a:r>
@@ -34938,7 +34948,7 @@
           <a:bodyPr wrap="square" lIns="0" tIns="0" rIns="0" bIns="0" rtlCol="0" anchor="t"/>
           <a:lstStyle/>
           <a:p>
-            <a:pPr indent="0" marL="0">
+            <a:pPr marL="0" indent="0">
               <a:buNone/>
             </a:pPr>
             <a:r>
@@ -34972,6 +34982,7 @@
         <a:solidFill>
           <a:srgbClr val="000408"/>
         </a:solidFill>
+        <a:effectLst/>
       </p:bgPr>
     </p:bg>
     <p:spTree>
@@ -36258,9 +36269,7 @@
             <a:ext cx="594360" cy="594360"/>
           </a:xfrm>
           <a:prstGeom prst="rect">
-            <a:avLst>
-              <a:gd name="adj" fmla="val 12308"/>
-            </a:avLst>
+            <a:avLst/>
           </a:prstGeom>
           <a:solidFill>
             <a:srgbClr val="00D2BE">
@@ -36274,7 +36283,7 @@
             <a:prstDash val="solid"/>
           </a:ln>
           <a:effectLst>
-            <a:outerShdw sx="100000" sy="100000" kx="0" ky="0" algn="bl" rotWithShape="0" blurRad="317500" dist="50800" dir="8100000">
+            <a:outerShdw blurRad="317500" dist="50800" dir="8100000" algn="bl" rotWithShape="0">
               <a:srgbClr val="00D2BE">
                 <a:alpha val="40000"/>
               </a:srgbClr>
@@ -36303,7 +36312,7 @@
           <a:bodyPr wrap="square" lIns="0" tIns="0" rIns="0" bIns="0" rtlCol="0" anchor="ctr"/>
           <a:lstStyle/>
           <a:p>
-            <a:pPr algn="ctr" indent="0" marL="0">
+            <a:pPr marL="0" indent="0" algn="ctr">
               <a:buNone/>
             </a:pPr>
             <a:r>
@@ -36335,7 +36344,7 @@
           <a:noFill/>
           <a:ln/>
           <a:effectLst>
-            <a:outerShdw sx="100000" sy="100000" kx="0" ky="0" algn="bl" rotWithShape="0" blurRad="127000" dist="38100" dir="8100000">
+            <a:outerShdw blurRad="127000" dist="38100" dir="8100000" algn="bl" rotWithShape="0">
               <a:srgbClr val="000000">
                 <a:alpha val="50000"/>
               </a:srgbClr>
@@ -36346,7 +36355,7 @@
           <a:bodyPr wrap="square" lIns="0" tIns="0" rIns="0" bIns="0" rtlCol="0" anchor="ctr"/>
           <a:lstStyle/>
           <a:p>
-            <a:pPr indent="0" marL="0">
+            <a:pPr marL="0" indent="0">
               <a:buNone/>
             </a:pPr>
             <a:r>
@@ -36412,11 +36421,11 @@
           <a:bodyPr wrap="square" lIns="0" tIns="0" rIns="0" bIns="0" rtlCol="0" anchor="ctr"/>
           <a:lstStyle/>
           <a:p>
-            <a:pPr algn="ctr" indent="0" marL="0">
-              <a:buNone/>
-            </a:pPr>
-            <a:r>
-              <a:rPr lang="en-US" sz="700" b="1" spc="150" kern="0" dirty="0">
+            <a:pPr marL="0" indent="0" algn="ctr">
+              <a:buNone/>
+            </a:pPr>
+            <a:r>
+              <a:rPr lang="en-US" sz="700" b="1" kern="0" spc="150" dirty="0">
                 <a:solidFill>
                   <a:srgbClr val="00D2BE"/>
                 </a:solidFill>
@@ -36483,7 +36492,7 @@
             <a:prstDash val="solid"/>
           </a:ln>
           <a:effectLst>
-            <a:outerShdw sx="100000" sy="100000" kx="0" ky="0" algn="bl" rotWithShape="0" blurRad="254000" dist="76200" dir="8100000">
+            <a:outerShdw blurRad="254000" dist="76200" dir="8100000" algn="bl" rotWithShape="0">
               <a:srgbClr val="000000">
                 <a:alpha val="80000"/>
               </a:srgbClr>
@@ -36618,7 +36627,7 @@
           <a:bodyPr wrap="square" lIns="0" tIns="0" rIns="0" bIns="0" rtlCol="0" anchor="ctr"/>
           <a:lstStyle/>
           <a:p>
-            <a:pPr algn="ctr" indent="0" marL="0">
+            <a:pPr marL="0" indent="0" algn="ctr">
               <a:buNone/>
             </a:pPr>
             <a:r>
@@ -36684,7 +36693,7 @@
           <a:bodyPr wrap="square" lIns="0" tIns="0" rIns="0" bIns="0" rtlCol="0" anchor="ctr"/>
           <a:lstStyle/>
           <a:p>
-            <a:pPr algn="ctr" indent="0" marL="0">
+            <a:pPr marL="0" indent="0" algn="ctr">
               <a:buNone/>
             </a:pPr>
             <a:r>
@@ -36719,7 +36728,7 @@
           <a:noFill/>
           <a:ln/>
           <a:effectLst>
-            <a:outerShdw sx="100000" sy="100000" kx="0" ky="0" algn="bl" rotWithShape="0" blurRad="317500" dist="50800" dir="8100000">
+            <a:outerShdw blurRad="317500" dist="50800" dir="8100000" algn="bl" rotWithShape="0">
               <a:srgbClr val="00D2BE">
                 <a:alpha val="40000"/>
               </a:srgbClr>
@@ -36730,7 +36739,7 @@
           <a:bodyPr wrap="square" lIns="0" tIns="0" rIns="0" bIns="0" rtlCol="0" anchor="ctr"/>
           <a:lstStyle/>
           <a:p>
-            <a:pPr indent="0" marL="0">
+            <a:pPr marL="0" indent="0">
               <a:buNone/>
             </a:pPr>
             <a:r>
@@ -36769,11 +36778,11 @@
           <a:bodyPr wrap="square" lIns="0" tIns="0" rIns="0" bIns="0" rtlCol="0" anchor="ctr"/>
           <a:lstStyle/>
           <a:p>
-            <a:pPr indent="0" marL="0">
-              <a:buNone/>
-            </a:pPr>
-            <a:r>
-              <a:rPr lang="en-US" sz="650" spc="150" kern="0" dirty="0">
+            <a:pPr marL="0" indent="0">
+              <a:buNone/>
+            </a:pPr>
+            <a:r>
+              <a:rPr lang="en-US" sz="650" kern="0" spc="150" dirty="0">
                 <a:solidFill>
                   <a:srgbClr val="00D2BE">
                     <a:alpha val="70000"/>
@@ -36835,7 +36844,7 @@
           <a:bodyPr wrap="square" lIns="0" tIns="0" rIns="0" bIns="0" rtlCol="0" anchor="t"/>
           <a:lstStyle/>
           <a:p>
-            <a:pPr indent="0" marL="0">
+            <a:pPr marL="0" indent="0">
               <a:lnSpc>
                 <a:spcPct val="140000"/>
               </a:lnSpc>
@@ -36909,7 +36918,7 @@
             <a:prstDash val="solid"/>
           </a:ln>
           <a:effectLst>
-            <a:outerShdw sx="100000" sy="100000" kx="0" ky="0" algn="bl" rotWithShape="0" blurRad="254000" dist="76200" dir="8100000">
+            <a:outerShdw blurRad="254000" dist="76200" dir="8100000" algn="bl" rotWithShape="0">
               <a:srgbClr val="000000">
                 <a:alpha val="80000"/>
               </a:srgbClr>
@@ -37044,7 +37053,7 @@
           <a:bodyPr wrap="square" lIns="0" tIns="0" rIns="0" bIns="0" rtlCol="0" anchor="ctr"/>
           <a:lstStyle/>
           <a:p>
-            <a:pPr algn="ctr" indent="0" marL="0">
+            <a:pPr marL="0" indent="0" algn="ctr">
               <a:buNone/>
             </a:pPr>
             <a:r>
@@ -37110,7 +37119,7 @@
           <a:bodyPr wrap="square" lIns="0" tIns="0" rIns="0" bIns="0" rtlCol="0" anchor="ctr"/>
           <a:lstStyle/>
           <a:p>
-            <a:pPr algn="ctr" indent="0" marL="0">
+            <a:pPr marL="0" indent="0" algn="ctr">
               <a:buNone/>
             </a:pPr>
             <a:r>
@@ -37145,7 +37154,7 @@
           <a:noFill/>
           <a:ln/>
           <a:effectLst>
-            <a:outerShdw sx="100000" sy="100000" kx="0" ky="0" algn="bl" rotWithShape="0" blurRad="317500" dist="50800" dir="8100000">
+            <a:outerShdw blurRad="317500" dist="50800" dir="8100000" algn="bl" rotWithShape="0">
               <a:srgbClr val="00C8A0">
                 <a:alpha val="40000"/>
               </a:srgbClr>
@@ -37156,7 +37165,7 @@
           <a:bodyPr wrap="square" lIns="0" tIns="0" rIns="0" bIns="0" rtlCol="0" anchor="ctr"/>
           <a:lstStyle/>
           <a:p>
-            <a:pPr indent="0" marL="0">
+            <a:pPr marL="0" indent="0">
               <a:buNone/>
             </a:pPr>
             <a:r>
@@ -37195,11 +37204,11 @@
           <a:bodyPr wrap="square" lIns="0" tIns="0" rIns="0" bIns="0" rtlCol="0" anchor="ctr"/>
           <a:lstStyle/>
           <a:p>
-            <a:pPr indent="0" marL="0">
-              <a:buNone/>
-            </a:pPr>
-            <a:r>
-              <a:rPr lang="en-US" sz="650" spc="150" kern="0" dirty="0">
+            <a:pPr marL="0" indent="0">
+              <a:buNone/>
+            </a:pPr>
+            <a:r>
+              <a:rPr lang="en-US" sz="650" kern="0" spc="150" dirty="0">
                 <a:solidFill>
                   <a:srgbClr val="00C8A0">
                     <a:alpha val="70000"/>
@@ -37261,7 +37270,7 @@
           <a:bodyPr wrap="square" lIns="0" tIns="0" rIns="0" bIns="0" rtlCol="0" anchor="t"/>
           <a:lstStyle/>
           <a:p>
-            <a:pPr indent="0" marL="0">
+            <a:pPr marL="0" indent="0">
               <a:lnSpc>
                 <a:spcPct val="140000"/>
               </a:lnSpc>
@@ -37335,7 +37344,7 @@
             <a:prstDash val="solid"/>
           </a:ln>
           <a:effectLst>
-            <a:outerShdw sx="100000" sy="100000" kx="0" ky="0" algn="bl" rotWithShape="0" blurRad="254000" dist="76200" dir="8100000">
+            <a:outerShdw blurRad="254000" dist="76200" dir="8100000" algn="bl" rotWithShape="0">
               <a:srgbClr val="000000">
                 <a:alpha val="80000"/>
               </a:srgbClr>
@@ -37470,7 +37479,7 @@
           <a:bodyPr wrap="square" lIns="0" tIns="0" rIns="0" bIns="0" rtlCol="0" anchor="ctr"/>
           <a:lstStyle/>
           <a:p>
-            <a:pPr algn="ctr" indent="0" marL="0">
+            <a:pPr marL="0" indent="0" algn="ctr">
               <a:buNone/>
             </a:pPr>
             <a:r>
@@ -37536,7 +37545,7 @@
           <a:bodyPr wrap="square" lIns="0" tIns="0" rIns="0" bIns="0" rtlCol="0" anchor="ctr"/>
           <a:lstStyle/>
           <a:p>
-            <a:pPr algn="ctr" indent="0" marL="0">
+            <a:pPr marL="0" indent="0" algn="ctr">
               <a:buNone/>
             </a:pPr>
             <a:r>
@@ -37571,7 +37580,7 @@
           <a:noFill/>
           <a:ln/>
           <a:effectLst>
-            <a:outerShdw sx="100000" sy="100000" kx="0" ky="0" algn="bl" rotWithShape="0" blurRad="317500" dist="50800" dir="8100000">
+            <a:outerShdw blurRad="317500" dist="50800" dir="8100000" algn="bl" rotWithShape="0">
               <a:srgbClr val="28D870">
                 <a:alpha val="40000"/>
               </a:srgbClr>
@@ -37582,7 +37591,7 @@
           <a:bodyPr wrap="square" lIns="0" tIns="0" rIns="0" bIns="0" rtlCol="0" anchor="ctr"/>
           <a:lstStyle/>
           <a:p>
-            <a:pPr indent="0" marL="0">
+            <a:pPr marL="0" indent="0">
               <a:buNone/>
             </a:pPr>
             <a:r>
@@ -37621,11 +37630,11 @@
           <a:bodyPr wrap="square" lIns="0" tIns="0" rIns="0" bIns="0" rtlCol="0" anchor="ctr"/>
           <a:lstStyle/>
           <a:p>
-            <a:pPr indent="0" marL="0">
-              <a:buNone/>
-            </a:pPr>
-            <a:r>
-              <a:rPr lang="en-US" sz="650" spc="150" kern="0" dirty="0">
+            <a:pPr marL="0" indent="0">
+              <a:buNone/>
+            </a:pPr>
+            <a:r>
+              <a:rPr lang="en-US" sz="650" kern="0" spc="150" dirty="0">
                 <a:solidFill>
                   <a:srgbClr val="28D870">
                     <a:alpha val="70000"/>
@@ -37687,7 +37696,7 @@
           <a:bodyPr wrap="square" lIns="0" tIns="0" rIns="0" bIns="0" rtlCol="0" anchor="t"/>
           <a:lstStyle/>
           <a:p>
-            <a:pPr indent="0" marL="0">
+            <a:pPr marL="0" indent="0">
               <a:lnSpc>
                 <a:spcPct val="140000"/>
               </a:lnSpc>
@@ -37761,7 +37770,7 @@
             <a:prstDash val="solid"/>
           </a:ln>
           <a:effectLst>
-            <a:outerShdw sx="100000" sy="100000" kx="0" ky="0" algn="bl" rotWithShape="0" blurRad="254000" dist="76200" dir="8100000">
+            <a:outerShdw blurRad="254000" dist="76200" dir="8100000" algn="bl" rotWithShape="0">
               <a:srgbClr val="000000">
                 <a:alpha val="80000"/>
               </a:srgbClr>
@@ -37896,7 +37905,7 @@
           <a:bodyPr wrap="square" lIns="0" tIns="0" rIns="0" bIns="0" rtlCol="0" anchor="ctr"/>
           <a:lstStyle/>
           <a:p>
-            <a:pPr algn="ctr" indent="0" marL="0">
+            <a:pPr marL="0" indent="0" algn="ctr">
               <a:buNone/>
             </a:pPr>
             <a:r>
@@ -37962,7 +37971,7 @@
           <a:bodyPr wrap="square" lIns="0" tIns="0" rIns="0" bIns="0" rtlCol="0" anchor="ctr"/>
           <a:lstStyle/>
           <a:p>
-            <a:pPr algn="ctr" indent="0" marL="0">
+            <a:pPr marL="0" indent="0" algn="ctr">
               <a:buNone/>
             </a:pPr>
             <a:r>
@@ -37997,7 +38006,7 @@
           <a:noFill/>
           <a:ln/>
           <a:effectLst>
-            <a:outerShdw sx="100000" sy="100000" kx="0" ky="0" algn="bl" rotWithShape="0" blurRad="317500" dist="50800" dir="8100000">
+            <a:outerShdw blurRad="317500" dist="50800" dir="8100000" algn="bl" rotWithShape="0">
               <a:srgbClr val="F0A020">
                 <a:alpha val="40000"/>
               </a:srgbClr>
@@ -38008,7 +38017,7 @@
           <a:bodyPr wrap="square" lIns="0" tIns="0" rIns="0" bIns="0" rtlCol="0" anchor="ctr"/>
           <a:lstStyle/>
           <a:p>
-            <a:pPr indent="0" marL="0">
+            <a:pPr marL="0" indent="0">
               <a:buNone/>
             </a:pPr>
             <a:r>
@@ -38047,11 +38056,11 @@
           <a:bodyPr wrap="square" lIns="0" tIns="0" rIns="0" bIns="0" rtlCol="0" anchor="ctr"/>
           <a:lstStyle/>
           <a:p>
-            <a:pPr indent="0" marL="0">
-              <a:buNone/>
-            </a:pPr>
-            <a:r>
-              <a:rPr lang="en-US" sz="650" spc="150" kern="0" dirty="0">
+            <a:pPr marL="0" indent="0">
+              <a:buNone/>
+            </a:pPr>
+            <a:r>
+              <a:rPr lang="en-US" sz="650" kern="0" spc="150" dirty="0">
                 <a:solidFill>
                   <a:srgbClr val="F0A020">
                     <a:alpha val="70000"/>
@@ -38113,7 +38122,7 @@
           <a:bodyPr wrap="square" lIns="0" tIns="0" rIns="0" bIns="0" rtlCol="0" anchor="t"/>
           <a:lstStyle/>
           <a:p>
-            <a:pPr indent="0" marL="0">
+            <a:pPr marL="0" indent="0">
               <a:lnSpc>
                 <a:spcPct val="140000"/>
               </a:lnSpc>
@@ -38187,7 +38196,7 @@
             <a:prstDash val="solid"/>
           </a:ln>
           <a:effectLst>
-            <a:outerShdw sx="100000" sy="100000" kx="0" ky="0" algn="bl" rotWithShape="0" blurRad="254000" dist="76200" dir="8100000">
+            <a:outerShdw blurRad="254000" dist="76200" dir="8100000" algn="bl" rotWithShape="0">
               <a:srgbClr val="000000">
                 <a:alpha val="80000"/>
               </a:srgbClr>
@@ -38322,7 +38331,7 @@
           <a:bodyPr wrap="square" lIns="0" tIns="0" rIns="0" bIns="0" rtlCol="0" anchor="ctr"/>
           <a:lstStyle/>
           <a:p>
-            <a:pPr algn="ctr" indent="0" marL="0">
+            <a:pPr marL="0" indent="0" algn="ctr">
               <a:buNone/>
             </a:pPr>
             <a:r>
@@ -38388,7 +38397,7 @@
           <a:bodyPr wrap="square" lIns="0" tIns="0" rIns="0" bIns="0" rtlCol="0" anchor="ctr"/>
           <a:lstStyle/>
           <a:p>
-            <a:pPr algn="ctr" indent="0" marL="0">
+            <a:pPr marL="0" indent="0" algn="ctr">
               <a:buNone/>
             </a:pPr>
             <a:r>
@@ -38423,7 +38432,7 @@
           <a:noFill/>
           <a:ln/>
           <a:effectLst>
-            <a:outerShdw sx="100000" sy="100000" kx="0" ky="0" algn="bl" rotWithShape="0" blurRad="317500" dist="50800" dir="8100000">
+            <a:outerShdw blurRad="317500" dist="50800" dir="8100000" algn="bl" rotWithShape="0">
               <a:srgbClr val="F06050">
                 <a:alpha val="40000"/>
               </a:srgbClr>
@@ -38434,7 +38443,7 @@
           <a:bodyPr wrap="square" lIns="0" tIns="0" rIns="0" bIns="0" rtlCol="0" anchor="ctr"/>
           <a:lstStyle/>
           <a:p>
-            <a:pPr indent="0" marL="0">
+            <a:pPr marL="0" indent="0">
               <a:buNone/>
             </a:pPr>
             <a:r>
@@ -38473,11 +38482,11 @@
           <a:bodyPr wrap="square" lIns="0" tIns="0" rIns="0" bIns="0" rtlCol="0" anchor="ctr"/>
           <a:lstStyle/>
           <a:p>
-            <a:pPr indent="0" marL="0">
-              <a:buNone/>
-            </a:pPr>
-            <a:r>
-              <a:rPr lang="en-US" sz="650" spc="150" kern="0" dirty="0">
+            <a:pPr marL="0" indent="0">
+              <a:buNone/>
+            </a:pPr>
+            <a:r>
+              <a:rPr lang="en-US" sz="650" kern="0" spc="150" dirty="0">
                 <a:solidFill>
                   <a:srgbClr val="F06050">
                     <a:alpha val="70000"/>
@@ -38539,7 +38548,7 @@
           <a:bodyPr wrap="square" lIns="0" tIns="0" rIns="0" bIns="0" rtlCol="0" anchor="t"/>
           <a:lstStyle/>
           <a:p>
-            <a:pPr indent="0" marL="0">
+            <a:pPr marL="0" indent="0">
               <a:lnSpc>
                 <a:spcPct val="140000"/>
               </a:lnSpc>
@@ -38613,7 +38622,7 @@
             <a:prstDash val="solid"/>
           </a:ln>
           <a:effectLst>
-            <a:outerShdw sx="100000" sy="100000" kx="0" ky="0" algn="bl" rotWithShape="0" blurRad="254000" dist="76200" dir="8100000">
+            <a:outerShdw blurRad="254000" dist="76200" dir="8100000" algn="bl" rotWithShape="0">
               <a:srgbClr val="000000">
                 <a:alpha val="80000"/>
               </a:srgbClr>
@@ -38748,7 +38757,7 @@
           <a:bodyPr wrap="square" lIns="0" tIns="0" rIns="0" bIns="0" rtlCol="0" anchor="ctr"/>
           <a:lstStyle/>
           <a:p>
-            <a:pPr algn="ctr" indent="0" marL="0">
+            <a:pPr marL="0" indent="0" algn="ctr">
               <a:buNone/>
             </a:pPr>
             <a:r>
@@ -38814,7 +38823,7 @@
           <a:bodyPr wrap="square" lIns="0" tIns="0" rIns="0" bIns="0" rtlCol="0" anchor="ctr"/>
           <a:lstStyle/>
           <a:p>
-            <a:pPr algn="ctr" indent="0" marL="0">
+            <a:pPr marL="0" indent="0" algn="ctr">
               <a:buNone/>
             </a:pPr>
             <a:r>
@@ -38849,7 +38858,7 @@
           <a:noFill/>
           <a:ln/>
           <a:effectLst>
-            <a:outerShdw sx="100000" sy="100000" kx="0" ky="0" algn="bl" rotWithShape="0" blurRad="317500" dist="50800" dir="8100000">
+            <a:outerShdw blurRad="317500" dist="50800" dir="8100000" algn="bl" rotWithShape="0">
               <a:srgbClr val="A050F0">
                 <a:alpha val="40000"/>
               </a:srgbClr>
@@ -38860,7 +38869,7 @@
           <a:bodyPr wrap="square" lIns="0" tIns="0" rIns="0" bIns="0" rtlCol="0" anchor="ctr"/>
           <a:lstStyle/>
           <a:p>
-            <a:pPr indent="0" marL="0">
+            <a:pPr marL="0" indent="0">
               <a:buNone/>
             </a:pPr>
             <a:r>
@@ -38899,11 +38908,11 @@
           <a:bodyPr wrap="square" lIns="0" tIns="0" rIns="0" bIns="0" rtlCol="0" anchor="ctr"/>
           <a:lstStyle/>
           <a:p>
-            <a:pPr indent="0" marL="0">
-              <a:buNone/>
-            </a:pPr>
-            <a:r>
-              <a:rPr lang="en-US" sz="650" spc="150" kern="0" dirty="0">
+            <a:pPr marL="0" indent="0">
+              <a:buNone/>
+            </a:pPr>
+            <a:r>
+              <a:rPr lang="en-US" sz="650" kern="0" spc="150" dirty="0">
                 <a:solidFill>
                   <a:srgbClr val="A050F0">
                     <a:alpha val="70000"/>
@@ -38965,7 +38974,7 @@
           <a:bodyPr wrap="square" lIns="0" tIns="0" rIns="0" bIns="0" rtlCol="0" anchor="t"/>
           <a:lstStyle/>
           <a:p>
-            <a:pPr indent="0" marL="0">
+            <a:pPr marL="0" indent="0">
               <a:lnSpc>
                 <a:spcPct val="140000"/>
               </a:lnSpc>
@@ -39039,7 +39048,7 @@
             <a:prstDash val="solid"/>
           </a:ln>
           <a:effectLst>
-            <a:outerShdw sx="100000" sy="100000" kx="0" ky="0" algn="bl" rotWithShape="0" blurRad="254000" dist="76200" dir="8100000">
+            <a:outerShdw blurRad="254000" dist="76200" dir="8100000" algn="bl" rotWithShape="0">
               <a:srgbClr val="000000">
                 <a:alpha val="80000"/>
               </a:srgbClr>
@@ -39174,7 +39183,7 @@
           <a:bodyPr wrap="square" lIns="0" tIns="0" rIns="0" bIns="0" rtlCol="0" anchor="ctr"/>
           <a:lstStyle/>
           <a:p>
-            <a:pPr algn="ctr" indent="0" marL="0">
+            <a:pPr marL="0" indent="0" algn="ctr">
               <a:buNone/>
             </a:pPr>
             <a:r>
@@ -39240,7 +39249,7 @@
           <a:bodyPr wrap="square" lIns="0" tIns="0" rIns="0" bIns="0" rtlCol="0" anchor="ctr"/>
           <a:lstStyle/>
           <a:p>
-            <a:pPr algn="ctr" indent="0" marL="0">
+            <a:pPr marL="0" indent="0" algn="ctr">
               <a:buNone/>
             </a:pPr>
             <a:r>
@@ -39275,7 +39284,7 @@
           <a:noFill/>
           <a:ln/>
           <a:effectLst>
-            <a:outerShdw sx="100000" sy="100000" kx="0" ky="0" algn="bl" rotWithShape="0" blurRad="317500" dist="50800" dir="8100000">
+            <a:outerShdw blurRad="317500" dist="50800" dir="8100000" algn="bl" rotWithShape="0">
               <a:srgbClr val="22D88A">
                 <a:alpha val="40000"/>
               </a:srgbClr>
@@ -39286,7 +39295,7 @@
           <a:bodyPr wrap="square" lIns="0" tIns="0" rIns="0" bIns="0" rtlCol="0" anchor="ctr"/>
           <a:lstStyle/>
           <a:p>
-            <a:pPr indent="0" marL="0">
+            <a:pPr marL="0" indent="0">
               <a:buNone/>
             </a:pPr>
             <a:r>
@@ -39325,11 +39334,11 @@
           <a:bodyPr wrap="square" lIns="0" tIns="0" rIns="0" bIns="0" rtlCol="0" anchor="ctr"/>
           <a:lstStyle/>
           <a:p>
-            <a:pPr indent="0" marL="0">
-              <a:buNone/>
-            </a:pPr>
-            <a:r>
-              <a:rPr lang="en-US" sz="650" spc="150" kern="0" dirty="0">
+            <a:pPr marL="0" indent="0">
+              <a:buNone/>
+            </a:pPr>
+            <a:r>
+              <a:rPr lang="en-US" sz="650" kern="0" spc="150" dirty="0">
                 <a:solidFill>
                   <a:srgbClr val="22D88A">
                     <a:alpha val="70000"/>
@@ -39391,7 +39400,7 @@
           <a:bodyPr wrap="square" lIns="0" tIns="0" rIns="0" bIns="0" rtlCol="0" anchor="t"/>
           <a:lstStyle/>
           <a:p>
-            <a:pPr indent="0" marL="0">
+            <a:pPr marL="0" indent="0">
               <a:lnSpc>
                 <a:spcPct val="140000"/>
               </a:lnSpc>
@@ -39465,7 +39474,7 @@
             <a:prstDash val="solid"/>
           </a:ln>
           <a:effectLst>
-            <a:outerShdw sx="100000" sy="100000" kx="0" ky="0" algn="bl" rotWithShape="0" blurRad="254000" dist="76200" dir="8100000">
+            <a:outerShdw blurRad="254000" dist="76200" dir="8100000" algn="bl" rotWithShape="0">
               <a:srgbClr val="000000">
                 <a:alpha val="80000"/>
               </a:srgbClr>
@@ -39600,7 +39609,7 @@
           <a:bodyPr wrap="square" lIns="0" tIns="0" rIns="0" bIns="0" rtlCol="0" anchor="ctr"/>
           <a:lstStyle/>
           <a:p>
-            <a:pPr algn="ctr" indent="0" marL="0">
+            <a:pPr marL="0" indent="0" algn="ctr">
               <a:buNone/>
             </a:pPr>
             <a:r>
@@ -39666,7 +39675,7 @@
           <a:bodyPr wrap="square" lIns="0" tIns="0" rIns="0" bIns="0" rtlCol="0" anchor="ctr"/>
           <a:lstStyle/>
           <a:p>
-            <a:pPr algn="ctr" indent="0" marL="0">
+            <a:pPr marL="0" indent="0" algn="ctr">
               <a:buNone/>
             </a:pPr>
             <a:r>
@@ -39701,7 +39710,7 @@
           <a:noFill/>
           <a:ln/>
           <a:effectLst>
-            <a:outerShdw sx="100000" sy="100000" kx="0" ky="0" algn="bl" rotWithShape="0" blurRad="317500" dist="50800" dir="8100000">
+            <a:outerShdw blurRad="317500" dist="50800" dir="8100000" algn="bl" rotWithShape="0">
               <a:srgbClr val="38C8FF">
                 <a:alpha val="40000"/>
               </a:srgbClr>
@@ -39712,7 +39721,7 @@
           <a:bodyPr wrap="square" lIns="0" tIns="0" rIns="0" bIns="0" rtlCol="0" anchor="ctr"/>
           <a:lstStyle/>
           <a:p>
-            <a:pPr indent="0" marL="0">
+            <a:pPr marL="0" indent="0">
               <a:buNone/>
             </a:pPr>
             <a:r>
@@ -39751,11 +39760,11 @@
           <a:bodyPr wrap="square" lIns="0" tIns="0" rIns="0" bIns="0" rtlCol="0" anchor="ctr"/>
           <a:lstStyle/>
           <a:p>
-            <a:pPr indent="0" marL="0">
-              <a:buNone/>
-            </a:pPr>
-            <a:r>
-              <a:rPr lang="en-US" sz="650" spc="150" kern="0" dirty="0">
+            <a:pPr marL="0" indent="0">
+              <a:buNone/>
+            </a:pPr>
+            <a:r>
+              <a:rPr lang="en-US" sz="650" kern="0" spc="150" dirty="0">
                 <a:solidFill>
                   <a:srgbClr val="38C8FF">
                     <a:alpha val="70000"/>
@@ -39817,7 +39826,7 @@
           <a:bodyPr wrap="square" lIns="0" tIns="0" rIns="0" bIns="0" rtlCol="0" anchor="t"/>
           <a:lstStyle/>
           <a:p>
-            <a:pPr indent="0" marL="0">
+            <a:pPr marL="0" indent="0">
               <a:lnSpc>
                 <a:spcPct val="140000"/>
               </a:lnSpc>
@@ -39891,7 +39900,7 @@
             <a:prstDash val="solid"/>
           </a:ln>
           <a:effectLst>
-            <a:outerShdw sx="100000" sy="100000" kx="0" ky="0" algn="bl" rotWithShape="0" blurRad="254000" dist="76200" dir="8100000">
+            <a:outerShdw blurRad="254000" dist="76200" dir="8100000" algn="bl" rotWithShape="0">
               <a:srgbClr val="000000">
                 <a:alpha val="80000"/>
               </a:srgbClr>
@@ -40026,7 +40035,7 @@
           <a:bodyPr wrap="square" lIns="0" tIns="0" rIns="0" bIns="0" rtlCol="0" anchor="ctr"/>
           <a:lstStyle/>
           <a:p>
-            <a:pPr algn="ctr" indent="0" marL="0">
+            <a:pPr marL="0" indent="0" algn="ctr">
               <a:buNone/>
             </a:pPr>
             <a:r>
@@ -40092,7 +40101,7 @@
           <a:bodyPr wrap="square" lIns="0" tIns="0" rIns="0" bIns="0" rtlCol="0" anchor="ctr"/>
           <a:lstStyle/>
           <a:p>
-            <a:pPr algn="ctr" indent="0" marL="0">
+            <a:pPr marL="0" indent="0" algn="ctr">
               <a:buNone/>
             </a:pPr>
             <a:r>
@@ -40127,7 +40136,7 @@
           <a:noFill/>
           <a:ln/>
           <a:effectLst>
-            <a:outerShdw sx="100000" sy="100000" kx="0" ky="0" algn="bl" rotWithShape="0" blurRad="317500" dist="50800" dir="8100000">
+            <a:outerShdw blurRad="317500" dist="50800" dir="8100000" algn="bl" rotWithShape="0">
               <a:srgbClr val="9B6FF0">
                 <a:alpha val="40000"/>
               </a:srgbClr>
@@ -40138,7 +40147,7 @@
           <a:bodyPr wrap="square" lIns="0" tIns="0" rIns="0" bIns="0" rtlCol="0" anchor="ctr"/>
           <a:lstStyle/>
           <a:p>
-            <a:pPr indent="0" marL="0">
+            <a:pPr marL="0" indent="0">
               <a:buNone/>
             </a:pPr>
             <a:r>
@@ -40177,11 +40186,11 @@
           <a:bodyPr wrap="square" lIns="0" tIns="0" rIns="0" bIns="0" rtlCol="0" anchor="ctr"/>
           <a:lstStyle/>
           <a:p>
-            <a:pPr indent="0" marL="0">
-              <a:buNone/>
-            </a:pPr>
-            <a:r>
-              <a:rPr lang="en-US" sz="650" spc="150" kern="0" dirty="0">
+            <a:pPr marL="0" indent="0">
+              <a:buNone/>
+            </a:pPr>
+            <a:r>
+              <a:rPr lang="en-US" sz="650" kern="0" spc="150" dirty="0">
                 <a:solidFill>
                   <a:srgbClr val="9B6FF0">
                     <a:alpha val="70000"/>
@@ -40243,7 +40252,7 @@
           <a:bodyPr wrap="square" lIns="0" tIns="0" rIns="0" bIns="0" rtlCol="0" anchor="t"/>
           <a:lstStyle/>
           <a:p>
-            <a:pPr indent="0" marL="0">
+            <a:pPr marL="0" indent="0">
               <a:lnSpc>
                 <a:spcPct val="140000"/>
               </a:lnSpc>
@@ -40280,6 +40289,7 @@
         <a:solidFill>
           <a:srgbClr val="030B16"/>
         </a:solidFill>
+        <a:effectLst/>
       </p:bgPr>
     </p:bg>
     <p:spTree>
@@ -40412,9 +40422,7 @@
             <a:ext cx="594360" cy="594360"/>
           </a:xfrm>
           <a:prstGeom prst="rect">
-            <a:avLst>
-              <a:gd name="adj" fmla="val 12308"/>
-            </a:avLst>
+            <a:avLst/>
           </a:prstGeom>
           <a:solidFill>
             <a:srgbClr val="F0A020">
@@ -40428,7 +40436,7 @@
             <a:prstDash val="solid"/>
           </a:ln>
           <a:effectLst>
-            <a:outerShdw sx="100000" sy="100000" kx="0" ky="0" algn="bl" rotWithShape="0" blurRad="317500" dist="50800" dir="8100000">
+            <a:outerShdw blurRad="317500" dist="50800" dir="8100000" algn="bl" rotWithShape="0">
               <a:srgbClr val="F0A020">
                 <a:alpha val="40000"/>
               </a:srgbClr>
@@ -40457,7 +40465,7 @@
           <a:bodyPr wrap="square" lIns="0" tIns="0" rIns="0" bIns="0" rtlCol="0" anchor="ctr"/>
           <a:lstStyle/>
           <a:p>
-            <a:pPr algn="ctr" indent="0" marL="0">
+            <a:pPr marL="0" indent="0" algn="ctr">
               <a:buNone/>
             </a:pPr>
             <a:r>
@@ -40489,7 +40497,7 @@
           <a:noFill/>
           <a:ln/>
           <a:effectLst>
-            <a:outerShdw sx="100000" sy="100000" kx="0" ky="0" algn="bl" rotWithShape="0" blurRad="127000" dist="38100" dir="8100000">
+            <a:outerShdw blurRad="127000" dist="38100" dir="8100000" algn="bl" rotWithShape="0">
               <a:srgbClr val="000000">
                 <a:alpha val="50000"/>
               </a:srgbClr>
@@ -40500,7 +40508,7 @@
           <a:bodyPr wrap="square" lIns="0" tIns="0" rIns="0" bIns="0" rtlCol="0" anchor="ctr"/>
           <a:lstStyle/>
           <a:p>
-            <a:pPr indent="0" marL="0">
+            <a:pPr marL="0" indent="0">
               <a:buNone/>
             </a:pPr>
             <a:r>
@@ -40566,11 +40574,11 @@
           <a:bodyPr wrap="square" lIns="0" tIns="0" rIns="0" bIns="0" rtlCol="0" anchor="ctr"/>
           <a:lstStyle/>
           <a:p>
-            <a:pPr algn="ctr" indent="0" marL="0">
-              <a:buNone/>
-            </a:pPr>
-            <a:r>
-              <a:rPr lang="en-US" sz="700" b="1" spc="150" kern="0" dirty="0">
+            <a:pPr marL="0" indent="0" algn="ctr">
+              <a:buNone/>
+            </a:pPr>
+            <a:r>
+              <a:rPr lang="en-US" sz="700" b="1" kern="0" spc="150" dirty="0">
                 <a:solidFill>
                   <a:srgbClr val="F0A020"/>
                 </a:solidFill>
@@ -40637,7 +40645,7 @@
             <a:prstDash val="solid"/>
           </a:ln>
           <a:effectLst>
-            <a:outerShdw sx="100000" sy="100000" kx="0" ky="0" algn="bl" rotWithShape="0" blurRad="254000" dist="76200" dir="8100000">
+            <a:outerShdw blurRad="254000" dist="76200" dir="8100000" algn="bl" rotWithShape="0">
               <a:srgbClr val="000000">
                 <a:alpha val="80000"/>
               </a:srgbClr>
@@ -40743,7 +40751,7 @@
           <a:noFill/>
           <a:ln/>
           <a:effectLst>
-            <a:outerShdw sx="100000" sy="100000" kx="0" ky="0" algn="bl" rotWithShape="0" blurRad="317500" dist="50800" dir="8100000">
+            <a:outerShdw blurRad="317500" dist="50800" dir="8100000" algn="bl" rotWithShape="0">
               <a:srgbClr val="F0A020">
                 <a:alpha val="40000"/>
               </a:srgbClr>
@@ -40754,7 +40762,7 @@
           <a:bodyPr wrap="square" lIns="0" tIns="0" rIns="0" bIns="0" rtlCol="0" anchor="ctr"/>
           <a:lstStyle/>
           <a:p>
-            <a:pPr indent="0" marL="0">
+            <a:pPr marL="0" indent="0">
               <a:buNone/>
             </a:pPr>
             <a:r>
@@ -40793,11 +40801,11 @@
           <a:bodyPr wrap="square" lIns="0" tIns="0" rIns="0" bIns="0" rtlCol="0" anchor="ctr"/>
           <a:lstStyle/>
           <a:p>
-            <a:pPr indent="0" marL="0">
-              <a:buNone/>
-            </a:pPr>
-            <a:r>
-              <a:rPr lang="en-US" sz="800" spc="100" kern="0" dirty="0">
+            <a:pPr marL="0" indent="0">
+              <a:buNone/>
+            </a:pPr>
+            <a:r>
+              <a:rPr lang="en-US" sz="800" kern="0" spc="100" dirty="0">
                 <a:solidFill>
                   <a:srgbClr val="2A5050"/>
                 </a:solidFill>
@@ -40857,7 +40865,7 @@
           <a:bodyPr wrap="square" lIns="0" tIns="0" rIns="0" bIns="0" rtlCol="0" anchor="ctr"/>
           <a:lstStyle/>
           <a:p>
-            <a:pPr algn="ctr" indent="0" marL="0">
+            <a:pPr marL="0" indent="0" algn="ctr">
               <a:buNone/>
             </a:pPr>
             <a:r>
@@ -40893,7 +40901,7 @@
           <a:bodyPr wrap="square" lIns="0" tIns="0" rIns="0" bIns="0" rtlCol="0" anchor="ctr"/>
           <a:lstStyle/>
           <a:p>
-            <a:pPr indent="0" marL="0">
+            <a:pPr marL="0" indent="0">
               <a:buNone/>
             </a:pPr>
             <a:r>
@@ -40932,7 +40940,7 @@
           <a:bodyPr wrap="square" lIns="0" tIns="0" rIns="0" bIns="0" rtlCol="0" anchor="t"/>
           <a:lstStyle/>
           <a:p>
-            <a:pPr indent="0" marL="0">
+            <a:pPr marL="0" indent="0">
               <a:lnSpc>
                 <a:spcPct val="130000"/>
               </a:lnSpc>
@@ -40974,7 +40982,7 @@
           <a:bodyPr wrap="square" lIns="0" tIns="0" rIns="0" bIns="0" rtlCol="0" anchor="ctr"/>
           <a:lstStyle/>
           <a:p>
-            <a:pPr algn="ctr" indent="0" marL="0">
+            <a:pPr marL="0" indent="0" algn="ctr">
               <a:buNone/>
             </a:pPr>
             <a:r>
@@ -41010,7 +41018,7 @@
           <a:bodyPr wrap="square" lIns="0" tIns="0" rIns="0" bIns="0" rtlCol="0" anchor="ctr"/>
           <a:lstStyle/>
           <a:p>
-            <a:pPr indent="0" marL="0">
+            <a:pPr marL="0" indent="0">
               <a:buNone/>
             </a:pPr>
             <a:r>
@@ -41049,7 +41057,7 @@
           <a:bodyPr wrap="square" lIns="0" tIns="0" rIns="0" bIns="0" rtlCol="0" anchor="t"/>
           <a:lstStyle/>
           <a:p>
-            <a:pPr indent="0" marL="0">
+            <a:pPr marL="0" indent="0">
               <a:lnSpc>
                 <a:spcPct val="130000"/>
               </a:lnSpc>
@@ -41091,7 +41099,7 @@
           <a:bodyPr wrap="square" lIns="0" tIns="0" rIns="0" bIns="0" rtlCol="0" anchor="ctr"/>
           <a:lstStyle/>
           <a:p>
-            <a:pPr algn="ctr" indent="0" marL="0">
+            <a:pPr marL="0" indent="0" algn="ctr">
               <a:buNone/>
             </a:pPr>
             <a:r>
@@ -41127,7 +41135,7 @@
           <a:bodyPr wrap="square" lIns="0" tIns="0" rIns="0" bIns="0" rtlCol="0" anchor="ctr"/>
           <a:lstStyle/>
           <a:p>
-            <a:pPr indent="0" marL="0">
+            <a:pPr marL="0" indent="0">
               <a:buNone/>
             </a:pPr>
             <a:r>
@@ -41166,7 +41174,7 @@
           <a:bodyPr wrap="square" lIns="0" tIns="0" rIns="0" bIns="0" rtlCol="0" anchor="t"/>
           <a:lstStyle/>
           <a:p>
-            <a:pPr indent="0" marL="0">
+            <a:pPr marL="0" indent="0">
               <a:lnSpc>
                 <a:spcPct val="130000"/>
               </a:lnSpc>
@@ -41208,7 +41216,7 @@
           <a:bodyPr wrap="square" lIns="0" tIns="0" rIns="0" bIns="0" rtlCol="0" anchor="ctr"/>
           <a:lstStyle/>
           <a:p>
-            <a:pPr algn="ctr" indent="0" marL="0">
+            <a:pPr marL="0" indent="0" algn="ctr">
               <a:buNone/>
             </a:pPr>
             <a:r>
@@ -41244,7 +41252,7 @@
           <a:bodyPr wrap="square" lIns="0" tIns="0" rIns="0" bIns="0" rtlCol="0" anchor="ctr"/>
           <a:lstStyle/>
           <a:p>
-            <a:pPr indent="0" marL="0">
+            <a:pPr marL="0" indent="0">
               <a:buNone/>
             </a:pPr>
             <a:r>
@@ -41283,7 +41291,7 @@
           <a:bodyPr wrap="square" lIns="0" tIns="0" rIns="0" bIns="0" rtlCol="0" anchor="t"/>
           <a:lstStyle/>
           <a:p>
-            <a:pPr indent="0" marL="0">
+            <a:pPr marL="0" indent="0">
               <a:lnSpc>
                 <a:spcPct val="130000"/>
               </a:lnSpc>
@@ -41325,7 +41333,7 @@
           <a:bodyPr wrap="square" lIns="0" tIns="0" rIns="0" bIns="0" rtlCol="0" anchor="ctr"/>
           <a:lstStyle/>
           <a:p>
-            <a:pPr algn="ctr" indent="0" marL="0">
+            <a:pPr marL="0" indent="0" algn="ctr">
               <a:buNone/>
             </a:pPr>
             <a:r>
@@ -41361,7 +41369,7 @@
           <a:bodyPr wrap="square" lIns="0" tIns="0" rIns="0" bIns="0" rtlCol="0" anchor="ctr"/>
           <a:lstStyle/>
           <a:p>
-            <a:pPr indent="0" marL="0">
+            <a:pPr marL="0" indent="0">
               <a:buNone/>
             </a:pPr>
             <a:r>
@@ -41400,7 +41408,7 @@
           <a:bodyPr wrap="square" lIns="0" tIns="0" rIns="0" bIns="0" rtlCol="0" anchor="t"/>
           <a:lstStyle/>
           <a:p>
-            <a:pPr indent="0" marL="0">
+            <a:pPr marL="0" indent="0">
               <a:lnSpc>
                 <a:spcPct val="130000"/>
               </a:lnSpc>
@@ -41442,7 +41450,7 @@
           <a:bodyPr wrap="square" lIns="0" tIns="0" rIns="0" bIns="0" rtlCol="0" anchor="ctr"/>
           <a:lstStyle/>
           <a:p>
-            <a:pPr algn="ctr" indent="0" marL="0">
+            <a:pPr marL="0" indent="0" algn="ctr">
               <a:buNone/>
             </a:pPr>
             <a:r>
@@ -41478,7 +41486,7 @@
           <a:bodyPr wrap="square" lIns="0" tIns="0" rIns="0" bIns="0" rtlCol="0" anchor="ctr"/>
           <a:lstStyle/>
           <a:p>
-            <a:pPr indent="0" marL="0">
+            <a:pPr marL="0" indent="0">
               <a:buNone/>
             </a:pPr>
             <a:r>
@@ -41517,7 +41525,7 @@
           <a:bodyPr wrap="square" lIns="0" tIns="0" rIns="0" bIns="0" rtlCol="0" anchor="t"/>
           <a:lstStyle/>
           <a:p>
-            <a:pPr indent="0" marL="0">
+            <a:pPr marL="0" indent="0">
               <a:lnSpc>
                 <a:spcPct val="130000"/>
               </a:lnSpc>
@@ -41591,7 +41599,7 @@
             <a:prstDash val="solid"/>
           </a:ln>
           <a:effectLst>
-            <a:outerShdw sx="100000" sy="100000" kx="0" ky="0" algn="bl" rotWithShape="0" blurRad="254000" dist="76200" dir="8100000">
+            <a:outerShdw blurRad="254000" dist="76200" dir="8100000" algn="bl" rotWithShape="0">
               <a:srgbClr val="000000">
                 <a:alpha val="80000"/>
               </a:srgbClr>
@@ -41697,7 +41705,7 @@
           <a:noFill/>
           <a:ln/>
           <a:effectLst>
-            <a:outerShdw sx="100000" sy="100000" kx="0" ky="0" algn="bl" rotWithShape="0" blurRad="317500" dist="50800" dir="8100000">
+            <a:outerShdw blurRad="317500" dist="50800" dir="8100000" algn="bl" rotWithShape="0">
               <a:srgbClr val="00D2BE">
                 <a:alpha val="40000"/>
               </a:srgbClr>
@@ -41708,7 +41716,7 @@
           <a:bodyPr wrap="square" lIns="0" tIns="0" rIns="0" bIns="0" rtlCol="0" anchor="ctr"/>
           <a:lstStyle/>
           <a:p>
-            <a:pPr indent="0" marL="0">
+            <a:pPr marL="0" indent="0">
               <a:buNone/>
             </a:pPr>
             <a:r>
@@ -41747,7 +41755,7 @@
           <a:bodyPr wrap="square" lIns="0" tIns="0" rIns="0" bIns="0" rtlCol="0" anchor="ctr"/>
           <a:lstStyle/>
           <a:p>
-            <a:pPr indent="0" marL="0">
+            <a:pPr marL="0" indent="0">
               <a:lnSpc>
                 <a:spcPct val="120000"/>
               </a:lnSpc>
@@ -41789,7 +41797,7 @@
           <a:bodyPr wrap="square" lIns="0" tIns="0" rIns="0" bIns="0" rtlCol="0" anchor="ctr"/>
           <a:lstStyle/>
           <a:p>
-            <a:pPr indent="0" marL="0">
+            <a:pPr marL="0" indent="0">
               <a:lnSpc>
                 <a:spcPct val="120000"/>
               </a:lnSpc>
@@ -41831,7 +41839,7 @@
           <a:bodyPr wrap="square" lIns="0" tIns="0" rIns="0" bIns="0" rtlCol="0" anchor="ctr"/>
           <a:lstStyle/>
           <a:p>
-            <a:pPr indent="0" marL="0">
+            <a:pPr marL="0" indent="0">
               <a:lnSpc>
                 <a:spcPct val="120000"/>
               </a:lnSpc>
@@ -41873,7 +41881,7 @@
           <a:bodyPr wrap="square" lIns="0" tIns="0" rIns="0" bIns="0" rtlCol="0" anchor="ctr"/>
           <a:lstStyle/>
           <a:p>
-            <a:pPr indent="0" marL="0">
+            <a:pPr marL="0" indent="0">
               <a:lnSpc>
                 <a:spcPct val="120000"/>
               </a:lnSpc>
@@ -41915,7 +41923,7 @@
           <a:bodyPr wrap="square" lIns="0" tIns="0" rIns="0" bIns="0" rtlCol="0" anchor="ctr"/>
           <a:lstStyle/>
           <a:p>
-            <a:pPr indent="0" marL="0">
+            <a:pPr marL="0" indent="0">
               <a:lnSpc>
                 <a:spcPct val="120000"/>
               </a:lnSpc>
@@ -41989,7 +41997,7 @@
             <a:prstDash val="solid"/>
           </a:ln>
           <a:effectLst>
-            <a:outerShdw sx="100000" sy="100000" kx="0" ky="0" algn="bl" rotWithShape="0" blurRad="254000" dist="76200" dir="8100000">
+            <a:outerShdw blurRad="254000" dist="76200" dir="8100000" algn="bl" rotWithShape="0">
               <a:srgbClr val="000000">
                 <a:alpha val="80000"/>
               </a:srgbClr>
@@ -42072,7 +42080,7 @@
           <a:bodyPr wrap="square" lIns="0" tIns="0" rIns="0" bIns="0" rtlCol="0" anchor="ctr"/>
           <a:lstStyle/>
           <a:p>
-            <a:pPr indent="0" marL="0">
+            <a:pPr marL="0" indent="0">
               <a:buNone/>
             </a:pPr>
             <a:r>
@@ -42111,7 +42119,7 @@
           <a:bodyPr wrap="square" lIns="0" tIns="0" rIns="0" bIns="0" rtlCol="0" anchor="ctr"/>
           <a:lstStyle/>
           <a:p>
-            <a:pPr indent="0" marL="0">
+            <a:pPr marL="0" indent="0">
               <a:buNone/>
             </a:pPr>
             <a:r>
@@ -42150,7 +42158,7 @@
           <a:bodyPr wrap="square" lIns="0" tIns="0" rIns="0" bIns="0" rtlCol="0" anchor="ctr"/>
           <a:lstStyle/>
           <a:p>
-            <a:pPr indent="0" marL="0">
+            <a:pPr marL="0" indent="0">
               <a:buNone/>
             </a:pPr>
             <a:r>
@@ -42189,7 +42197,7 @@
           <a:bodyPr wrap="square" lIns="0" tIns="0" rIns="0" bIns="0" rtlCol="0" anchor="ctr"/>
           <a:lstStyle/>
           <a:p>
-            <a:pPr indent="0" marL="0">
+            <a:pPr marL="0" indent="0">
               <a:buNone/>
             </a:pPr>
             <a:r>
@@ -42260,7 +42268,7 @@
             <a:prstDash val="solid"/>
           </a:ln>
           <a:effectLst>
-            <a:outerShdw sx="100000" sy="100000" kx="0" ky="0" algn="bl" rotWithShape="0" blurRad="254000" dist="76200" dir="8100000">
+            <a:outerShdw blurRad="254000" dist="76200" dir="8100000" algn="bl" rotWithShape="0">
               <a:srgbClr val="000000">
                 <a:alpha val="80000"/>
               </a:srgbClr>
@@ -42343,7 +42351,7 @@
           <a:bodyPr wrap="square" lIns="0" tIns="0" rIns="0" bIns="0" rtlCol="0" anchor="ctr"/>
           <a:lstStyle/>
           <a:p>
-            <a:pPr indent="0" marL="0">
+            <a:pPr marL="0" indent="0">
               <a:buNone/>
             </a:pPr>
             <a:r>
@@ -42382,7 +42390,7 @@
           <a:bodyPr wrap="square" lIns="0" tIns="0" rIns="0" bIns="0" rtlCol="0" anchor="ctr"/>
           <a:lstStyle/>
           <a:p>
-            <a:pPr indent="0" marL="0">
+            <a:pPr marL="0" indent="0">
               <a:buNone/>
             </a:pPr>
             <a:r>
@@ -42421,7 +42429,7 @@
           <a:bodyPr wrap="square" lIns="0" tIns="0" rIns="0" bIns="0" rtlCol="0" anchor="ctr"/>
           <a:lstStyle/>
           <a:p>
-            <a:pPr indent="0" marL="0">
+            <a:pPr marL="0" indent="0">
               <a:buNone/>
             </a:pPr>
             <a:r>
@@ -42460,7 +42468,7 @@
           <a:bodyPr wrap="square" lIns="0" tIns="0" rIns="0" bIns="0" rtlCol="0" anchor="ctr"/>
           <a:lstStyle/>
           <a:p>
-            <a:pPr indent="0" marL="0">
+            <a:pPr marL="0" indent="0">
               <a:buNone/>
             </a:pPr>
             <a:r>
@@ -42531,7 +42539,7 @@
             <a:prstDash val="solid"/>
           </a:ln>
           <a:effectLst>
-            <a:outerShdw sx="100000" sy="100000" kx="0" ky="0" algn="bl" rotWithShape="0" blurRad="254000" dist="76200" dir="8100000">
+            <a:outerShdw blurRad="254000" dist="76200" dir="8100000" algn="bl" rotWithShape="0">
               <a:srgbClr val="000000">
                 <a:alpha val="80000"/>
               </a:srgbClr>
@@ -42614,7 +42622,7 @@
           <a:bodyPr wrap="square" lIns="0" tIns="0" rIns="0" bIns="0" rtlCol="0" anchor="ctr"/>
           <a:lstStyle/>
           <a:p>
-            <a:pPr indent="0" marL="0">
+            <a:pPr marL="0" indent="0">
               <a:buNone/>
             </a:pPr>
             <a:r>
@@ -42653,7 +42661,7 @@
           <a:bodyPr wrap="square" lIns="0" tIns="0" rIns="0" bIns="0" rtlCol="0" anchor="ctr"/>
           <a:lstStyle/>
           <a:p>
-            <a:pPr indent="0" marL="0">
+            <a:pPr marL="0" indent="0">
               <a:buNone/>
             </a:pPr>
             <a:r>
@@ -42692,7 +42700,7 @@
           <a:bodyPr wrap="square" lIns="0" tIns="0" rIns="0" bIns="0" rtlCol="0" anchor="ctr"/>
           <a:lstStyle/>
           <a:p>
-            <a:pPr indent="0" marL="0">
+            <a:pPr marL="0" indent="0">
               <a:buNone/>
             </a:pPr>
             <a:r>
@@ -42731,7 +42739,7 @@
           <a:bodyPr wrap="square" lIns="0" tIns="0" rIns="0" bIns="0" rtlCol="0" anchor="ctr"/>
           <a:lstStyle/>
           <a:p>
-            <a:pPr indent="0" marL="0">
+            <a:pPr marL="0" indent="0">
               <a:buNone/>
             </a:pPr>
             <a:r>
@@ -42765,6 +42773,7 @@
         <a:solidFill>
           <a:srgbClr val="030B16"/>
         </a:solidFill>
+        <a:effectLst/>
       </p:bgPr>
     </p:bg>
     <p:spTree>
@@ -42897,9 +42906,7 @@
             <a:ext cx="594360" cy="594360"/>
           </a:xfrm>
           <a:prstGeom prst="rect">
-            <a:avLst>
-              <a:gd name="adj" fmla="val 12308"/>
-            </a:avLst>
+            <a:avLst/>
           </a:prstGeom>
           <a:solidFill>
             <a:srgbClr val="00D2BE">
@@ -42913,7 +42920,7 @@
             <a:prstDash val="solid"/>
           </a:ln>
           <a:effectLst>
-            <a:outerShdw sx="100000" sy="100000" kx="0" ky="0" algn="bl" rotWithShape="0" blurRad="317500" dist="50800" dir="8100000">
+            <a:outerShdw blurRad="317500" dist="50800" dir="8100000" algn="bl" rotWithShape="0">
               <a:srgbClr val="00D2BE">
                 <a:alpha val="40000"/>
               </a:srgbClr>
@@ -42942,7 +42949,7 @@
           <a:bodyPr wrap="square" lIns="0" tIns="0" rIns="0" bIns="0" rtlCol="0" anchor="ctr"/>
           <a:lstStyle/>
           <a:p>
-            <a:pPr algn="ctr" indent="0" marL="0">
+            <a:pPr marL="0" indent="0" algn="ctr">
               <a:buNone/>
             </a:pPr>
             <a:r>
@@ -42974,7 +42981,7 @@
           <a:noFill/>
           <a:ln/>
           <a:effectLst>
-            <a:outerShdw sx="100000" sy="100000" kx="0" ky="0" algn="bl" rotWithShape="0" blurRad="127000" dist="38100" dir="8100000">
+            <a:outerShdw blurRad="127000" dist="38100" dir="8100000" algn="bl" rotWithShape="0">
               <a:srgbClr val="000000">
                 <a:alpha val="50000"/>
               </a:srgbClr>
@@ -42985,7 +42992,7 @@
           <a:bodyPr wrap="square" lIns="0" tIns="0" rIns="0" bIns="0" rtlCol="0" anchor="ctr"/>
           <a:lstStyle/>
           <a:p>
-            <a:pPr indent="0" marL="0">
+            <a:pPr marL="0" indent="0">
               <a:buNone/>
             </a:pPr>
             <a:r>
@@ -43051,11 +43058,11 @@
           <a:bodyPr wrap="square" lIns="0" tIns="0" rIns="0" bIns="0" rtlCol="0" anchor="ctr"/>
           <a:lstStyle/>
           <a:p>
-            <a:pPr algn="ctr" indent="0" marL="0">
-              <a:buNone/>
-            </a:pPr>
-            <a:r>
-              <a:rPr lang="en-US" sz="700" b="1" spc="150" kern="0" dirty="0">
+            <a:pPr marL="0" indent="0" algn="ctr">
+              <a:buNone/>
+            </a:pPr>
+            <a:r>
+              <a:rPr lang="en-US" sz="700" b="1" kern="0" spc="150" dirty="0">
                 <a:solidFill>
                   <a:srgbClr val="00D2BE"/>
                 </a:solidFill>
@@ -43122,7 +43129,7 @@
             <a:prstDash val="solid"/>
           </a:ln>
           <a:effectLst>
-            <a:outerShdw sx="100000" sy="100000" kx="0" ky="0" algn="bl" rotWithShape="0" blurRad="254000" dist="76200" dir="8100000">
+            <a:outerShdw blurRad="254000" dist="76200" dir="8100000" algn="bl" rotWithShape="0">
               <a:srgbClr val="000000">
                 <a:alpha val="80000"/>
               </a:srgbClr>
@@ -43228,7 +43235,7 @@
           <a:noFill/>
           <a:ln/>
           <a:effectLst>
-            <a:outerShdw sx="100000" sy="100000" kx="0" ky="0" algn="bl" rotWithShape="0" blurRad="317500" dist="50800" dir="8100000">
+            <a:outerShdw blurRad="317500" dist="50800" dir="8100000" algn="bl" rotWithShape="0">
               <a:srgbClr val="22D88A">
                 <a:alpha val="40000"/>
               </a:srgbClr>
@@ -43239,7 +43246,7 @@
           <a:bodyPr wrap="square" lIns="0" tIns="0" rIns="0" bIns="0" rtlCol="0" anchor="ctr"/>
           <a:lstStyle/>
           <a:p>
-            <a:pPr indent="0" marL="0">
+            <a:pPr marL="0" indent="0">
               <a:buNone/>
             </a:pPr>
             <a:r>
@@ -43278,7 +43285,7 @@
           <a:bodyPr wrap="square" lIns="0" tIns="0" rIns="0" bIns="0" rtlCol="0" anchor="ctr"/>
           <a:lstStyle/>
           <a:p>
-            <a:pPr indent="0" marL="0">
+            <a:pPr marL="0" indent="0">
               <a:buNone/>
             </a:pPr>
             <a:r>
@@ -43319,7 +43326,7 @@
           <a:bodyPr wrap="square" lIns="0" tIns="0" rIns="0" bIns="0" rtlCol="0" anchor="ctr"/>
           <a:lstStyle/>
           <a:p>
-            <a:pPr indent="0" marL="0">
+            <a:pPr marL="0" indent="0">
               <a:buNone/>
             </a:pPr>
             <a:r>
@@ -43385,7 +43392,7 @@
           <a:bodyPr wrap="square" lIns="0" tIns="0" rIns="0" bIns="0" rtlCol="0" anchor="ctr"/>
           <a:lstStyle/>
           <a:p>
-            <a:pPr algn="ctr" indent="0" marL="0">
+            <a:pPr marL="0" indent="0" algn="ctr">
               <a:buNone/>
             </a:pPr>
             <a:r>
@@ -43451,7 +43458,7 @@
           <a:bodyPr wrap="square" lIns="0" tIns="0" rIns="0" bIns="0" rtlCol="0" anchor="ctr"/>
           <a:lstStyle/>
           <a:p>
-            <a:pPr algn="ctr" indent="0" marL="0">
+            <a:pPr marL="0" indent="0" algn="ctr">
               <a:buNone/>
             </a:pPr>
             <a:r>
@@ -43517,7 +43524,7 @@
           <a:bodyPr wrap="square" lIns="0" tIns="0" rIns="0" bIns="0" rtlCol="0" anchor="ctr"/>
           <a:lstStyle/>
           <a:p>
-            <a:pPr algn="ctr" indent="0" marL="0">
+            <a:pPr marL="0" indent="0" algn="ctr">
               <a:buNone/>
             </a:pPr>
             <a:r>
@@ -43583,7 +43590,7 @@
           <a:bodyPr wrap="square" lIns="0" tIns="0" rIns="0" bIns="0" rtlCol="0" anchor="ctr"/>
           <a:lstStyle/>
           <a:p>
-            <a:pPr algn="ctr" indent="0" marL="0">
+            <a:pPr marL="0" indent="0" algn="ctr">
               <a:buNone/>
             </a:pPr>
             <a:r>
@@ -43649,7 +43656,7 @@
           <a:bodyPr wrap="square" lIns="0" tIns="0" rIns="0" bIns="0" rtlCol="0" anchor="ctr"/>
           <a:lstStyle/>
           <a:p>
-            <a:pPr algn="ctr" indent="0" marL="0">
+            <a:pPr marL="0" indent="0" algn="ctr">
               <a:buNone/>
             </a:pPr>
             <a:r>
@@ -43715,7 +43722,7 @@
           <a:bodyPr wrap="square" lIns="0" tIns="0" rIns="0" bIns="0" rtlCol="0" anchor="ctr"/>
           <a:lstStyle/>
           <a:p>
-            <a:pPr algn="ctr" indent="0" marL="0">
+            <a:pPr marL="0" indent="0" algn="ctr">
               <a:buNone/>
             </a:pPr>
             <a:r>
@@ -43804,7 +43811,7 @@
           <a:bodyPr wrap="square" lIns="0" tIns="0" rIns="0" bIns="0" rtlCol="0" anchor="ctr"/>
           <a:lstStyle/>
           <a:p>
-            <a:pPr indent="0" marL="0">
+            <a:pPr marL="0" indent="0">
               <a:buNone/>
             </a:pPr>
             <a:r>
@@ -43843,7 +43850,7 @@
           <a:bodyPr wrap="square" lIns="0" tIns="0" rIns="0" bIns="0" rtlCol="0" anchor="t"/>
           <a:lstStyle/>
           <a:p>
-            <a:pPr indent="0" marL="0">
+            <a:pPr marL="0" indent="0">
               <a:lnSpc>
                 <a:spcPct val="130000"/>
               </a:lnSpc>
@@ -43910,7 +43917,7 @@
           <a:bodyPr wrap="square" lIns="0" tIns="0" rIns="0" bIns="0" rtlCol="0" anchor="ctr"/>
           <a:lstStyle/>
           <a:p>
-            <a:pPr indent="0" marL="0">
+            <a:pPr marL="0" indent="0">
               <a:buNone/>
             </a:pPr>
             <a:r>
@@ -43949,7 +43956,7 @@
           <a:bodyPr wrap="square" lIns="0" tIns="0" rIns="0" bIns="0" rtlCol="0" anchor="t"/>
           <a:lstStyle/>
           <a:p>
-            <a:pPr indent="0" marL="0">
+            <a:pPr marL="0" indent="0">
               <a:lnSpc>
                 <a:spcPct val="130000"/>
               </a:lnSpc>
@@ -44016,7 +44023,7 @@
           <a:bodyPr wrap="square" lIns="0" tIns="0" rIns="0" bIns="0" rtlCol="0" anchor="ctr"/>
           <a:lstStyle/>
           <a:p>
-            <a:pPr indent="0" marL="0">
+            <a:pPr marL="0" indent="0">
               <a:buNone/>
             </a:pPr>
             <a:r>
@@ -44055,7 +44062,7 @@
           <a:bodyPr wrap="square" lIns="0" tIns="0" rIns="0" bIns="0" rtlCol="0" anchor="t"/>
           <a:lstStyle/>
           <a:p>
-            <a:pPr indent="0" marL="0">
+            <a:pPr marL="0" indent="0">
               <a:lnSpc>
                 <a:spcPct val="130000"/>
               </a:lnSpc>
@@ -44122,7 +44129,7 @@
           <a:bodyPr wrap="square" lIns="0" tIns="0" rIns="0" bIns="0" rtlCol="0" anchor="ctr"/>
           <a:lstStyle/>
           <a:p>
-            <a:pPr indent="0" marL="0">
+            <a:pPr marL="0" indent="0">
               <a:buNone/>
             </a:pPr>
             <a:r>
@@ -44161,7 +44168,7 @@
           <a:bodyPr wrap="square" lIns="0" tIns="0" rIns="0" bIns="0" rtlCol="0" anchor="t"/>
           <a:lstStyle/>
           <a:p>
-            <a:pPr indent="0" marL="0">
+            <a:pPr marL="0" indent="0">
               <a:lnSpc>
                 <a:spcPct val="130000"/>
               </a:lnSpc>
@@ -44228,7 +44235,7 @@
           <a:bodyPr wrap="square" lIns="0" tIns="0" rIns="0" bIns="0" rtlCol="0" anchor="ctr"/>
           <a:lstStyle/>
           <a:p>
-            <a:pPr indent="0" marL="0">
+            <a:pPr marL="0" indent="0">
               <a:buNone/>
             </a:pPr>
             <a:r>
@@ -44267,7 +44274,7 @@
           <a:bodyPr wrap="square" lIns="0" tIns="0" rIns="0" bIns="0" rtlCol="0" anchor="t"/>
           <a:lstStyle/>
           <a:p>
-            <a:pPr indent="0" marL="0">
+            <a:pPr marL="0" indent="0">
               <a:lnSpc>
                 <a:spcPct val="130000"/>
               </a:lnSpc>
@@ -44334,7 +44341,7 @@
           <a:bodyPr wrap="square" lIns="0" tIns="0" rIns="0" bIns="0" rtlCol="0" anchor="ctr"/>
           <a:lstStyle/>
           <a:p>
-            <a:pPr indent="0" marL="0">
+            <a:pPr marL="0" indent="0">
               <a:buNone/>
             </a:pPr>
             <a:r>
@@ -44373,7 +44380,7 @@
           <a:bodyPr wrap="square" lIns="0" tIns="0" rIns="0" bIns="0" rtlCol="0" anchor="t"/>
           <a:lstStyle/>
           <a:p>
-            <a:pPr indent="0" marL="0">
+            <a:pPr marL="0" indent="0">
               <a:lnSpc>
                 <a:spcPct val="130000"/>
               </a:lnSpc>
@@ -44447,7 +44454,7 @@
             <a:prstDash val="solid"/>
           </a:ln>
           <a:effectLst>
-            <a:outerShdw sx="100000" sy="100000" kx="0" ky="0" algn="bl" rotWithShape="0" blurRad="254000" dist="76200" dir="8100000">
+            <a:outerShdw blurRad="254000" dist="76200" dir="8100000" algn="bl" rotWithShape="0">
               <a:srgbClr val="000000">
                 <a:alpha val="80000"/>
               </a:srgbClr>
@@ -44553,7 +44560,7 @@
           <a:noFill/>
           <a:ln/>
           <a:effectLst>
-            <a:outerShdw sx="100000" sy="100000" kx="0" ky="0" algn="bl" rotWithShape="0" blurRad="317500" dist="50800" dir="8100000">
+            <a:outerShdw blurRad="317500" dist="50800" dir="8100000" algn="bl" rotWithShape="0">
               <a:srgbClr val="38C8FF">
                 <a:alpha val="40000"/>
               </a:srgbClr>
@@ -44564,7 +44571,7 @@
           <a:bodyPr wrap="square" lIns="0" tIns="0" rIns="0" bIns="0" rtlCol="0" anchor="ctr"/>
           <a:lstStyle/>
           <a:p>
-            <a:pPr indent="0" marL="0">
+            <a:pPr marL="0" indent="0">
               <a:buNone/>
             </a:pPr>
             <a:r>
@@ -44603,7 +44610,7 @@
           <a:bodyPr wrap="square" lIns="0" tIns="0" rIns="0" bIns="0" rtlCol="0" anchor="ctr"/>
           <a:lstStyle/>
           <a:p>
-            <a:pPr indent="0" marL="0">
+            <a:pPr marL="0" indent="0">
               <a:buNone/>
             </a:pPr>
             <a:r>
@@ -44644,7 +44651,7 @@
           <a:bodyPr wrap="square" lIns="0" tIns="0" rIns="0" bIns="0" rtlCol="0" anchor="ctr"/>
           <a:lstStyle/>
           <a:p>
-            <a:pPr indent="0" marL="0">
+            <a:pPr marL="0" indent="0">
               <a:buNone/>
             </a:pPr>
             <a:r>
@@ -44710,7 +44717,7 @@
           <a:bodyPr wrap="square" lIns="0" tIns="0" rIns="0" bIns="0" rtlCol="0" anchor="ctr"/>
           <a:lstStyle/>
           <a:p>
-            <a:pPr algn="ctr" indent="0" marL="0">
+            <a:pPr marL="0" indent="0" algn="ctr">
               <a:buNone/>
             </a:pPr>
             <a:r>
@@ -44776,7 +44783,7 @@
           <a:bodyPr wrap="square" lIns="0" tIns="0" rIns="0" bIns="0" rtlCol="0" anchor="ctr"/>
           <a:lstStyle/>
           <a:p>
-            <a:pPr algn="ctr" indent="0" marL="0">
+            <a:pPr marL="0" indent="0" algn="ctr">
               <a:buNone/>
             </a:pPr>
             <a:r>
@@ -44842,7 +44849,7 @@
           <a:bodyPr wrap="square" lIns="0" tIns="0" rIns="0" bIns="0" rtlCol="0" anchor="ctr"/>
           <a:lstStyle/>
           <a:p>
-            <a:pPr algn="ctr" indent="0" marL="0">
+            <a:pPr marL="0" indent="0" algn="ctr">
               <a:buNone/>
             </a:pPr>
             <a:r>
@@ -44908,7 +44915,7 @@
           <a:bodyPr wrap="square" lIns="0" tIns="0" rIns="0" bIns="0" rtlCol="0" anchor="ctr"/>
           <a:lstStyle/>
           <a:p>
-            <a:pPr algn="ctr" indent="0" marL="0">
+            <a:pPr marL="0" indent="0" algn="ctr">
               <a:buNone/>
             </a:pPr>
             <a:r>
@@ -44974,7 +44981,7 @@
           <a:bodyPr wrap="square" lIns="0" tIns="0" rIns="0" bIns="0" rtlCol="0" anchor="ctr"/>
           <a:lstStyle/>
           <a:p>
-            <a:pPr algn="ctr" indent="0" marL="0">
+            <a:pPr marL="0" indent="0" algn="ctr">
               <a:buNone/>
             </a:pPr>
             <a:r>
@@ -45063,7 +45070,7 @@
           <a:bodyPr wrap="square" lIns="0" tIns="0" rIns="0" bIns="0" rtlCol="0" anchor="ctr"/>
           <a:lstStyle/>
           <a:p>
-            <a:pPr indent="0" marL="0">
+            <a:pPr marL="0" indent="0">
               <a:buNone/>
             </a:pPr>
             <a:r>
@@ -45102,7 +45109,7 @@
           <a:bodyPr wrap="square" lIns="0" tIns="0" rIns="0" bIns="0" rtlCol="0" anchor="t"/>
           <a:lstStyle/>
           <a:p>
-            <a:pPr indent="0" marL="0">
+            <a:pPr marL="0" indent="0">
               <a:lnSpc>
                 <a:spcPct val="130000"/>
               </a:lnSpc>
@@ -45169,7 +45176,7 @@
           <a:bodyPr wrap="square" lIns="0" tIns="0" rIns="0" bIns="0" rtlCol="0" anchor="ctr"/>
           <a:lstStyle/>
           <a:p>
-            <a:pPr indent="0" marL="0">
+            <a:pPr marL="0" indent="0">
               <a:buNone/>
             </a:pPr>
             <a:r>
@@ -45208,7 +45215,7 @@
           <a:bodyPr wrap="square" lIns="0" tIns="0" rIns="0" bIns="0" rtlCol="0" anchor="t"/>
           <a:lstStyle/>
           <a:p>
-            <a:pPr indent="0" marL="0">
+            <a:pPr marL="0" indent="0">
               <a:lnSpc>
                 <a:spcPct val="130000"/>
               </a:lnSpc>
@@ -45275,7 +45282,7 @@
           <a:bodyPr wrap="square" lIns="0" tIns="0" rIns="0" bIns="0" rtlCol="0" anchor="ctr"/>
           <a:lstStyle/>
           <a:p>
-            <a:pPr indent="0" marL="0">
+            <a:pPr marL="0" indent="0">
               <a:buNone/>
             </a:pPr>
             <a:r>
@@ -45314,7 +45321,7 @@
           <a:bodyPr wrap="square" lIns="0" tIns="0" rIns="0" bIns="0" rtlCol="0" anchor="t"/>
           <a:lstStyle/>
           <a:p>
-            <a:pPr indent="0" marL="0">
+            <a:pPr marL="0" indent="0">
               <a:lnSpc>
                 <a:spcPct val="130000"/>
               </a:lnSpc>
@@ -45381,7 +45388,7 @@
           <a:bodyPr wrap="square" lIns="0" tIns="0" rIns="0" bIns="0" rtlCol="0" anchor="ctr"/>
           <a:lstStyle/>
           <a:p>
-            <a:pPr indent="0" marL="0">
+            <a:pPr marL="0" indent="0">
               <a:buNone/>
             </a:pPr>
             <a:r>
@@ -45420,7 +45427,7 @@
           <a:bodyPr wrap="square" lIns="0" tIns="0" rIns="0" bIns="0" rtlCol="0" anchor="t"/>
           <a:lstStyle/>
           <a:p>
-            <a:pPr indent="0" marL="0">
+            <a:pPr marL="0" indent="0">
               <a:lnSpc>
                 <a:spcPct val="130000"/>
               </a:lnSpc>
@@ -45487,7 +45494,7 @@
           <a:bodyPr wrap="square" lIns="0" tIns="0" rIns="0" bIns="0" rtlCol="0" anchor="ctr"/>
           <a:lstStyle/>
           <a:p>
-            <a:pPr indent="0" marL="0">
+            <a:pPr marL="0" indent="0">
               <a:buNone/>
             </a:pPr>
             <a:r>
@@ -45526,7 +45533,7 @@
           <a:bodyPr wrap="square" lIns="0" tIns="0" rIns="0" bIns="0" rtlCol="0" anchor="t"/>
           <a:lstStyle/>
           <a:p>
-            <a:pPr indent="0" marL="0">
+            <a:pPr marL="0" indent="0">
               <a:lnSpc>
                 <a:spcPct val="130000"/>
               </a:lnSpc>
@@ -45593,7 +45600,7 @@
           <a:bodyPr wrap="square" lIns="0" tIns="0" rIns="0" bIns="0" rtlCol="0" anchor="ctr"/>
           <a:lstStyle/>
           <a:p>
-            <a:pPr indent="0" marL="0">
+            <a:pPr marL="0" indent="0">
               <a:buNone/>
             </a:pPr>
             <a:r>
@@ -45632,7 +45639,7 @@
           <a:bodyPr wrap="square" lIns="0" tIns="0" rIns="0" bIns="0" rtlCol="0" anchor="t"/>
           <a:lstStyle/>
           <a:p>
-            <a:pPr indent="0" marL="0">
+            <a:pPr marL="0" indent="0">
               <a:lnSpc>
                 <a:spcPct val="130000"/>
               </a:lnSpc>
@@ -45706,7 +45713,7 @@
             <a:prstDash val="solid"/>
           </a:ln>
           <a:effectLst>
-            <a:outerShdw sx="100000" sy="100000" kx="0" ky="0" algn="bl" rotWithShape="0" blurRad="254000" dist="76200" dir="8100000">
+            <a:outerShdw blurRad="254000" dist="76200" dir="8100000" algn="bl" rotWithShape="0">
               <a:srgbClr val="000000">
                 <a:alpha val="80000"/>
               </a:srgbClr>
@@ -45812,7 +45819,7 @@
           <a:noFill/>
           <a:ln/>
           <a:effectLst>
-            <a:outerShdw sx="100000" sy="100000" kx="0" ky="0" algn="bl" rotWithShape="0" blurRad="317500" dist="50800" dir="8100000">
+            <a:outerShdw blurRad="317500" dist="50800" dir="8100000" algn="bl" rotWithShape="0">
               <a:srgbClr val="F0A020">
                 <a:alpha val="40000"/>
               </a:srgbClr>
@@ -45823,7 +45830,7 @@
           <a:bodyPr wrap="square" lIns="0" tIns="0" rIns="0" bIns="0" rtlCol="0" anchor="ctr"/>
           <a:lstStyle/>
           <a:p>
-            <a:pPr indent="0" marL="0">
+            <a:pPr marL="0" indent="0">
               <a:buNone/>
             </a:pPr>
             <a:r>
@@ -45862,7 +45869,7 @@
           <a:bodyPr wrap="square" lIns="0" tIns="0" rIns="0" bIns="0" rtlCol="0" anchor="ctr"/>
           <a:lstStyle/>
           <a:p>
-            <a:pPr indent="0" marL="0">
+            <a:pPr marL="0" indent="0">
               <a:buNone/>
             </a:pPr>
             <a:r>
@@ -45903,7 +45910,7 @@
           <a:bodyPr wrap="square" lIns="0" tIns="0" rIns="0" bIns="0" rtlCol="0" anchor="ctr"/>
           <a:lstStyle/>
           <a:p>
-            <a:pPr indent="0" marL="0">
+            <a:pPr marL="0" indent="0">
               <a:buNone/>
             </a:pPr>
             <a:r>
@@ -45969,7 +45976,7 @@
           <a:bodyPr wrap="square" lIns="0" tIns="0" rIns="0" bIns="0" rtlCol="0" anchor="ctr"/>
           <a:lstStyle/>
           <a:p>
-            <a:pPr algn="ctr" indent="0" marL="0">
+            <a:pPr marL="0" indent="0" algn="ctr">
               <a:buNone/>
             </a:pPr>
             <a:r>
@@ -46035,7 +46042,7 @@
           <a:bodyPr wrap="square" lIns="0" tIns="0" rIns="0" bIns="0" rtlCol="0" anchor="ctr"/>
           <a:lstStyle/>
           <a:p>
-            <a:pPr algn="ctr" indent="0" marL="0">
+            <a:pPr marL="0" indent="0" algn="ctr">
               <a:buNone/>
             </a:pPr>
             <a:r>
@@ -46101,7 +46108,7 @@
           <a:bodyPr wrap="square" lIns="0" tIns="0" rIns="0" bIns="0" rtlCol="0" anchor="ctr"/>
           <a:lstStyle/>
           <a:p>
-            <a:pPr algn="ctr" indent="0" marL="0">
+            <a:pPr marL="0" indent="0" algn="ctr">
               <a:buNone/>
             </a:pPr>
             <a:r>
@@ -46167,7 +46174,7 @@
           <a:bodyPr wrap="square" lIns="0" tIns="0" rIns="0" bIns="0" rtlCol="0" anchor="ctr"/>
           <a:lstStyle/>
           <a:p>
-            <a:pPr algn="ctr" indent="0" marL="0">
+            <a:pPr marL="0" indent="0" algn="ctr">
               <a:buNone/>
             </a:pPr>
             <a:r>
@@ -46233,7 +46240,7 @@
           <a:bodyPr wrap="square" lIns="0" tIns="0" rIns="0" bIns="0" rtlCol="0" anchor="ctr"/>
           <a:lstStyle/>
           <a:p>
-            <a:pPr algn="ctr" indent="0" marL="0">
+            <a:pPr marL="0" indent="0" algn="ctr">
               <a:buNone/>
             </a:pPr>
             <a:r>
@@ -46299,7 +46306,7 @@
           <a:bodyPr wrap="square" lIns="0" tIns="0" rIns="0" bIns="0" rtlCol="0" anchor="ctr"/>
           <a:lstStyle/>
           <a:p>
-            <a:pPr algn="ctr" indent="0" marL="0">
+            <a:pPr marL="0" indent="0" algn="ctr">
               <a:buNone/>
             </a:pPr>
             <a:r>
@@ -46365,7 +46372,7 @@
           <a:bodyPr wrap="square" lIns="0" tIns="0" rIns="0" bIns="0" rtlCol="0" anchor="ctr"/>
           <a:lstStyle/>
           <a:p>
-            <a:pPr algn="ctr" indent="0" marL="0">
+            <a:pPr marL="0" indent="0" algn="ctr">
               <a:buNone/>
             </a:pPr>
             <a:r>
@@ -46454,7 +46461,7 @@
           <a:bodyPr wrap="square" lIns="0" tIns="0" rIns="0" bIns="0" rtlCol="0" anchor="ctr"/>
           <a:lstStyle/>
           <a:p>
-            <a:pPr indent="0" marL="0">
+            <a:pPr marL="0" indent="0">
               <a:buNone/>
             </a:pPr>
             <a:r>
@@ -46493,7 +46500,7 @@
           <a:bodyPr wrap="square" lIns="0" tIns="0" rIns="0" bIns="0" rtlCol="0" anchor="t"/>
           <a:lstStyle/>
           <a:p>
-            <a:pPr indent="0" marL="0">
+            <a:pPr marL="0" indent="0">
               <a:lnSpc>
                 <a:spcPct val="130000"/>
               </a:lnSpc>
@@ -46560,7 +46567,7 @@
           <a:bodyPr wrap="square" lIns="0" tIns="0" rIns="0" bIns="0" rtlCol="0" anchor="ctr"/>
           <a:lstStyle/>
           <a:p>
-            <a:pPr indent="0" marL="0">
+            <a:pPr marL="0" indent="0">
               <a:buNone/>
             </a:pPr>
             <a:r>
@@ -46599,7 +46606,7 @@
           <a:bodyPr wrap="square" lIns="0" tIns="0" rIns="0" bIns="0" rtlCol="0" anchor="t"/>
           <a:lstStyle/>
           <a:p>
-            <a:pPr indent="0" marL="0">
+            <a:pPr marL="0" indent="0">
               <a:lnSpc>
                 <a:spcPct val="130000"/>
               </a:lnSpc>
@@ -46666,7 +46673,7 @@
           <a:bodyPr wrap="square" lIns="0" tIns="0" rIns="0" bIns="0" rtlCol="0" anchor="ctr"/>
           <a:lstStyle/>
           <a:p>
-            <a:pPr indent="0" marL="0">
+            <a:pPr marL="0" indent="0">
               <a:buNone/>
             </a:pPr>
             <a:r>
@@ -46705,7 +46712,7 @@
           <a:bodyPr wrap="square" lIns="0" tIns="0" rIns="0" bIns="0" rtlCol="0" anchor="t"/>
           <a:lstStyle/>
           <a:p>
-            <a:pPr indent="0" marL="0">
+            <a:pPr marL="0" indent="0">
               <a:lnSpc>
                 <a:spcPct val="130000"/>
               </a:lnSpc>
@@ -46772,7 +46779,7 @@
           <a:bodyPr wrap="square" lIns="0" tIns="0" rIns="0" bIns="0" rtlCol="0" anchor="ctr"/>
           <a:lstStyle/>
           <a:p>
-            <a:pPr indent="0" marL="0">
+            <a:pPr marL="0" indent="0">
               <a:buNone/>
             </a:pPr>
             <a:r>
@@ -46811,7 +46818,7 @@
           <a:bodyPr wrap="square" lIns="0" tIns="0" rIns="0" bIns="0" rtlCol="0" anchor="t"/>
           <a:lstStyle/>
           <a:p>
-            <a:pPr indent="0" marL="0">
+            <a:pPr marL="0" indent="0">
               <a:lnSpc>
                 <a:spcPct val="130000"/>
               </a:lnSpc>
@@ -46878,7 +46885,7 @@
           <a:bodyPr wrap="square" lIns="0" tIns="0" rIns="0" bIns="0" rtlCol="0" anchor="ctr"/>
           <a:lstStyle/>
           <a:p>
-            <a:pPr indent="0" marL="0">
+            <a:pPr marL="0" indent="0">
               <a:buNone/>
             </a:pPr>
             <a:r>
@@ -46917,7 +46924,7 @@
           <a:bodyPr wrap="square" lIns="0" tIns="0" rIns="0" bIns="0" rtlCol="0" anchor="t"/>
           <a:lstStyle/>
           <a:p>
-            <a:pPr indent="0" marL="0">
+            <a:pPr marL="0" indent="0">
               <a:lnSpc>
                 <a:spcPct val="130000"/>
               </a:lnSpc>
@@ -46984,7 +46991,7 @@
           <a:bodyPr wrap="square" lIns="0" tIns="0" rIns="0" bIns="0" rtlCol="0" anchor="ctr"/>
           <a:lstStyle/>
           <a:p>
-            <a:pPr indent="0" marL="0">
+            <a:pPr marL="0" indent="0">
               <a:buNone/>
             </a:pPr>
             <a:r>
@@ -47023,7 +47030,7 @@
           <a:bodyPr wrap="square" lIns="0" tIns="0" rIns="0" bIns="0" rtlCol="0" anchor="t"/>
           <a:lstStyle/>
           <a:p>
-            <a:pPr indent="0" marL="0">
+            <a:pPr marL="0" indent="0">
               <a:lnSpc>
                 <a:spcPct val="130000"/>
               </a:lnSpc>
@@ -47060,6 +47067,7 @@
         <a:solidFill>
           <a:srgbClr val="000408"/>
         </a:solidFill>
+        <a:effectLst/>
       </p:bgPr>
     </p:bg>
     <p:spTree>
@@ -48346,9 +48354,7 @@
             <a:ext cx="594360" cy="594360"/>
           </a:xfrm>
           <a:prstGeom prst="rect">
-            <a:avLst>
-              <a:gd name="adj" fmla="val 12308"/>
-            </a:avLst>
+            <a:avLst/>
           </a:prstGeom>
           <a:solidFill>
             <a:srgbClr val="00D2BE">
@@ -48362,7 +48368,7 @@
             <a:prstDash val="solid"/>
           </a:ln>
           <a:effectLst>
-            <a:outerShdw sx="100000" sy="100000" kx="0" ky="0" algn="bl" rotWithShape="0" blurRad="317500" dist="50800" dir="8100000">
+            <a:outerShdw blurRad="317500" dist="50800" dir="8100000" algn="bl" rotWithShape="0">
               <a:srgbClr val="00D2BE">
                 <a:alpha val="40000"/>
               </a:srgbClr>
@@ -48391,7 +48397,7 @@
           <a:bodyPr wrap="square" lIns="0" tIns="0" rIns="0" bIns="0" rtlCol="0" anchor="ctr"/>
           <a:lstStyle/>
           <a:p>
-            <a:pPr algn="ctr" indent="0" marL="0">
+            <a:pPr marL="0" indent="0" algn="ctr">
               <a:buNone/>
             </a:pPr>
             <a:r>
@@ -48423,7 +48429,7 @@
           <a:noFill/>
           <a:ln/>
           <a:effectLst>
-            <a:outerShdw sx="100000" sy="100000" kx="0" ky="0" algn="bl" rotWithShape="0" blurRad="127000" dist="38100" dir="8100000">
+            <a:outerShdw blurRad="127000" dist="38100" dir="8100000" algn="bl" rotWithShape="0">
               <a:srgbClr val="000000">
                 <a:alpha val="50000"/>
               </a:srgbClr>
@@ -48434,7 +48440,7 @@
           <a:bodyPr wrap="square" lIns="0" tIns="0" rIns="0" bIns="0" rtlCol="0" anchor="ctr"/>
           <a:lstStyle/>
           <a:p>
-            <a:pPr indent="0" marL="0">
+            <a:pPr marL="0" indent="0">
               <a:buNone/>
             </a:pPr>
             <a:r>
@@ -48500,11 +48506,11 @@
           <a:bodyPr wrap="square" lIns="0" tIns="0" rIns="0" bIns="0" rtlCol="0" anchor="ctr"/>
           <a:lstStyle/>
           <a:p>
-            <a:pPr algn="ctr" indent="0" marL="0">
-              <a:buNone/>
-            </a:pPr>
-            <a:r>
-              <a:rPr lang="en-US" sz="700" b="1" spc="150" kern="0" dirty="0">
+            <a:pPr marL="0" indent="0" algn="ctr">
+              <a:buNone/>
+            </a:pPr>
+            <a:r>
+              <a:rPr lang="en-US" sz="700" b="1" kern="0" spc="150" dirty="0">
                 <a:solidFill>
                   <a:srgbClr val="00D2BE"/>
                 </a:solidFill>
@@ -48571,7 +48577,7 @@
             <a:prstDash val="solid"/>
           </a:ln>
           <a:effectLst>
-            <a:outerShdw sx="100000" sy="100000" kx="0" ky="0" algn="bl" rotWithShape="0" blurRad="254000" dist="76200" dir="8100000">
+            <a:outerShdw blurRad="254000" dist="76200" dir="8100000" algn="bl" rotWithShape="0">
               <a:srgbClr val="000000">
                 <a:alpha val="80000"/>
               </a:srgbClr>
@@ -48659,7 +48665,7 @@
             <a:prstDash val="solid"/>
           </a:ln>
           <a:effectLst>
-            <a:outerShdw sx="100000" sy="100000" kx="0" ky="0" algn="bl" rotWithShape="0" blurRad="317500" dist="50800" dir="8100000">
+            <a:outerShdw blurRad="317500" dist="50800" dir="8100000" algn="bl" rotWithShape="0">
               <a:srgbClr val="00D2BE">
                 <a:alpha val="40000"/>
               </a:srgbClr>
@@ -48688,7 +48694,7 @@
           <a:bodyPr wrap="square" lIns="0" tIns="0" rIns="0" bIns="0" rtlCol="0" anchor="ctr"/>
           <a:lstStyle/>
           <a:p>
-            <a:pPr algn="ctr" indent="0" marL="0">
+            <a:pPr marL="0" indent="0" algn="ctr">
               <a:buNone/>
             </a:pPr>
             <a:r>
@@ -48723,7 +48729,7 @@
           <a:noFill/>
           <a:ln/>
           <a:effectLst>
-            <a:outerShdw sx="100000" sy="100000" kx="0" ky="0" algn="bl" rotWithShape="0" blurRad="127000" dist="38100" dir="8100000">
+            <a:outerShdw blurRad="127000" dist="38100" dir="8100000" algn="bl" rotWithShape="0">
               <a:srgbClr val="000000">
                 <a:alpha val="50000"/>
               </a:srgbClr>
@@ -48734,7 +48740,7 @@
           <a:bodyPr wrap="square" lIns="0" tIns="0" rIns="0" bIns="0" rtlCol="0" anchor="ctr"/>
           <a:lstStyle/>
           <a:p>
-            <a:pPr algn="ctr" indent="0" marL="0">
+            <a:pPr marL="0" indent="0" algn="ctr">
               <a:buNone/>
             </a:pPr>
             <a:r>
@@ -48798,7 +48804,7 @@
           <a:bodyPr wrap="square" lIns="0" tIns="0" rIns="0" bIns="0" rtlCol="0" anchor="t"/>
           <a:lstStyle/>
           <a:p>
-            <a:pPr algn="ctr" indent="0" marL="0">
+            <a:pPr marL="0" indent="0" algn="ctr">
               <a:lnSpc>
                 <a:spcPct val="140000"/>
               </a:lnSpc>
@@ -48818,7 +48824,7 @@
             <a:endParaRPr lang="en-US" sz="800" dirty="0"/>
           </a:p>
           <a:p>
-            <a:pPr algn="ctr" indent="0" marL="0">
+            <a:pPr marL="0" indent="0" algn="ctr">
               <a:lnSpc>
                 <a:spcPct val="140000"/>
               </a:lnSpc>
@@ -48917,7 +48923,7 @@
             <a:prstDash val="solid"/>
           </a:ln>
           <a:effectLst>
-            <a:outerShdw sx="100000" sy="100000" kx="0" ky="0" algn="bl" rotWithShape="0" blurRad="254000" dist="76200" dir="8100000">
+            <a:outerShdw blurRad="254000" dist="76200" dir="8100000" algn="bl" rotWithShape="0">
               <a:srgbClr val="000000">
                 <a:alpha val="80000"/>
               </a:srgbClr>
@@ -49005,7 +49011,7 @@
             <a:prstDash val="solid"/>
           </a:ln>
           <a:effectLst>
-            <a:outerShdw sx="100000" sy="100000" kx="0" ky="0" algn="bl" rotWithShape="0" blurRad="317500" dist="50800" dir="8100000">
+            <a:outerShdw blurRad="317500" dist="50800" dir="8100000" algn="bl" rotWithShape="0">
               <a:srgbClr val="22D88A">
                 <a:alpha val="40000"/>
               </a:srgbClr>
@@ -49034,7 +49040,7 @@
           <a:bodyPr wrap="square" lIns="0" tIns="0" rIns="0" bIns="0" rtlCol="0" anchor="ctr"/>
           <a:lstStyle/>
           <a:p>
-            <a:pPr algn="ctr" indent="0" marL="0">
+            <a:pPr marL="0" indent="0" algn="ctr">
               <a:buNone/>
             </a:pPr>
             <a:r>
@@ -49069,7 +49075,7 @@
           <a:noFill/>
           <a:ln/>
           <a:effectLst>
-            <a:outerShdw sx="100000" sy="100000" kx="0" ky="0" algn="bl" rotWithShape="0" blurRad="127000" dist="38100" dir="8100000">
+            <a:outerShdw blurRad="127000" dist="38100" dir="8100000" algn="bl" rotWithShape="0">
               <a:srgbClr val="000000">
                 <a:alpha val="50000"/>
               </a:srgbClr>
@@ -49080,7 +49086,7 @@
           <a:bodyPr wrap="square" lIns="0" tIns="0" rIns="0" bIns="0" rtlCol="0" anchor="ctr"/>
           <a:lstStyle/>
           <a:p>
-            <a:pPr algn="ctr" indent="0" marL="0">
+            <a:pPr marL="0" indent="0" algn="ctr">
               <a:buNone/>
             </a:pPr>
             <a:r>
@@ -49144,7 +49150,7 @@
           <a:bodyPr wrap="square" lIns="0" tIns="0" rIns="0" bIns="0" rtlCol="0" anchor="t"/>
           <a:lstStyle/>
           <a:p>
-            <a:pPr algn="ctr" indent="0" marL="0">
+            <a:pPr marL="0" indent="0" algn="ctr">
               <a:lnSpc>
                 <a:spcPct val="140000"/>
               </a:lnSpc>
@@ -49164,7 +49170,7 @@
             <a:endParaRPr lang="en-US" sz="800" dirty="0"/>
           </a:p>
           <a:p>
-            <a:pPr algn="ctr" indent="0" marL="0">
+            <a:pPr marL="0" indent="0" algn="ctr">
               <a:lnSpc>
                 <a:spcPct val="140000"/>
               </a:lnSpc>
@@ -49263,7 +49269,7 @@
             <a:prstDash val="solid"/>
           </a:ln>
           <a:effectLst>
-            <a:outerShdw sx="100000" sy="100000" kx="0" ky="0" algn="bl" rotWithShape="0" blurRad="254000" dist="76200" dir="8100000">
+            <a:outerShdw blurRad="254000" dist="76200" dir="8100000" algn="bl" rotWithShape="0">
               <a:srgbClr val="000000">
                 <a:alpha val="80000"/>
               </a:srgbClr>
@@ -49351,7 +49357,7 @@
             <a:prstDash val="solid"/>
           </a:ln>
           <a:effectLst>
-            <a:outerShdw sx="100000" sy="100000" kx="0" ky="0" algn="bl" rotWithShape="0" blurRad="317500" dist="50800" dir="8100000">
+            <a:outerShdw blurRad="317500" dist="50800" dir="8100000" algn="bl" rotWithShape="0">
               <a:srgbClr val="F0A020">
                 <a:alpha val="40000"/>
               </a:srgbClr>
@@ -49380,7 +49386,7 @@
           <a:bodyPr wrap="square" lIns="0" tIns="0" rIns="0" bIns="0" rtlCol="0" anchor="ctr"/>
           <a:lstStyle/>
           <a:p>
-            <a:pPr algn="ctr" indent="0" marL="0">
+            <a:pPr marL="0" indent="0" algn="ctr">
               <a:buNone/>
             </a:pPr>
             <a:r>
@@ -49415,7 +49421,7 @@
           <a:noFill/>
           <a:ln/>
           <a:effectLst>
-            <a:outerShdw sx="100000" sy="100000" kx="0" ky="0" algn="bl" rotWithShape="0" blurRad="127000" dist="38100" dir="8100000">
+            <a:outerShdw blurRad="127000" dist="38100" dir="8100000" algn="bl" rotWithShape="0">
               <a:srgbClr val="000000">
                 <a:alpha val="50000"/>
               </a:srgbClr>
@@ -49426,7 +49432,7 @@
           <a:bodyPr wrap="square" lIns="0" tIns="0" rIns="0" bIns="0" rtlCol="0" anchor="ctr"/>
           <a:lstStyle/>
           <a:p>
-            <a:pPr algn="ctr" indent="0" marL="0">
+            <a:pPr marL="0" indent="0" algn="ctr">
               <a:buNone/>
             </a:pPr>
             <a:r>
@@ -49490,7 +49496,7 @@
           <a:bodyPr wrap="square" lIns="0" tIns="0" rIns="0" bIns="0" rtlCol="0" anchor="t"/>
           <a:lstStyle/>
           <a:p>
-            <a:pPr algn="ctr" indent="0" marL="0">
+            <a:pPr marL="0" indent="0" algn="ctr">
               <a:lnSpc>
                 <a:spcPct val="140000"/>
               </a:lnSpc>
@@ -49510,7 +49516,7 @@
             <a:endParaRPr lang="en-US" sz="800" dirty="0"/>
           </a:p>
           <a:p>
-            <a:pPr algn="ctr" indent="0" marL="0">
+            <a:pPr marL="0" indent="0" algn="ctr">
               <a:lnSpc>
                 <a:spcPct val="140000"/>
               </a:lnSpc>
@@ -49609,7 +49615,7 @@
             <a:prstDash val="solid"/>
           </a:ln>
           <a:effectLst>
-            <a:outerShdw sx="100000" sy="100000" kx="0" ky="0" algn="bl" rotWithShape="0" blurRad="254000" dist="76200" dir="8100000">
+            <a:outerShdw blurRad="254000" dist="76200" dir="8100000" algn="bl" rotWithShape="0">
               <a:srgbClr val="000000">
                 <a:alpha val="80000"/>
               </a:srgbClr>
@@ -49697,7 +49703,7 @@
             <a:prstDash val="solid"/>
           </a:ln>
           <a:effectLst>
-            <a:outerShdw sx="100000" sy="100000" kx="0" ky="0" algn="bl" rotWithShape="0" blurRad="317500" dist="50800" dir="8100000">
+            <a:outerShdw blurRad="317500" dist="50800" dir="8100000" algn="bl" rotWithShape="0">
               <a:srgbClr val="00D2BE">
                 <a:alpha val="40000"/>
               </a:srgbClr>
@@ -49726,7 +49732,7 @@
           <a:bodyPr wrap="square" lIns="0" tIns="0" rIns="0" bIns="0" rtlCol="0" anchor="ctr"/>
           <a:lstStyle/>
           <a:p>
-            <a:pPr algn="ctr" indent="0" marL="0">
+            <a:pPr marL="0" indent="0" algn="ctr">
               <a:buNone/>
             </a:pPr>
             <a:r>
@@ -49761,7 +49767,7 @@
           <a:noFill/>
           <a:ln/>
           <a:effectLst>
-            <a:outerShdw sx="100000" sy="100000" kx="0" ky="0" algn="bl" rotWithShape="0" blurRad="127000" dist="38100" dir="8100000">
+            <a:outerShdw blurRad="127000" dist="38100" dir="8100000" algn="bl" rotWithShape="0">
               <a:srgbClr val="000000">
                 <a:alpha val="50000"/>
               </a:srgbClr>
@@ -49772,7 +49778,7 @@
           <a:bodyPr wrap="square" lIns="0" tIns="0" rIns="0" bIns="0" rtlCol="0" anchor="ctr"/>
           <a:lstStyle/>
           <a:p>
-            <a:pPr algn="ctr" indent="0" marL="0">
+            <a:pPr marL="0" indent="0" algn="ctr">
               <a:buNone/>
             </a:pPr>
             <a:r>
@@ -49836,7 +49842,7 @@
           <a:bodyPr wrap="square" lIns="0" tIns="0" rIns="0" bIns="0" rtlCol="0" anchor="t"/>
           <a:lstStyle/>
           <a:p>
-            <a:pPr algn="ctr" indent="0" marL="0">
+            <a:pPr marL="0" indent="0" algn="ctr">
               <a:lnSpc>
                 <a:spcPct val="140000"/>
               </a:lnSpc>
@@ -49856,7 +49862,7 @@
             <a:endParaRPr lang="en-US" sz="800" dirty="0"/>
           </a:p>
           <a:p>
-            <a:pPr algn="ctr" indent="0" marL="0">
+            <a:pPr marL="0" indent="0" algn="ctr">
               <a:lnSpc>
                 <a:spcPct val="140000"/>
               </a:lnSpc>
@@ -49955,7 +49961,7 @@
             <a:prstDash val="solid"/>
           </a:ln>
           <a:effectLst>
-            <a:outerShdw sx="100000" sy="100000" kx="0" ky="0" algn="bl" rotWithShape="0" blurRad="254000" dist="76200" dir="8100000">
+            <a:outerShdw blurRad="254000" dist="76200" dir="8100000" algn="bl" rotWithShape="0">
               <a:srgbClr val="000000">
                 <a:alpha val="80000"/>
               </a:srgbClr>
@@ -50043,7 +50049,7 @@
             <a:prstDash val="solid"/>
           </a:ln>
           <a:effectLst>
-            <a:outerShdw sx="100000" sy="100000" kx="0" ky="0" algn="bl" rotWithShape="0" blurRad="317500" dist="50800" dir="8100000">
+            <a:outerShdw blurRad="317500" dist="50800" dir="8100000" algn="bl" rotWithShape="0">
               <a:srgbClr val="9B6FF0">
                 <a:alpha val="40000"/>
               </a:srgbClr>
@@ -50072,7 +50078,7 @@
           <a:bodyPr wrap="square" lIns="0" tIns="0" rIns="0" bIns="0" rtlCol="0" anchor="ctr"/>
           <a:lstStyle/>
           <a:p>
-            <a:pPr algn="ctr" indent="0" marL="0">
+            <a:pPr marL="0" indent="0" algn="ctr">
               <a:buNone/>
             </a:pPr>
             <a:r>
@@ -50107,7 +50113,7 @@
           <a:noFill/>
           <a:ln/>
           <a:effectLst>
-            <a:outerShdw sx="100000" sy="100000" kx="0" ky="0" algn="bl" rotWithShape="0" blurRad="127000" dist="38100" dir="8100000">
+            <a:outerShdw blurRad="127000" dist="38100" dir="8100000" algn="bl" rotWithShape="0">
               <a:srgbClr val="000000">
                 <a:alpha val="50000"/>
               </a:srgbClr>
@@ -50118,7 +50124,7 @@
           <a:bodyPr wrap="square" lIns="0" tIns="0" rIns="0" bIns="0" rtlCol="0" anchor="ctr"/>
           <a:lstStyle/>
           <a:p>
-            <a:pPr algn="ctr" indent="0" marL="0">
+            <a:pPr marL="0" indent="0" algn="ctr">
               <a:buNone/>
             </a:pPr>
             <a:r>
@@ -50182,7 +50188,7 @@
           <a:bodyPr wrap="square" lIns="0" tIns="0" rIns="0" bIns="0" rtlCol="0" anchor="t"/>
           <a:lstStyle/>
           <a:p>
-            <a:pPr algn="ctr" indent="0" marL="0">
+            <a:pPr marL="0" indent="0" algn="ctr">
               <a:lnSpc>
                 <a:spcPct val="140000"/>
               </a:lnSpc>
@@ -50202,7 +50208,7 @@
             <a:endParaRPr lang="en-US" sz="800" dirty="0"/>
           </a:p>
           <a:p>
-            <a:pPr algn="ctr" indent="0" marL="0">
+            <a:pPr marL="0" indent="0" algn="ctr">
               <a:lnSpc>
                 <a:spcPct val="140000"/>
               </a:lnSpc>
@@ -50301,7 +50307,7 @@
             <a:prstDash val="solid"/>
           </a:ln>
           <a:effectLst>
-            <a:outerShdw sx="100000" sy="100000" kx="0" ky="0" algn="bl" rotWithShape="0" blurRad="254000" dist="76200" dir="8100000">
+            <a:outerShdw blurRad="254000" dist="76200" dir="8100000" algn="bl" rotWithShape="0">
               <a:srgbClr val="000000">
                 <a:alpha val="80000"/>
               </a:srgbClr>
@@ -50389,7 +50395,7 @@
             <a:prstDash val="solid"/>
           </a:ln>
           <a:effectLst>
-            <a:outerShdw sx="100000" sy="100000" kx="0" ky="0" algn="bl" rotWithShape="0" blurRad="317500" dist="50800" dir="8100000">
+            <a:outerShdw blurRad="317500" dist="50800" dir="8100000" algn="bl" rotWithShape="0">
               <a:srgbClr val="22D88A">
                 <a:alpha val="40000"/>
               </a:srgbClr>
@@ -50418,7 +50424,7 @@
           <a:bodyPr wrap="square" lIns="0" tIns="0" rIns="0" bIns="0" rtlCol="0" anchor="ctr"/>
           <a:lstStyle/>
           <a:p>
-            <a:pPr algn="ctr" indent="0" marL="0">
+            <a:pPr marL="0" indent="0" algn="ctr">
               <a:buNone/>
             </a:pPr>
             <a:r>
@@ -50453,7 +50459,7 @@
           <a:noFill/>
           <a:ln/>
           <a:effectLst>
-            <a:outerShdw sx="100000" sy="100000" kx="0" ky="0" algn="bl" rotWithShape="0" blurRad="127000" dist="38100" dir="8100000">
+            <a:outerShdw blurRad="127000" dist="38100" dir="8100000" algn="bl" rotWithShape="0">
               <a:srgbClr val="000000">
                 <a:alpha val="50000"/>
               </a:srgbClr>
@@ -50464,7 +50470,7 @@
           <a:bodyPr wrap="square" lIns="0" tIns="0" rIns="0" bIns="0" rtlCol="0" anchor="ctr"/>
           <a:lstStyle/>
           <a:p>
-            <a:pPr algn="ctr" indent="0" marL="0">
+            <a:pPr marL="0" indent="0" algn="ctr">
               <a:buNone/>
             </a:pPr>
             <a:r>
@@ -50528,7 +50534,7 @@
           <a:bodyPr wrap="square" lIns="0" tIns="0" rIns="0" bIns="0" rtlCol="0" anchor="t"/>
           <a:lstStyle/>
           <a:p>
-            <a:pPr algn="ctr" indent="0" marL="0">
+            <a:pPr marL="0" indent="0" algn="ctr">
               <a:lnSpc>
                 <a:spcPct val="140000"/>
               </a:lnSpc>
@@ -50548,7 +50554,7 @@
             <a:endParaRPr lang="en-US" sz="800" dirty="0"/>
           </a:p>
           <a:p>
-            <a:pPr algn="ctr" indent="0" marL="0">
+            <a:pPr marL="0" indent="0" algn="ctr">
               <a:lnSpc>
                 <a:spcPct val="140000"/>
               </a:lnSpc>
@@ -50647,7 +50653,7 @@
             <a:prstDash val="solid"/>
           </a:ln>
           <a:effectLst>
-            <a:outerShdw sx="100000" sy="100000" kx="0" ky="0" algn="bl" rotWithShape="0" blurRad="254000" dist="76200" dir="8100000">
+            <a:outerShdw blurRad="254000" dist="76200" dir="8100000" algn="bl" rotWithShape="0">
               <a:srgbClr val="000000">
                 <a:alpha val="80000"/>
               </a:srgbClr>
@@ -50735,7 +50741,7 @@
             <a:prstDash val="solid"/>
           </a:ln>
           <a:effectLst>
-            <a:outerShdw sx="100000" sy="100000" kx="0" ky="0" algn="bl" rotWithShape="0" blurRad="317500" dist="50800" dir="8100000">
+            <a:outerShdw blurRad="317500" dist="50800" dir="8100000" algn="bl" rotWithShape="0">
               <a:srgbClr val="38C8FF">
                 <a:alpha val="40000"/>
               </a:srgbClr>
@@ -50764,7 +50770,7 @@
           <a:bodyPr wrap="square" lIns="0" tIns="0" rIns="0" bIns="0" rtlCol="0" anchor="ctr"/>
           <a:lstStyle/>
           <a:p>
-            <a:pPr algn="ctr" indent="0" marL="0">
+            <a:pPr marL="0" indent="0" algn="ctr">
               <a:buNone/>
             </a:pPr>
             <a:r>
@@ -50799,7 +50805,7 @@
           <a:noFill/>
           <a:ln/>
           <a:effectLst>
-            <a:outerShdw sx="100000" sy="100000" kx="0" ky="0" algn="bl" rotWithShape="0" blurRad="127000" dist="38100" dir="8100000">
+            <a:outerShdw blurRad="127000" dist="38100" dir="8100000" algn="bl" rotWithShape="0">
               <a:srgbClr val="000000">
                 <a:alpha val="50000"/>
               </a:srgbClr>
@@ -50810,7 +50816,7 @@
           <a:bodyPr wrap="square" lIns="0" tIns="0" rIns="0" bIns="0" rtlCol="0" anchor="ctr"/>
           <a:lstStyle/>
           <a:p>
-            <a:pPr algn="ctr" indent="0" marL="0">
+            <a:pPr marL="0" indent="0" algn="ctr">
               <a:buNone/>
             </a:pPr>
             <a:r>
@@ -50874,7 +50880,7 @@
           <a:bodyPr wrap="square" lIns="0" tIns="0" rIns="0" bIns="0" rtlCol="0" anchor="t"/>
           <a:lstStyle/>
           <a:p>
-            <a:pPr algn="ctr" indent="0" marL="0">
+            <a:pPr marL="0" indent="0" algn="ctr">
               <a:lnSpc>
                 <a:spcPct val="140000"/>
               </a:lnSpc>
@@ -50894,7 +50900,7 @@
             <a:endParaRPr lang="en-US" sz="800" dirty="0"/>
           </a:p>
           <a:p>
-            <a:pPr algn="ctr" indent="0" marL="0">
+            <a:pPr marL="0" indent="0" algn="ctr">
               <a:lnSpc>
                 <a:spcPct val="140000"/>
               </a:lnSpc>
@@ -50993,7 +50999,7 @@
             <a:prstDash val="solid"/>
           </a:ln>
           <a:effectLst>
-            <a:outerShdw sx="100000" sy="100000" kx="0" ky="0" algn="bl" rotWithShape="0" blurRad="254000" dist="76200" dir="8100000">
+            <a:outerShdw blurRad="254000" dist="76200" dir="8100000" algn="bl" rotWithShape="0">
               <a:srgbClr val="000000">
                 <a:alpha val="80000"/>
               </a:srgbClr>
@@ -51081,7 +51087,7 @@
             <a:prstDash val="solid"/>
           </a:ln>
           <a:effectLst>
-            <a:outerShdw sx="100000" sy="100000" kx="0" ky="0" algn="bl" rotWithShape="0" blurRad="317500" dist="50800" dir="8100000">
+            <a:outerShdw blurRad="317500" dist="50800" dir="8100000" algn="bl" rotWithShape="0">
               <a:srgbClr val="F0A020">
                 <a:alpha val="40000"/>
               </a:srgbClr>
@@ -51110,7 +51116,7 @@
           <a:bodyPr wrap="square" lIns="0" tIns="0" rIns="0" bIns="0" rtlCol="0" anchor="ctr"/>
           <a:lstStyle/>
           <a:p>
-            <a:pPr algn="ctr" indent="0" marL="0">
+            <a:pPr marL="0" indent="0" algn="ctr">
               <a:buNone/>
             </a:pPr>
             <a:r>
@@ -51145,7 +51151,7 @@
           <a:noFill/>
           <a:ln/>
           <a:effectLst>
-            <a:outerShdw sx="100000" sy="100000" kx="0" ky="0" algn="bl" rotWithShape="0" blurRad="127000" dist="38100" dir="8100000">
+            <a:outerShdw blurRad="127000" dist="38100" dir="8100000" algn="bl" rotWithShape="0">
               <a:srgbClr val="000000">
                 <a:alpha val="50000"/>
               </a:srgbClr>
@@ -51156,7 +51162,7 @@
           <a:bodyPr wrap="square" lIns="0" tIns="0" rIns="0" bIns="0" rtlCol="0" anchor="ctr"/>
           <a:lstStyle/>
           <a:p>
-            <a:pPr algn="ctr" indent="0" marL="0">
+            <a:pPr marL="0" indent="0" algn="ctr">
               <a:buNone/>
             </a:pPr>
             <a:r>
@@ -51220,7 +51226,7 @@
           <a:bodyPr wrap="square" lIns="0" tIns="0" rIns="0" bIns="0" rtlCol="0" anchor="t"/>
           <a:lstStyle/>
           <a:p>
-            <a:pPr algn="ctr" indent="0" marL="0">
+            <a:pPr marL="0" indent="0" algn="ctr">
               <a:lnSpc>
                 <a:spcPct val="140000"/>
               </a:lnSpc>
@@ -51240,7 +51246,7 @@
             <a:endParaRPr lang="en-US" sz="800" dirty="0"/>
           </a:p>
           <a:p>
-            <a:pPr algn="ctr" indent="0" marL="0">
+            <a:pPr marL="0" indent="0" algn="ctr">
               <a:lnSpc>
                 <a:spcPct val="140000"/>
               </a:lnSpc>
@@ -51339,7 +51345,7 @@
             <a:prstDash val="solid"/>
           </a:ln>
           <a:effectLst>
-            <a:outerShdw sx="100000" sy="100000" kx="0" ky="0" algn="bl" rotWithShape="0" blurRad="254000" dist="76200" dir="8100000">
+            <a:outerShdw blurRad="254000" dist="76200" dir="8100000" algn="bl" rotWithShape="0">
               <a:srgbClr val="000000">
                 <a:alpha val="80000"/>
               </a:srgbClr>
@@ -51427,7 +51433,7 @@
             <a:prstDash val="solid"/>
           </a:ln>
           <a:effectLst>
-            <a:outerShdw sx="100000" sy="100000" kx="0" ky="0" algn="bl" rotWithShape="0" blurRad="317500" dist="50800" dir="8100000">
+            <a:outerShdw blurRad="317500" dist="50800" dir="8100000" algn="bl" rotWithShape="0">
               <a:srgbClr val="00D2BE">
                 <a:alpha val="40000"/>
               </a:srgbClr>
@@ -51456,7 +51462,7 @@
           <a:bodyPr wrap="square" lIns="0" tIns="0" rIns="0" bIns="0" rtlCol="0" anchor="ctr"/>
           <a:lstStyle/>
           <a:p>
-            <a:pPr algn="ctr" indent="0" marL="0">
+            <a:pPr marL="0" indent="0" algn="ctr">
               <a:buNone/>
             </a:pPr>
             <a:r>
@@ -51491,7 +51497,7 @@
           <a:noFill/>
           <a:ln/>
           <a:effectLst>
-            <a:outerShdw sx="100000" sy="100000" kx="0" ky="0" algn="bl" rotWithShape="0" blurRad="127000" dist="38100" dir="8100000">
+            <a:outerShdw blurRad="127000" dist="38100" dir="8100000" algn="bl" rotWithShape="0">
               <a:srgbClr val="000000">
                 <a:alpha val="50000"/>
               </a:srgbClr>
@@ -51502,7 +51508,7 @@
           <a:bodyPr wrap="square" lIns="0" tIns="0" rIns="0" bIns="0" rtlCol="0" anchor="ctr"/>
           <a:lstStyle/>
           <a:p>
-            <a:pPr algn="ctr" indent="0" marL="0">
+            <a:pPr marL="0" indent="0" algn="ctr">
               <a:buNone/>
             </a:pPr>
             <a:r>
@@ -51566,7 +51572,7 @@
           <a:bodyPr wrap="square" lIns="0" tIns="0" rIns="0" bIns="0" rtlCol="0" anchor="t"/>
           <a:lstStyle/>
           <a:p>
-            <a:pPr algn="ctr" indent="0" marL="0">
+            <a:pPr marL="0" indent="0" algn="ctr">
               <a:lnSpc>
                 <a:spcPct val="140000"/>
               </a:lnSpc>
@@ -51586,7 +51592,7 @@
             <a:endParaRPr lang="en-US" sz="800" dirty="0"/>
           </a:p>
           <a:p>
-            <a:pPr algn="ctr" indent="0" marL="0">
+            <a:pPr marL="0" indent="0" algn="ctr">
               <a:lnSpc>
                 <a:spcPct val="140000"/>
               </a:lnSpc>
@@ -51685,7 +51691,7 @@
             <a:prstDash val="solid"/>
           </a:ln>
           <a:effectLst>
-            <a:outerShdw sx="100000" sy="100000" kx="0" ky="0" algn="bl" rotWithShape="0" blurRad="254000" dist="76200" dir="8100000">
+            <a:outerShdw blurRad="254000" dist="76200" dir="8100000" algn="bl" rotWithShape="0">
               <a:srgbClr val="000000">
                 <a:alpha val="80000"/>
               </a:srgbClr>
@@ -51773,7 +51779,7 @@
             <a:prstDash val="solid"/>
           </a:ln>
           <a:effectLst>
-            <a:outerShdw sx="100000" sy="100000" kx="0" ky="0" algn="bl" rotWithShape="0" blurRad="317500" dist="50800" dir="8100000">
+            <a:outerShdw blurRad="317500" dist="50800" dir="8100000" algn="bl" rotWithShape="0">
               <a:srgbClr val="22D88A">
                 <a:alpha val="40000"/>
               </a:srgbClr>
@@ -51802,7 +51808,7 @@
           <a:bodyPr wrap="square" lIns="0" tIns="0" rIns="0" bIns="0" rtlCol="0" anchor="ctr"/>
           <a:lstStyle/>
           <a:p>
-            <a:pPr algn="ctr" indent="0" marL="0">
+            <a:pPr marL="0" indent="0" algn="ctr">
               <a:buNone/>
             </a:pPr>
             <a:r>
@@ -51837,7 +51843,7 @@
           <a:noFill/>
           <a:ln/>
           <a:effectLst>
-            <a:outerShdw sx="100000" sy="100000" kx="0" ky="0" algn="bl" rotWithShape="0" blurRad="127000" dist="38100" dir="8100000">
+            <a:outerShdw blurRad="127000" dist="38100" dir="8100000" algn="bl" rotWithShape="0">
               <a:srgbClr val="000000">
                 <a:alpha val="50000"/>
               </a:srgbClr>
@@ -51848,7 +51854,7 @@
           <a:bodyPr wrap="square" lIns="0" tIns="0" rIns="0" bIns="0" rtlCol="0" anchor="ctr"/>
           <a:lstStyle/>
           <a:p>
-            <a:pPr algn="ctr" indent="0" marL="0">
+            <a:pPr marL="0" indent="0" algn="ctr">
               <a:buNone/>
             </a:pPr>
             <a:r>
@@ -51912,7 +51918,7 @@
           <a:bodyPr wrap="square" lIns="0" tIns="0" rIns="0" bIns="0" rtlCol="0" anchor="t"/>
           <a:lstStyle/>
           <a:p>
-            <a:pPr algn="ctr" indent="0" marL="0">
+            <a:pPr marL="0" indent="0" algn="ctr">
               <a:lnSpc>
                 <a:spcPct val="140000"/>
               </a:lnSpc>
@@ -51932,7 +51938,7 @@
             <a:endParaRPr lang="en-US" sz="800" dirty="0"/>
           </a:p>
           <a:p>
-            <a:pPr algn="ctr" indent="0" marL="0">
+            <a:pPr marL="0" indent="0" algn="ctr">
               <a:lnSpc>
                 <a:spcPct val="140000"/>
               </a:lnSpc>
@@ -52006,7 +52012,7 @@
             <a:prstDash val="solid"/>
           </a:ln>
           <a:effectLst>
-            <a:outerShdw sx="100000" sy="100000" kx="0" ky="0" algn="bl" rotWithShape="0" blurRad="254000" dist="76200" dir="8100000">
+            <a:outerShdw blurRad="254000" dist="76200" dir="8100000" algn="bl" rotWithShape="0">
               <a:srgbClr val="000000">
                 <a:alpha val="80000"/>
               </a:srgbClr>
@@ -52110,7 +52116,7 @@
           <a:noFill/>
           <a:ln/>
           <a:effectLst>
-            <a:outerShdw sx="100000" sy="100000" kx="0" ky="0" algn="bl" rotWithShape="0" blurRad="317500" dist="50800" dir="8100000">
+            <a:outerShdw blurRad="317500" dist="50800" dir="8100000" algn="bl" rotWithShape="0">
               <a:srgbClr val="00D2BE">
                 <a:alpha val="40000"/>
               </a:srgbClr>
@@ -52121,7 +52127,7 @@
           <a:bodyPr wrap="square" lIns="0" tIns="0" rIns="0" bIns="0" rtlCol="0" anchor="ctr"/>
           <a:lstStyle/>
           <a:p>
-            <a:pPr indent="0" marL="0">
+            <a:pPr marL="0" indent="0">
               <a:buNone/>
             </a:pPr>
             <a:r>
@@ -52185,7 +52191,7 @@
           <a:bodyPr wrap="square" lIns="0" tIns="0" rIns="0" bIns="0" rtlCol="0" anchor="t"/>
           <a:lstStyle/>
           <a:p>
-            <a:pPr indent="0" marL="0">
+            <a:pPr marL="0" indent="0">
               <a:lnSpc>
                 <a:spcPct val="150000"/>
               </a:lnSpc>
@@ -52259,7 +52265,7 @@
             <a:prstDash val="solid"/>
           </a:ln>
           <a:effectLst>
-            <a:outerShdw sx="100000" sy="100000" kx="0" ky="0" algn="bl" rotWithShape="0" blurRad="254000" dist="76200" dir="8100000">
+            <a:outerShdw blurRad="254000" dist="76200" dir="8100000" algn="bl" rotWithShape="0">
               <a:srgbClr val="000000">
                 <a:alpha val="80000"/>
               </a:srgbClr>
@@ -52363,7 +52369,7 @@
           <a:noFill/>
           <a:ln/>
           <a:effectLst>
-            <a:outerShdw sx="100000" sy="100000" kx="0" ky="0" algn="bl" rotWithShape="0" blurRad="317500" dist="50800" dir="8100000">
+            <a:outerShdw blurRad="317500" dist="50800" dir="8100000" algn="bl" rotWithShape="0">
               <a:srgbClr val="F0A020">
                 <a:alpha val="40000"/>
               </a:srgbClr>
@@ -52374,7 +52380,7 @@
           <a:bodyPr wrap="square" lIns="0" tIns="0" rIns="0" bIns="0" rtlCol="0" anchor="ctr"/>
           <a:lstStyle/>
           <a:p>
-            <a:pPr indent="0" marL="0">
+            <a:pPr marL="0" indent="0">
               <a:buNone/>
             </a:pPr>
             <a:r>
@@ -52438,7 +52444,7 @@
           <a:bodyPr wrap="square" lIns="0" tIns="0" rIns="0" bIns="0" rtlCol="0" anchor="t"/>
           <a:lstStyle/>
           <a:p>
-            <a:pPr indent="0" marL="0">
+            <a:pPr marL="0" indent="0">
               <a:lnSpc>
                 <a:spcPct val="150000"/>
               </a:lnSpc>
@@ -52512,7 +52518,7 @@
             <a:prstDash val="solid"/>
           </a:ln>
           <a:effectLst>
-            <a:outerShdw sx="100000" sy="100000" kx="0" ky="0" algn="bl" rotWithShape="0" blurRad="254000" dist="76200" dir="8100000">
+            <a:outerShdw blurRad="254000" dist="76200" dir="8100000" algn="bl" rotWithShape="0">
               <a:srgbClr val="000000">
                 <a:alpha val="80000"/>
               </a:srgbClr>
@@ -52616,7 +52622,7 @@
           <a:noFill/>
           <a:ln/>
           <a:effectLst>
-            <a:outerShdw sx="100000" sy="100000" kx="0" ky="0" algn="bl" rotWithShape="0" blurRad="317500" dist="50800" dir="8100000">
+            <a:outerShdw blurRad="317500" dist="50800" dir="8100000" algn="bl" rotWithShape="0">
               <a:srgbClr val="22D88A">
                 <a:alpha val="40000"/>
               </a:srgbClr>
@@ -52627,7 +52633,7 @@
           <a:bodyPr wrap="square" lIns="0" tIns="0" rIns="0" bIns="0" rtlCol="0" anchor="ctr"/>
           <a:lstStyle/>
           <a:p>
-            <a:pPr indent="0" marL="0">
+            <a:pPr marL="0" indent="0">
               <a:buNone/>
             </a:pPr>
             <a:r>
@@ -52691,7 +52697,7 @@
           <a:bodyPr wrap="square" lIns="0" tIns="0" rIns="0" bIns="0" rtlCol="0" anchor="t"/>
           <a:lstStyle/>
           <a:p>
-            <a:pPr indent="0" marL="0">
+            <a:pPr marL="0" indent="0">
               <a:lnSpc>
                 <a:spcPct val="150000"/>
               </a:lnSpc>
@@ -52765,7 +52771,7 @@
             <a:prstDash val="solid"/>
           </a:ln>
           <a:effectLst>
-            <a:outerShdw sx="100000" sy="100000" kx="0" ky="0" algn="bl" rotWithShape="0" blurRad="254000" dist="76200" dir="8100000">
+            <a:outerShdw blurRad="254000" dist="76200" dir="8100000" algn="bl" rotWithShape="0">
               <a:srgbClr val="000000">
                 <a:alpha val="80000"/>
               </a:srgbClr>
@@ -52869,7 +52875,7 @@
           <a:noFill/>
           <a:ln/>
           <a:effectLst>
-            <a:outerShdw sx="100000" sy="100000" kx="0" ky="0" algn="bl" rotWithShape="0" blurRad="317500" dist="50800" dir="8100000">
+            <a:outerShdw blurRad="317500" dist="50800" dir="8100000" algn="bl" rotWithShape="0">
               <a:srgbClr val="9B6FF0">
                 <a:alpha val="40000"/>
               </a:srgbClr>
@@ -52880,7 +52886,7 @@
           <a:bodyPr wrap="square" lIns="0" tIns="0" rIns="0" bIns="0" rtlCol="0" anchor="ctr"/>
           <a:lstStyle/>
           <a:p>
-            <a:pPr indent="0" marL="0">
+            <a:pPr marL="0" indent="0">
               <a:buNone/>
             </a:pPr>
             <a:r>
@@ -52944,7 +52950,7 @@
           <a:bodyPr wrap="square" lIns="0" tIns="0" rIns="0" bIns="0" rtlCol="0" anchor="t"/>
           <a:lstStyle/>
           <a:p>
-            <a:pPr indent="0" marL="0">
+            <a:pPr marL="0" indent="0">
               <a:lnSpc>
                 <a:spcPct val="150000"/>
               </a:lnSpc>
@@ -53266,4 +53272,319 @@
     </a:ext>
   </a:extLst>
 </a:theme>
+</file>
+
+<file path=ppt/theme/theme2.xml><?xml version="1.0" encoding="utf-8"?>
+<a:theme xmlns:a="http://schemas.openxmlformats.org/drawingml/2006/main" name="Office Theme">
+  <a:themeElements>
+    <a:clrScheme name="Office">
+      <a:dk1>
+        <a:sysClr val="windowText" lastClr="000000"/>
+      </a:dk1>
+      <a:lt1>
+        <a:sysClr val="window" lastClr="FFFFFF"/>
+      </a:lt1>
+      <a:dk2>
+        <a:srgbClr val="0E2841"/>
+      </a:dk2>
+      <a:lt2>
+        <a:srgbClr val="E8E8E8"/>
+      </a:lt2>
+      <a:accent1>
+        <a:srgbClr val="156082"/>
+      </a:accent1>
+      <a:accent2>
+        <a:srgbClr val="E97132"/>
+      </a:accent2>
+      <a:accent3>
+        <a:srgbClr val="196B24"/>
+      </a:accent3>
+      <a:accent4>
+        <a:srgbClr val="0F9ED5"/>
+      </a:accent4>
+      <a:accent5>
+        <a:srgbClr val="A02B93"/>
+      </a:accent5>
+      <a:accent6>
+        <a:srgbClr val="4EA72E"/>
+      </a:accent6>
+      <a:hlink>
+        <a:srgbClr val="467886"/>
+      </a:hlink>
+      <a:folHlink>
+        <a:srgbClr val="96607D"/>
+      </a:folHlink>
+    </a:clrScheme>
+    <a:fontScheme name="Office">
+      <a:majorFont>
+        <a:latin typeface="Aptos Display" panose="02110004020202020204"/>
+        <a:ea typeface=""/>
+        <a:cs typeface=""/>
+        <a:font script="Jpan" typeface="游ゴシック Light"/>
+        <a:font script="Hang" typeface="맑은 고딕"/>
+        <a:font script="Hans" typeface="等线 Light"/>
+        <a:font script="Hant" typeface="新細明體"/>
+        <a:font script="Arab" typeface="Times New Roman"/>
+        <a:font script="Hebr" typeface="Times New Roman"/>
+        <a:font script="Thai" typeface="Angsana New"/>
+        <a:font script="Ethi" typeface="Nyala"/>
+        <a:font script="Beng" typeface="Vrinda"/>
+        <a:font script="Gujr" typeface="Shruti"/>
+        <a:font script="Khmr" typeface="MoolBoran"/>
+        <a:font script="Knda" typeface="Tunga"/>
+        <a:font script="Guru" typeface="Raavi"/>
+        <a:font script="Cans" typeface="Euphemia"/>
+        <a:font script="Cher" typeface="Plantagenet Cherokee"/>
+        <a:font script="Yiii" typeface="Microsoft Yi Baiti"/>
+        <a:font script="Tibt" typeface="Microsoft Himalaya"/>
+        <a:font script="Thaa" typeface="MV Boli"/>
+        <a:font script="Deva" typeface="Mangal"/>
+        <a:font script="Telu" typeface="Gautami"/>
+        <a:font script="Taml" typeface="Latha"/>
+        <a:font script="Syrc" typeface="Estrangelo Edessa"/>
+        <a:font script="Orya" typeface="Kalinga"/>
+        <a:font script="Mlym" typeface="Kartika"/>
+        <a:font script="Laoo" typeface="DokChampa"/>
+        <a:font script="Sinh" typeface="Iskoola Pota"/>
+        <a:font script="Mong" typeface="Mongolian Baiti"/>
+        <a:font script="Viet" typeface="Times New Roman"/>
+        <a:font script="Uigh" typeface="Microsoft Uighur"/>
+        <a:font script="Geor" typeface="Sylfaen"/>
+        <a:font script="Armn" typeface="Arial"/>
+        <a:font script="Bugi" typeface="Leelawadee UI"/>
+        <a:font script="Bopo" typeface="Microsoft JhengHei"/>
+        <a:font script="Java" typeface="Javanese Text"/>
+        <a:font script="Lisu" typeface="Segoe UI"/>
+        <a:font script="Mymr" typeface="Myanmar Text"/>
+        <a:font script="Nkoo" typeface="Ebrima"/>
+        <a:font script="Olck" typeface="Nirmala UI"/>
+        <a:font script="Osma" typeface="Ebrima"/>
+        <a:font script="Phag" typeface="Phagspa"/>
+        <a:font script="Syrn" typeface="Estrangelo Edessa"/>
+        <a:font script="Syrj" typeface="Estrangelo Edessa"/>
+        <a:font script="Syre" typeface="Estrangelo Edessa"/>
+        <a:font script="Sora" typeface="Nirmala UI"/>
+        <a:font script="Tale" typeface="Microsoft Tai Le"/>
+        <a:font script="Talu" typeface="Microsoft New Tai Lue"/>
+        <a:font script="Tfng" typeface="Ebrima"/>
+      </a:majorFont>
+      <a:minorFont>
+        <a:latin typeface="Aptos" panose="02110004020202020204"/>
+        <a:ea typeface=""/>
+        <a:cs typeface=""/>
+        <a:font script="Jpan" typeface="游ゴシック"/>
+        <a:font script="Hang" typeface="맑은 고딕"/>
+        <a:font script="Hans" typeface="等线"/>
+        <a:font script="Hant" typeface="新細明體"/>
+        <a:font script="Arab" typeface="Arial"/>
+        <a:font script="Hebr" typeface="Arial"/>
+        <a:font script="Thai" typeface="Cordia New"/>
+        <a:font script="Ethi" typeface="Nyala"/>
+        <a:font script="Beng" typeface="Vrinda"/>
+        <a:font script="Gujr" typeface="Shruti"/>
+        <a:font script="Khmr" typeface="DaunPenh"/>
+        <a:font script="Knda" typeface="Tunga"/>
+        <a:font script="Guru" typeface="Raavi"/>
+        <a:font script="Cans" typeface="Euphemia"/>
+        <a:font script="Cher" typeface="Plantagenet Cherokee"/>
+        <a:font script="Yiii" typeface="Microsoft Yi Baiti"/>
+        <a:font script="Tibt" typeface="Microsoft Himalaya"/>
+        <a:font script="Thaa" typeface="MV Boli"/>
+        <a:font script="Deva" typeface="Mangal"/>
+        <a:font script="Telu" typeface="Gautami"/>
+        <a:font script="Taml" typeface="Latha"/>
+        <a:font script="Syrc" typeface="Estrangelo Edessa"/>
+        <a:font script="Orya" typeface="Kalinga"/>
+        <a:font script="Mlym" typeface="Kartika"/>
+        <a:font script="Laoo" typeface="DokChampa"/>
+        <a:font script="Sinh" typeface="Iskoola Pota"/>
+        <a:font script="Mong" typeface="Mongolian Baiti"/>
+        <a:font script="Viet" typeface="Arial"/>
+        <a:font script="Uigh" typeface="Microsoft Uighur"/>
+        <a:font script="Geor" typeface="Sylfaen"/>
+        <a:font script="Armn" typeface="Arial"/>
+        <a:font script="Bugi" typeface="Leelawadee UI"/>
+        <a:font script="Bopo" typeface="Microsoft JhengHei"/>
+        <a:font script="Java" typeface="Javanese Text"/>
+        <a:font script="Lisu" typeface="Segoe UI"/>
+        <a:font script="Mymr" typeface="Myanmar Text"/>
+        <a:font script="Nkoo" typeface="Ebrima"/>
+        <a:font script="Olck" typeface="Nirmala UI"/>
+        <a:font script="Osma" typeface="Ebrima"/>
+        <a:font script="Phag" typeface="Phagspa"/>
+        <a:font script="Syrn" typeface="Estrangelo Edessa"/>
+        <a:font script="Syrj" typeface="Estrangelo Edessa"/>
+        <a:font script="Syre" typeface="Estrangelo Edessa"/>
+        <a:font script="Sora" typeface="Nirmala UI"/>
+        <a:font script="Tale" typeface="Microsoft Tai Le"/>
+        <a:font script="Talu" typeface="Microsoft New Tai Lue"/>
+        <a:font script="Tfng" typeface="Ebrima"/>
+      </a:minorFont>
+    </a:fontScheme>
+    <a:fmtScheme name="Office">
+      <a:fillStyleLst>
+        <a:solidFill>
+          <a:schemeClr val="phClr"/>
+        </a:solidFill>
+        <a:gradFill rotWithShape="1">
+          <a:gsLst>
+            <a:gs pos="0">
+              <a:schemeClr val="phClr">
+                <a:lumMod val="110000"/>
+                <a:satMod val="105000"/>
+                <a:tint val="67000"/>
+              </a:schemeClr>
+            </a:gs>
+            <a:gs pos="50000">
+              <a:schemeClr val="phClr">
+                <a:lumMod val="105000"/>
+                <a:satMod val="103000"/>
+                <a:tint val="73000"/>
+              </a:schemeClr>
+            </a:gs>
+            <a:gs pos="100000">
+              <a:schemeClr val="phClr">
+                <a:lumMod val="105000"/>
+                <a:satMod val="109000"/>
+                <a:tint val="81000"/>
+              </a:schemeClr>
+            </a:gs>
+          </a:gsLst>
+          <a:lin ang="5400000" scaled="0"/>
+        </a:gradFill>
+        <a:gradFill rotWithShape="1">
+          <a:gsLst>
+            <a:gs pos="0">
+              <a:schemeClr val="phClr">
+                <a:satMod val="103000"/>
+                <a:lumMod val="102000"/>
+                <a:tint val="94000"/>
+              </a:schemeClr>
+            </a:gs>
+            <a:gs pos="50000">
+              <a:schemeClr val="phClr">
+                <a:satMod val="110000"/>
+                <a:lumMod val="100000"/>
+                <a:shade val="100000"/>
+              </a:schemeClr>
+            </a:gs>
+            <a:gs pos="100000">
+              <a:schemeClr val="phClr">
+                <a:lumMod val="99000"/>
+                <a:satMod val="120000"/>
+                <a:shade val="78000"/>
+              </a:schemeClr>
+            </a:gs>
+          </a:gsLst>
+          <a:lin ang="5400000" scaled="0"/>
+        </a:gradFill>
+      </a:fillStyleLst>
+      <a:lnStyleLst>
+        <a:ln w="12700" cap="flat" cmpd="sng" algn="ctr">
+          <a:solidFill>
+            <a:schemeClr val="phClr"/>
+          </a:solidFill>
+          <a:prstDash val="solid"/>
+          <a:miter lim="800000"/>
+        </a:ln>
+        <a:ln w="19050" cap="flat" cmpd="sng" algn="ctr">
+          <a:solidFill>
+            <a:schemeClr val="phClr"/>
+          </a:solidFill>
+          <a:prstDash val="solid"/>
+          <a:miter lim="800000"/>
+        </a:ln>
+        <a:ln w="25400" cap="flat" cmpd="sng" algn="ctr">
+          <a:solidFill>
+            <a:schemeClr val="phClr"/>
+          </a:solidFill>
+          <a:prstDash val="solid"/>
+          <a:miter lim="800000"/>
+        </a:ln>
+      </a:lnStyleLst>
+      <a:effectStyleLst>
+        <a:effectStyle>
+          <a:effectLst/>
+        </a:effectStyle>
+        <a:effectStyle>
+          <a:effectLst/>
+        </a:effectStyle>
+        <a:effectStyle>
+          <a:effectLst>
+            <a:outerShdw blurRad="57150" dist="19050" dir="5400000" algn="ctr" rotWithShape="0">
+              <a:srgbClr val="000000">
+                <a:alpha val="63000"/>
+              </a:srgbClr>
+            </a:outerShdw>
+          </a:effectLst>
+        </a:effectStyle>
+      </a:effectStyleLst>
+      <a:bgFillStyleLst>
+        <a:solidFill>
+          <a:schemeClr val="phClr"/>
+        </a:solidFill>
+        <a:solidFill>
+          <a:schemeClr val="phClr">
+            <a:tint val="95000"/>
+            <a:satMod val="170000"/>
+          </a:schemeClr>
+        </a:solidFill>
+        <a:gradFill rotWithShape="1">
+          <a:gsLst>
+            <a:gs pos="0">
+              <a:schemeClr val="phClr">
+                <a:tint val="93000"/>
+                <a:satMod val="150000"/>
+                <a:shade val="98000"/>
+                <a:lumMod val="102000"/>
+              </a:schemeClr>
+            </a:gs>
+            <a:gs pos="50000">
+              <a:schemeClr val="phClr">
+                <a:tint val="98000"/>
+                <a:satMod val="130000"/>
+                <a:shade val="90000"/>
+                <a:lumMod val="103000"/>
+              </a:schemeClr>
+            </a:gs>
+            <a:gs pos="100000">
+              <a:schemeClr val="phClr">
+                <a:shade val="63000"/>
+                <a:satMod val="120000"/>
+              </a:schemeClr>
+            </a:gs>
+          </a:gsLst>
+          <a:lin ang="5400000" scaled="0"/>
+        </a:gradFill>
+      </a:bgFillStyleLst>
+    </a:fmtScheme>
+  </a:themeElements>
+  <a:objectDefaults>
+    <a:lnDef>
+      <a:spPr/>
+      <a:bodyPr/>
+      <a:lstStyle/>
+      <a:style>
+        <a:lnRef idx="2">
+          <a:schemeClr val="accent1"/>
+        </a:lnRef>
+        <a:fillRef idx="0">
+          <a:schemeClr val="accent1"/>
+        </a:fillRef>
+        <a:effectRef idx="1">
+          <a:schemeClr val="accent1"/>
+        </a:effectRef>
+        <a:fontRef idx="minor">
+          <a:schemeClr val="tx1"/>
+        </a:fontRef>
+      </a:style>
+    </a:lnDef>
+  </a:objectDefaults>
+  <a:extraClrSchemeLst/>
+  <a:extLst>
+    <a:ext uri="{05A4C25C-085E-4340-85A3-A5531E510DB2}">
+      <thm15:themeFamily xmlns:thm15="http://schemas.microsoft.com/office/thememl/2012/main" name="Office Theme" id="{2E142A2C-CD16-42D6-873A-C26D2A0506FA}" vid="{1BDDFF52-6CD6-40A5-AB3C-68EB2F1E4D0A}"/>
+    </a:ext>
+  </a:extLst>
+</a:theme>
 </file>